--- a/courses/ai-native/sessions/s01.pptx
+++ b/courses/ai-native/sessions/s01.pptx
@@ -3964,7 +3964,7 @@
           </p:nvPr>
         </p:nvGraphicFramePr>
         <p:xfrm>
-          <a:off x="921575" y="3099498"/>
+          <a:off x="921575" y="2898948"/>
           <a:ext cx="7287260" cy="3873500"/>
         </p:xfrm>
         <a:graphic>
@@ -4464,7 +4464,7 @@
         <p:spPr>
           <a:xfrm>
             <a:off x="365760" y="960120"/>
-            <a:ext cx="8412480" cy="1739328"/>
+            <a:ext cx="8412480" cy="1587442"/>
           </a:xfrm>
           <a:prstGeom prst="rect">
             <a:avLst/>
@@ -4671,7 +4671,7 @@
         </p:nvSpPr>
         <p:spPr>
           <a:xfrm>
-            <a:off x="365760" y="2801048"/>
+            <a:off x="365760" y="2600498"/>
             <a:ext cx="8412480" cy="222250"/>
           </a:xfrm>
           <a:prstGeom prst="rect">
@@ -4720,7 +4720,7 @@
         </p:nvSpPr>
         <p:spPr>
           <a:xfrm>
-            <a:off x="365760" y="4353098"/>
+            <a:off x="365760" y="4279548"/>
             <a:ext cx="8412480" cy="781278"/>
           </a:xfrm>
           <a:prstGeom prst="rect">
@@ -5950,7 +5950,7 @@
           </p:nvPr>
         </p:nvGraphicFramePr>
         <p:xfrm>
-          <a:off x="1480375" y="3099498"/>
+          <a:off x="1480375" y="2898948"/>
           <a:ext cx="6169660" cy="3873500"/>
         </p:xfrm>
         <a:graphic>
@@ -6450,7 +6450,7 @@
         <p:spPr>
           <a:xfrm>
             <a:off x="365760" y="960120"/>
-            <a:ext cx="8412480" cy="1739328"/>
+            <a:ext cx="8412480" cy="1587442"/>
           </a:xfrm>
           <a:prstGeom prst="rect">
             <a:avLst/>
@@ -6687,7 +6687,7 @@
         </p:nvSpPr>
         <p:spPr>
           <a:xfrm>
-            <a:off x="365760" y="2801048"/>
+            <a:off x="365760" y="2600498"/>
             <a:ext cx="8412480" cy="222250"/>
           </a:xfrm>
           <a:prstGeom prst="rect">
@@ -6736,7 +6736,7 @@
         </p:nvSpPr>
         <p:spPr>
           <a:xfrm>
-            <a:off x="365760" y="4353098"/>
+            <a:off x="365760" y="4279548"/>
             <a:ext cx="8412480" cy="781278"/>
           </a:xfrm>
           <a:prstGeom prst="rect">
@@ -7159,8 +7159,8 @@
         </p:nvSpPr>
         <p:spPr>
           <a:xfrm>
-            <a:off x="365760" y="4316622"/>
-            <a:ext cx="8412480" cy="274320"/>
+            <a:off x="365760" y="3136392"/>
+            <a:ext cx="8412480" cy="201168"/>
           </a:xfrm>
           <a:prstGeom prst="rect">
             <a:avLst/>
@@ -7203,7 +7203,7 @@
         </p:blipFill>
         <p:spPr>
           <a:xfrm>
-            <a:off x="1056298" y="4590942"/>
+            <a:off x="1056298" y="3374136"/>
             <a:ext cx="7031404" cy="1123462"/>
           </a:xfrm>
           <a:prstGeom prst="rect">
@@ -7392,7 +7392,7 @@
           </p:nvPr>
         </p:nvGraphicFramePr>
         <p:xfrm>
-          <a:off x="1663256" y="3344852"/>
+          <a:off x="1663256" y="3249468"/>
           <a:ext cx="5803900" cy="3873500"/>
         </p:xfrm>
         <a:graphic>
@@ -8391,7 +8391,7 @@
         </p:nvSpPr>
         <p:spPr>
           <a:xfrm>
-            <a:off x="365760" y="3046402"/>
+            <a:off x="365760" y="2951018"/>
             <a:ext cx="8412480" cy="222250"/>
           </a:xfrm>
           <a:prstGeom prst="rect">
@@ -8440,7 +8440,7 @@
         </p:nvSpPr>
         <p:spPr>
           <a:xfrm>
-            <a:off x="365760" y="4598452"/>
+            <a:off x="365760" y="4630068"/>
             <a:ext cx="8412480" cy="781278"/>
           </a:xfrm>
           <a:prstGeom prst="rect">
@@ -8679,7 +8679,7 @@
           </p:nvPr>
         </p:nvGraphicFramePr>
         <p:xfrm>
-          <a:off x="412306" y="2141448"/>
+          <a:off x="412306" y="2112010"/>
           <a:ext cx="8305800" cy="3873500"/>
         </p:xfrm>
         <a:graphic>
@@ -9791,7 +9791,7 @@
         </p:nvSpPr>
         <p:spPr>
           <a:xfrm>
-            <a:off x="365760" y="1842998"/>
+            <a:off x="365760" y="1813560"/>
             <a:ext cx="8412480" cy="222250"/>
           </a:xfrm>
           <a:prstGeom prst="rect">
@@ -9840,7 +9840,7 @@
         </p:nvSpPr>
         <p:spPr>
           <a:xfrm>
-            <a:off x="365760" y="3395048"/>
+            <a:off x="365760" y="3492610"/>
             <a:ext cx="8412480" cy="2089833"/>
           </a:xfrm>
           <a:prstGeom prst="rect">
@@ -10392,8 +10392,8 @@
         </p:nvSpPr>
         <p:spPr>
           <a:xfrm>
-            <a:off x="365760" y="3919503"/>
-            <a:ext cx="8412480" cy="274320"/>
+            <a:off x="365760" y="2938272"/>
+            <a:ext cx="8412480" cy="201168"/>
           </a:xfrm>
           <a:prstGeom prst="rect">
             <a:avLst/>
@@ -10436,7 +10436,7 @@
         </p:blipFill>
         <p:spPr>
           <a:xfrm>
-            <a:off x="1460500" y="4193822"/>
+            <a:off x="1460500" y="3176016"/>
             <a:ext cx="6223000" cy="1778000"/>
           </a:xfrm>
           <a:prstGeom prst="rect">
@@ -10872,8 +10872,8 @@
         </p:nvSpPr>
         <p:spPr>
           <a:xfrm>
-            <a:off x="365760" y="4407035"/>
-            <a:ext cx="8412480" cy="274320"/>
+            <a:off x="365760" y="4035552"/>
+            <a:ext cx="8412480" cy="201168"/>
           </a:xfrm>
           <a:prstGeom prst="rect">
             <a:avLst/>
@@ -10916,7 +10916,7 @@
         </p:blipFill>
         <p:spPr>
           <a:xfrm>
-            <a:off x="1460500" y="4681355"/>
+            <a:off x="1460500" y="4273296"/>
             <a:ext cx="6223000" cy="674688"/>
           </a:xfrm>
           <a:prstGeom prst="rect">
@@ -13307,7 +13307,7 @@
           </p:nvPr>
         </p:nvGraphicFramePr>
         <p:xfrm>
-          <a:off x="783146" y="2141448"/>
+          <a:off x="783146" y="2112010"/>
           <a:ext cx="7564120" cy="3873500"/>
         </p:xfrm>
         <a:graphic>
@@ -15060,7 +15060,7 @@
         </p:nvSpPr>
         <p:spPr>
           <a:xfrm>
-            <a:off x="365760" y="1842998"/>
+            <a:off x="365760" y="1813560"/>
             <a:ext cx="8412480" cy="222250"/>
           </a:xfrm>
           <a:prstGeom prst="rect">
@@ -15109,7 +15109,7 @@
         </p:nvSpPr>
         <p:spPr>
           <a:xfrm>
-            <a:off x="365760" y="4835048"/>
+            <a:off x="365760" y="4932610"/>
             <a:ext cx="8412480" cy="781278"/>
           </a:xfrm>
           <a:prstGeom prst="rect">
@@ -15615,8 +15615,8 @@
         </p:nvSpPr>
         <p:spPr>
           <a:xfrm>
-            <a:off x="365760" y="4133166"/>
-            <a:ext cx="8412480" cy="274320"/>
+            <a:off x="365760" y="3649010"/>
+            <a:ext cx="8412480" cy="201168"/>
           </a:xfrm>
           <a:prstGeom prst="rect">
             <a:avLst/>
@@ -15659,7 +15659,7 @@
         </p:blipFill>
         <p:spPr>
           <a:xfrm>
-            <a:off x="1460500" y="4407486"/>
+            <a:off x="1460500" y="3886754"/>
             <a:ext cx="6223000" cy="960437"/>
           </a:xfrm>
           <a:prstGeom prst="rect">
@@ -15836,7 +15836,7 @@
           </p:nvPr>
         </p:nvGraphicFramePr>
         <p:xfrm>
-          <a:off x="412306" y="2141448"/>
+          <a:off x="412306" y="2112010"/>
           <a:ext cx="8305800" cy="3873500"/>
         </p:xfrm>
         <a:graphic>
@@ -17620,7 +17620,7 @@
         </p:nvSpPr>
         <p:spPr>
           <a:xfrm>
-            <a:off x="365760" y="1842998"/>
+            <a:off x="365760" y="1813560"/>
             <a:ext cx="8412480" cy="222250"/>
           </a:xfrm>
           <a:prstGeom prst="rect">
@@ -20445,8 +20445,8 @@
         </p:nvSpPr>
         <p:spPr>
           <a:xfrm>
-            <a:off x="365760" y="3858860"/>
-            <a:ext cx="8412480" cy="274320"/>
+            <a:off x="365760" y="3212592"/>
+            <a:ext cx="8412480" cy="201168"/>
           </a:xfrm>
           <a:prstGeom prst="rect">
             <a:avLst/>
@@ -20489,7 +20489,7 @@
         </p:blipFill>
         <p:spPr>
           <a:xfrm>
-            <a:off x="1944688" y="4133180"/>
+            <a:off x="1944688" y="3450336"/>
             <a:ext cx="5254625" cy="2206625"/>
           </a:xfrm>
           <a:prstGeom prst="rect">
@@ -21090,7 +21090,7 @@
           </p:nvPr>
         </p:nvGraphicFramePr>
         <p:xfrm>
-          <a:off x="412306" y="2141448"/>
+          <a:off x="412306" y="2112010"/>
           <a:ext cx="8305800" cy="3873500"/>
         </p:xfrm>
         <a:graphic>
@@ -21963,7 +21963,7 @@
         </p:nvSpPr>
         <p:spPr>
           <a:xfrm>
-            <a:off x="365760" y="1842998"/>
+            <a:off x="365760" y="1813560"/>
             <a:ext cx="8412480" cy="222250"/>
           </a:xfrm>
           <a:prstGeom prst="rect">
@@ -22012,7 +22012,7 @@
         </p:nvSpPr>
         <p:spPr>
           <a:xfrm>
-            <a:off x="365760" y="3395048"/>
+            <a:off x="365760" y="3492610"/>
             <a:ext cx="8412480" cy="781278"/>
           </a:xfrm>
           <a:prstGeom prst="rect">
@@ -22532,8 +22532,8 @@
         </p:nvSpPr>
         <p:spPr>
           <a:xfrm>
-            <a:off x="365760" y="3257832"/>
-            <a:ext cx="8412480" cy="274320"/>
+            <a:off x="365760" y="2663952"/>
+            <a:ext cx="8412480" cy="201168"/>
           </a:xfrm>
           <a:prstGeom prst="rect">
             <a:avLst/>
@@ -22576,7 +22576,7 @@
         </p:blipFill>
         <p:spPr>
           <a:xfrm>
-            <a:off x="1024548" y="3532152"/>
+            <a:off x="1024548" y="2901696"/>
             <a:ext cx="7094904" cy="2794000"/>
           </a:xfrm>
           <a:prstGeom prst="rect">
@@ -23447,7 +23447,7 @@
           </p:nvPr>
         </p:nvGraphicFramePr>
         <p:xfrm>
-          <a:off x="1635316" y="3778033"/>
+          <a:off x="1635316" y="3912172"/>
           <a:ext cx="5859780" cy="3873500"/>
         </p:xfrm>
         <a:graphic>
@@ -24320,7 +24320,7 @@
         </p:nvSpPr>
         <p:spPr>
           <a:xfrm>
-            <a:off x="365760" y="3479583"/>
+            <a:off x="365760" y="3613722"/>
             <a:ext cx="8412480" cy="222250"/>
           </a:xfrm>
           <a:prstGeom prst="rect">
@@ -24369,8 +24369,8 @@
         </p:nvSpPr>
         <p:spPr>
           <a:xfrm>
-            <a:off x="365760" y="1842998"/>
-            <a:ext cx="8412480" cy="274320"/>
+            <a:off x="365760" y="1886712"/>
+            <a:ext cx="8412480" cy="201168"/>
           </a:xfrm>
           <a:prstGeom prst="rect">
             <a:avLst/>
@@ -24420,7 +24420,7 @@
         </p:blipFill>
         <p:spPr>
           <a:xfrm>
-            <a:off x="1453706" y="2117318"/>
+            <a:off x="1453706" y="2124456"/>
             <a:ext cx="6223000" cy="1150938"/>
           </a:xfrm>
           <a:prstGeom prst="rect">
@@ -24609,7 +24609,7 @@
           </p:nvPr>
         </p:nvGraphicFramePr>
         <p:xfrm>
-          <a:off x="412306" y="2445220"/>
+          <a:off x="412306" y="2436206"/>
           <a:ext cx="8305800" cy="3873500"/>
         </p:xfrm>
         <a:graphic>
@@ -25374,7 +25374,7 @@
         </p:nvSpPr>
         <p:spPr>
           <a:xfrm>
-            <a:off x="365760" y="2146770"/>
+            <a:off x="365760" y="2137756"/>
             <a:ext cx="8412480" cy="222250"/>
           </a:xfrm>
           <a:prstGeom prst="rect">
@@ -25423,7 +25423,7 @@
         </p:nvSpPr>
         <p:spPr>
           <a:xfrm>
-            <a:off x="365760" y="3410820"/>
+            <a:off x="365760" y="3528806"/>
             <a:ext cx="8412480" cy="1178518"/>
           </a:xfrm>
           <a:prstGeom prst="rect">

--- a/courses/ai-native/sessions/s01.pptx
+++ b/courses/ai-native/sessions/s01.pptx
@@ -700,7 +700,7 @@
             <a:pPr lvl="0"/>
             <a:r>
               <a:rPr lang="ko-KR" sz="1200"/>
-              <a:t>무엇을 골라 줄지는 "05. 도메인·설계 지식과 맥락 구성"에서 다룬다. 결제 연동 매뉴얼 200쪽을 통째로 준 장면이 그 세션의 사례다.</a:t>
+              <a:t>무엇을 골라 줄지는 "세션 05. 도메인·설계 지식과 맥락 구성"에서 다룬다. 결제 연동 매뉴얼 200쪽을 통째로 준 장면이 그 세션의 사례다.</a:t>
             </a:r>
           </a:p>
         </p:txBody>
@@ -972,7 +972,7 @@
             <a:pPr lvl="0"/>
             <a:r>
               <a:rPr lang="ko-KR" sz="1200"/>
-              <a:t>AI 지원의 병목은 사람의 리뷰다. 형태의 선택은 "02. 작업 특성에 따른 AI 활용 방식"에서 다룬다.</a:t>
+              <a:t>AI 지원의 병목은 사람의 리뷰다. 형태의 선택은 "세션 02. 작업 특성에 따른 AI 활용 방식"에서 다룬다.</a:t>
             </a:r>
           </a:p>
         </p:txBody>
@@ -1040,7 +1040,7 @@
             <a:pPr lvl="0"/>
             <a:r>
               <a:rPr lang="ko-KR" sz="1200"/>
-              <a:t>센서와 확인 지점은 "07. 워크플로·에이전트와 사람의 개입"과 "09. 검증 하네스·결과 점검·피드백"에서 다룬다.</a:t>
+              <a:t>센서와 확인 지점은 "세션 07. 워크플로·에이전트와 사람의 개입"과 "세션 09. 검증 하네스·결과 점검·피드백"에서 다룬다.</a:t>
             </a:r>
           </a:p>
         </p:txBody>
@@ -1101,7 +1101,7 @@
             <a:pPr lvl="0"/>
             <a:r>
               <a:rPr lang="ko-KR" sz="1200"/>
-              <a:t>경로 원칙은 원전의 분류가 아니다(course-design.md의 「과정 전체 판단 원칙」). 상세는 "03. 요구의 구체화와 명세"에서 다룬다.</a:t>
+              <a:t>경로 원칙은 원전의 분류가 아니다(course-design.md의 「과정 전체 판단 원칙」). 상세는 "세션 03. 요구의 구체화와 명세"에서 다룬다.</a:t>
             </a:r>
           </a:p>
           <a:p>
@@ -1176,7 +1176,7 @@
             <a:pPr lvl="0"/>
             <a:r>
               <a:rPr lang="ko-KR" sz="1200"/>
-              <a:t>두 형태 중 무엇을 고를지, 언제 AI가 필요 없는지는 "02. 작업 특성에 따른 AI 활용 방식"에서 다룬다.</a:t>
+              <a:t>두 형태 중 무엇을 고를지, 언제 AI가 필요 없는지는 "세션 02. 작업 특성에 따른 AI 활용 방식"에서 다룬다.</a:t>
             </a:r>
           </a:p>
         </p:txBody>
@@ -1523,7 +1523,7 @@
             <a:pPr lvl="0"/>
             <a:r>
               <a:rPr lang="ko-KR" sz="1200"/>
-              <a:t>가이드(feedforward)·센서(feedback)의 상세는 "09. 검증 하네스·결과 점검·피드백"에서 다룬다. "자율의 정도"는 이 과정의 설명이다.</a:t>
+              <a:t>가이드(feedforward)·센서(feedback)의 상세는 "세션 09. 검증 하네스·결과 점검·피드백"에서 다룬다. "자율의 정도"는 이 과정의 설명이다.</a:t>
             </a:r>
           </a:p>
         </p:txBody>
@@ -1591,7 +1591,7 @@
             <a:pPr lvl="0"/>
             <a:r>
               <a:rPr lang="ko-KR" sz="1200"/>
-              <a:t>산출물을 모두 합친 것을 위임 패키지라 부른다. "12. 명세·맥락·작업 지시의 종합 검토"에서 위임 패키지로 다음 기능을 맡긴다.</a:t>
+              <a:t>산출물을 모두 합친 것을 위임 패키지라 부른다. "세션 12. 명세·맥락·작업 지시의 종합 검토"에서 위임 패키지로 다음 기능을 맡긴다.</a:t>
             </a:r>
           </a:p>
         </p:txBody>
@@ -2163,7 +2163,7 @@
             <a:pPr lvl="0"/>
             <a:r>
               <a:rPr lang="ko-KR" sz="1200"/>
-              <a:t>테스트가 통과했다는 것은 "코드가 기대값대로 동작한다"는 뜻이다. 기대값이 추측이면 통과도 추측을 확인했을 뿐이다. 기대값은 사람이 업무 규칙에서 정한다("04. 수용 기준과 검증 가능한 작업 단위").</a:t>
+              <a:t>테스트가 통과했다는 것은 "코드가 기대값대로 동작한다"는 뜻이다. 기대값이 추측이면 통과도 추측을 확인했을 뿐이다. 기대값은 사람이 업무 규칙에서 정한다("세션 04. 수용 기준과 검증 가능한 작업 단위").</a:t>
             </a:r>
           </a:p>
         </p:txBody>

--- a/courses/ai-native/sessions/s01.pptx
+++ b/courses/ai-native/sessions/s01.pptx
@@ -1673,7 +1673,7 @@
             <a:pPr lvl="0"/>
             <a:r>
               <a:rPr lang="ko-KR" sz="1200"/>
-              <a:t>신청한다(실습 1~9) 다음에 배송지를 변경한다(실습 10~12)를 같은 맥락·하네스로 진행한다.</a:t>
+              <a:t>"신청한다"(실습 1~9) 다음에 배송지를 변경한다(실습 10~12)를 같은 맥락·하네스로 진행한다.</a:t>
             </a:r>
           </a:p>
           <a:p>
@@ -10224,7 +10224,7 @@
                 <a:latin typeface="맑은 고딕"/>
                 <a:ea typeface="맑은 고딕"/>
               </a:rPr>
-              <a:t>주문한다를 3가지 방식으로 개발하면 </a:t>
+              <a:t>"주문한다"를 3가지 방식으로 개발하면 </a:t>
             </a:r>
             <a:r>
               <a:rPr sz="1800" b="1">
@@ -17913,7 +17913,7 @@
                 <a:latin typeface="맑은 고딕"/>
                 <a:ea typeface="맑은 고딕"/>
               </a:rPr>
-              <a:t>정기배송을 신청한다</a:t>
+              <a:t>정기배송을 "신청한다"</a:t>
             </a:r>
             <a:r>
               <a:rPr sz="1600" b="0">
@@ -19708,7 +19708,7 @@
                 <a:latin typeface="맑은 고딕"/>
                 <a:ea typeface="맑은 고딕"/>
               </a:rPr>
-              <a:t>LLM 초안은 신청한다를 만들면서 </a:t>
+              <a:t>LLM 초안은 "신청한다"를 만들면서 </a:t>
             </a:r>
             <a:r>
               <a:rPr sz="1400" b="1">
@@ -20313,7 +20313,7 @@
                 <a:latin typeface="맑은 고딕"/>
                 <a:ea typeface="맑은 고딕"/>
               </a:rPr>
-              <a:t>주문한다</a:t>
+              <a:t>"주문한다"</a:t>
             </a:r>
             <a:r>
               <a:rPr sz="1800" b="0">

--- a/courses/ai-native/sessions/s01.pptx
+++ b/courses/ai-native/sessions/s01.pptx
@@ -35,6 +35,7 @@
     <p:sldId id="280" r:id="javaLecture25"/>
     <p:sldId id="281" r:id="javaLecture26"/>
     <p:sldId id="282" r:id="javaLecture27"/>
+    <p:sldId id="283" r:id="javaLecture28"/>
   </p:sldIdLst>
   <p:sldSz cx="9144000" cy="6858000" type="screen4x3"/>
   <p:notesSz cx="6858000" cy="9144000"/>
@@ -1121,74 +1122,6 @@
 </p:notes>
 </file>
 
-<file path=ppt/notesSlides/notesSlide19.xml><?xml version="1.0" encoding="utf-8"?>
-<p:notes xmlns:a="http://schemas.openxmlformats.org/drawingml/2006/main" xmlns:r="http://schemas.openxmlformats.org/officeDocument/2006/relationships" xmlns:p="http://schemas.openxmlformats.org/presentationml/2006/main">
-  <p:cSld>
-    <p:spTree>
-      <p:nvGrpSpPr>
-        <p:cNvPr id="1" name=""/>
-        <p:cNvGrpSpPr/>
-        <p:nvPr/>
-      </p:nvGrpSpPr>
-      <p:grpSpPr>
-        <a:xfrm>
-          <a:off x="0" y="0"/>
-          <a:ext cx="0" cy="0"/>
-          <a:chOff x="0" y="0"/>
-          <a:chExt cx="0" cy="0"/>
-        </a:xfrm>
-      </p:grpSpPr>
-      <p:sp>
-        <p:nvSpPr>
-          <p:cNvPr id="2" name="슬라이드 이미지 개체 틀"/>
-          <p:cNvSpPr/>
-          <p:nvPr>
-            <p:ph type="sldImg" idx="2"/>
-          </p:nvPr>
-        </p:nvSpPr>
-        <p:spPr/>
-        <p:txBody>
-          <a:bodyPr/>
-          <a:lstStyle/>
-          <a:p/>
-        </p:txBody>
-      </p:sp>
-      <p:sp>
-        <p:nvSpPr>
-          <p:cNvPr id="3" name="슬라이드 노트 개체 틀"/>
-          <p:cNvSpPr/>
-          <p:nvPr>
-            <p:ph type="body" idx="3"/>
-          </p:nvPr>
-        </p:nvSpPr>
-        <p:spPr/>
-        <p:txBody>
-          <a:bodyPr/>
-          <a:lstStyle/>
-          <a:p>
-            <a:pPr lvl="0"/>
-            <a:r>
-              <a:rPr lang="ko-KR" sz="1200"/>
-              <a:t>인용 근거: Anthropic, "Building effective agents"(2024) 원문 확인. 위임 형태에 관한 이 과정의 기준 원전이다.</a:t>
-            </a:r>
-          </a:p>
-          <a:p>
-            <a:pPr lvl="0"/>
-            <a:r>
-              <a:rPr lang="ko-KR" sz="1200"/>
-              <a:t>두 형태 중 무엇을 고를지, 언제 AI가 필요 없는지는 "세션 02. 작업 특성에 따른 AI 활용 방식"에서 다룬다.</a:t>
-            </a:r>
-          </a:p>
-        </p:txBody>
-      </p:sp>
-    </p:spTree>
-  </p:cSld>
-  <p:clrMapOvr>
-    <a:masterClrMapping/>
-  </p:clrMapOvr>
-</p:notes>
-</file>
-
 <file path=ppt/notesSlides/notesSlide2.xml><?xml version="1.0" encoding="utf-8"?>
 <p:notes xmlns:a="http://schemas.openxmlformats.org/drawingml/2006/main" xmlns:r="http://schemas.openxmlformats.org/officeDocument/2006/relationships" xmlns:p="http://schemas.openxmlformats.org/presentationml/2006/main">
   <p:cSld>
@@ -1305,21 +1238,14 @@
             <a:pPr lvl="0"/>
             <a:r>
               <a:rPr lang="ko-KR" sz="1200"/>
-              <a:t>인용 근거: Kent Beck, "Augmented Coding: Beyond the Vibes"(2025), Simon Willison, "Vibe engineering"(2025) 원문 확인. Willison 인용은 요약이다.</a:t>
+              <a:t>인용 근거: Anthropic, "Building effective agents"(2024) 원문 확인. 위임 형태에 관한 이 과정의 기준 원전이다.</a:t>
             </a:r>
           </a:p>
           <a:p>
             <a:pPr lvl="0"/>
             <a:r>
               <a:rPr lang="ko-KR" sz="1200"/>
-              <a:t>바이브 코딩은 개발 방식의 한 구분이 아니라 규율이 없는 사용이다. AI 지원과 AI-native 어디에서나 생길 수 있다.</a:t>
-            </a:r>
-          </a:p>
-          <a:p>
-            <a:pPr lvl="0"/>
-            <a:r>
-              <a:rPr lang="ko-KR" sz="1200"/>
-              <a:t>"습관을 키운다"는 이 과정의 설명이다. 출처로 인용하지 않는다.</a:t>
+              <a:t>두 형태 중 무엇을 고를지, 언제 AI가 필요 없는지는 "세션 02. 작업 특성에 따른 AI 활용 방식"에서 다룬다.</a:t>
             </a:r>
           </a:p>
         </p:txBody>
@@ -1380,14 +1306,21 @@
             <a:pPr lvl="0"/>
             <a:r>
               <a:rPr lang="ko-KR" sz="1200"/>
-              <a:t>인용 근거: Ryan Lopopolo, "Harness engineering: leveraging Codex in an agent-first world", OpenAI, 2026 영문 원문 확인(openai.com이 한국어판으로 자동 전환하므로 영문판으로 확인).</a:t>
+              <a:t>인용 근거: Kent Beck, "Augmented Coding: Beyond the Vibes"(2025), Simon Willison, "Vibe engineering"(2025) 원문 확인. Willison 인용은 요약이다.</a:t>
             </a:r>
           </a:p>
           <a:p>
             <a:pPr lvl="0"/>
             <a:r>
               <a:rPr lang="ko-KR" sz="1200"/>
-              <a:t>한 팀(OpenAI 내부 제품)의 경험이다. 글도 비슷한 투자 없이 일반화된다고 가정하지 말라고 밝힌다.</a:t>
+              <a:t>바이브 코딩은 개발 방식의 한 구분이 아니라 규율이 없는 사용이다. AI 지원과 AI-native 어디에서나 생길 수 있다.</a:t>
+            </a:r>
+          </a:p>
+          <a:p>
+            <a:pPr lvl="0"/>
+            <a:r>
+              <a:rPr lang="ko-KR" sz="1200"/>
+              <a:t>"습관을 키운다"는 이 과정의 설명이다. 출처로 인용하지 않는다.</a:t>
             </a:r>
           </a:p>
         </p:txBody>
@@ -1448,14 +1381,14 @@
             <a:pPr lvl="0"/>
             <a:r>
               <a:rPr lang="ko-KR" sz="1200"/>
-              <a:t>이 역할 구분은 이 과정의 구분이다(course-design.md의 「과정 전체 판단 원칙」).</a:t>
+              <a:t>인용 근거: Ryan Lopopolo, "Harness engineering: leveraging Codex in an agent-first world", OpenAI, 2026 영문 원문 확인(openai.com이 한국어판으로 자동 전환하므로 영문판으로 확인).</a:t>
             </a:r>
           </a:p>
           <a:p>
             <a:pPr lvl="0"/>
             <a:r>
               <a:rPr lang="ko-KR" sz="1200"/>
-              <a:t>표의 각 행이 뒤 세션의 주제다 — 명세·수용 기준은 03·04, 맥락은 05, 위임 경계는 06, 가드레일·하네스는 08·09, 실패는 10 세션.</a:t>
+              <a:t>한 팀(OpenAI 내부 제품)의 경험이다. 글도 비슷한 투자 없이 일반화된다고 가정하지 말라고 밝힌다.</a:t>
             </a:r>
           </a:p>
         </p:txBody>
@@ -1516,14 +1449,14 @@
             <a:pPr lvl="0"/>
             <a:r>
               <a:rPr lang="ko-KR" sz="1200"/>
-              <a:t>인용 근거: Birgitta Böckeler, "Harness engineering for coding agent users", martinfowler.com, 2026 원문 확인.</a:t>
+              <a:t>이 역할 구분은 이 과정의 구분이다(course-design.md의 「과정 전체 판단 원칙」).</a:t>
             </a:r>
           </a:p>
           <a:p>
             <a:pPr lvl="0"/>
             <a:r>
               <a:rPr lang="ko-KR" sz="1200"/>
-              <a:t>가이드(feedforward)·센서(feedback)의 상세는 "세션 09. 검증 하네스·결과 점검·피드백"에서 다룬다. "자율의 정도"는 이 과정의 설명이다.</a:t>
+              <a:t>표의 각 행이 뒤 세션의 주제다 — 명세·수용 기준은 03·04, 맥락은 05, 위임 경계는 06, 가드레일·하네스는 08·09, 실패는 10 세션.</a:t>
             </a:r>
           </a:p>
         </p:txBody>
@@ -1584,14 +1517,14 @@
             <a:pPr lvl="0"/>
             <a:r>
               <a:rPr lang="ko-KR" sz="1200"/>
-              <a:t>표의 행 순서가 결정의 순서다. 학습 순서이지 고정된 개발 절차가 아니며, 증거가 나오면 원인이 된 결정(대개 업무 규칙이나 맥락)으로 되돌린다.</a:t>
+              <a:t>인용 근거: Birgitta Böckeler, "Harness engineering for coding agent users", martinfowler.com, 2026 원문 확인.</a:t>
             </a:r>
           </a:p>
           <a:p>
             <a:pPr lvl="0"/>
             <a:r>
               <a:rPr lang="ko-KR" sz="1200"/>
-              <a:t>산출물을 모두 합친 것을 위임 패키지라 부른다. "세션 12. 명세·맥락·작업 지시의 종합 검토"에서 위임 패키지로 다음 기능을 맡긴다.</a:t>
+              <a:t>가이드(feedforward)·센서(feedback)의 상세는 "세션 09. 검증 하네스·결과 점검·피드백"에서 다룬다. "자율의 정도"는 이 과정의 설명이다.</a:t>
             </a:r>
           </a:p>
         </p:txBody>
@@ -1652,35 +1585,14 @@
             <a:pPr lvl="0"/>
             <a:r>
               <a:rPr lang="ko-KR" sz="1200"/>
-              <a:t>모델 패키지는 code/s01/subscription/docs/에 있다.</a:t>
+              <a:t>표의 행 순서가 결정의 순서다. 학습 순서이지 고정된 개발 절차가 아니며, 증거가 나오면 원인이 된 결정(대개 업무 규칙이나 맥락)으로 되돌린다.</a:t>
             </a:r>
           </a:p>
           <a:p>
             <a:pPr lvl="0"/>
             <a:r>
               <a:rPr lang="ko-KR" sz="1200"/>
-              <a:t>실습은 정기배송 시스템을 빈 저장소에서 개발하는 하나의 시나리오다. 강의의 첫 시도와 달리 모델 패키지를 받고 시작하지만, 모델에도 빈칸이 있다.</a:t>
-            </a:r>
-          </a:p>
-          <a:p>
-            <a:pPr lvl="0"/>
-            <a:r>
-              <a:rPr lang="ko-KR" sz="1200"/>
-              <a:t>결과물은 실습 2(활용 방식 판단)에서 사람이 정할 결정과 맡길 수 있는 구현을 가르는 데 쓰이고, 실습 3(작업 명세서)에서 명세에 담긴다.</a:t>
-            </a:r>
-          </a:p>
-          <a:p>
-            <a:pPr lvl="0"/>
-            <a:r>
-              <a:rPr lang="ko-KR" sz="1200"/>
-              <a:t>"신청한다"(실습 1~9) 다음에 배송지를 변경한다(실습 10~12)를 같은 맥락·하네스로 진행한다.</a:t>
-            </a:r>
-          </a:p>
-          <a:p>
-            <a:pPr lvl="0"/>
-            <a:r>
-              <a:rPr lang="ko-KR" sz="1200"/>
-              <a:t>도구는 제한하지 않는다. 평가는 초안이 아니라 찾아낸 추측과 정한 결정을 본다. 모델에 없는 결정은 수강생이 업무 담당자로서 정한다.</a:t>
+              <a:t>산출물을 모두 합친 것을 위임 패키지라 부른다. "세션 12. 명세·맥락·작업 지시의 종합 검토"에서 위임 패키지로 다음 기능을 맡긴다.</a:t>
             </a:r>
           </a:p>
         </p:txBody>
@@ -1741,7 +1653,35 @@
             <a:pPr lvl="0"/>
             <a:r>
               <a:rPr lang="ko-KR" sz="1200"/>
-              <a:t>첫 시도의 실패는 AI의 실패가 아니라 사람의 몫(업무 규칙·검증)이 빠진 것이다. 다음 세션부터 그 몫을 하나씩 채운다.</a:t>
+              <a:t>모델 패키지는 code/s01/subscription/docs/에 있다.</a:t>
+            </a:r>
+          </a:p>
+          <a:p>
+            <a:pPr lvl="0"/>
+            <a:r>
+              <a:rPr lang="ko-KR" sz="1200"/>
+              <a:t>실습은 정기배송 시스템을 빈 저장소에서 개발하는 하나의 시나리오다. 강의의 첫 시도와 달리 모델 패키지를 받고 시작하지만, 모델에도 빈칸이 있다.</a:t>
+            </a:r>
+          </a:p>
+          <a:p>
+            <a:pPr lvl="0"/>
+            <a:r>
+              <a:rPr lang="ko-KR" sz="1200"/>
+              <a:t>결과물은 실습 2(활용 방식 판단)에서 사람이 정할 결정과 맡길 수 있는 구현을 가르는 데 쓰이고, 실습 3(작업 명세서)에서 명세에 담긴다.</a:t>
+            </a:r>
+          </a:p>
+          <a:p>
+            <a:pPr lvl="0"/>
+            <a:r>
+              <a:rPr lang="ko-KR" sz="1200"/>
+              <a:t>"신청한다"(실습 1~9) 다음에 배송지를 변경한다(실습 10~12)를 같은 맥락·하네스로 진행한다.</a:t>
+            </a:r>
+          </a:p>
+          <a:p>
+            <a:pPr lvl="0"/>
+            <a:r>
+              <a:rPr lang="ko-KR" sz="1200"/>
+              <a:t>도구는 제한하지 않는다. 평가는 초안이 아니라 찾아낸 추측과 정한 결정을 본다. 모델에 없는 결정은 수강생이 업무 담당자로서 정한다.</a:t>
             </a:r>
           </a:p>
         </p:txBody>
@@ -1755,6 +1695,67 @@
 </file>
 
 <file path=ppt/notesSlides/notesSlide27.xml><?xml version="1.0" encoding="utf-8"?>
+<p:notes xmlns:a="http://schemas.openxmlformats.org/drawingml/2006/main" xmlns:r="http://schemas.openxmlformats.org/officeDocument/2006/relationships" xmlns:p="http://schemas.openxmlformats.org/presentationml/2006/main">
+  <p:cSld>
+    <p:spTree>
+      <p:nvGrpSpPr>
+        <p:cNvPr id="1" name=""/>
+        <p:cNvGrpSpPr/>
+        <p:nvPr/>
+      </p:nvGrpSpPr>
+      <p:grpSpPr>
+        <a:xfrm>
+          <a:off x="0" y="0"/>
+          <a:ext cx="0" cy="0"/>
+          <a:chOff x="0" y="0"/>
+          <a:chExt cx="0" cy="0"/>
+        </a:xfrm>
+      </p:grpSpPr>
+      <p:sp>
+        <p:nvSpPr>
+          <p:cNvPr id="2" name="슬라이드 이미지 개체 틀"/>
+          <p:cNvSpPr/>
+          <p:nvPr>
+            <p:ph type="sldImg" idx="2"/>
+          </p:nvPr>
+        </p:nvSpPr>
+        <p:spPr/>
+        <p:txBody>
+          <a:bodyPr/>
+          <a:lstStyle/>
+          <a:p/>
+        </p:txBody>
+      </p:sp>
+      <p:sp>
+        <p:nvSpPr>
+          <p:cNvPr id="3" name="슬라이드 노트 개체 틀"/>
+          <p:cNvSpPr/>
+          <p:nvPr>
+            <p:ph type="body" idx="3"/>
+          </p:nvPr>
+        </p:nvSpPr>
+        <p:spPr/>
+        <p:txBody>
+          <a:bodyPr/>
+          <a:lstStyle/>
+          <a:p>
+            <a:pPr lvl="0"/>
+            <a:r>
+              <a:rPr lang="ko-KR" sz="1200"/>
+              <a:t>첫 시도의 실패는 AI의 실패가 아니라 사람의 몫(업무 규칙·검증)이 빠진 것이다. 다음 세션부터 그 몫을 하나씩 채운다.</a:t>
+            </a:r>
+          </a:p>
+        </p:txBody>
+      </p:sp>
+    </p:spTree>
+  </p:cSld>
+  <p:clrMapOvr>
+    <a:masterClrMapping/>
+  </p:clrMapOvr>
+</p:notes>
+</file>
+
+<file path=ppt/notesSlides/notesSlide28.xml><?xml version="1.0" encoding="utf-8"?>
 <p:notes xmlns:a="http://schemas.openxmlformats.org/drawingml/2006/main" xmlns:r="http://schemas.openxmlformats.org/officeDocument/2006/relationships" xmlns:p="http://schemas.openxmlformats.org/presentationml/2006/main">
   <p:cSld>
     <p:spTree>
@@ -10436,8 +10437,8 @@
         </p:blipFill>
         <p:spPr>
           <a:xfrm>
-            <a:off x="1460500" y="3176016"/>
-            <a:ext cx="6223000" cy="1778000"/>
+            <a:off x="679450" y="3176016"/>
+            <a:ext cx="7785100" cy="2224314"/>
           </a:xfrm>
           <a:prstGeom prst="rect">
             <a:avLst/>
@@ -10509,7 +10510,17 @@
                 <a:latin typeface="맑은 고딕"/>
                 <a:ea typeface="맑은 고딕"/>
               </a:rPr>
-              <a:t>요구에서 코드까지</a:t>
+              <a:t>요구에서 코드까지 </a:t>
+            </a:r>
+            <a:r>
+              <a:rPr sz="2000" b="1">
+                <a:solidFill>
+                  <a:srgbClr val="000000"/>
+                </a:solidFill>
+                <a:latin typeface="맑은 고딕"/>
+                <a:ea typeface="맑은 고딕"/>
+              </a:rPr>
+              <a:t>(1/2)</a:t>
             </a:r>
           </a:p>
           <a:p>
@@ -10858,72 +10869,6 @@
           </a:p>
         </p:txBody>
       </p:sp>
-      <p:sp>
-        <p:nvSpPr>
-          <p:cNvPr id="9" name="TextBox 12">
-            <a:extLst>
-              <a:ext uri="{FF2B5EF4-FFF2-40B4-BE49-F238E27FC236}">
-                <a16:creationId xmlns:a16="http://schemas.microsoft.com/office/drawing/2014/main" id="{654EDDB4-901F-3D48-A715-17D163E8A7AC}"/>
-              </a:ext>
-            </a:extLst>
-          </p:cNvPr>
-          <p:cNvSpPr txBox="1"/>
-          <p:nvPr/>
-        </p:nvSpPr>
-        <p:spPr>
-          <a:xfrm>
-            <a:off x="365760" y="4035552"/>
-            <a:ext cx="8412480" cy="201168"/>
-          </a:xfrm>
-          <a:prstGeom prst="rect">
-            <a:avLst/>
-          </a:prstGeom>
-          <a:noFill/>
-        </p:spPr>
-        <p:txBody>
-          <a:bodyPr wrap="square">
-            <a:spAutoFit/>
-          </a:bodyPr>
-          <a:lstStyle/>
-          <a:p>
-            <a:pPr algn="ctr"/>
-            <a:r>
-              <a:rPr sz="1400" b="1">
-                <a:solidFill>
-                  <a:srgbClr val="000000"/>
-                </a:solidFill>
-                <a:latin typeface="맑은 고딕"/>
-                <a:ea typeface="맑은 고딕"/>
-              </a:rPr>
-              <a:t>불변의 뼈대와 중간 산출물</a:t>
-            </a:r>
-          </a:p>
-        </p:txBody>
-      </p:sp>
-      <p:pic>
-        <p:nvPicPr>
-          <p:cNvPr id="10" name="mermaid Diagram 4"/>
-          <p:cNvPicPr>
-            <a:picLocks noChangeAspect="1"/>
-          </p:cNvPicPr>
-          <p:nvPr/>
-        </p:nvPicPr>
-        <p:blipFill>
-          <a:blip r:embed="mermaidImage4"/>
-          <a:stretch>
-            <a:fillRect/>
-          </a:stretch>
-        </p:blipFill>
-        <p:spPr>
-          <a:xfrm>
-            <a:off x="1460500" y="4273296"/>
-            <a:ext cx="6223000" cy="674688"/>
-          </a:xfrm>
-          <a:prstGeom prst="rect">
-            <a:avLst/>
-          </a:prstGeom>
-        </p:spPr>
-      </p:pic>
     </p:spTree>
     <p:extLst>
       <p:ext uri="{BB962C8B-B14F-4D97-AF65-F5344CB8AC3E}">
@@ -10989,7 +10934,17 @@
                 <a:latin typeface="맑은 고딕"/>
                 <a:ea typeface="맑은 고딕"/>
               </a:rPr>
-              <a:t>워크플로와 에이전트</a:t>
+              <a:t>요구에서 코드까지 </a:t>
+            </a:r>
+            <a:r>
+              <a:rPr sz="2000" b="1">
+                <a:solidFill>
+                  <a:srgbClr val="000000"/>
+                </a:solidFill>
+                <a:latin typeface="맑은 고딕"/>
+                <a:ea typeface="맑은 고딕"/>
+              </a:rPr>
+              <a:t>(2/2)</a:t>
             </a:r>
           </a:p>
           <a:p>
@@ -11141,341 +11096,75 @@
             <a:normAutofit/>
           </a:bodyPr>
           <a:lstStyle/>
-          <a:p>
-            <a:pPr marL="0" indent="0">
-              <a:spcBef>
-                <a:spcPts val="600"/>
-              </a:spcBef>
-              <a:spcAft>
-                <a:spcPts val="600"/>
-              </a:spcAft>
-              <a:buNone/>
-            </a:pPr>
-            <a:r>
-              <a:rPr sz="1800" b="0">
-                <a:solidFill>
-                  <a:srgbClr val="000000"/>
-                </a:solidFill>
-                <a:latin typeface="맑은 고딕"/>
-                <a:ea typeface="맑은 고딕"/>
-              </a:rPr>
-              <a:t>AI-native에서 맡기는 단위는 </a:t>
-            </a:r>
-            <a:r>
-              <a:rPr sz="1800" b="1">
-                <a:solidFill>
-                  <a:srgbClr val="000000"/>
-                </a:solidFill>
-                <a:latin typeface="맑은 고딕"/>
-                <a:ea typeface="맑은 고딕"/>
-              </a:rPr>
-              <a:t>워크플로</a:t>
-            </a:r>
-            <a:r>
-              <a:rPr sz="1400" b="0">
-                <a:solidFill>
-                  <a:srgbClr val="000000"/>
-                </a:solidFill>
-                <a:latin typeface="맑은 고딕"/>
-                <a:ea typeface="맑은 고딕"/>
-              </a:rPr>
-              <a:t>(workflow)</a:t>
-            </a:r>
-            <a:r>
-              <a:rPr sz="1800" b="0">
-                <a:solidFill>
-                  <a:srgbClr val="000000"/>
-                </a:solidFill>
-                <a:latin typeface="맑은 고딕"/>
-                <a:ea typeface="맑은 고딕"/>
-              </a:rPr>
-              <a:t>와 </a:t>
-            </a:r>
-            <a:r>
-              <a:rPr sz="1800" b="1">
-                <a:solidFill>
-                  <a:srgbClr val="000000"/>
-                </a:solidFill>
-                <a:latin typeface="맑은 고딕"/>
-                <a:ea typeface="맑은 고딕"/>
-              </a:rPr>
-              <a:t>에이전트</a:t>
-            </a:r>
-            <a:r>
-              <a:rPr sz="1400" b="0">
-                <a:solidFill>
-                  <a:srgbClr val="000000"/>
-                </a:solidFill>
-                <a:latin typeface="맑은 고딕"/>
-                <a:ea typeface="맑은 고딕"/>
-              </a:rPr>
-              <a:t>(agent)</a:t>
-            </a:r>
-            <a:r>
-              <a:rPr sz="1800" b="0">
-                <a:solidFill>
-                  <a:srgbClr val="000000"/>
-                </a:solidFill>
-                <a:latin typeface="맑은 고딕"/>
-                <a:ea typeface="맑은 고딕"/>
-              </a:rPr>
-              <a:t> 두 형태다.</a:t>
-            </a:r>
-          </a:p>
-          <a:p>
-            <a:pPr lvl="2" marL="723900" indent="-368300">
-              <a:spcBef>
-                <a:spcPts val="600"/>
-              </a:spcBef>
-              <a:spcAft>
-                <a:spcPts val="600"/>
-              </a:spcAft>
-              <a:buSzPct val="90000"/>
-              <a:buFont typeface="Wingdings" pitchFamily="2" charset="2"/>
-              <a:buChar char=""/>
-            </a:pPr>
-            <a:r>
-              <a:rPr sz="1800" b="0">
-                <a:solidFill>
-                  <a:srgbClr val="000000"/>
-                </a:solidFill>
-                <a:latin typeface="맑은 고딕"/>
-                <a:ea typeface="맑은 고딕"/>
-              </a:rPr>
-              <a:t>"워크플로는 LLM과 도구가 </a:t>
-            </a:r>
-            <a:r>
-              <a:rPr sz="1800" b="1">
-                <a:solidFill>
-                  <a:srgbClr val="000000"/>
-                </a:solidFill>
-                <a:latin typeface="맑은 고딕"/>
-                <a:ea typeface="맑은 고딕"/>
-              </a:rPr>
-              <a:t>미리 정한 코드 경로</a:t>
-            </a:r>
-            <a:r>
-              <a:rPr sz="1800" b="0">
-                <a:solidFill>
-                  <a:srgbClr val="000000"/>
-                </a:solidFill>
-                <a:latin typeface="맑은 고딕"/>
-                <a:ea typeface="맑은 고딕"/>
-              </a:rPr>
-              <a:t>로 조율되는 시스템이다"</a:t>
-            </a:r>
-            <a:r>
-              <a:rPr sz="1000" b="0">
-                <a:solidFill>
-                  <a:srgbClr val="000000"/>
-                </a:solidFill>
-                <a:latin typeface="맑은 고딕"/>
-                <a:ea typeface="맑은 고딕"/>
-              </a:rPr>
-              <a:t>, </a:t>
-            </a:r>
-            <a:r>
-              <a:rPr sz="1000" b="0">
-                <a:solidFill>
-                  <a:srgbClr val="000000"/>
-                </a:solidFill>
-                <a:latin typeface="맑은 고딕"/>
-                <a:ea typeface="맑은 고딕"/>
-              </a:rPr>
-              <a:t>"Workflows are systems where LLMs and tools are orchestrated through predefined code paths."</a:t>
-            </a:r>
-            <a:r>
-              <a:rPr sz="1000" b="0">
-                <a:solidFill>
-                  <a:srgbClr val="000000"/>
-                </a:solidFill>
-                <a:latin typeface="맑은 고딕"/>
-                <a:ea typeface="맑은 고딕"/>
-              </a:rPr>
-              <a:t>, </a:t>
-            </a:r>
-            <a:r>
-              <a:rPr sz="1000" b="0">
-                <a:solidFill>
-                  <a:srgbClr val="000000"/>
-                </a:solidFill>
-                <a:latin typeface="맑은 고딕"/>
-                <a:ea typeface="맑은 고딕"/>
-              </a:rPr>
-              <a:t>[Anthropic 2024]</a:t>
-            </a:r>
-          </a:p>
-          <a:p>
-            <a:pPr lvl="2" marL="723900" indent="-368300">
-              <a:spcBef>
-                <a:spcPts val="600"/>
-              </a:spcBef>
-              <a:spcAft>
-                <a:spcPts val="600"/>
-              </a:spcAft>
-              <a:buSzPct val="90000"/>
-              <a:buFont typeface="Wingdings" pitchFamily="2" charset="2"/>
-              <a:buChar char=""/>
-            </a:pPr>
-            <a:r>
-              <a:rPr sz="1800" b="0">
-                <a:solidFill>
-                  <a:srgbClr val="000000"/>
-                </a:solidFill>
-                <a:latin typeface="맑은 고딕"/>
-                <a:ea typeface="맑은 고딕"/>
-              </a:rPr>
-              <a:t>"에이전트는 LLM이 </a:t>
-            </a:r>
-            <a:r>
-              <a:rPr sz="1800" b="1">
-                <a:solidFill>
-                  <a:srgbClr val="000000"/>
-                </a:solidFill>
-                <a:latin typeface="맑은 고딕"/>
-                <a:ea typeface="맑은 고딕"/>
-              </a:rPr>
-              <a:t>자기 과정과 도구 사용을 스스로 정하며</a:t>
-            </a:r>
-            <a:r>
-              <a:rPr sz="1800" b="0">
-                <a:solidFill>
-                  <a:srgbClr val="000000"/>
-                </a:solidFill>
-                <a:latin typeface="맑은 고딕"/>
-                <a:ea typeface="맑은 고딕"/>
-              </a:rPr>
-              <a:t>, 일을 어떻게 이룰지 통제하는 시스템이다"</a:t>
-            </a:r>
-            <a:r>
-              <a:rPr sz="1000" b="0">
-                <a:solidFill>
-                  <a:srgbClr val="000000"/>
-                </a:solidFill>
-                <a:latin typeface="맑은 고딕"/>
-                <a:ea typeface="맑은 고딕"/>
-              </a:rPr>
-              <a:t>, </a:t>
-            </a:r>
-            <a:r>
-              <a:rPr sz="1000" b="0">
-                <a:solidFill>
-                  <a:srgbClr val="000000"/>
-                </a:solidFill>
-                <a:latin typeface="맑은 고딕"/>
-                <a:ea typeface="맑은 고딕"/>
-              </a:rPr>
-              <a:t>"Agents, on the other hand, are systems where LLMs dynamically direct their own processes and tool usage, maintaining control over how they accomplish tasks."</a:t>
-            </a:r>
-            <a:r>
-              <a:rPr sz="1000" b="0">
-                <a:solidFill>
-                  <a:srgbClr val="000000"/>
-                </a:solidFill>
-                <a:latin typeface="맑은 고딕"/>
-                <a:ea typeface="맑은 고딕"/>
-              </a:rPr>
-              <a:t>, </a:t>
-            </a:r>
-            <a:r>
-              <a:rPr sz="1000" b="0">
-                <a:solidFill>
-                  <a:srgbClr val="000000"/>
-                </a:solidFill>
-                <a:latin typeface="맑은 고딕"/>
-                <a:ea typeface="맑은 고딕"/>
-              </a:rPr>
-              <a:t>[Anthropic 2024]</a:t>
-            </a:r>
-          </a:p>
-          <a:p>
-            <a:pPr lvl="2" marL="723900" indent="-368300">
-              <a:spcBef>
-                <a:spcPts val="600"/>
-              </a:spcBef>
-              <a:spcAft>
-                <a:spcPts val="600"/>
-              </a:spcAft>
-              <a:buSzPct val="90000"/>
-              <a:buFont typeface="Wingdings" pitchFamily="2" charset="2"/>
-              <a:buChar char=""/>
-            </a:pPr>
-            <a:r>
-              <a:rPr sz="1800" b="1">
-                <a:solidFill>
-                  <a:srgbClr val="000000"/>
-                </a:solidFill>
-                <a:latin typeface="맑은 고딕"/>
-                <a:ea typeface="맑은 고딕"/>
-              </a:rPr>
-              <a:t>차이</a:t>
-            </a:r>
-            <a:r>
-              <a:rPr sz="1800" b="0">
-                <a:solidFill>
-                  <a:srgbClr val="000000"/>
-                </a:solidFill>
-                <a:latin typeface="맑은 고딕"/>
-                <a:ea typeface="맑은 고딕"/>
-              </a:rPr>
-              <a:t> —</a:t>
-            </a:r>
-            <a:r>
-              <a:rPr sz="1600" b="0">
-                <a:solidFill>
-                  <a:srgbClr val="000000"/>
-                </a:solidFill>
-                <a:latin typeface="맑은 고딕"/>
-                <a:ea typeface="맑은 고딕"/>
-              </a:rPr>
-              <a:t> 단계를 누가 정하는가다. 워크플로는 사람이 정한 경로를 따르고, 에이전트는 LLM이 그때그때 정한다.</a:t>
-            </a:r>
-          </a:p>
-          <a:p>
-            <a:pPr lvl="2" marL="723900" indent="-368300">
-              <a:spcBef>
-                <a:spcPts val="600"/>
-              </a:spcBef>
-              <a:spcAft>
-                <a:spcPts val="600"/>
-              </a:spcAft>
-              <a:buSzPct val="90000"/>
-              <a:buFont typeface="Wingdings" pitchFamily="2" charset="2"/>
-              <a:buChar char=""/>
-            </a:pPr>
-            <a:r>
-              <a:rPr sz="1800" b="1">
-                <a:solidFill>
-                  <a:srgbClr val="000000"/>
-                </a:solidFill>
-                <a:latin typeface="맑은 고딕"/>
-                <a:ea typeface="맑은 고딕"/>
-              </a:rPr>
-              <a:t>예</a:t>
-            </a:r>
-            <a:r>
-              <a:rPr sz="1800" b="0">
-                <a:solidFill>
-                  <a:srgbClr val="000000"/>
-                </a:solidFill>
-                <a:latin typeface="맑은 고딕"/>
-                <a:ea typeface="맑은 고딕"/>
-              </a:rPr>
-              <a:t> —</a:t>
-            </a:r>
-            <a:r>
-              <a:rPr sz="1600" b="0">
-                <a:solidFill>
-                  <a:srgbClr val="000000"/>
-                </a:solidFill>
-                <a:latin typeface="맑은 고딕"/>
-                <a:ea typeface="맑은 고딕"/>
-              </a:rPr>
-              <a:t> "명세 확인 → 구현 → 테스트"를 정해 두고 단계마다 LLM을 부르면 워크플로다. 첫 시도처럼 과제만 주고 에이전트가 파일을 찾고 고치고 테스트를 돌리게 하면 에이전트다.</a:t>
-            </a:r>
-          </a:p>
+          <a:p/>
         </p:txBody>
       </p:sp>
+      <p:sp>
+        <p:nvSpPr>
+          <p:cNvPr id="9" name="TextBox 12">
+            <a:extLst>
+              <a:ext uri="{FF2B5EF4-FFF2-40B4-BE49-F238E27FC236}">
+                <a16:creationId xmlns:a16="http://schemas.microsoft.com/office/drawing/2014/main" id="{654EDDB4-901F-3D48-A715-17D163E8A7AC}"/>
+              </a:ext>
+            </a:extLst>
+          </p:cNvPr>
+          <p:cNvSpPr txBox="1"/>
+          <p:nvPr/>
+        </p:nvSpPr>
+        <p:spPr>
+          <a:xfrm>
+            <a:off x="365760" y="3290045"/>
+            <a:ext cx="8412480" cy="201168"/>
+          </a:xfrm>
+          <a:prstGeom prst="rect">
+            <a:avLst/>
+          </a:prstGeom>
+          <a:noFill/>
+        </p:spPr>
+        <p:txBody>
+          <a:bodyPr wrap="square">
+            <a:spAutoFit/>
+          </a:bodyPr>
+          <a:lstStyle/>
+          <a:p>
+            <a:pPr algn="ctr"/>
+            <a:r>
+              <a:rPr sz="1400" b="1">
+                <a:solidFill>
+                  <a:srgbClr val="000000"/>
+                </a:solidFill>
+                <a:latin typeface="맑은 고딕"/>
+                <a:ea typeface="맑은 고딕"/>
+              </a:rPr>
+              <a:t>불변의 뼈대와 중간 산출물</a:t>
+            </a:r>
+          </a:p>
+        </p:txBody>
+      </p:sp>
+      <p:pic>
+        <p:nvPicPr>
+          <p:cNvPr id="10" name="mermaid Diagram 4"/>
+          <p:cNvPicPr>
+            <a:picLocks noChangeAspect="1"/>
+          </p:cNvPicPr>
+          <p:nvPr/>
+        </p:nvPicPr>
+        <p:blipFill>
+          <a:blip r:embed="mermaidImage4"/>
+          <a:stretch>
+            <a:fillRect/>
+          </a:stretch>
+        </p:blipFill>
+        <p:spPr>
+          <a:xfrm>
+            <a:off x="703659" y="3527789"/>
+            <a:ext cx="7736681" cy="838798"/>
+          </a:xfrm>
+          <a:prstGeom prst="rect">
+            <a:avLst/>
+          </a:prstGeom>
+        </p:spPr>
+      </p:pic>
     </p:spTree>
     <p:extLst>
       <p:ext uri="{BB962C8B-B14F-4D97-AF65-F5344CB8AC3E}">
@@ -12057,7 +11746,7 @@
                 <a:latin typeface="맑은 고딕"/>
                 <a:ea typeface="맑은 고딕"/>
               </a:rPr>
-              <a:t>바이브 코딩과 규율</a:t>
+              <a:t>워크플로와 에이전트</a:t>
             </a:r>
           </a:p>
           <a:p>
@@ -12227,7 +11916,7 @@
                 <a:latin typeface="맑은 고딕"/>
                 <a:ea typeface="맑은 고딕"/>
               </a:rPr>
-              <a:t>첫 시도는 데모 한 번을 보고 받아들일 뻔했다. 결과의 동작만 보고 받아들이는 방식이 </a:t>
+              <a:t>AI-native에서 맡기는 단위는 </a:t>
             </a:r>
             <a:r>
               <a:rPr sz="1800" b="1">
@@ -12237,7 +11926,7 @@
                 <a:latin typeface="맑은 고딕"/>
                 <a:ea typeface="맑은 고딕"/>
               </a:rPr>
-              <a:t>바이브 코딩</a:t>
+              <a:t>워크플로</a:t>
             </a:r>
             <a:r>
               <a:rPr sz="1400" b="0">
@@ -12247,7 +11936,7 @@
                 <a:latin typeface="맑은 고딕"/>
                 <a:ea typeface="맑은 고딕"/>
               </a:rPr>
-              <a:t>(vibe coding)</a:t>
+              <a:t>(workflow)</a:t>
             </a:r>
             <a:r>
               <a:rPr sz="1800" b="0">
@@ -12257,7 +11946,37 @@
                 <a:latin typeface="맑은 고딕"/>
                 <a:ea typeface="맑은 고딕"/>
               </a:rPr>
-              <a:t>이다.</a:t>
+              <a:t>와 </a:t>
+            </a:r>
+            <a:r>
+              <a:rPr sz="1800" b="1">
+                <a:solidFill>
+                  <a:srgbClr val="000000"/>
+                </a:solidFill>
+                <a:latin typeface="맑은 고딕"/>
+                <a:ea typeface="맑은 고딕"/>
+              </a:rPr>
+              <a:t>에이전트</a:t>
+            </a:r>
+            <a:r>
+              <a:rPr sz="1400" b="0">
+                <a:solidFill>
+                  <a:srgbClr val="000000"/>
+                </a:solidFill>
+                <a:latin typeface="맑은 고딕"/>
+                <a:ea typeface="맑은 고딕"/>
+              </a:rPr>
+              <a:t>(agent)</a:t>
+            </a:r>
+            <a:r>
+              <a:rPr sz="1800" b="0">
+                <a:solidFill>
+                  <a:srgbClr val="000000"/>
+                </a:solidFill>
+                <a:latin typeface="맑은 고딕"/>
+                <a:ea typeface="맑은 고딕"/>
+              </a:rPr>
+              <a:t> 두 형태다.</a:t>
             </a:r>
           </a:p>
           <a:p>
@@ -12280,7 +11999,7 @@
                 <a:latin typeface="맑은 고딕"/>
                 <a:ea typeface="맑은 고딕"/>
               </a:rPr>
-              <a:t>"바이브 코딩에서는 코드가 아니라 </a:t>
+              <a:t>"워크플로는 LLM과 도구가 </a:t>
             </a:r>
             <a:r>
               <a:rPr sz="1800" b="1">
@@ -12290,7 +12009,7 @@
                 <a:latin typeface="맑은 고딕"/>
                 <a:ea typeface="맑은 고딕"/>
               </a:rPr>
-              <a:t>시스템의 동작만</a:t>
+              <a:t>미리 정한 코드 경로</a:t>
             </a:r>
             <a:r>
               <a:rPr sz="1800" b="0">
@@ -12300,7 +12019,7 @@
                 <a:latin typeface="맑은 고딕"/>
                 <a:ea typeface="맑은 고딕"/>
               </a:rPr>
-              <a:t> 신경 쓴다"</a:t>
+              <a:t>로 조율되는 시스템이다"</a:t>
             </a:r>
             <a:r>
               <a:rPr sz="1000" b="0">
@@ -12320,7 +12039,7 @@
                 <a:latin typeface="맑은 고딕"/>
                 <a:ea typeface="맑은 고딕"/>
               </a:rPr>
-              <a:t>"In vibe coding you don't care about the code, just the behavior of the system."</a:t>
+              <a:t>"Workflows are systems where LLMs and tools are orchestrated through predefined code paths."</a:t>
             </a:r>
             <a:r>
               <a:rPr sz="1000" b="0">
@@ -12340,7 +12059,7 @@
                 <a:latin typeface="맑은 고딕"/>
                 <a:ea typeface="맑은 고딕"/>
               </a:rPr>
-              <a:t>[Beck 2025]</a:t>
+              <a:t>[Anthropic 2024]</a:t>
             </a:r>
           </a:p>
           <a:p>
@@ -12363,7 +12082,7 @@
                 <a:latin typeface="맑은 고딕"/>
                 <a:ea typeface="맑은 고딕"/>
               </a:rPr>
-              <a:t>"증강 코딩에서는 </a:t>
+              <a:t>"에이전트는 LLM이 </a:t>
             </a:r>
             <a:r>
               <a:rPr sz="1800" b="1">
@@ -12373,7 +12092,7 @@
                 <a:latin typeface="맑은 고딕"/>
                 <a:ea typeface="맑은 고딕"/>
               </a:rPr>
-              <a:t>코드와 그 복잡도, 테스트와 그 커버리지</a:t>
+              <a:t>자기 과정과 도구 사용을 스스로 정하며</a:t>
             </a:r>
             <a:r>
               <a:rPr sz="1800" b="0">
@@ -12383,7 +12102,7 @@
                 <a:latin typeface="맑은 고딕"/>
                 <a:ea typeface="맑은 고딕"/>
               </a:rPr>
-              <a:t>를 신경 쓴다"</a:t>
+              <a:t>, 일을 어떻게 이룰지 통제하는 시스템이다"</a:t>
             </a:r>
             <a:r>
               <a:rPr sz="1000" b="0">
@@ -12403,7 +12122,7 @@
                 <a:latin typeface="맑은 고딕"/>
                 <a:ea typeface="맑은 고딕"/>
               </a:rPr>
-              <a:t>"In augmented coding you care about the code, its complexity, the tests, &amp; their coverage."</a:t>
+              <a:t>"Agents, on the other hand, are systems where LLMs dynamically direct their own processes and tool usage, maintaining control over how they accomplish tasks."</a:t>
             </a:r>
             <a:r>
               <a:rPr sz="1000" b="0">
@@ -12423,7 +12142,7 @@
                 <a:latin typeface="맑은 고딕"/>
                 <a:ea typeface="맑은 고딕"/>
               </a:rPr>
-              <a:t>[Beck 2025]</a:t>
+              <a:t>[Anthropic 2024]</a:t>
             </a:r>
           </a:p>
           <a:p>
@@ -12439,6 +12158,16 @@
               <a:buChar char=""/>
             </a:pPr>
             <a:r>
+              <a:rPr sz="1800" b="1">
+                <a:solidFill>
+                  <a:srgbClr val="000000"/>
+                </a:solidFill>
+                <a:latin typeface="맑은 고딕"/>
+                <a:ea typeface="맑은 고딕"/>
+              </a:rPr>
+              <a:t>차이</a:t>
+            </a:r>
+            <a:r>
               <a:rPr sz="1800" b="0">
                 <a:solidFill>
                   <a:srgbClr val="000000"/>
@@ -12446,67 +12175,17 @@
                 <a:latin typeface="맑은 고딕"/>
                 <a:ea typeface="맑은 고딕"/>
               </a:rPr>
-              <a:t>숙련자가 LLM으로 일을 빠르게 하면서도 </a:t>
-            </a:r>
-            <a:r>
-              <a:rPr sz="1800" b="1">
-                <a:solidFill>
-                  <a:srgbClr val="000000"/>
-                </a:solidFill>
-                <a:latin typeface="맑은 고딕"/>
-                <a:ea typeface="맑은 고딕"/>
-              </a:rPr>
-              <a:t>자기가 만든 소프트웨어에 책임을 지는</a:t>
-            </a:r>
-            <a:r>
-              <a:rPr sz="1800" b="0">
-                <a:solidFill>
-                  <a:srgbClr val="000000"/>
-                </a:solidFill>
-                <a:latin typeface="맑은 고딕"/>
-                <a:ea typeface="맑은 고딕"/>
-              </a:rPr>
-              <a:t> 방식을 바이브 엔지니어링</a:t>
-            </a:r>
-            <a:r>
-              <a:rPr sz="1400" b="0">
-                <a:solidFill>
-                  <a:srgbClr val="000000"/>
-                </a:solidFill>
-                <a:latin typeface="맑은 고딕"/>
-                <a:ea typeface="맑은 고딕"/>
-              </a:rPr>
-              <a:t>(vibe engineering)</a:t>
-            </a:r>
-            <a:r>
-              <a:rPr sz="1800" b="0">
-                <a:solidFill>
-                  <a:srgbClr val="000000"/>
-                </a:solidFill>
-                <a:latin typeface="맑은 고딕"/>
-                <a:ea typeface="맑은 고딕"/>
-              </a:rPr>
-              <a:t>이라 부른다</a:t>
-            </a:r>
-            <a:r>
-              <a:rPr sz="1000" b="0">
-                <a:solidFill>
-                  <a:srgbClr val="000000"/>
-                </a:solidFill>
-                <a:latin typeface="맑은 고딕"/>
-                <a:ea typeface="맑은 고딕"/>
-              </a:rPr>
-              <a:t>, </a:t>
-            </a:r>
-            <a:r>
-              <a:rPr sz="1000" b="0">
-                <a:solidFill>
-                  <a:srgbClr val="000000"/>
-                </a:solidFill>
-                <a:latin typeface="맑은 고딕"/>
-                <a:ea typeface="맑은 고딕"/>
-              </a:rPr>
-              <a:t>"seasoned professionals accelerate their work with LLMs while staying proudly and confidently accountable for the software they produce", [Willison 2025b]</a:t>
+              <a:t> —</a:t>
+            </a:r>
+            <a:r>
+              <a:rPr sz="1600" b="0">
+                <a:solidFill>
+                  <a:srgbClr val="000000"/>
+                </a:solidFill>
+                <a:latin typeface="맑은 고딕"/>
+                <a:ea typeface="맑은 고딕"/>
+              </a:rPr>
+              <a:t> 단계를 누가 정하는가다. 워크플로는 사람이 정한 경로를 따르고, 에이전트는 LLM이 그때그때 정한다.</a:t>
             </a:r>
           </a:p>
           <a:p>
@@ -12529,7 +12208,7 @@
                 <a:latin typeface="맑은 고딕"/>
                 <a:ea typeface="맑은 고딕"/>
               </a:rPr>
-              <a:t>AI는 팀의 습관을 키운다</a:t>
+              <a:t>예</a:t>
             </a:r>
             <a:r>
               <a:rPr sz="1800" b="0">
@@ -12549,7 +12228,7 @@
                 <a:latin typeface="맑은 고딕"/>
                 <a:ea typeface="맑은 고딕"/>
               </a:rPr>
-              <a:t> 업무 규칙·테스트·리뷰가 있는 팀에서는 좋은 결과를, 없는 팀에서는 나쁜 결과를 더 빨리 만든다.</a:t>
+              <a:t> "명세 확인 → 구현 → 테스트"를 정해 두고 단계마다 LLM을 부르면 워크플로다. 첫 시도처럼 과제만 주고 에이전트가 파일을 찾고 고치고 테스트를 돌리게 하면 에이전트다.</a:t>
             </a:r>
           </a:p>
         </p:txBody>
@@ -12619,7 +12298,7 @@
                 <a:latin typeface="맑은 고딕"/>
                 <a:ea typeface="맑은 고딕"/>
               </a:rPr>
-              <a:t>사람이 조종하고 에이전트가 실행한다</a:t>
+              <a:t>바이브 코딩과 규율</a:t>
             </a:r>
           </a:p>
           <a:p>
@@ -12631,7 +12310,7 @@
                 <a:latin typeface="맑은 고딕"/>
                 <a:ea typeface="맑은 고딕"/>
               </a:rPr>
-              <a:t>06. 개발자의 일과 LLM의 일</a:t>
+              <a:t>05. 개발 방식의 변화</a:t>
             </a:r>
           </a:p>
         </p:txBody>
@@ -12789,7 +12468,7 @@
                 <a:latin typeface="맑은 고딕"/>
                 <a:ea typeface="맑은 고딕"/>
               </a:rPr>
-              <a:t>"사람이 </a:t>
+              <a:t>첫 시도는 데모 한 번을 보고 받아들일 뻔했다. 결과의 동작만 보고 받아들이는 방식이 </a:t>
             </a:r>
             <a:r>
               <a:rPr sz="1800" b="1">
@@ -12799,7 +12478,17 @@
                 <a:latin typeface="맑은 고딕"/>
                 <a:ea typeface="맑은 고딕"/>
               </a:rPr>
-              <a:t>조종하고</a:t>
+              <a:t>바이브 코딩</a:t>
+            </a:r>
+            <a:r>
+              <a:rPr sz="1400" b="0">
+                <a:solidFill>
+                  <a:srgbClr val="000000"/>
+                </a:solidFill>
+                <a:latin typeface="맑은 고딕"/>
+                <a:ea typeface="맑은 고딕"/>
+              </a:rPr>
+              <a:t>(vibe coding)</a:t>
             </a:r>
             <a:r>
               <a:rPr sz="1800" b="0">
@@ -12809,67 +12498,7 @@
                 <a:latin typeface="맑은 고딕"/>
                 <a:ea typeface="맑은 고딕"/>
               </a:rPr>
-              <a:t>, 에이전트가 </a:t>
-            </a:r>
-            <a:r>
-              <a:rPr sz="1800" b="1">
-                <a:solidFill>
-                  <a:srgbClr val="000000"/>
-                </a:solidFill>
-                <a:latin typeface="맑은 고딕"/>
-                <a:ea typeface="맑은 고딕"/>
-              </a:rPr>
-              <a:t>실행한다</a:t>
-            </a:r>
-            <a:r>
-              <a:rPr sz="1800" b="0">
-                <a:solidFill>
-                  <a:srgbClr val="000000"/>
-                </a:solidFill>
-                <a:latin typeface="맑은 고딕"/>
-                <a:ea typeface="맑은 고딕"/>
-              </a:rPr>
-              <a:t>"</a:t>
-            </a:r>
-            <a:r>
-              <a:rPr sz="1000" b="0">
-                <a:solidFill>
-                  <a:srgbClr val="000000"/>
-                </a:solidFill>
-                <a:latin typeface="맑은 고딕"/>
-                <a:ea typeface="맑은 고딕"/>
-              </a:rPr>
-              <a:t>, </a:t>
-            </a:r>
-            <a:r>
-              <a:rPr sz="1000" b="0">
-                <a:solidFill>
-                  <a:srgbClr val="000000"/>
-                </a:solidFill>
-                <a:latin typeface="맑은 고딕"/>
-                <a:ea typeface="맑은 고딕"/>
-              </a:rPr>
-              <a:t>"Humans steer. Agents execute."</a:t>
-            </a:r>
-            <a:r>
-              <a:rPr sz="1000" b="0">
-                <a:solidFill>
-                  <a:srgbClr val="000000"/>
-                </a:solidFill>
-                <a:latin typeface="맑은 고딕"/>
-                <a:ea typeface="맑은 고딕"/>
-              </a:rPr>
-              <a:t>, </a:t>
-            </a:r>
-            <a:r>
-              <a:rPr sz="1000" b="0">
-                <a:solidFill>
-                  <a:srgbClr val="000000"/>
-                </a:solidFill>
-                <a:latin typeface="맑은 고딕"/>
-                <a:ea typeface="맑은 고딕"/>
-              </a:rPr>
-              <a:t>[Lopopolo 2026]</a:t>
+              <a:t>이다.</a:t>
             </a:r>
           </a:p>
           <a:p>
@@ -12892,7 +12521,7 @@
                 <a:latin typeface="맑은 고딕"/>
                 <a:ea typeface="맑은 고딕"/>
               </a:rPr>
-              <a:t>"사람은 늘 루프 안에 있지만 </a:t>
+              <a:t>"바이브 코딩에서는 코드가 아니라 </a:t>
             </a:r>
             <a:r>
               <a:rPr sz="1800" b="1">
@@ -12902,7 +12531,7 @@
                 <a:latin typeface="맑은 고딕"/>
                 <a:ea typeface="맑은 고딕"/>
               </a:rPr>
-              <a:t>예전과 다른 추상 수준</a:t>
+              <a:t>시스템의 동작만</a:t>
             </a:r>
             <a:r>
               <a:rPr sz="1800" b="0">
@@ -12912,47 +12541,7 @@
                 <a:latin typeface="맑은 고딕"/>
                 <a:ea typeface="맑은 고딕"/>
               </a:rPr>
-              <a:t>에서 일한다. 일의 우선순위를 정하고, 사용자 피드백을 </a:t>
-            </a:r>
-            <a:r>
-              <a:rPr sz="1800" b="1">
-                <a:solidFill>
-                  <a:srgbClr val="000000"/>
-                </a:solidFill>
-                <a:latin typeface="맑은 고딕"/>
-                <a:ea typeface="맑은 고딕"/>
-              </a:rPr>
-              <a:t>수용 기준</a:t>
-            </a:r>
-            <a:r>
-              <a:rPr sz="1800" b="0">
-                <a:solidFill>
-                  <a:srgbClr val="000000"/>
-                </a:solidFill>
-                <a:latin typeface="맑은 고딕"/>
-                <a:ea typeface="맑은 고딕"/>
-              </a:rPr>
-              <a:t>으로 옮기고, </a:t>
-            </a:r>
-            <a:r>
-              <a:rPr sz="1800" b="1">
-                <a:solidFill>
-                  <a:srgbClr val="000000"/>
-                </a:solidFill>
-                <a:latin typeface="맑은 고딕"/>
-                <a:ea typeface="맑은 고딕"/>
-              </a:rPr>
-              <a:t>결과를 확인</a:t>
-            </a:r>
-            <a:r>
-              <a:rPr sz="1800" b="0">
-                <a:solidFill>
-                  <a:srgbClr val="000000"/>
-                </a:solidFill>
-                <a:latin typeface="맑은 고딕"/>
-                <a:ea typeface="맑은 고딕"/>
-              </a:rPr>
-              <a:t>한다"</a:t>
+              <a:t> 신경 쓴다"</a:t>
             </a:r>
             <a:r>
               <a:rPr sz="1000" b="0">
@@ -12972,7 +12561,7 @@
                 <a:latin typeface="맑은 고딕"/>
                 <a:ea typeface="맑은 고딕"/>
               </a:rPr>
-              <a:t>"Humans always remain in the loop, but work at a different layer of abstraction than we used to. We prioritize work, translate user feedback into acceptance criteria, and validate outcomes."</a:t>
+              <a:t>"In vibe coding you don't care about the code, just the behavior of the system."</a:t>
             </a:r>
             <a:r>
               <a:rPr sz="1000" b="0">
@@ -12992,7 +12581,7 @@
                 <a:latin typeface="맑은 고딕"/>
                 <a:ea typeface="맑은 고딕"/>
               </a:rPr>
-              <a:t>[Lopopolo 2026]</a:t>
+              <a:t>[Beck 2025]</a:t>
             </a:r>
           </a:p>
           <a:p>
@@ -13008,6 +12597,16 @@
               <a:buChar char=""/>
             </a:pPr>
             <a:r>
+              <a:rPr sz="1800" b="0">
+                <a:solidFill>
+                  <a:srgbClr val="000000"/>
+                </a:solidFill>
+                <a:latin typeface="맑은 고딕"/>
+                <a:ea typeface="맑은 고딕"/>
+              </a:rPr>
+              <a:t>"증강 코딩에서는 </a:t>
+            </a:r>
+            <a:r>
               <a:rPr sz="1800" b="1">
                 <a:solidFill>
                   <a:srgbClr val="000000"/>
@@ -13015,7 +12614,7 @@
                 <a:latin typeface="맑은 고딕"/>
                 <a:ea typeface="맑은 고딕"/>
               </a:rPr>
-              <a:t>우선순위</a:t>
+              <a:t>코드와 그 복잡도, 테스트와 그 커버리지</a:t>
             </a:r>
             <a:r>
               <a:rPr sz="1800" b="0">
@@ -13025,17 +12624,47 @@
                 <a:latin typeface="맑은 고딕"/>
                 <a:ea typeface="맑은 고딕"/>
               </a:rPr>
-              <a:t> —</a:t>
-            </a:r>
-            <a:r>
-              <a:rPr sz="1600" b="0">
-                <a:solidFill>
-                  <a:srgbClr val="000000"/>
-                </a:solidFill>
-                <a:latin typeface="맑은 고딕"/>
-                <a:ea typeface="맑은 고딕"/>
-              </a:rPr>
-              <a:t> 첫 릴리스에 "주문한다"를 먼저 맡기기로 정한다.</a:t>
+              <a:t>를 신경 쓴다"</a:t>
+            </a:r>
+            <a:r>
+              <a:rPr sz="1000" b="0">
+                <a:solidFill>
+                  <a:srgbClr val="000000"/>
+                </a:solidFill>
+                <a:latin typeface="맑은 고딕"/>
+                <a:ea typeface="맑은 고딕"/>
+              </a:rPr>
+              <a:t>, </a:t>
+            </a:r>
+            <a:r>
+              <a:rPr sz="1000" b="0">
+                <a:solidFill>
+                  <a:srgbClr val="000000"/>
+                </a:solidFill>
+                <a:latin typeface="맑은 고딕"/>
+                <a:ea typeface="맑은 고딕"/>
+              </a:rPr>
+              <a:t>"In augmented coding you care about the code, its complexity, the tests, &amp; their coverage."</a:t>
+            </a:r>
+            <a:r>
+              <a:rPr sz="1000" b="0">
+                <a:solidFill>
+                  <a:srgbClr val="000000"/>
+                </a:solidFill>
+                <a:latin typeface="맑은 고딕"/>
+                <a:ea typeface="맑은 고딕"/>
+              </a:rPr>
+              <a:t>, </a:t>
+            </a:r>
+            <a:r>
+              <a:rPr sz="1000" b="0">
+                <a:solidFill>
+                  <a:srgbClr val="000000"/>
+                </a:solidFill>
+                <a:latin typeface="맑은 고딕"/>
+                <a:ea typeface="맑은 고딕"/>
+              </a:rPr>
+              <a:t>[Beck 2025]</a:t>
             </a:r>
           </a:p>
           <a:p>
@@ -13051,6 +12680,16 @@
               <a:buChar char=""/>
             </a:pPr>
             <a:r>
+              <a:rPr sz="1800" b="0">
+                <a:solidFill>
+                  <a:srgbClr val="000000"/>
+                </a:solidFill>
+                <a:latin typeface="맑은 고딕"/>
+                <a:ea typeface="맑은 고딕"/>
+              </a:rPr>
+              <a:t>숙련자가 LLM으로 일을 빠르게 하면서도 </a:t>
+            </a:r>
+            <a:r>
               <a:rPr sz="1800" b="1">
                 <a:solidFill>
                   <a:srgbClr val="000000"/>
@@ -13058,7 +12697,7 @@
                 <a:latin typeface="맑은 고딕"/>
                 <a:ea typeface="맑은 고딕"/>
               </a:rPr>
-              <a:t>수용 기준</a:t>
+              <a:t>자기가 만든 소프트웨어에 책임을 지는</a:t>
             </a:r>
             <a:r>
               <a:rPr sz="1800" b="0">
@@ -13068,17 +12707,47 @@
                 <a:latin typeface="맑은 고딕"/>
                 <a:ea typeface="맑은 고딕"/>
               </a:rPr>
-              <a:t> —</a:t>
-            </a:r>
-            <a:r>
-              <a:rPr sz="1600" b="0">
-                <a:solidFill>
-                  <a:srgbClr val="000000"/>
-                </a:solidFill>
-                <a:latin typeface="맑은 고딕"/>
-                <a:ea typeface="맑은 고딕"/>
-              </a:rPr>
-              <a:t> 업무 규칙 3가지을 허용·거절 예시로 옮긴다.</a:t>
+              <a:t> 방식을 바이브 엔지니어링</a:t>
+            </a:r>
+            <a:r>
+              <a:rPr sz="1400" b="0">
+                <a:solidFill>
+                  <a:srgbClr val="000000"/>
+                </a:solidFill>
+                <a:latin typeface="맑은 고딕"/>
+                <a:ea typeface="맑은 고딕"/>
+              </a:rPr>
+              <a:t>(vibe engineering)</a:t>
+            </a:r>
+            <a:r>
+              <a:rPr sz="1800" b="0">
+                <a:solidFill>
+                  <a:srgbClr val="000000"/>
+                </a:solidFill>
+                <a:latin typeface="맑은 고딕"/>
+                <a:ea typeface="맑은 고딕"/>
+              </a:rPr>
+              <a:t>이라 부른다</a:t>
+            </a:r>
+            <a:r>
+              <a:rPr sz="1000" b="0">
+                <a:solidFill>
+                  <a:srgbClr val="000000"/>
+                </a:solidFill>
+                <a:latin typeface="맑은 고딕"/>
+                <a:ea typeface="맑은 고딕"/>
+              </a:rPr>
+              <a:t>, </a:t>
+            </a:r>
+            <a:r>
+              <a:rPr sz="1000" b="0">
+                <a:solidFill>
+                  <a:srgbClr val="000000"/>
+                </a:solidFill>
+                <a:latin typeface="맑은 고딕"/>
+                <a:ea typeface="맑은 고딕"/>
+              </a:rPr>
+              <a:t>"seasoned professionals accelerate their work with LLMs while staying proudly and confidently accountable for the software they produce", [Willison 2025b]</a:t>
             </a:r>
           </a:p>
           <a:p>
@@ -13101,7 +12770,7 @@
                 <a:latin typeface="맑은 고딕"/>
                 <a:ea typeface="맑은 고딕"/>
               </a:rPr>
-              <a:t>결과 확인</a:t>
+              <a:t>AI는 팀의 습관을 키운다</a:t>
             </a:r>
             <a:r>
               <a:rPr sz="1800" b="0">
@@ -13121,7 +12790,7 @@
                 <a:latin typeface="맑은 고딕"/>
                 <a:ea typeface="맑은 고딕"/>
               </a:rPr>
-              <a:t> 데모가 아니라 업무 규칙의 테스트로 받아들인다.</a:t>
+              <a:t> 업무 규칙·테스트·리뷰가 있는 팀에서는 좋은 결과를, 없는 팀에서는 나쁜 결과를 더 빨리 만든다.</a:t>
             </a:r>
           </a:p>
         </p:txBody>
@@ -13140,6 +12809,578 @@
 </file>
 
 <file path=ppt/slides/slide22.xml><?xml version="1.0" encoding="utf-8"?>
+<p:sld xmlns:a="http://schemas.openxmlformats.org/drawingml/2006/main" xmlns:r="http://schemas.openxmlformats.org/officeDocument/2006/relationships" xmlns:p="http://schemas.openxmlformats.org/presentationml/2006/main">
+  <p:cSld>
+    <p:spTree>
+      <p:nvGrpSpPr>
+        <p:cNvPr id="1" name="">
+          <a:extLst>
+            <a:ext uri="{FF2B5EF4-FFF2-40B4-BE49-F238E27FC236}">
+              <a16:creationId xmlns:a16="http://schemas.microsoft.com/office/drawing/2014/main" id="{8E4F1F13-426B-086B-7D8C-9A58A0F879DB}"/>
+            </a:ext>
+          </a:extLst>
+        </p:cNvPr>
+        <p:cNvGrpSpPr/>
+        <p:nvPr/>
+      </p:nvGrpSpPr>
+      <p:grpSpPr>
+        <a:xfrm>
+          <a:off x="0" y="0"/>
+          <a:ext cx="0" cy="0"/>
+          <a:chOff x="0" y="0"/>
+          <a:chExt cx="0" cy="0"/>
+        </a:xfrm>
+      </p:grpSpPr>
+      <p:sp>
+        <p:nvSpPr>
+          <p:cNvPr id="2" name="제목 1">
+            <a:extLst>
+              <a:ext uri="{FF2B5EF4-FFF2-40B4-BE49-F238E27FC236}">
+                <a16:creationId xmlns:a16="http://schemas.microsoft.com/office/drawing/2014/main" id="{AA26A92D-924E-0575-9551-F8FD7BFD3FAD}"/>
+              </a:ext>
+            </a:extLst>
+          </p:cNvPr>
+          <p:cNvSpPr>
+            <a:spLocks noGrp="1"/>
+          </p:cNvSpPr>
+          <p:nvPr>
+            <p:ph type="title"/>
+          </p:nvPr>
+        </p:nvSpPr>
+        <p:spPr/>
+        <p:txBody>
+          <a:bodyPr/>
+          <a:lstStyle/>
+          <a:p>
+            <a:r>
+              <a:rPr sz="2400" b="1">
+                <a:solidFill>
+                  <a:srgbClr val="000000"/>
+                </a:solidFill>
+                <a:latin typeface="맑은 고딕"/>
+                <a:ea typeface="맑은 고딕"/>
+              </a:rPr>
+              <a:t>사람이 조종하고 에이전트가 실행한다</a:t>
+            </a:r>
+          </a:p>
+          <a:p>
+            <a:r>
+              <a:rPr sz="1100" b="1">
+                <a:solidFill>
+                  <a:srgbClr val="000000"/>
+                </a:solidFill>
+                <a:latin typeface="맑은 고딕"/>
+                <a:ea typeface="맑은 고딕"/>
+              </a:rPr>
+              <a:t>06. 개발자의 일과 LLM의 일</a:t>
+            </a:r>
+          </a:p>
+        </p:txBody>
+      </p:sp>
+      <p:sp>
+        <p:nvSpPr>
+          <p:cNvPr id="3" name="슬라이드 번호 개체 틀 2">
+            <a:extLst>
+              <a:ext uri="{FF2B5EF4-FFF2-40B4-BE49-F238E27FC236}">
+                <a16:creationId xmlns:a16="http://schemas.microsoft.com/office/drawing/2014/main" id="{12CF30EE-4DFD-8063-56B8-B8689E76DFCA}"/>
+              </a:ext>
+            </a:extLst>
+          </p:cNvPr>
+          <p:cNvSpPr>
+            <a:spLocks noGrp="1"/>
+          </p:cNvSpPr>
+          <p:nvPr>
+            <p:ph type="sldNum" sz="quarter" idx="10"/>
+          </p:nvPr>
+        </p:nvSpPr>
+        <p:spPr/>
+        <p:txBody>
+          <a:bodyPr/>
+          <a:lstStyle/>
+          <a:p>
+            <a:pPr>
+              <a:defRPr/>
+            </a:pPr>
+            <a:r>
+              <a:rPr lang="en-US" altLang="ko-KR">
+                <a:solidFill>
+                  <a:prstClr val="black"/>
+                </a:solidFill>
+              </a:rPr>
+              <a:t>- 22 -</a:t>
+            </a:r>
+          </a:p>
+        </p:txBody>
+      </p:sp>
+      <p:sp>
+        <p:nvSpPr>
+          <p:cNvPr id="5" name="텍스트 개체 틀 4">
+            <a:extLst>
+              <a:ext uri="{FF2B5EF4-FFF2-40B4-BE49-F238E27FC236}">
+                <a16:creationId xmlns:a16="http://schemas.microsoft.com/office/drawing/2014/main" id="{D66274C8-E16F-5AEB-614B-D8D32DA3E8C6}"/>
+              </a:ext>
+            </a:extLst>
+          </p:cNvPr>
+          <p:cNvSpPr>
+            <a:spLocks noGrp="1"/>
+          </p:cNvSpPr>
+          <p:nvPr>
+            <p:ph type="body" sz="quarter" idx="11"/>
+          </p:nvPr>
+        </p:nvSpPr>
+        <p:spPr/>
+        <p:txBody>
+          <a:bodyPr/>
+          <a:lstStyle/>
+          <a:p>
+            <a:r>
+              <a:rPr kumimoji="1" lang="en-US" altLang="ko-KR" sz="1400" dirty="0" err="1"/>
+              <a:t>01. AI 협업의 특성과 사람의 판단 책임</a:t>
+            </a:r>
+          </a:p>
+        </p:txBody>
+      </p:sp>
+      <p:sp>
+        <p:nvSpPr>
+          <p:cNvPr id="6" name="텍스트 개체 틀 5">
+            <a:extLst>
+              <a:ext uri="{FF2B5EF4-FFF2-40B4-BE49-F238E27FC236}">
+                <a16:creationId xmlns:a16="http://schemas.microsoft.com/office/drawing/2014/main" id="{A24E58E1-194B-A320-AEEE-24D08685BB67}"/>
+              </a:ext>
+            </a:extLst>
+          </p:cNvPr>
+          <p:cNvSpPr>
+            <a:spLocks noGrp="1"/>
+          </p:cNvSpPr>
+          <p:nvPr>
+            <p:ph type="body" sz="quarter" idx="12"/>
+          </p:nvPr>
+        </p:nvSpPr>
+        <p:spPr/>
+        <p:txBody>
+          <a:bodyPr/>
+          <a:lstStyle/>
+          <a:p>
+            <a:endParaRPr kumimoji="1" lang="ko-KR" altLang="en-US" dirty="0"/>
+          </a:p>
+        </p:txBody>
+      </p:sp>
+      <p:sp>
+        <p:nvSpPr>
+          <p:cNvPr id="7" name="텍스트 개체 틀 6">
+            <a:extLst>
+              <a:ext uri="{FF2B5EF4-FFF2-40B4-BE49-F238E27FC236}">
+                <a16:creationId xmlns:a16="http://schemas.microsoft.com/office/drawing/2014/main" id="{A219F420-613B-6234-45F6-0955A9A4505F}"/>
+              </a:ext>
+            </a:extLst>
+          </p:cNvPr>
+          <p:cNvSpPr>
+            <a:spLocks noGrp="1"/>
+          </p:cNvSpPr>
+          <p:nvPr>
+            <p:ph type="body" sz="quarter" idx="13"/>
+          </p:nvPr>
+        </p:nvSpPr>
+        <p:spPr/>
+        <p:txBody>
+          <a:bodyPr/>
+          <a:lstStyle/>
+          <a:p>
+            <a:endParaRPr kumimoji="1" lang="en-US" altLang="ko-KR" dirty="0"/>
+          </a:p>
+        </p:txBody>
+      </p:sp>
+      <p:sp>
+        <p:nvSpPr>
+          <p:cNvPr id="8" name="내용 개체 틀 7">
+            <a:extLst>
+              <a:ext uri="{FF2B5EF4-FFF2-40B4-BE49-F238E27FC236}">
+                <a16:creationId xmlns:a16="http://schemas.microsoft.com/office/drawing/2014/main" id="{BEBA2C4A-B0BF-F2E4-EA6E-614C99CBA184}"/>
+              </a:ext>
+            </a:extLst>
+          </p:cNvPr>
+          <p:cNvSpPr>
+            <a:spLocks noGrp="1"/>
+          </p:cNvSpPr>
+          <p:nvPr>
+            <p:ph idx="1"/>
+          </p:nvPr>
+        </p:nvSpPr>
+        <p:spPr/>
+        <p:txBody>
+          <a:bodyPr>
+            <a:normAutofit/>
+          </a:bodyPr>
+          <a:lstStyle/>
+          <a:p>
+            <a:pPr marL="0" indent="0">
+              <a:spcBef>
+                <a:spcPts val="600"/>
+              </a:spcBef>
+              <a:spcAft>
+                <a:spcPts val="600"/>
+              </a:spcAft>
+              <a:buNone/>
+            </a:pPr>
+            <a:r>
+              <a:rPr sz="1800" b="0">
+                <a:solidFill>
+                  <a:srgbClr val="000000"/>
+                </a:solidFill>
+                <a:latin typeface="맑은 고딕"/>
+                <a:ea typeface="맑은 고딕"/>
+              </a:rPr>
+              <a:t>"사람이 </a:t>
+            </a:r>
+            <a:r>
+              <a:rPr sz="1800" b="1">
+                <a:solidFill>
+                  <a:srgbClr val="000000"/>
+                </a:solidFill>
+                <a:latin typeface="맑은 고딕"/>
+                <a:ea typeface="맑은 고딕"/>
+              </a:rPr>
+              <a:t>조종하고</a:t>
+            </a:r>
+            <a:r>
+              <a:rPr sz="1800" b="0">
+                <a:solidFill>
+                  <a:srgbClr val="000000"/>
+                </a:solidFill>
+                <a:latin typeface="맑은 고딕"/>
+                <a:ea typeface="맑은 고딕"/>
+              </a:rPr>
+              <a:t>, 에이전트가 </a:t>
+            </a:r>
+            <a:r>
+              <a:rPr sz="1800" b="1">
+                <a:solidFill>
+                  <a:srgbClr val="000000"/>
+                </a:solidFill>
+                <a:latin typeface="맑은 고딕"/>
+                <a:ea typeface="맑은 고딕"/>
+              </a:rPr>
+              <a:t>실행한다</a:t>
+            </a:r>
+            <a:r>
+              <a:rPr sz="1800" b="0">
+                <a:solidFill>
+                  <a:srgbClr val="000000"/>
+                </a:solidFill>
+                <a:latin typeface="맑은 고딕"/>
+                <a:ea typeface="맑은 고딕"/>
+              </a:rPr>
+              <a:t>"</a:t>
+            </a:r>
+            <a:r>
+              <a:rPr sz="1000" b="0">
+                <a:solidFill>
+                  <a:srgbClr val="000000"/>
+                </a:solidFill>
+                <a:latin typeface="맑은 고딕"/>
+                <a:ea typeface="맑은 고딕"/>
+              </a:rPr>
+              <a:t>, </a:t>
+            </a:r>
+            <a:r>
+              <a:rPr sz="1000" b="0">
+                <a:solidFill>
+                  <a:srgbClr val="000000"/>
+                </a:solidFill>
+                <a:latin typeface="맑은 고딕"/>
+                <a:ea typeface="맑은 고딕"/>
+              </a:rPr>
+              <a:t>"Humans steer. Agents execute."</a:t>
+            </a:r>
+            <a:r>
+              <a:rPr sz="1000" b="0">
+                <a:solidFill>
+                  <a:srgbClr val="000000"/>
+                </a:solidFill>
+                <a:latin typeface="맑은 고딕"/>
+                <a:ea typeface="맑은 고딕"/>
+              </a:rPr>
+              <a:t>, </a:t>
+            </a:r>
+            <a:r>
+              <a:rPr sz="1000" b="0">
+                <a:solidFill>
+                  <a:srgbClr val="000000"/>
+                </a:solidFill>
+                <a:latin typeface="맑은 고딕"/>
+                <a:ea typeface="맑은 고딕"/>
+              </a:rPr>
+              <a:t>[Lopopolo 2026]</a:t>
+            </a:r>
+          </a:p>
+          <a:p>
+            <a:pPr lvl="2" marL="723900" indent="-368300">
+              <a:spcBef>
+                <a:spcPts val="600"/>
+              </a:spcBef>
+              <a:spcAft>
+                <a:spcPts val="600"/>
+              </a:spcAft>
+              <a:buSzPct val="90000"/>
+              <a:buFont typeface="Wingdings" pitchFamily="2" charset="2"/>
+              <a:buChar char=""/>
+            </a:pPr>
+            <a:r>
+              <a:rPr sz="1800" b="0">
+                <a:solidFill>
+                  <a:srgbClr val="000000"/>
+                </a:solidFill>
+                <a:latin typeface="맑은 고딕"/>
+                <a:ea typeface="맑은 고딕"/>
+              </a:rPr>
+              <a:t>"사람은 늘 루프 안에 있지만 </a:t>
+            </a:r>
+            <a:r>
+              <a:rPr sz="1800" b="1">
+                <a:solidFill>
+                  <a:srgbClr val="000000"/>
+                </a:solidFill>
+                <a:latin typeface="맑은 고딕"/>
+                <a:ea typeface="맑은 고딕"/>
+              </a:rPr>
+              <a:t>예전과 다른 추상 수준</a:t>
+            </a:r>
+            <a:r>
+              <a:rPr sz="1800" b="0">
+                <a:solidFill>
+                  <a:srgbClr val="000000"/>
+                </a:solidFill>
+                <a:latin typeface="맑은 고딕"/>
+                <a:ea typeface="맑은 고딕"/>
+              </a:rPr>
+              <a:t>에서 일한다. 일의 우선순위를 정하고, 사용자 피드백을 </a:t>
+            </a:r>
+            <a:r>
+              <a:rPr sz="1800" b="1">
+                <a:solidFill>
+                  <a:srgbClr val="000000"/>
+                </a:solidFill>
+                <a:latin typeface="맑은 고딕"/>
+                <a:ea typeface="맑은 고딕"/>
+              </a:rPr>
+              <a:t>수용 기준</a:t>
+            </a:r>
+            <a:r>
+              <a:rPr sz="1800" b="0">
+                <a:solidFill>
+                  <a:srgbClr val="000000"/>
+                </a:solidFill>
+                <a:latin typeface="맑은 고딕"/>
+                <a:ea typeface="맑은 고딕"/>
+              </a:rPr>
+              <a:t>으로 옮기고, </a:t>
+            </a:r>
+            <a:r>
+              <a:rPr sz="1800" b="1">
+                <a:solidFill>
+                  <a:srgbClr val="000000"/>
+                </a:solidFill>
+                <a:latin typeface="맑은 고딕"/>
+                <a:ea typeface="맑은 고딕"/>
+              </a:rPr>
+              <a:t>결과를 확인</a:t>
+            </a:r>
+            <a:r>
+              <a:rPr sz="1800" b="0">
+                <a:solidFill>
+                  <a:srgbClr val="000000"/>
+                </a:solidFill>
+                <a:latin typeface="맑은 고딕"/>
+                <a:ea typeface="맑은 고딕"/>
+              </a:rPr>
+              <a:t>한다"</a:t>
+            </a:r>
+            <a:r>
+              <a:rPr sz="1000" b="0">
+                <a:solidFill>
+                  <a:srgbClr val="000000"/>
+                </a:solidFill>
+                <a:latin typeface="맑은 고딕"/>
+                <a:ea typeface="맑은 고딕"/>
+              </a:rPr>
+              <a:t>, </a:t>
+            </a:r>
+            <a:r>
+              <a:rPr sz="1000" b="0">
+                <a:solidFill>
+                  <a:srgbClr val="000000"/>
+                </a:solidFill>
+                <a:latin typeface="맑은 고딕"/>
+                <a:ea typeface="맑은 고딕"/>
+              </a:rPr>
+              <a:t>"Humans always remain in the loop, but work at a different layer of abstraction than we used to. We prioritize work, translate user feedback into acceptance criteria, and validate outcomes."</a:t>
+            </a:r>
+            <a:r>
+              <a:rPr sz="1000" b="0">
+                <a:solidFill>
+                  <a:srgbClr val="000000"/>
+                </a:solidFill>
+                <a:latin typeface="맑은 고딕"/>
+                <a:ea typeface="맑은 고딕"/>
+              </a:rPr>
+              <a:t>, </a:t>
+            </a:r>
+            <a:r>
+              <a:rPr sz="1000" b="0">
+                <a:solidFill>
+                  <a:srgbClr val="000000"/>
+                </a:solidFill>
+                <a:latin typeface="맑은 고딕"/>
+                <a:ea typeface="맑은 고딕"/>
+              </a:rPr>
+              <a:t>[Lopopolo 2026]</a:t>
+            </a:r>
+          </a:p>
+          <a:p>
+            <a:pPr lvl="2" marL="723900" indent="-368300">
+              <a:spcBef>
+                <a:spcPts val="600"/>
+              </a:spcBef>
+              <a:spcAft>
+                <a:spcPts val="600"/>
+              </a:spcAft>
+              <a:buSzPct val="90000"/>
+              <a:buFont typeface="Wingdings" pitchFamily="2" charset="2"/>
+              <a:buChar char=""/>
+            </a:pPr>
+            <a:r>
+              <a:rPr sz="1800" b="1">
+                <a:solidFill>
+                  <a:srgbClr val="000000"/>
+                </a:solidFill>
+                <a:latin typeface="맑은 고딕"/>
+                <a:ea typeface="맑은 고딕"/>
+              </a:rPr>
+              <a:t>우선순위</a:t>
+            </a:r>
+            <a:r>
+              <a:rPr sz="1800" b="0">
+                <a:solidFill>
+                  <a:srgbClr val="000000"/>
+                </a:solidFill>
+                <a:latin typeface="맑은 고딕"/>
+                <a:ea typeface="맑은 고딕"/>
+              </a:rPr>
+              <a:t> —</a:t>
+            </a:r>
+            <a:r>
+              <a:rPr sz="1600" b="0">
+                <a:solidFill>
+                  <a:srgbClr val="000000"/>
+                </a:solidFill>
+                <a:latin typeface="맑은 고딕"/>
+                <a:ea typeface="맑은 고딕"/>
+              </a:rPr>
+              <a:t> 첫 릴리스에 "주문한다"를 먼저 맡기기로 정한다.</a:t>
+            </a:r>
+          </a:p>
+          <a:p>
+            <a:pPr lvl="2" marL="723900" indent="-368300">
+              <a:spcBef>
+                <a:spcPts val="600"/>
+              </a:spcBef>
+              <a:spcAft>
+                <a:spcPts val="600"/>
+              </a:spcAft>
+              <a:buSzPct val="90000"/>
+              <a:buFont typeface="Wingdings" pitchFamily="2" charset="2"/>
+              <a:buChar char=""/>
+            </a:pPr>
+            <a:r>
+              <a:rPr sz="1800" b="1">
+                <a:solidFill>
+                  <a:srgbClr val="000000"/>
+                </a:solidFill>
+                <a:latin typeface="맑은 고딕"/>
+                <a:ea typeface="맑은 고딕"/>
+              </a:rPr>
+              <a:t>수용 기준</a:t>
+            </a:r>
+            <a:r>
+              <a:rPr sz="1800" b="0">
+                <a:solidFill>
+                  <a:srgbClr val="000000"/>
+                </a:solidFill>
+                <a:latin typeface="맑은 고딕"/>
+                <a:ea typeface="맑은 고딕"/>
+              </a:rPr>
+              <a:t> —</a:t>
+            </a:r>
+            <a:r>
+              <a:rPr sz="1600" b="0">
+                <a:solidFill>
+                  <a:srgbClr val="000000"/>
+                </a:solidFill>
+                <a:latin typeface="맑은 고딕"/>
+                <a:ea typeface="맑은 고딕"/>
+              </a:rPr>
+              <a:t> 업무 규칙 3가지을 허용·거절 예시로 옮긴다.</a:t>
+            </a:r>
+          </a:p>
+          <a:p>
+            <a:pPr lvl="2" marL="723900" indent="-368300">
+              <a:spcBef>
+                <a:spcPts val="600"/>
+              </a:spcBef>
+              <a:spcAft>
+                <a:spcPts val="600"/>
+              </a:spcAft>
+              <a:buSzPct val="90000"/>
+              <a:buFont typeface="Wingdings" pitchFamily="2" charset="2"/>
+              <a:buChar char=""/>
+            </a:pPr>
+            <a:r>
+              <a:rPr sz="1800" b="1">
+                <a:solidFill>
+                  <a:srgbClr val="000000"/>
+                </a:solidFill>
+                <a:latin typeface="맑은 고딕"/>
+                <a:ea typeface="맑은 고딕"/>
+              </a:rPr>
+              <a:t>결과 확인</a:t>
+            </a:r>
+            <a:r>
+              <a:rPr sz="1800" b="0">
+                <a:solidFill>
+                  <a:srgbClr val="000000"/>
+                </a:solidFill>
+                <a:latin typeface="맑은 고딕"/>
+                <a:ea typeface="맑은 고딕"/>
+              </a:rPr>
+              <a:t> —</a:t>
+            </a:r>
+            <a:r>
+              <a:rPr sz="1600" b="0">
+                <a:solidFill>
+                  <a:srgbClr val="000000"/>
+                </a:solidFill>
+                <a:latin typeface="맑은 고딕"/>
+                <a:ea typeface="맑은 고딕"/>
+              </a:rPr>
+              <a:t> 데모가 아니라 업무 규칙의 테스트로 받아들인다.</a:t>
+            </a:r>
+          </a:p>
+        </p:txBody>
+      </p:sp>
+    </p:spTree>
+    <p:extLst>
+      <p:ext uri="{BB962C8B-B14F-4D97-AF65-F5344CB8AC3E}">
+        <p14:creationId xmlns:p14="http://schemas.microsoft.com/office/powerpoint/2010/main" val="3555436673"/>
+      </p:ext>
+    </p:extLst>
+  </p:cSld>
+  <p:clrMapOvr>
+    <a:masterClrMapping/>
+  </p:clrMapOvr>
+</p:sld>
+</file>
+
+<file path=ppt/slides/slide23.xml><?xml version="1.0" encoding="utf-8"?>
 <p:sld xmlns:a="http://schemas.openxmlformats.org/drawingml/2006/main" xmlns:r="http://schemas.openxmlformats.org/officeDocument/2006/relationships" xmlns:p="http://schemas.openxmlformats.org/presentationml/2006/main">
   <p:cSld>
     <p:spTree>
@@ -15041,7 +15282,7 @@
                 <a:ea typeface="맑은 고딕" panose="020B0503020000020004" pitchFamily="34" charset="-127"/>
                 <a:cs typeface="+mn-cs"/>
               </a:rPr>
-              <a:t>- 22 -</a:t>
+              <a:t>- 23 -</a:t>
             </a:r>
           </a:p>
         </p:txBody>
@@ -15180,7 +15421,7 @@
 </p:sld>
 </file>
 
-<file path=ppt/slides/slide23.xml><?xml version="1.0" encoding="utf-8"?>
+<file path=ppt/slides/slide24.xml><?xml version="1.0" encoding="utf-8"?>
 <p:sld xmlns:a="http://schemas.openxmlformats.org/drawingml/2006/main" xmlns:r="http://schemas.openxmlformats.org/officeDocument/2006/relationships" xmlns:p="http://schemas.openxmlformats.org/presentationml/2006/main">
   <p:cSld>
     <p:spTree>
@@ -15279,7 +15520,7 @@
                   <a:prstClr val="black"/>
                 </a:solidFill>
               </a:rPr>
-              <a:t>- 23 -</a:t>
+              <a:t>- 24 -</a:t>
             </a:r>
           </a:p>
         </p:txBody>
@@ -15659,8 +15900,8 @@
         </p:blipFill>
         <p:spPr>
           <a:xfrm>
-            <a:off x="1460500" y="3886754"/>
-            <a:ext cx="6223000" cy="960437"/>
+            <a:off x="1620155" y="3886754"/>
+            <a:ext cx="5903689" cy="911156"/>
           </a:xfrm>
           <a:prstGeom prst="rect">
             <a:avLst/>
@@ -15680,7 +15921,7 @@
 </p:sld>
 </file>
 
-<file path=ppt/slides/slide24.xml><?xml version="1.0" encoding="utf-8"?>
+<file path=ppt/slides/slide25.xml><?xml version="1.0" encoding="utf-8"?>
 <p:sld xmlns:a="http://schemas.openxmlformats.org/drawingml/2006/main" xmlns:r="http://schemas.openxmlformats.org/officeDocument/2006/relationships" xmlns:p="http://schemas.openxmlformats.org/presentationml/2006/main">
   <p:cSld>
     <p:spTree>
@@ -17601,7 +17842,7 @@
                 <a:ea typeface="맑은 고딕" panose="020B0503020000020004" pitchFamily="34" charset="-127"/>
                 <a:cs typeface="+mn-cs"/>
               </a:rPr>
-              <a:t>- 24 -</a:t>
+              <a:t>- 25 -</a:t>
             </a:r>
           </a:p>
         </p:txBody>
@@ -17659,921 +17900,6 @@
     <p:extLst>
       <p:ext uri="{BB962C8B-B14F-4D97-AF65-F5344CB8AC3E}">
         <p14:creationId xmlns:p14="http://schemas.microsoft.com/office/powerpoint/2010/main" val="2789569477"/>
-      </p:ext>
-    </p:extLst>
-  </p:cSld>
-  <p:clrMapOvr>
-    <a:masterClrMapping/>
-  </p:clrMapOvr>
-</p:sld>
-</file>
-
-<file path=ppt/slides/slide25.xml><?xml version="1.0" encoding="utf-8"?>
-<p:sld xmlns:a="http://schemas.openxmlformats.org/drawingml/2006/main" xmlns:r="http://schemas.openxmlformats.org/officeDocument/2006/relationships" xmlns:p="http://schemas.openxmlformats.org/presentationml/2006/main">
-  <p:cSld>
-    <p:spTree>
-      <p:nvGrpSpPr>
-        <p:cNvPr id="1" name="">
-          <a:extLst>
-            <a:ext uri="{FF2B5EF4-FFF2-40B4-BE49-F238E27FC236}">
-              <a16:creationId xmlns:a16="http://schemas.microsoft.com/office/drawing/2014/main" id="{8E4F1F13-426B-086B-7D8C-9A58A0F879DB}"/>
-            </a:ext>
-          </a:extLst>
-        </p:cNvPr>
-        <p:cNvGrpSpPr/>
-        <p:nvPr/>
-      </p:nvGrpSpPr>
-      <p:grpSpPr>
-        <a:xfrm>
-          <a:off x="0" y="0"/>
-          <a:ext cx="0" cy="0"/>
-          <a:chOff x="0" y="0"/>
-          <a:chExt cx="0" cy="0"/>
-        </a:xfrm>
-      </p:grpSpPr>
-      <p:sp>
-        <p:nvSpPr>
-          <p:cNvPr id="2" name="제목 1">
-            <a:extLst>
-              <a:ext uri="{FF2B5EF4-FFF2-40B4-BE49-F238E27FC236}">
-                <a16:creationId xmlns:a16="http://schemas.microsoft.com/office/drawing/2014/main" id="{AA26A92D-924E-0575-9551-F8FD7BFD3FAD}"/>
-              </a:ext>
-            </a:extLst>
-          </p:cNvPr>
-          <p:cNvSpPr>
-            <a:spLocks noGrp="1"/>
-          </p:cNvSpPr>
-          <p:nvPr>
-            <p:ph type="title"/>
-          </p:nvPr>
-        </p:nvSpPr>
-        <p:spPr/>
-        <p:txBody>
-          <a:bodyPr/>
-          <a:lstStyle/>
-          <a:p>
-            <a:r>
-              <a:rPr sz="2400" b="1">
-                <a:solidFill>
-                  <a:srgbClr val="000000"/>
-                </a:solidFill>
-                <a:latin typeface="맑은 고딕"/>
-                <a:ea typeface="맑은 고딕"/>
-              </a:rPr>
-              <a:t>08. 실습 — 추측 찾기</a:t>
-            </a:r>
-          </a:p>
-        </p:txBody>
-      </p:sp>
-      <p:sp>
-        <p:nvSpPr>
-          <p:cNvPr id="3" name="슬라이드 번호 개체 틀 2">
-            <a:extLst>
-              <a:ext uri="{FF2B5EF4-FFF2-40B4-BE49-F238E27FC236}">
-                <a16:creationId xmlns:a16="http://schemas.microsoft.com/office/drawing/2014/main" id="{12CF30EE-4DFD-8063-56B8-B8689E76DFCA}"/>
-              </a:ext>
-            </a:extLst>
-          </p:cNvPr>
-          <p:cNvSpPr>
-            <a:spLocks noGrp="1"/>
-          </p:cNvSpPr>
-          <p:nvPr>
-            <p:ph type="sldNum" sz="quarter" idx="10"/>
-          </p:nvPr>
-        </p:nvSpPr>
-        <p:spPr/>
-        <p:txBody>
-          <a:bodyPr/>
-          <a:lstStyle/>
-          <a:p>
-            <a:pPr>
-              <a:defRPr/>
-            </a:pPr>
-            <a:r>
-              <a:rPr lang="en-US" altLang="ko-KR">
-                <a:solidFill>
-                  <a:prstClr val="black"/>
-                </a:solidFill>
-              </a:rPr>
-              <a:t>- 25 -</a:t>
-            </a:r>
-          </a:p>
-        </p:txBody>
-      </p:sp>
-      <p:sp>
-        <p:nvSpPr>
-          <p:cNvPr id="5" name="텍스트 개체 틀 4">
-            <a:extLst>
-              <a:ext uri="{FF2B5EF4-FFF2-40B4-BE49-F238E27FC236}">
-                <a16:creationId xmlns:a16="http://schemas.microsoft.com/office/drawing/2014/main" id="{D66274C8-E16F-5AEB-614B-D8D32DA3E8C6}"/>
-              </a:ext>
-            </a:extLst>
-          </p:cNvPr>
-          <p:cNvSpPr>
-            <a:spLocks noGrp="1"/>
-          </p:cNvSpPr>
-          <p:nvPr>
-            <p:ph type="body" sz="quarter" idx="11"/>
-          </p:nvPr>
-        </p:nvSpPr>
-        <p:spPr/>
-        <p:txBody>
-          <a:bodyPr/>
-          <a:lstStyle/>
-          <a:p>
-            <a:r>
-              <a:rPr kumimoji="1" lang="en-US" altLang="ko-KR" sz="1400" dirty="0" err="1"/>
-              <a:t>01. AI 협업의 특성과 사람의 판단 책임</a:t>
-            </a:r>
-          </a:p>
-        </p:txBody>
-      </p:sp>
-      <p:sp>
-        <p:nvSpPr>
-          <p:cNvPr id="6" name="텍스트 개체 틀 5">
-            <a:extLst>
-              <a:ext uri="{FF2B5EF4-FFF2-40B4-BE49-F238E27FC236}">
-                <a16:creationId xmlns:a16="http://schemas.microsoft.com/office/drawing/2014/main" id="{A24E58E1-194B-A320-AEEE-24D08685BB67}"/>
-              </a:ext>
-            </a:extLst>
-          </p:cNvPr>
-          <p:cNvSpPr>
-            <a:spLocks noGrp="1"/>
-          </p:cNvSpPr>
-          <p:nvPr>
-            <p:ph type="body" sz="quarter" idx="12"/>
-          </p:nvPr>
-        </p:nvSpPr>
-        <p:spPr/>
-        <p:txBody>
-          <a:bodyPr/>
-          <a:lstStyle/>
-          <a:p>
-            <a:endParaRPr kumimoji="1" lang="ko-KR" altLang="en-US" dirty="0"/>
-          </a:p>
-        </p:txBody>
-      </p:sp>
-      <p:sp>
-        <p:nvSpPr>
-          <p:cNvPr id="7" name="텍스트 개체 틀 6">
-            <a:extLst>
-              <a:ext uri="{FF2B5EF4-FFF2-40B4-BE49-F238E27FC236}">
-                <a16:creationId xmlns:a16="http://schemas.microsoft.com/office/drawing/2014/main" id="{A219F420-613B-6234-45F6-0955A9A4505F}"/>
-              </a:ext>
-            </a:extLst>
-          </p:cNvPr>
-          <p:cNvSpPr>
-            <a:spLocks noGrp="1"/>
-          </p:cNvSpPr>
-          <p:nvPr>
-            <p:ph type="body" sz="quarter" idx="13"/>
-          </p:nvPr>
-        </p:nvSpPr>
-        <p:spPr/>
-        <p:txBody>
-          <a:bodyPr/>
-          <a:lstStyle/>
-          <a:p>
-            <a:endParaRPr kumimoji="1" lang="en-US" altLang="ko-KR" dirty="0"/>
-          </a:p>
-        </p:txBody>
-      </p:sp>
-      <p:sp>
-        <p:nvSpPr>
-          <p:cNvPr id="8" name="내용 개체 틀 7">
-            <a:extLst>
-              <a:ext uri="{FF2B5EF4-FFF2-40B4-BE49-F238E27FC236}">
-                <a16:creationId xmlns:a16="http://schemas.microsoft.com/office/drawing/2014/main" id="{BEBA2C4A-B0BF-F2E4-EA6E-614C99CBA184}"/>
-              </a:ext>
-            </a:extLst>
-          </p:cNvPr>
-          <p:cNvSpPr>
-            <a:spLocks noGrp="1"/>
-          </p:cNvSpPr>
-          <p:nvPr>
-            <p:ph idx="1"/>
-          </p:nvPr>
-        </p:nvSpPr>
-        <p:spPr>
-          <a:xfrm>
-            <a:off x="365760" y="960120"/>
-            <a:ext cx="8412480" cy="5257800"/>
-          </a:xfrm>
-        </p:spPr>
-        <p:txBody>
-          <a:bodyPr>
-            <a:normAutofit/>
-          </a:bodyPr>
-          <a:lstStyle/>
-          <a:p>
-            <a:pPr marL="0" indent="0">
-              <a:spcBef>
-                <a:spcPts val="300"/>
-              </a:spcBef>
-              <a:spcAft>
-                <a:spcPts val="300"/>
-              </a:spcAft>
-              <a:buNone/>
-            </a:pPr>
-            <a:r>
-              <a:rPr sz="1600" b="0">
-                <a:solidFill>
-                  <a:srgbClr val="000000"/>
-                </a:solidFill>
-                <a:latin typeface="맑은 고딕"/>
-                <a:ea typeface="맑은 고딕"/>
-              </a:rPr>
-              <a:t>정기배송의 </a:t>
-            </a:r>
-            <a:r>
-              <a:rPr sz="1600" b="1">
-                <a:solidFill>
-                  <a:srgbClr val="000000"/>
-                </a:solidFill>
-                <a:latin typeface="맑은 고딕"/>
-                <a:ea typeface="맑은 고딕"/>
-              </a:rPr>
-              <a:t>모델 패키지</a:t>
-            </a:r>
-            <a:r>
-              <a:rPr sz="1600" b="0">
-                <a:solidFill>
-                  <a:srgbClr val="000000"/>
-                </a:solidFill>
-                <a:latin typeface="맑은 고딕"/>
-                <a:ea typeface="맑은 고딕"/>
-              </a:rPr>
-              <a:t>를 LLM에 제공하여 </a:t>
-            </a:r>
-            <a:r>
-              <a:rPr sz="1600" b="1">
-                <a:solidFill>
-                  <a:srgbClr val="000000"/>
-                </a:solidFill>
-                <a:latin typeface="맑은 고딕"/>
-                <a:ea typeface="맑은 고딕"/>
-              </a:rPr>
-              <a:t>정기배송을 "신청한다"</a:t>
-            </a:r>
-            <a:r>
-              <a:rPr sz="1600" b="0">
-                <a:solidFill>
-                  <a:srgbClr val="000000"/>
-                </a:solidFill>
-                <a:latin typeface="맑은 고딕"/>
-                <a:ea typeface="맑은 고딕"/>
-              </a:rPr>
-              <a:t>를 개발하게 하고, 점검 항목으로 초안이 </a:t>
-            </a:r>
-            <a:r>
-              <a:rPr sz="1600" b="1">
-                <a:solidFill>
-                  <a:srgbClr val="000000"/>
-                </a:solidFill>
-                <a:latin typeface="맑은 고딕"/>
-                <a:ea typeface="맑은 고딕"/>
-              </a:rPr>
-              <a:t>추측한 것</a:t>
-            </a:r>
-            <a:r>
-              <a:rPr sz="1600" b="0">
-                <a:solidFill>
-                  <a:srgbClr val="000000"/>
-                </a:solidFill>
-                <a:latin typeface="맑은 고딕"/>
-                <a:ea typeface="맑은 고딕"/>
-              </a:rPr>
-              <a:t>을 찾아 </a:t>
-            </a:r>
-            <a:r>
-              <a:rPr sz="1600" b="1">
-                <a:solidFill>
-                  <a:srgbClr val="000000"/>
-                </a:solidFill>
-                <a:latin typeface="맑은 고딕"/>
-                <a:ea typeface="맑은 고딕"/>
-              </a:rPr>
-              <a:t>사람이 정할 결정</a:t>
-            </a:r>
-            <a:r>
-              <a:rPr sz="1600" b="0">
-                <a:solidFill>
-                  <a:srgbClr val="000000"/>
-                </a:solidFill>
-                <a:latin typeface="맑은 고딕"/>
-                <a:ea typeface="맑은 고딕"/>
-              </a:rPr>
-              <a:t>으로 정리하십시오.</a:t>
-            </a:r>
-          </a:p>
-          <a:p>
-            <a:pPr lvl="2" marL="723900" indent="-368300">
-              <a:spcBef>
-                <a:spcPts val="300"/>
-              </a:spcBef>
-              <a:spcAft>
-                <a:spcPts val="300"/>
-              </a:spcAft>
-              <a:buSzPct val="90000"/>
-              <a:buFont typeface="Wingdings" pitchFamily="2" charset="2"/>
-              <a:buChar char=""/>
-            </a:pPr>
-            <a:r>
-              <a:rPr sz="1600" b="1">
-                <a:solidFill>
-                  <a:srgbClr val="000000"/>
-                </a:solidFill>
-                <a:latin typeface="맑은 고딕"/>
-                <a:ea typeface="맑은 고딕"/>
-              </a:rPr>
-              <a:t>서비스 개요</a:t>
-            </a:r>
-          </a:p>
-          <a:p>
-            <a:pPr lvl="3" marL="723900" indent="0">
-              <a:spcBef>
-                <a:spcPts val="300"/>
-              </a:spcBef>
-              <a:spcAft>
-                <a:spcPts val="300"/>
-              </a:spcAft>
-              <a:buNone/>
-            </a:pPr>
-            <a:r>
-              <a:rPr sz="1400" b="0">
-                <a:solidFill>
-                  <a:srgbClr val="000000"/>
-                </a:solidFill>
-                <a:latin typeface="맑은 고딕"/>
-                <a:ea typeface="맑은 고딕"/>
-              </a:rPr>
-              <a:t>생필품을 고객이 정한 주기로 배송하는 정기배송 시스템을 </a:t>
-            </a:r>
-            <a:r>
-              <a:rPr sz="1400" b="1">
-                <a:solidFill>
-                  <a:srgbClr val="000000"/>
-                </a:solidFill>
-                <a:latin typeface="맑은 고딕"/>
-                <a:ea typeface="맑은 고딕"/>
-              </a:rPr>
-              <a:t>빈 저장소</a:t>
-            </a:r>
-            <a:r>
-              <a:rPr sz="1400" b="0">
-                <a:solidFill>
-                  <a:srgbClr val="000000"/>
-                </a:solidFill>
-                <a:latin typeface="맑은 고딕"/>
-                <a:ea typeface="맑은 고딕"/>
-              </a:rPr>
-              <a:t>에서 개발한다. 고객은 상품·수량·배송 주기·첫 배송일·기간·배송지를 정해 신청하고 일시불로 결제한다. 상품·결제·배송은 외부 시스템이 맡는다.</a:t>
-            </a:r>
-          </a:p>
-          <a:p>
-            <a:pPr lvl="3" marL="723900" indent="0">
-              <a:spcBef>
-                <a:spcPts val="300"/>
-              </a:spcBef>
-              <a:spcAft>
-                <a:spcPts val="300"/>
-              </a:spcAft>
-              <a:buNone/>
-            </a:pPr>
-            <a:r>
-              <a:rPr sz="1400" b="1">
-                <a:solidFill>
-                  <a:srgbClr val="000000"/>
-                </a:solidFill>
-                <a:latin typeface="맑은 고딕"/>
-                <a:ea typeface="맑은 고딕"/>
-              </a:rPr>
-              <a:t>모델 패키지</a:t>
-            </a:r>
-            <a:r>
-              <a:rPr sz="1400" b="0">
-                <a:solidFill>
-                  <a:srgbClr val="000000"/>
-                </a:solidFill>
-                <a:latin typeface="맑은 고딕"/>
-                <a:ea typeface="맑은 고딕"/>
-              </a:rPr>
-              <a:t> —</a:t>
-            </a:r>
-            <a:r>
-              <a:rPr sz="1200" b="0">
-                <a:solidFill>
-                  <a:srgbClr val="000000"/>
-                </a:solidFill>
-                <a:latin typeface="맑은 고딕"/>
-                <a:ea typeface="맑은 고딕"/>
-              </a:rPr>
-              <a:t> 요구사항 정의서·용어집·유스케이스·도메인 모델·상태 기계</a:t>
-            </a:r>
-          </a:p>
-          <a:p>
-            <a:pPr lvl="2" marL="723900" indent="-368300">
-              <a:spcBef>
-                <a:spcPts val="300"/>
-              </a:spcBef>
-              <a:spcAft>
-                <a:spcPts val="300"/>
-              </a:spcAft>
-              <a:buSzPct val="90000"/>
-              <a:buFont typeface="Wingdings" pitchFamily="2" charset="2"/>
-              <a:buChar char=""/>
-            </a:pPr>
-            <a:r>
-              <a:rPr sz="1600" b="1">
-                <a:solidFill>
-                  <a:srgbClr val="000000"/>
-                </a:solidFill>
-                <a:latin typeface="맑은 고딕"/>
-                <a:ea typeface="맑은 고딕"/>
-              </a:rPr>
-              <a:t>프롬프트</a:t>
-            </a:r>
-          </a:p>
-          <a:p>
-            <a:pPr lvl="3" marL="723900" indent="0">
-              <a:spcBef>
-                <a:spcPts val="300"/>
-              </a:spcBef>
-              <a:spcAft>
-                <a:spcPts val="300"/>
-              </a:spcAft>
-              <a:buNone/>
-            </a:pPr>
-            <a:r>
-              <a:rPr sz="1400" b="0">
-                <a:solidFill>
-                  <a:srgbClr val="000000"/>
-                </a:solidFill>
-                <a:latin typeface="맑은 고딕"/>
-                <a:ea typeface="맑은 고딕"/>
-              </a:rPr>
-              <a:t>① "이 모델 패키지로 </a:t>
-            </a:r>
-            <a:r>
-              <a:rPr sz="1400" b="1">
-                <a:solidFill>
-                  <a:srgbClr val="000000"/>
-                </a:solidFill>
-                <a:latin typeface="맑은 고딕"/>
-                <a:ea typeface="맑은 고딕"/>
-              </a:rPr>
-              <a:t>정기배송을 신청한다</a:t>
-            </a:r>
-            <a:r>
-              <a:rPr sz="1400" b="0">
-                <a:solidFill>
-                  <a:srgbClr val="000000"/>
-                </a:solidFill>
-                <a:latin typeface="맑은 고딕"/>
-                <a:ea typeface="맑은 고딕"/>
-              </a:rPr>
-              <a:t>를 설계하고, 자바 코드와 테스트를 만들어줘."</a:t>
-            </a:r>
-          </a:p>
-          <a:p>
-            <a:pPr lvl="3" marL="723900" indent="0">
-              <a:spcBef>
-                <a:spcPts val="300"/>
-              </a:spcBef>
-              <a:spcAft>
-                <a:spcPts val="300"/>
-              </a:spcAft>
-              <a:buNone/>
-            </a:pPr>
-            <a:r>
-              <a:rPr sz="1400" b="0">
-                <a:solidFill>
-                  <a:srgbClr val="000000"/>
-                </a:solidFill>
-                <a:latin typeface="맑은 고딕"/>
-                <a:ea typeface="맑은 고딕"/>
-              </a:rPr>
-              <a:t>② "모델에 없어서 네가 스스로 정한 것과 모델과 다르게 만든 것을 </a:t>
-            </a:r>
-            <a:r>
-              <a:rPr sz="1400" b="1">
-                <a:solidFill>
-                  <a:srgbClr val="000000"/>
-                </a:solidFill>
-                <a:latin typeface="맑은 고딕"/>
-                <a:ea typeface="맑은 고딕"/>
-              </a:rPr>
-              <a:t>모두 나열</a:t>
-            </a:r>
-            <a:r>
-              <a:rPr sz="1400" b="0">
-                <a:solidFill>
-                  <a:srgbClr val="000000"/>
-                </a:solidFill>
-                <a:latin typeface="맑은 고딕"/>
-                <a:ea typeface="맑은 고딕"/>
-              </a:rPr>
-              <a:t>해줘."</a:t>
-            </a:r>
-          </a:p>
-          <a:p>
-            <a:pPr lvl="2" marL="723900" indent="-368300">
-              <a:spcBef>
-                <a:spcPts val="300"/>
-              </a:spcBef>
-              <a:spcAft>
-                <a:spcPts val="300"/>
-              </a:spcAft>
-              <a:buSzPct val="90000"/>
-              <a:buFont typeface="Wingdings" pitchFamily="2" charset="2"/>
-              <a:buChar char=""/>
-            </a:pPr>
-            <a:r>
-              <a:rPr sz="1600" b="1">
-                <a:solidFill>
-                  <a:srgbClr val="000000"/>
-                </a:solidFill>
-                <a:latin typeface="맑은 고딕"/>
-                <a:ea typeface="맑은 고딕"/>
-              </a:rPr>
-              <a:t>점검 항목</a:t>
-            </a:r>
-          </a:p>
-          <a:p>
-            <a:pPr lvl="3" marL="947420" indent="-223520">
-              <a:spcBef>
-                <a:spcPts val="300"/>
-              </a:spcBef>
-              <a:spcAft>
-                <a:spcPts val="300"/>
-              </a:spcAft>
-              <a:buNone/>
-            </a:pPr>
-            <a:r>
-              <a:rPr sz="1400" b="0">
-                <a:solidFill>
-                  <a:srgbClr val="000000"/>
-                </a:solidFill>
-                <a:latin typeface="맑은 고딕"/>
-                <a:ea typeface="맑은 고딕"/>
-              </a:rPr>
-              <a:t>1. </a:t>
-            </a:r>
-            <a:r>
-              <a:rPr sz="1400" b="1">
-                <a:solidFill>
-                  <a:srgbClr val="000000"/>
-                </a:solidFill>
-                <a:latin typeface="맑은 고딕"/>
-                <a:ea typeface="맑은 고딕"/>
-              </a:rPr>
-              <a:t>상태</a:t>
-            </a:r>
-            <a:r>
-              <a:rPr sz="1400" b="0">
-                <a:solidFill>
-                  <a:srgbClr val="000000"/>
-                </a:solidFill>
-                <a:latin typeface="맑은 고딕"/>
-                <a:ea typeface="맑은 고딕"/>
-              </a:rPr>
-              <a:t> —</a:t>
-            </a:r>
-            <a:r>
-              <a:rPr sz="1200" b="0">
-                <a:solidFill>
-                  <a:srgbClr val="000000"/>
-                </a:solidFill>
-                <a:latin typeface="맑은 고딕"/>
-                <a:ea typeface="맑은 고딕"/>
-              </a:rPr>
-              <a:t> 모델에 없는 상태나 필드를 더했는가?</a:t>
-            </a:r>
-          </a:p>
-          <a:p>
-            <a:pPr lvl="3" marL="947420" indent="-223520">
-              <a:spcBef>
-                <a:spcPts val="300"/>
-              </a:spcBef>
-              <a:spcAft>
-                <a:spcPts val="300"/>
-              </a:spcAft>
-              <a:buNone/>
-            </a:pPr>
-            <a:r>
-              <a:rPr sz="1400" b="0">
-                <a:solidFill>
-                  <a:srgbClr val="000000"/>
-                </a:solidFill>
-                <a:latin typeface="맑은 고딕"/>
-                <a:ea typeface="맑은 고딕"/>
-              </a:rPr>
-              <a:t>2. </a:t>
-            </a:r>
-            <a:r>
-              <a:rPr sz="1400" b="1">
-                <a:solidFill>
-                  <a:srgbClr val="000000"/>
-                </a:solidFill>
-                <a:latin typeface="맑은 고딕"/>
-                <a:ea typeface="맑은 고딕"/>
-              </a:rPr>
-              <a:t>금액</a:t>
-            </a:r>
-            <a:r>
-              <a:rPr sz="1400" b="0">
-                <a:solidFill>
-                  <a:srgbClr val="000000"/>
-                </a:solidFill>
-                <a:latin typeface="맑은 고딕"/>
-                <a:ea typeface="맑은 고딕"/>
-              </a:rPr>
-              <a:t> —</a:t>
-            </a:r>
-            <a:r>
-              <a:rPr sz="1200" b="0">
-                <a:solidFill>
-                  <a:srgbClr val="000000"/>
-                </a:solidFill>
-                <a:latin typeface="맑은 고딕"/>
-                <a:ea typeface="맑은 고딕"/>
-              </a:rPr>
-              <a:t> 회차 금액을 무엇으로 계산했는가? 신청 때의 가격인가?</a:t>
-            </a:r>
-          </a:p>
-          <a:p>
-            <a:pPr lvl="3" marL="947420" indent="-223520">
-              <a:spcBef>
-                <a:spcPts val="300"/>
-              </a:spcBef>
-              <a:spcAft>
-                <a:spcPts val="300"/>
-              </a:spcAft>
-              <a:buNone/>
-            </a:pPr>
-            <a:r>
-              <a:rPr sz="1400" b="0">
-                <a:solidFill>
-                  <a:srgbClr val="000000"/>
-                </a:solidFill>
-                <a:latin typeface="맑은 고딕"/>
-                <a:ea typeface="맑은 고딕"/>
-              </a:rPr>
-              <a:t>3. </a:t>
-            </a:r>
-            <a:r>
-              <a:rPr sz="1400" b="1">
-                <a:solidFill>
-                  <a:srgbClr val="000000"/>
-                </a:solidFill>
-                <a:latin typeface="맑은 고딕"/>
-                <a:ea typeface="맑은 고딕"/>
-              </a:rPr>
-              <a:t>회차</a:t>
-            </a:r>
-            <a:r>
-              <a:rPr sz="1400" b="0">
-                <a:solidFill>
-                  <a:srgbClr val="000000"/>
-                </a:solidFill>
-                <a:latin typeface="맑은 고딕"/>
-                <a:ea typeface="맑은 고딕"/>
-              </a:rPr>
-              <a:t> —</a:t>
-            </a:r>
-            <a:r>
-              <a:rPr sz="1200" b="0">
-                <a:solidFill>
-                  <a:srgbClr val="000000"/>
-                </a:solidFill>
-                <a:latin typeface="맑은 고딕"/>
-                <a:ea typeface="맑은 고딕"/>
-              </a:rPr>
-              <a:t> 확정할 때 배송 회차를 몇 개, 어느 날짜로 만들었는가? 그 계산 규칙이 모델에 있는가?</a:t>
-            </a:r>
-          </a:p>
-          <a:p>
-            <a:pPr lvl="3" marL="947420" indent="-223520">
-              <a:spcBef>
-                <a:spcPts val="300"/>
-              </a:spcBef>
-              <a:spcAft>
-                <a:spcPts val="300"/>
-              </a:spcAft>
-              <a:buNone/>
-            </a:pPr>
-            <a:r>
-              <a:rPr sz="1400" b="0">
-                <a:solidFill>
-                  <a:srgbClr val="000000"/>
-                </a:solidFill>
-                <a:latin typeface="맑은 고딕"/>
-                <a:ea typeface="맑은 고딕"/>
-              </a:rPr>
-              <a:t>4. </a:t>
-            </a:r>
-            <a:r>
-              <a:rPr sz="1400" b="1">
-                <a:solidFill>
-                  <a:srgbClr val="000000"/>
-                </a:solidFill>
-                <a:latin typeface="맑은 고딕"/>
-                <a:ea typeface="맑은 고딕"/>
-              </a:rPr>
-              <a:t>거절</a:t>
-            </a:r>
-            <a:r>
-              <a:rPr sz="1400" b="0">
-                <a:solidFill>
-                  <a:srgbClr val="000000"/>
-                </a:solidFill>
-                <a:latin typeface="맑은 고딕"/>
-                <a:ea typeface="맑은 고딕"/>
-              </a:rPr>
-              <a:t> —</a:t>
-            </a:r>
-            <a:r>
-              <a:rPr sz="1200" b="0">
-                <a:solidFill>
-                  <a:srgbClr val="000000"/>
-                </a:solidFill>
-                <a:latin typeface="맑은 고딕"/>
-                <a:ea typeface="맑은 고딕"/>
-              </a:rPr>
-              <a:t> 결제가 거절되면 정기배송은 어떤 상태인가?</a:t>
-            </a:r>
-          </a:p>
-          <a:p>
-            <a:pPr lvl="3" marL="947420" indent="-223520">
-              <a:spcBef>
-                <a:spcPts val="300"/>
-              </a:spcBef>
-              <a:spcAft>
-                <a:spcPts val="300"/>
-              </a:spcAft>
-              <a:buNone/>
-            </a:pPr>
-            <a:r>
-              <a:rPr sz="1400" b="0">
-                <a:solidFill>
-                  <a:srgbClr val="000000"/>
-                </a:solidFill>
-                <a:latin typeface="맑은 고딕"/>
-                <a:ea typeface="맑은 고딕"/>
-              </a:rPr>
-              <a:t>5. </a:t>
-            </a:r>
-            <a:r>
-              <a:rPr sz="1400" b="1">
-                <a:solidFill>
-                  <a:srgbClr val="000000"/>
-                </a:solidFill>
-                <a:latin typeface="맑은 고딕"/>
-                <a:ea typeface="맑은 고딕"/>
-              </a:rPr>
-              <a:t>덧붙인 규칙</a:t>
-            </a:r>
-            <a:r>
-              <a:rPr sz="1400" b="0">
-                <a:solidFill>
-                  <a:srgbClr val="000000"/>
-                </a:solidFill>
-                <a:latin typeface="맑은 고딕"/>
-                <a:ea typeface="맑은 고딕"/>
-              </a:rPr>
-              <a:t> —</a:t>
-            </a:r>
-            <a:r>
-              <a:rPr sz="1200" b="0">
-                <a:solidFill>
-                  <a:srgbClr val="000000"/>
-                </a:solidFill>
-                <a:latin typeface="맑은 고딕"/>
-                <a:ea typeface="맑은 고딕"/>
-              </a:rPr>
-              <a:t> 모델에 없는 규칙</a:t>
-            </a:r>
-            <a:r>
-              <a:rPr sz="1000" b="0">
-                <a:solidFill>
-                  <a:srgbClr val="000000"/>
-                </a:solidFill>
-                <a:latin typeface="맑은 고딕"/>
-                <a:ea typeface="맑은 고딕"/>
-              </a:rPr>
-              <a:t>(할인, 최소 수량 등)</a:t>
-            </a:r>
-            <a:r>
-              <a:rPr sz="1200" b="0">
-                <a:solidFill>
-                  <a:srgbClr val="000000"/>
-                </a:solidFill>
-                <a:latin typeface="맑은 고딕"/>
-                <a:ea typeface="맑은 고딕"/>
-              </a:rPr>
-              <a:t>이 들어갔는가?</a:t>
-            </a:r>
-          </a:p>
-          <a:p>
-            <a:pPr lvl="3" marL="947420" indent="-223520">
-              <a:spcBef>
-                <a:spcPts val="300"/>
-              </a:spcBef>
-              <a:spcAft>
-                <a:spcPts val="300"/>
-              </a:spcAft>
-              <a:buNone/>
-            </a:pPr>
-            <a:r>
-              <a:rPr sz="1400" b="0">
-                <a:solidFill>
-                  <a:srgbClr val="000000"/>
-                </a:solidFill>
-                <a:latin typeface="맑은 고딕"/>
-                <a:ea typeface="맑은 고딕"/>
-              </a:rPr>
-              <a:t>6. </a:t>
-            </a:r>
-            <a:r>
-              <a:rPr sz="1400" b="1">
-                <a:solidFill>
-                  <a:srgbClr val="000000"/>
-                </a:solidFill>
-                <a:latin typeface="맑은 고딕"/>
-                <a:ea typeface="맑은 고딕"/>
-              </a:rPr>
-              <a:t>테스트</a:t>
-            </a:r>
-            <a:r>
-              <a:rPr sz="1400" b="0">
-                <a:solidFill>
-                  <a:srgbClr val="000000"/>
-                </a:solidFill>
-                <a:latin typeface="맑은 고딕"/>
-                <a:ea typeface="맑은 고딕"/>
-              </a:rPr>
-              <a:t> —</a:t>
-            </a:r>
-            <a:r>
-              <a:rPr sz="1200" b="0">
-                <a:solidFill>
-                  <a:srgbClr val="000000"/>
-                </a:solidFill>
-                <a:latin typeface="맑은 고딕"/>
-                <a:ea typeface="맑은 고딕"/>
-              </a:rPr>
-              <a:t> 승인된 경우뿐 아니라 거절된 경우의 테스트가 있는가?</a:t>
-            </a:r>
-          </a:p>
-          <a:p>
-            <a:pPr lvl="2" marL="723900" indent="-368300">
-              <a:spcBef>
-                <a:spcPts val="300"/>
-              </a:spcBef>
-              <a:spcAft>
-                <a:spcPts val="300"/>
-              </a:spcAft>
-              <a:buSzPct val="90000"/>
-              <a:buFont typeface="Wingdings" pitchFamily="2" charset="2"/>
-              <a:buChar char=""/>
-            </a:pPr>
-            <a:r>
-              <a:rPr sz="1600" b="1">
-                <a:solidFill>
-                  <a:srgbClr val="000000"/>
-                </a:solidFill>
-                <a:latin typeface="맑은 고딕"/>
-                <a:ea typeface="맑은 고딕"/>
-              </a:rPr>
-              <a:t>결과물</a:t>
-            </a:r>
-            <a:r>
-              <a:rPr sz="1600" b="0">
-                <a:solidFill>
-                  <a:srgbClr val="000000"/>
-                </a:solidFill>
-                <a:latin typeface="맑은 고딕"/>
-                <a:ea typeface="맑은 고딕"/>
-              </a:rPr>
-              <a:t> —</a:t>
-            </a:r>
-            <a:r>
-              <a:rPr sz="1400" b="0">
-                <a:solidFill>
-                  <a:srgbClr val="000000"/>
-                </a:solidFill>
-                <a:latin typeface="맑은 고딕"/>
-                <a:ea typeface="맑은 고딕"/>
-              </a:rPr>
-              <a:t> 추측 목록과 사람이 정할 결정. 실습 2의 입력이 됩니다.</a:t>
-            </a:r>
-          </a:p>
-        </p:txBody>
-      </p:sp>
-    </p:spTree>
-    <p:extLst>
-      <p:ext uri="{BB962C8B-B14F-4D97-AF65-F5344CB8AC3E}">
-        <p14:creationId xmlns:p14="http://schemas.microsoft.com/office/powerpoint/2010/main" val="3555436673"/>
       </p:ext>
     </p:extLst>
   </p:cSld>
@@ -18635,7 +17961,7 @@
                 <a:latin typeface="맑은 고딕"/>
                 <a:ea typeface="맑은 고딕"/>
               </a:rPr>
-              <a:t>09. 요약</a:t>
+              <a:t>08. 실습 — 추측 찾기</a:t>
             </a:r>
           </a:p>
         </p:txBody>
@@ -18769,7 +18095,12 @@
             <p:ph idx="1"/>
           </p:nvPr>
         </p:nvSpPr>
-        <p:spPr/>
+        <p:spPr>
+          <a:xfrm>
+            <a:off x="365760" y="960120"/>
+            <a:ext cx="8412480" cy="5257800"/>
+          </a:xfrm>
+        </p:spPr>
         <p:txBody>
           <a:bodyPr>
             <a:normAutofit/>
@@ -18778,89 +18109,190 @@
           <a:p>
             <a:pPr marL="0" indent="0">
               <a:spcBef>
-                <a:spcPts val="600"/>
+                <a:spcPts val="300"/>
               </a:spcBef>
               <a:spcAft>
-                <a:spcPts val="600"/>
+                <a:spcPts val="300"/>
               </a:spcAft>
               <a:buNone/>
             </a:pPr>
             <a:r>
-              <a:rPr sz="1800" b="0">
-                <a:solidFill>
-                  <a:srgbClr val="000000"/>
-                </a:solidFill>
-                <a:latin typeface="맑은 고딕"/>
-                <a:ea typeface="맑은 고딕"/>
-              </a:rPr>
-              <a:t>AI는 업무 규칙을 코드로 옮기는 일을 줄였다. 업무 규칙을 </a:t>
-            </a:r>
-            <a:r>
-              <a:rPr sz="1800" b="1">
-                <a:solidFill>
-                  <a:srgbClr val="000000"/>
-                </a:solidFill>
-                <a:latin typeface="맑은 고딕"/>
-                <a:ea typeface="맑은 고딕"/>
-              </a:rPr>
-              <a:t>정하고, 명시하고, 검증하는 일</a:t>
-            </a:r>
-            <a:r>
-              <a:rPr sz="1800" b="0">
-                <a:solidFill>
-                  <a:srgbClr val="000000"/>
-                </a:solidFill>
-                <a:latin typeface="맑은 고딕"/>
-                <a:ea typeface="맑은 고딕"/>
-              </a:rPr>
-              <a:t>은 사람에게 남는다.</a:t>
-            </a:r>
-          </a:p>
-          <a:p>
-            <a:pPr marL="342900" indent="0">
+              <a:rPr sz="1600" b="0">
+                <a:solidFill>
+                  <a:srgbClr val="000000"/>
+                </a:solidFill>
+                <a:latin typeface="맑은 고딕"/>
+                <a:ea typeface="맑은 고딕"/>
+              </a:rPr>
+              <a:t>정기배송의 </a:t>
+            </a:r>
+            <a:r>
+              <a:rPr sz="1600" b="1">
+                <a:solidFill>
+                  <a:srgbClr val="000000"/>
+                </a:solidFill>
+                <a:latin typeface="맑은 고딕"/>
+                <a:ea typeface="맑은 고딕"/>
+              </a:rPr>
+              <a:t>모델 패키지</a:t>
+            </a:r>
+            <a:r>
+              <a:rPr sz="1600" b="0">
+                <a:solidFill>
+                  <a:srgbClr val="000000"/>
+                </a:solidFill>
+                <a:latin typeface="맑은 고딕"/>
+                <a:ea typeface="맑은 고딕"/>
+              </a:rPr>
+              <a:t>를 LLM에 제공하여 </a:t>
+            </a:r>
+            <a:r>
+              <a:rPr sz="1600" b="1">
+                <a:solidFill>
+                  <a:srgbClr val="000000"/>
+                </a:solidFill>
+                <a:latin typeface="맑은 고딕"/>
+                <a:ea typeface="맑은 고딕"/>
+              </a:rPr>
+              <a:t>정기배송을 "신청한다"</a:t>
+            </a:r>
+            <a:r>
+              <a:rPr sz="1600" b="0">
+                <a:solidFill>
+                  <a:srgbClr val="000000"/>
+                </a:solidFill>
+                <a:latin typeface="맑은 고딕"/>
+                <a:ea typeface="맑은 고딕"/>
+              </a:rPr>
+              <a:t>를 개발하게 하고, 점검 항목으로 초안이 </a:t>
+            </a:r>
+            <a:r>
+              <a:rPr sz="1600" b="1">
+                <a:solidFill>
+                  <a:srgbClr val="000000"/>
+                </a:solidFill>
+                <a:latin typeface="맑은 고딕"/>
+                <a:ea typeface="맑은 고딕"/>
+              </a:rPr>
+              <a:t>추측한 것</a:t>
+            </a:r>
+            <a:r>
+              <a:rPr sz="1600" b="0">
+                <a:solidFill>
+                  <a:srgbClr val="000000"/>
+                </a:solidFill>
+                <a:latin typeface="맑은 고딕"/>
+                <a:ea typeface="맑은 고딕"/>
+              </a:rPr>
+              <a:t>을 찾아 </a:t>
+            </a:r>
+            <a:r>
+              <a:rPr sz="1600" b="1">
+                <a:solidFill>
+                  <a:srgbClr val="000000"/>
+                </a:solidFill>
+                <a:latin typeface="맑은 고딕"/>
+                <a:ea typeface="맑은 고딕"/>
+              </a:rPr>
+              <a:t>사람이 정할 결정</a:t>
+            </a:r>
+            <a:r>
+              <a:rPr sz="1600" b="0">
+                <a:solidFill>
+                  <a:srgbClr val="000000"/>
+                </a:solidFill>
+                <a:latin typeface="맑은 고딕"/>
+                <a:ea typeface="맑은 고딕"/>
+              </a:rPr>
+              <a:t>으로 정리하십시오.</a:t>
+            </a:r>
+          </a:p>
+          <a:p>
+            <a:pPr lvl="2" marL="723900" indent="-368300">
               <a:spcBef>
-                <a:spcPts val="600"/>
+                <a:spcPts val="300"/>
               </a:spcBef>
               <a:spcAft>
-                <a:spcPts val="600"/>
-              </a:spcAft>
-              <a:buNone/>
-            </a:pPr>
-            <a:r>
-              <a:rPr sz="1800" b="1">
-                <a:solidFill>
-                  <a:srgbClr val="000000"/>
-                </a:solidFill>
-                <a:latin typeface="맑은 고딕"/>
-                <a:ea typeface="맑은 고딕"/>
-              </a:rPr>
-              <a:t>AI 협업의 핵심</a:t>
-            </a:r>
-          </a:p>
-          <a:p>
-            <a:pPr lvl="2" marL="723900" indent="-368300">
-              <a:spcBef>
-                <a:spcPts val="600"/>
-              </a:spcBef>
-              <a:spcAft>
-                <a:spcPts val="600"/>
+                <a:spcPts val="300"/>
               </a:spcAft>
               <a:buSzPct val="90000"/>
               <a:buFont typeface="Wingdings" pitchFamily="2" charset="2"/>
               <a:buChar char=""/>
             </a:pPr>
             <a:r>
-              <a:rPr sz="1800" b="1">
-                <a:solidFill>
-                  <a:srgbClr val="000000"/>
-                </a:solidFill>
-                <a:latin typeface="맑은 고딕"/>
-                <a:ea typeface="맑은 고딕"/>
-              </a:rPr>
-              <a:t>바꾼 것과 바꾸지 못한 것</a:t>
-            </a:r>
-            <a:r>
-              <a:rPr sz="1800" b="0">
+              <a:rPr sz="1600" b="1">
+                <a:solidFill>
+                  <a:srgbClr val="000000"/>
+                </a:solidFill>
+                <a:latin typeface="맑은 고딕"/>
+                <a:ea typeface="맑은 고딕"/>
+              </a:rPr>
+              <a:t>서비스 개요</a:t>
+            </a:r>
+          </a:p>
+          <a:p>
+            <a:pPr lvl="3" marL="723900" indent="0">
+              <a:spcBef>
+                <a:spcPts val="300"/>
+              </a:spcBef>
+              <a:spcAft>
+                <a:spcPts val="300"/>
+              </a:spcAft>
+              <a:buNone/>
+            </a:pPr>
+            <a:r>
+              <a:rPr sz="1400" b="0">
+                <a:solidFill>
+                  <a:srgbClr val="000000"/>
+                </a:solidFill>
+                <a:latin typeface="맑은 고딕"/>
+                <a:ea typeface="맑은 고딕"/>
+              </a:rPr>
+              <a:t>생필품을 고객이 정한 주기로 배송하는 정기배송 시스템을 </a:t>
+            </a:r>
+            <a:r>
+              <a:rPr sz="1400" b="1">
+                <a:solidFill>
+                  <a:srgbClr val="000000"/>
+                </a:solidFill>
+                <a:latin typeface="맑은 고딕"/>
+                <a:ea typeface="맑은 고딕"/>
+              </a:rPr>
+              <a:t>빈 저장소</a:t>
+            </a:r>
+            <a:r>
+              <a:rPr sz="1400" b="0">
+                <a:solidFill>
+                  <a:srgbClr val="000000"/>
+                </a:solidFill>
+                <a:latin typeface="맑은 고딕"/>
+                <a:ea typeface="맑은 고딕"/>
+              </a:rPr>
+              <a:t>에서 개발한다. 고객은 상품·수량·배송 주기·첫 배송일·기간·배송지를 정해 신청하고 일시불로 결제한다. 상품·결제·배송은 외부 시스템이 맡는다.</a:t>
+            </a:r>
+          </a:p>
+          <a:p>
+            <a:pPr lvl="3" marL="723900" indent="0">
+              <a:spcBef>
+                <a:spcPts val="300"/>
+              </a:spcBef>
+              <a:spcAft>
+                <a:spcPts val="300"/>
+              </a:spcAft>
+              <a:buNone/>
+            </a:pPr>
+            <a:r>
+              <a:rPr sz="1400" b="1">
+                <a:solidFill>
+                  <a:srgbClr val="000000"/>
+                </a:solidFill>
+                <a:latin typeface="맑은 고딕"/>
+                <a:ea typeface="맑은 고딕"/>
+              </a:rPr>
+              <a:t>모델 패키지</a:t>
+            </a:r>
+            <a:r>
+              <a:rPr sz="1400" b="0">
                 <a:solidFill>
                   <a:srgbClr val="000000"/>
                 </a:solidFill>
@@ -18870,83 +18302,176 @@
               <a:t> —</a:t>
             </a:r>
             <a:r>
-              <a:rPr sz="1600" b="0">
-                <a:solidFill>
-                  <a:srgbClr val="000000"/>
-                </a:solidFill>
-                <a:latin typeface="맑은 고딕"/>
-                <a:ea typeface="맑은 고딕"/>
-              </a:rPr>
-              <a:t> AI는 우연적 복잡성을 줄였고, 본질적 복잡성인 업무 규칙은 사람이 정한다</a:t>
+              <a:rPr sz="1200" b="0">
+                <a:solidFill>
+                  <a:srgbClr val="000000"/>
+                </a:solidFill>
+                <a:latin typeface="맑은 고딕"/>
+                <a:ea typeface="맑은 고딕"/>
+              </a:rPr>
+              <a:t> 요구사항 정의서·용어집·유스케이스·도메인 모델·상태 기계</a:t>
             </a:r>
           </a:p>
           <a:p>
             <a:pPr lvl="2" marL="723900" indent="-368300">
               <a:spcBef>
-                <a:spcPts val="600"/>
+                <a:spcPts val="300"/>
               </a:spcBef>
               <a:spcAft>
-                <a:spcPts val="600"/>
+                <a:spcPts val="300"/>
               </a:spcAft>
               <a:buSzPct val="90000"/>
               <a:buFont typeface="Wingdings" pitchFamily="2" charset="2"/>
               <a:buChar char=""/>
             </a:pPr>
             <a:r>
-              <a:rPr sz="1800" b="1">
-                <a:solidFill>
-                  <a:srgbClr val="000000"/>
-                </a:solidFill>
-                <a:latin typeface="맑은 고딕"/>
-                <a:ea typeface="맑은 고딕"/>
-              </a:rPr>
-              <a:t>LLM의 성질</a:t>
-            </a:r>
-            <a:r>
-              <a:rPr sz="1800" b="0">
-                <a:solidFill>
-                  <a:srgbClr val="000000"/>
-                </a:solidFill>
-                <a:latin typeface="맑은 고딕"/>
-                <a:ea typeface="맑은 고딕"/>
-              </a:rPr>
-              <a:t> —</a:t>
-            </a:r>
-            <a:r>
-              <a:rPr sz="1600" b="0">
-                <a:solidFill>
-                  <a:srgbClr val="000000"/>
-                </a:solidFill>
-                <a:latin typeface="맑은 고딕"/>
-                <a:ea typeface="맑은 고딕"/>
-              </a:rPr>
-              <a:t> 그럴듯한 추측, 비결정성, 맥락의 한계. 주어지지 않은 업무 규칙은 추측으로 채운다</a:t>
+              <a:rPr sz="1600" b="1">
+                <a:solidFill>
+                  <a:srgbClr val="000000"/>
+                </a:solidFill>
+                <a:latin typeface="맑은 고딕"/>
+                <a:ea typeface="맑은 고딕"/>
+              </a:rPr>
+              <a:t>프롬프트</a:t>
+            </a:r>
+          </a:p>
+          <a:p>
+            <a:pPr lvl="3" marL="723900" indent="0">
+              <a:spcBef>
+                <a:spcPts val="300"/>
+              </a:spcBef>
+              <a:spcAft>
+                <a:spcPts val="300"/>
+              </a:spcAft>
+              <a:buNone/>
+            </a:pPr>
+            <a:r>
+              <a:rPr sz="1400" b="0">
+                <a:solidFill>
+                  <a:srgbClr val="000000"/>
+                </a:solidFill>
+                <a:latin typeface="맑은 고딕"/>
+                <a:ea typeface="맑은 고딕"/>
+              </a:rPr>
+              <a:t>① "이 모델 패키지로 </a:t>
+            </a:r>
+            <a:r>
+              <a:rPr sz="1400" b="1">
+                <a:solidFill>
+                  <a:srgbClr val="000000"/>
+                </a:solidFill>
+                <a:latin typeface="맑은 고딕"/>
+                <a:ea typeface="맑은 고딕"/>
+              </a:rPr>
+              <a:t>정기배송을 신청한다</a:t>
+            </a:r>
+            <a:r>
+              <a:rPr sz="1400" b="0">
+                <a:solidFill>
+                  <a:srgbClr val="000000"/>
+                </a:solidFill>
+                <a:latin typeface="맑은 고딕"/>
+                <a:ea typeface="맑은 고딕"/>
+              </a:rPr>
+              <a:t>를 설계하고, 자바 코드와 테스트를 만들어줘."</a:t>
+            </a:r>
+          </a:p>
+          <a:p>
+            <a:pPr lvl="3" marL="723900" indent="0">
+              <a:spcBef>
+                <a:spcPts val="300"/>
+              </a:spcBef>
+              <a:spcAft>
+                <a:spcPts val="300"/>
+              </a:spcAft>
+              <a:buNone/>
+            </a:pPr>
+            <a:r>
+              <a:rPr sz="1400" b="0">
+                <a:solidFill>
+                  <a:srgbClr val="000000"/>
+                </a:solidFill>
+                <a:latin typeface="맑은 고딕"/>
+                <a:ea typeface="맑은 고딕"/>
+              </a:rPr>
+              <a:t>② "모델에 없어서 네가 스스로 정한 것과 모델과 다르게 만든 것을 </a:t>
+            </a:r>
+            <a:r>
+              <a:rPr sz="1400" b="1">
+                <a:solidFill>
+                  <a:srgbClr val="000000"/>
+                </a:solidFill>
+                <a:latin typeface="맑은 고딕"/>
+                <a:ea typeface="맑은 고딕"/>
+              </a:rPr>
+              <a:t>모두 나열</a:t>
+            </a:r>
+            <a:r>
+              <a:rPr sz="1400" b="0">
+                <a:solidFill>
+                  <a:srgbClr val="000000"/>
+                </a:solidFill>
+                <a:latin typeface="맑은 고딕"/>
+                <a:ea typeface="맑은 고딕"/>
+              </a:rPr>
+              <a:t>해줘."</a:t>
             </a:r>
           </a:p>
           <a:p>
             <a:pPr lvl="2" marL="723900" indent="-368300">
               <a:spcBef>
-                <a:spcPts val="600"/>
+                <a:spcPts val="300"/>
               </a:spcBef>
               <a:spcAft>
-                <a:spcPts val="600"/>
+                <a:spcPts val="300"/>
               </a:spcAft>
               <a:buSzPct val="90000"/>
               <a:buFont typeface="Wingdings" pitchFamily="2" charset="2"/>
               <a:buChar char=""/>
             </a:pPr>
             <a:r>
-              <a:rPr sz="1800" b="1">
-                <a:solidFill>
-                  <a:srgbClr val="000000"/>
-                </a:solidFill>
-                <a:latin typeface="맑은 고딕"/>
-                <a:ea typeface="맑은 고딕"/>
-              </a:rPr>
-              <a:t>업무 규칙의 명시</a:t>
-            </a:r>
-            <a:r>
-              <a:rPr sz="1800" b="0">
+              <a:rPr sz="1600" b="1">
+                <a:solidFill>
+                  <a:srgbClr val="000000"/>
+                </a:solidFill>
+                <a:latin typeface="맑은 고딕"/>
+                <a:ea typeface="맑은 고딕"/>
+              </a:rPr>
+              <a:t>점검 항목</a:t>
+            </a:r>
+          </a:p>
+          <a:p>
+            <a:pPr lvl="3" marL="947420" indent="-223520">
+              <a:spcBef>
+                <a:spcPts val="300"/>
+              </a:spcBef>
+              <a:spcAft>
+                <a:spcPts val="300"/>
+              </a:spcAft>
+              <a:buNone/>
+            </a:pPr>
+            <a:r>
+              <a:rPr sz="1400" b="0">
+                <a:solidFill>
+                  <a:srgbClr val="000000"/>
+                </a:solidFill>
+                <a:latin typeface="맑은 고딕"/>
+                <a:ea typeface="맑은 고딕"/>
+              </a:rPr>
+              <a:t>1. </a:t>
+            </a:r>
+            <a:r>
+              <a:rPr sz="1400" b="1">
+                <a:solidFill>
+                  <a:srgbClr val="000000"/>
+                </a:solidFill>
+                <a:latin typeface="맑은 고딕"/>
+                <a:ea typeface="맑은 고딕"/>
+              </a:rPr>
+              <a:t>상태</a:t>
+            </a:r>
+            <a:r>
+              <a:rPr sz="1400" b="0">
                 <a:solidFill>
                   <a:srgbClr val="000000"/>
                 </a:solidFill>
@@ -18956,16 +18481,6 @@
               <a:t> —</a:t>
             </a:r>
             <a:r>
-              <a:rPr sz="1600" b="0">
-                <a:solidFill>
-                  <a:srgbClr val="000000"/>
-                </a:solidFill>
-                <a:latin typeface="맑은 고딕"/>
-                <a:ea typeface="맑은 고딕"/>
-              </a:rPr>
-              <a:t> 용어집·도메인 모델</a:t>
-            </a:r>
-            <a:r>
               <a:rPr sz="1200" b="0">
                 <a:solidFill>
                   <a:srgbClr val="000000"/>
@@ -18973,43 +18488,308 @@
                 <a:latin typeface="맑은 고딕"/>
                 <a:ea typeface="맑은 고딕"/>
               </a:rPr>
-              <a:t>(보편 언어)</a:t>
-            </a:r>
-            <a:r>
-              <a:rPr sz="1600" b="0">
-                <a:solidFill>
-                  <a:srgbClr val="000000"/>
-                </a:solidFill>
-                <a:latin typeface="맑은 고딕"/>
-                <a:ea typeface="맑은 고딕"/>
-              </a:rPr>
-              <a:t>·온톨로지로 뜻을 고정한다</a:t>
+              <a:t> 모델에 없는 상태나 필드를 더했는가?</a:t>
+            </a:r>
+          </a:p>
+          <a:p>
+            <a:pPr lvl="3" marL="947420" indent="-223520">
+              <a:spcBef>
+                <a:spcPts val="300"/>
+              </a:spcBef>
+              <a:spcAft>
+                <a:spcPts val="300"/>
+              </a:spcAft>
+              <a:buNone/>
+            </a:pPr>
+            <a:r>
+              <a:rPr sz="1400" b="0">
+                <a:solidFill>
+                  <a:srgbClr val="000000"/>
+                </a:solidFill>
+                <a:latin typeface="맑은 고딕"/>
+                <a:ea typeface="맑은 고딕"/>
+              </a:rPr>
+              <a:t>2. </a:t>
+            </a:r>
+            <a:r>
+              <a:rPr sz="1400" b="1">
+                <a:solidFill>
+                  <a:srgbClr val="000000"/>
+                </a:solidFill>
+                <a:latin typeface="맑은 고딕"/>
+                <a:ea typeface="맑은 고딕"/>
+              </a:rPr>
+              <a:t>금액</a:t>
+            </a:r>
+            <a:r>
+              <a:rPr sz="1400" b="0">
+                <a:solidFill>
+                  <a:srgbClr val="000000"/>
+                </a:solidFill>
+                <a:latin typeface="맑은 고딕"/>
+                <a:ea typeface="맑은 고딕"/>
+              </a:rPr>
+              <a:t> —</a:t>
+            </a:r>
+            <a:r>
+              <a:rPr sz="1200" b="0">
+                <a:solidFill>
+                  <a:srgbClr val="000000"/>
+                </a:solidFill>
+                <a:latin typeface="맑은 고딕"/>
+                <a:ea typeface="맑은 고딕"/>
+              </a:rPr>
+              <a:t> 회차 금액을 무엇으로 계산했는가? 신청 때의 가격인가?</a:t>
+            </a:r>
+          </a:p>
+          <a:p>
+            <a:pPr lvl="3" marL="947420" indent="-223520">
+              <a:spcBef>
+                <a:spcPts val="300"/>
+              </a:spcBef>
+              <a:spcAft>
+                <a:spcPts val="300"/>
+              </a:spcAft>
+              <a:buNone/>
+            </a:pPr>
+            <a:r>
+              <a:rPr sz="1400" b="0">
+                <a:solidFill>
+                  <a:srgbClr val="000000"/>
+                </a:solidFill>
+                <a:latin typeface="맑은 고딕"/>
+                <a:ea typeface="맑은 고딕"/>
+              </a:rPr>
+              <a:t>3. </a:t>
+            </a:r>
+            <a:r>
+              <a:rPr sz="1400" b="1">
+                <a:solidFill>
+                  <a:srgbClr val="000000"/>
+                </a:solidFill>
+                <a:latin typeface="맑은 고딕"/>
+                <a:ea typeface="맑은 고딕"/>
+              </a:rPr>
+              <a:t>회차</a:t>
+            </a:r>
+            <a:r>
+              <a:rPr sz="1400" b="0">
+                <a:solidFill>
+                  <a:srgbClr val="000000"/>
+                </a:solidFill>
+                <a:latin typeface="맑은 고딕"/>
+                <a:ea typeface="맑은 고딕"/>
+              </a:rPr>
+              <a:t> —</a:t>
+            </a:r>
+            <a:r>
+              <a:rPr sz="1200" b="0">
+                <a:solidFill>
+                  <a:srgbClr val="000000"/>
+                </a:solidFill>
+                <a:latin typeface="맑은 고딕"/>
+                <a:ea typeface="맑은 고딕"/>
+              </a:rPr>
+              <a:t> 확정할 때 배송 회차를 몇 개, 어느 날짜로 만들었는가? 그 계산 규칙이 모델에 있는가?</a:t>
+            </a:r>
+          </a:p>
+          <a:p>
+            <a:pPr lvl="3" marL="947420" indent="-223520">
+              <a:spcBef>
+                <a:spcPts val="300"/>
+              </a:spcBef>
+              <a:spcAft>
+                <a:spcPts val="300"/>
+              </a:spcAft>
+              <a:buNone/>
+            </a:pPr>
+            <a:r>
+              <a:rPr sz="1400" b="0">
+                <a:solidFill>
+                  <a:srgbClr val="000000"/>
+                </a:solidFill>
+                <a:latin typeface="맑은 고딕"/>
+                <a:ea typeface="맑은 고딕"/>
+              </a:rPr>
+              <a:t>4. </a:t>
+            </a:r>
+            <a:r>
+              <a:rPr sz="1400" b="1">
+                <a:solidFill>
+                  <a:srgbClr val="000000"/>
+                </a:solidFill>
+                <a:latin typeface="맑은 고딕"/>
+                <a:ea typeface="맑은 고딕"/>
+              </a:rPr>
+              <a:t>거절</a:t>
+            </a:r>
+            <a:r>
+              <a:rPr sz="1400" b="0">
+                <a:solidFill>
+                  <a:srgbClr val="000000"/>
+                </a:solidFill>
+                <a:latin typeface="맑은 고딕"/>
+                <a:ea typeface="맑은 고딕"/>
+              </a:rPr>
+              <a:t> —</a:t>
+            </a:r>
+            <a:r>
+              <a:rPr sz="1200" b="0">
+                <a:solidFill>
+                  <a:srgbClr val="000000"/>
+                </a:solidFill>
+                <a:latin typeface="맑은 고딕"/>
+                <a:ea typeface="맑은 고딕"/>
+              </a:rPr>
+              <a:t> 결제가 거절되면 정기배송은 어떤 상태인가?</a:t>
+            </a:r>
+          </a:p>
+          <a:p>
+            <a:pPr lvl="3" marL="947420" indent="-223520">
+              <a:spcBef>
+                <a:spcPts val="300"/>
+              </a:spcBef>
+              <a:spcAft>
+                <a:spcPts val="300"/>
+              </a:spcAft>
+              <a:buNone/>
+            </a:pPr>
+            <a:r>
+              <a:rPr sz="1400" b="0">
+                <a:solidFill>
+                  <a:srgbClr val="000000"/>
+                </a:solidFill>
+                <a:latin typeface="맑은 고딕"/>
+                <a:ea typeface="맑은 고딕"/>
+              </a:rPr>
+              <a:t>5. </a:t>
+            </a:r>
+            <a:r>
+              <a:rPr sz="1400" b="1">
+                <a:solidFill>
+                  <a:srgbClr val="000000"/>
+                </a:solidFill>
+                <a:latin typeface="맑은 고딕"/>
+                <a:ea typeface="맑은 고딕"/>
+              </a:rPr>
+              <a:t>덧붙인 규칙</a:t>
+            </a:r>
+            <a:r>
+              <a:rPr sz="1400" b="0">
+                <a:solidFill>
+                  <a:srgbClr val="000000"/>
+                </a:solidFill>
+                <a:latin typeface="맑은 고딕"/>
+                <a:ea typeface="맑은 고딕"/>
+              </a:rPr>
+              <a:t> —</a:t>
+            </a:r>
+            <a:r>
+              <a:rPr sz="1200" b="0">
+                <a:solidFill>
+                  <a:srgbClr val="000000"/>
+                </a:solidFill>
+                <a:latin typeface="맑은 고딕"/>
+                <a:ea typeface="맑은 고딕"/>
+              </a:rPr>
+              <a:t> 모델에 없는 규칙</a:t>
+            </a:r>
+            <a:r>
+              <a:rPr sz="1000" b="0">
+                <a:solidFill>
+                  <a:srgbClr val="000000"/>
+                </a:solidFill>
+                <a:latin typeface="맑은 고딕"/>
+                <a:ea typeface="맑은 고딕"/>
+              </a:rPr>
+              <a:t>(할인, 최소 수량 등)</a:t>
+            </a:r>
+            <a:r>
+              <a:rPr sz="1200" b="0">
+                <a:solidFill>
+                  <a:srgbClr val="000000"/>
+                </a:solidFill>
+                <a:latin typeface="맑은 고딕"/>
+                <a:ea typeface="맑은 고딕"/>
+              </a:rPr>
+              <a:t>이 들어갔는가?</a:t>
+            </a:r>
+          </a:p>
+          <a:p>
+            <a:pPr lvl="3" marL="947420" indent="-223520">
+              <a:spcBef>
+                <a:spcPts val="300"/>
+              </a:spcBef>
+              <a:spcAft>
+                <a:spcPts val="300"/>
+              </a:spcAft>
+              <a:buNone/>
+            </a:pPr>
+            <a:r>
+              <a:rPr sz="1400" b="0">
+                <a:solidFill>
+                  <a:srgbClr val="000000"/>
+                </a:solidFill>
+                <a:latin typeface="맑은 고딕"/>
+                <a:ea typeface="맑은 고딕"/>
+              </a:rPr>
+              <a:t>6. </a:t>
+            </a:r>
+            <a:r>
+              <a:rPr sz="1400" b="1">
+                <a:solidFill>
+                  <a:srgbClr val="000000"/>
+                </a:solidFill>
+                <a:latin typeface="맑은 고딕"/>
+                <a:ea typeface="맑은 고딕"/>
+              </a:rPr>
+              <a:t>테스트</a:t>
+            </a:r>
+            <a:r>
+              <a:rPr sz="1400" b="0">
+                <a:solidFill>
+                  <a:srgbClr val="000000"/>
+                </a:solidFill>
+                <a:latin typeface="맑은 고딕"/>
+                <a:ea typeface="맑은 고딕"/>
+              </a:rPr>
+              <a:t> —</a:t>
+            </a:r>
+            <a:r>
+              <a:rPr sz="1200" b="0">
+                <a:solidFill>
+                  <a:srgbClr val="000000"/>
+                </a:solidFill>
+                <a:latin typeface="맑은 고딕"/>
+                <a:ea typeface="맑은 고딕"/>
+              </a:rPr>
+              <a:t> 승인된 경우뿐 아니라 거절된 경우의 테스트가 있는가?</a:t>
             </a:r>
           </a:p>
           <a:p>
             <a:pPr lvl="2" marL="723900" indent="-368300">
               <a:spcBef>
-                <a:spcPts val="600"/>
+                <a:spcPts val="300"/>
               </a:spcBef>
               <a:spcAft>
-                <a:spcPts val="600"/>
+                <a:spcPts val="300"/>
               </a:spcAft>
               <a:buSzPct val="90000"/>
               <a:buFont typeface="Wingdings" pitchFamily="2" charset="2"/>
               <a:buChar char=""/>
             </a:pPr>
             <a:r>
-              <a:rPr sz="1800" b="1">
-                <a:solidFill>
-                  <a:srgbClr val="000000"/>
-                </a:solidFill>
-                <a:latin typeface="맑은 고딕"/>
-                <a:ea typeface="맑은 고딕"/>
-              </a:rPr>
-              <a:t>역할</a:t>
-            </a:r>
-            <a:r>
-              <a:rPr sz="1800" b="0">
+              <a:rPr sz="1600" b="1">
+                <a:solidFill>
+                  <a:srgbClr val="000000"/>
+                </a:solidFill>
+                <a:latin typeface="맑은 고딕"/>
+                <a:ea typeface="맑은 고딕"/>
+              </a:rPr>
+              <a:t>결과물</a:t>
+            </a:r>
+            <a:r>
+              <a:rPr sz="1600" b="0">
                 <a:solidFill>
                   <a:srgbClr val="000000"/>
                 </a:solidFill>
@@ -19019,131 +18799,14 @@
               <a:t> —</a:t>
             </a:r>
             <a:r>
-              <a:rPr sz="1600" b="0">
-                <a:solidFill>
-                  <a:srgbClr val="000000"/>
-                </a:solidFill>
-                <a:latin typeface="맑은 고딕"/>
-                <a:ea typeface="맑은 고딕"/>
-              </a:rPr>
-              <a:t> 사람이 조종하고 에이전트가 실행한다. 테스트의 기대값은 업무 규칙에서 온다</a:t>
-            </a:r>
-          </a:p>
-          <a:p>
-            <a:pPr lvl="2" marL="723900" indent="-368300">
-              <a:spcBef>
-                <a:spcPts val="600"/>
-              </a:spcBef>
-              <a:spcAft>
-                <a:spcPts val="600"/>
-              </a:spcAft>
-              <a:buSzPct val="90000"/>
-              <a:buFont typeface="Wingdings" pitchFamily="2" charset="2"/>
-              <a:buChar char=""/>
-            </a:pPr>
-            <a:r>
-              <a:rPr sz="1800" b="1">
-                <a:solidFill>
-                  <a:srgbClr val="000000"/>
-                </a:solidFill>
-                <a:latin typeface="맑은 고딕"/>
-                <a:ea typeface="맑은 고딕"/>
-              </a:rPr>
-              <a:t>결정 지도</a:t>
-            </a:r>
-            <a:r>
-              <a:rPr sz="1800" b="0">
-                <a:solidFill>
-                  <a:srgbClr val="000000"/>
-                </a:solidFill>
-                <a:latin typeface="맑은 고딕"/>
-                <a:ea typeface="맑은 고딕"/>
-              </a:rPr>
-              <a:t> —</a:t>
-            </a:r>
-            <a:r>
-              <a:rPr sz="1600" b="0">
-                <a:solidFill>
-                  <a:srgbClr val="000000"/>
-                </a:solidFill>
-                <a:latin typeface="맑은 고딕"/>
-                <a:ea typeface="맑은 고딕"/>
-              </a:rPr>
-              <a:t> 활용 방식 → 명세·수용 기준 → 맥락 → 위임 경계 → 개입·가드레일·하네스 → 실패·평가</a:t>
-            </a:r>
-          </a:p>
-          <a:p>
-            <a:pPr marL="342900" indent="0">
-              <a:spcBef>
-                <a:spcPts val="600"/>
-              </a:spcBef>
-              <a:spcAft>
-                <a:spcPts val="600"/>
-              </a:spcAft>
-              <a:buNone/>
-            </a:pPr>
-            <a:r>
-              <a:rPr sz="1800" b="1">
-                <a:solidFill>
-                  <a:srgbClr val="000000"/>
-                </a:solidFill>
-                <a:latin typeface="맑은 고딕"/>
-                <a:ea typeface="맑은 고딕"/>
-              </a:rPr>
-              <a:t>다음 세션</a:t>
-            </a:r>
-          </a:p>
-          <a:p>
-            <a:pPr lvl="2" marL="723900" indent="-368300">
-              <a:spcBef>
-                <a:spcPts val="600"/>
-              </a:spcBef>
-              <a:spcAft>
-                <a:spcPts val="600"/>
-              </a:spcAft>
-              <a:buSzPct val="90000"/>
-              <a:buFont typeface="Wingdings" pitchFamily="2" charset="2"/>
-              <a:buChar char=""/>
-            </a:pPr>
-            <a:r>
-              <a:rPr sz="1800" b="0">
-                <a:solidFill>
-                  <a:srgbClr val="000000"/>
-                </a:solidFill>
-                <a:latin typeface="맑은 고딕"/>
-                <a:ea typeface="맑은 고딕"/>
-              </a:rPr>
-              <a:t>"</a:t>
-            </a:r>
-            <a:r>
-              <a:rPr sz="1800" b="1">
-                <a:solidFill>
-                  <a:srgbClr val="000000"/>
-                </a:solidFill>
-                <a:latin typeface="맑은 고딕"/>
-                <a:ea typeface="맑은 고딕"/>
-              </a:rPr>
-              <a:t>02. 작업 특성에 따른 AI 활용 방식</a:t>
-            </a:r>
-            <a:r>
-              <a:rPr sz="1800" b="0">
-                <a:solidFill>
-                  <a:srgbClr val="000000"/>
-                </a:solidFill>
-                <a:latin typeface="맑은 고딕"/>
-                <a:ea typeface="맑은 고딕"/>
-              </a:rPr>
-              <a:t>" —</a:t>
-            </a:r>
-            <a:r>
-              <a:rPr sz="1600" b="0">
-                <a:solidFill>
-                  <a:srgbClr val="000000"/>
-                </a:solidFill>
-                <a:latin typeface="맑은 고딕"/>
-                <a:ea typeface="맑은 고딕"/>
-              </a:rPr>
-              <a:t> 작업의 특성으로 수작업·대화형 보조·워크플로·에이전트 중 가장 단순한 충분한 형태를 고른다.</a:t>
+              <a:rPr sz="1400" b="0">
+                <a:solidFill>
+                  <a:srgbClr val="000000"/>
+                </a:solidFill>
+                <a:latin typeface="맑은 고딕"/>
+                <a:ea typeface="맑은 고딕"/>
+              </a:rPr>
+              <a:t> 추측 목록과 사람이 정할 결정. 실습 2의 입력이 됩니다.</a:t>
             </a:r>
           </a:p>
         </p:txBody>
@@ -19213,29 +18876,7 @@
                 <a:latin typeface="맑은 고딕"/>
                 <a:ea typeface="맑은 고딕"/>
               </a:rPr>
-              <a:t>추측 목록과 사람이 정할 결정 </a:t>
-            </a:r>
-            <a:r>
-              <a:rPr sz="1800" b="1">
-                <a:solidFill>
-                  <a:srgbClr val="000000"/>
-                </a:solidFill>
-                <a:latin typeface="맑은 고딕"/>
-                <a:ea typeface="맑은 고딕"/>
-              </a:rPr>
-              <a:t>(안)</a:t>
-            </a:r>
-          </a:p>
-          <a:p>
-            <a:r>
-              <a:rPr sz="1100" b="1">
-                <a:solidFill>
-                  <a:srgbClr val="000000"/>
-                </a:solidFill>
-                <a:latin typeface="맑은 고딕"/>
-                <a:ea typeface="맑은 고딕"/>
-              </a:rPr>
-              <a:t>별첨. 실습 답</a:t>
+              <a:t>09. 요약</a:t>
             </a:r>
           </a:p>
         </p:txBody>
@@ -19271,6 +18912,586 @@
                 </a:solidFill>
               </a:rPr>
               <a:t>- 27 -</a:t>
+            </a:r>
+          </a:p>
+        </p:txBody>
+      </p:sp>
+      <p:sp>
+        <p:nvSpPr>
+          <p:cNvPr id="5" name="텍스트 개체 틀 4">
+            <a:extLst>
+              <a:ext uri="{FF2B5EF4-FFF2-40B4-BE49-F238E27FC236}">
+                <a16:creationId xmlns:a16="http://schemas.microsoft.com/office/drawing/2014/main" id="{D66274C8-E16F-5AEB-614B-D8D32DA3E8C6}"/>
+              </a:ext>
+            </a:extLst>
+          </p:cNvPr>
+          <p:cNvSpPr>
+            <a:spLocks noGrp="1"/>
+          </p:cNvSpPr>
+          <p:nvPr>
+            <p:ph type="body" sz="quarter" idx="11"/>
+          </p:nvPr>
+        </p:nvSpPr>
+        <p:spPr/>
+        <p:txBody>
+          <a:bodyPr/>
+          <a:lstStyle/>
+          <a:p>
+            <a:r>
+              <a:rPr kumimoji="1" lang="en-US" altLang="ko-KR" sz="1400" dirty="0" err="1"/>
+              <a:t>01. AI 협업의 특성과 사람의 판단 책임</a:t>
+            </a:r>
+          </a:p>
+        </p:txBody>
+      </p:sp>
+      <p:sp>
+        <p:nvSpPr>
+          <p:cNvPr id="6" name="텍스트 개체 틀 5">
+            <a:extLst>
+              <a:ext uri="{FF2B5EF4-FFF2-40B4-BE49-F238E27FC236}">
+                <a16:creationId xmlns:a16="http://schemas.microsoft.com/office/drawing/2014/main" id="{A24E58E1-194B-A320-AEEE-24D08685BB67}"/>
+              </a:ext>
+            </a:extLst>
+          </p:cNvPr>
+          <p:cNvSpPr>
+            <a:spLocks noGrp="1"/>
+          </p:cNvSpPr>
+          <p:nvPr>
+            <p:ph type="body" sz="quarter" idx="12"/>
+          </p:nvPr>
+        </p:nvSpPr>
+        <p:spPr/>
+        <p:txBody>
+          <a:bodyPr/>
+          <a:lstStyle/>
+          <a:p>
+            <a:endParaRPr kumimoji="1" lang="ko-KR" altLang="en-US" dirty="0"/>
+          </a:p>
+        </p:txBody>
+      </p:sp>
+      <p:sp>
+        <p:nvSpPr>
+          <p:cNvPr id="7" name="텍스트 개체 틀 6">
+            <a:extLst>
+              <a:ext uri="{FF2B5EF4-FFF2-40B4-BE49-F238E27FC236}">
+                <a16:creationId xmlns:a16="http://schemas.microsoft.com/office/drawing/2014/main" id="{A219F420-613B-6234-45F6-0955A9A4505F}"/>
+              </a:ext>
+            </a:extLst>
+          </p:cNvPr>
+          <p:cNvSpPr>
+            <a:spLocks noGrp="1"/>
+          </p:cNvSpPr>
+          <p:nvPr>
+            <p:ph type="body" sz="quarter" idx="13"/>
+          </p:nvPr>
+        </p:nvSpPr>
+        <p:spPr/>
+        <p:txBody>
+          <a:bodyPr/>
+          <a:lstStyle/>
+          <a:p>
+            <a:endParaRPr kumimoji="1" lang="en-US" altLang="ko-KR" dirty="0"/>
+          </a:p>
+        </p:txBody>
+      </p:sp>
+      <p:sp>
+        <p:nvSpPr>
+          <p:cNvPr id="8" name="내용 개체 틀 7">
+            <a:extLst>
+              <a:ext uri="{FF2B5EF4-FFF2-40B4-BE49-F238E27FC236}">
+                <a16:creationId xmlns:a16="http://schemas.microsoft.com/office/drawing/2014/main" id="{BEBA2C4A-B0BF-F2E4-EA6E-614C99CBA184}"/>
+              </a:ext>
+            </a:extLst>
+          </p:cNvPr>
+          <p:cNvSpPr>
+            <a:spLocks noGrp="1"/>
+          </p:cNvSpPr>
+          <p:nvPr>
+            <p:ph idx="1"/>
+          </p:nvPr>
+        </p:nvSpPr>
+        <p:spPr/>
+        <p:txBody>
+          <a:bodyPr>
+            <a:normAutofit/>
+          </a:bodyPr>
+          <a:lstStyle/>
+          <a:p>
+            <a:pPr marL="0" indent="0">
+              <a:spcBef>
+                <a:spcPts val="600"/>
+              </a:spcBef>
+              <a:spcAft>
+                <a:spcPts val="600"/>
+              </a:spcAft>
+              <a:buNone/>
+            </a:pPr>
+            <a:r>
+              <a:rPr sz="1800" b="0">
+                <a:solidFill>
+                  <a:srgbClr val="000000"/>
+                </a:solidFill>
+                <a:latin typeface="맑은 고딕"/>
+                <a:ea typeface="맑은 고딕"/>
+              </a:rPr>
+              <a:t>AI는 업무 규칙을 코드로 옮기는 일을 줄였다. 업무 규칙을 </a:t>
+            </a:r>
+            <a:r>
+              <a:rPr sz="1800" b="1">
+                <a:solidFill>
+                  <a:srgbClr val="000000"/>
+                </a:solidFill>
+                <a:latin typeface="맑은 고딕"/>
+                <a:ea typeface="맑은 고딕"/>
+              </a:rPr>
+              <a:t>정하고, 명시하고, 검증하는 일</a:t>
+            </a:r>
+            <a:r>
+              <a:rPr sz="1800" b="0">
+                <a:solidFill>
+                  <a:srgbClr val="000000"/>
+                </a:solidFill>
+                <a:latin typeface="맑은 고딕"/>
+                <a:ea typeface="맑은 고딕"/>
+              </a:rPr>
+              <a:t>은 사람에게 남는다.</a:t>
+            </a:r>
+          </a:p>
+          <a:p>
+            <a:pPr marL="342900" indent="0">
+              <a:spcBef>
+                <a:spcPts val="600"/>
+              </a:spcBef>
+              <a:spcAft>
+                <a:spcPts val="600"/>
+              </a:spcAft>
+              <a:buNone/>
+            </a:pPr>
+            <a:r>
+              <a:rPr sz="1800" b="1">
+                <a:solidFill>
+                  <a:srgbClr val="000000"/>
+                </a:solidFill>
+                <a:latin typeface="맑은 고딕"/>
+                <a:ea typeface="맑은 고딕"/>
+              </a:rPr>
+              <a:t>AI 협업의 핵심</a:t>
+            </a:r>
+          </a:p>
+          <a:p>
+            <a:pPr lvl="2" marL="723900" indent="-368300">
+              <a:spcBef>
+                <a:spcPts val="600"/>
+              </a:spcBef>
+              <a:spcAft>
+                <a:spcPts val="600"/>
+              </a:spcAft>
+              <a:buSzPct val="90000"/>
+              <a:buFont typeface="Wingdings" pitchFamily="2" charset="2"/>
+              <a:buChar char=""/>
+            </a:pPr>
+            <a:r>
+              <a:rPr sz="1800" b="1">
+                <a:solidFill>
+                  <a:srgbClr val="000000"/>
+                </a:solidFill>
+                <a:latin typeface="맑은 고딕"/>
+                <a:ea typeface="맑은 고딕"/>
+              </a:rPr>
+              <a:t>바꾼 것과 바꾸지 못한 것</a:t>
+            </a:r>
+            <a:r>
+              <a:rPr sz="1800" b="0">
+                <a:solidFill>
+                  <a:srgbClr val="000000"/>
+                </a:solidFill>
+                <a:latin typeface="맑은 고딕"/>
+                <a:ea typeface="맑은 고딕"/>
+              </a:rPr>
+              <a:t> —</a:t>
+            </a:r>
+            <a:r>
+              <a:rPr sz="1600" b="0">
+                <a:solidFill>
+                  <a:srgbClr val="000000"/>
+                </a:solidFill>
+                <a:latin typeface="맑은 고딕"/>
+                <a:ea typeface="맑은 고딕"/>
+              </a:rPr>
+              <a:t> AI는 우연적 복잡성을 줄였고, 본질적 복잡성인 업무 규칙은 사람이 정한다</a:t>
+            </a:r>
+          </a:p>
+          <a:p>
+            <a:pPr lvl="2" marL="723900" indent="-368300">
+              <a:spcBef>
+                <a:spcPts val="600"/>
+              </a:spcBef>
+              <a:spcAft>
+                <a:spcPts val="600"/>
+              </a:spcAft>
+              <a:buSzPct val="90000"/>
+              <a:buFont typeface="Wingdings" pitchFamily="2" charset="2"/>
+              <a:buChar char=""/>
+            </a:pPr>
+            <a:r>
+              <a:rPr sz="1800" b="1">
+                <a:solidFill>
+                  <a:srgbClr val="000000"/>
+                </a:solidFill>
+                <a:latin typeface="맑은 고딕"/>
+                <a:ea typeface="맑은 고딕"/>
+              </a:rPr>
+              <a:t>LLM의 성질</a:t>
+            </a:r>
+            <a:r>
+              <a:rPr sz="1800" b="0">
+                <a:solidFill>
+                  <a:srgbClr val="000000"/>
+                </a:solidFill>
+                <a:latin typeface="맑은 고딕"/>
+                <a:ea typeface="맑은 고딕"/>
+              </a:rPr>
+              <a:t> —</a:t>
+            </a:r>
+            <a:r>
+              <a:rPr sz="1600" b="0">
+                <a:solidFill>
+                  <a:srgbClr val="000000"/>
+                </a:solidFill>
+                <a:latin typeface="맑은 고딕"/>
+                <a:ea typeface="맑은 고딕"/>
+              </a:rPr>
+              <a:t> 그럴듯한 추측, 비결정성, 맥락의 한계. 주어지지 않은 업무 규칙은 추측으로 채운다</a:t>
+            </a:r>
+          </a:p>
+          <a:p>
+            <a:pPr lvl="2" marL="723900" indent="-368300">
+              <a:spcBef>
+                <a:spcPts val="600"/>
+              </a:spcBef>
+              <a:spcAft>
+                <a:spcPts val="600"/>
+              </a:spcAft>
+              <a:buSzPct val="90000"/>
+              <a:buFont typeface="Wingdings" pitchFamily="2" charset="2"/>
+              <a:buChar char=""/>
+            </a:pPr>
+            <a:r>
+              <a:rPr sz="1800" b="1">
+                <a:solidFill>
+                  <a:srgbClr val="000000"/>
+                </a:solidFill>
+                <a:latin typeface="맑은 고딕"/>
+                <a:ea typeface="맑은 고딕"/>
+              </a:rPr>
+              <a:t>업무 규칙의 명시</a:t>
+            </a:r>
+            <a:r>
+              <a:rPr sz="1800" b="0">
+                <a:solidFill>
+                  <a:srgbClr val="000000"/>
+                </a:solidFill>
+                <a:latin typeface="맑은 고딕"/>
+                <a:ea typeface="맑은 고딕"/>
+              </a:rPr>
+              <a:t> —</a:t>
+            </a:r>
+            <a:r>
+              <a:rPr sz="1600" b="0">
+                <a:solidFill>
+                  <a:srgbClr val="000000"/>
+                </a:solidFill>
+                <a:latin typeface="맑은 고딕"/>
+                <a:ea typeface="맑은 고딕"/>
+              </a:rPr>
+              <a:t> 용어집·도메인 모델·온톨로지로 뜻을 고정한다</a:t>
+            </a:r>
+          </a:p>
+          <a:p>
+            <a:pPr lvl="2" marL="723900" indent="-368300">
+              <a:spcBef>
+                <a:spcPts val="600"/>
+              </a:spcBef>
+              <a:spcAft>
+                <a:spcPts val="600"/>
+              </a:spcAft>
+              <a:buSzPct val="90000"/>
+              <a:buFont typeface="Wingdings" pitchFamily="2" charset="2"/>
+              <a:buChar char=""/>
+            </a:pPr>
+            <a:r>
+              <a:rPr sz="1800" b="1">
+                <a:solidFill>
+                  <a:srgbClr val="000000"/>
+                </a:solidFill>
+                <a:latin typeface="맑은 고딕"/>
+                <a:ea typeface="맑은 고딕"/>
+              </a:rPr>
+              <a:t>역할</a:t>
+            </a:r>
+            <a:r>
+              <a:rPr sz="1800" b="0">
+                <a:solidFill>
+                  <a:srgbClr val="000000"/>
+                </a:solidFill>
+                <a:latin typeface="맑은 고딕"/>
+                <a:ea typeface="맑은 고딕"/>
+              </a:rPr>
+              <a:t> —</a:t>
+            </a:r>
+            <a:r>
+              <a:rPr sz="1600" b="0">
+                <a:solidFill>
+                  <a:srgbClr val="000000"/>
+                </a:solidFill>
+                <a:latin typeface="맑은 고딕"/>
+                <a:ea typeface="맑은 고딕"/>
+              </a:rPr>
+              <a:t> 사람이 조종하고 에이전트가 실행한다. 테스트의 기대값은 업무 규칙에서 온다</a:t>
+            </a:r>
+          </a:p>
+          <a:p>
+            <a:pPr lvl="2" marL="723900" indent="-368300">
+              <a:spcBef>
+                <a:spcPts val="600"/>
+              </a:spcBef>
+              <a:spcAft>
+                <a:spcPts val="600"/>
+              </a:spcAft>
+              <a:buSzPct val="90000"/>
+              <a:buFont typeface="Wingdings" pitchFamily="2" charset="2"/>
+              <a:buChar char=""/>
+            </a:pPr>
+            <a:r>
+              <a:rPr sz="1800" b="1">
+                <a:solidFill>
+                  <a:srgbClr val="000000"/>
+                </a:solidFill>
+                <a:latin typeface="맑은 고딕"/>
+                <a:ea typeface="맑은 고딕"/>
+              </a:rPr>
+              <a:t>결정 지도</a:t>
+            </a:r>
+            <a:r>
+              <a:rPr sz="1800" b="0">
+                <a:solidFill>
+                  <a:srgbClr val="000000"/>
+                </a:solidFill>
+                <a:latin typeface="맑은 고딕"/>
+                <a:ea typeface="맑은 고딕"/>
+              </a:rPr>
+              <a:t> —</a:t>
+            </a:r>
+            <a:r>
+              <a:rPr sz="1600" b="0">
+                <a:solidFill>
+                  <a:srgbClr val="000000"/>
+                </a:solidFill>
+                <a:latin typeface="맑은 고딕"/>
+                <a:ea typeface="맑은 고딕"/>
+              </a:rPr>
+              <a:t> 활용 방식 → 명세·수용 기준 → 맥락 → 위임 경계 → 개입·가드레일·하네스 → 실패·평가</a:t>
+            </a:r>
+          </a:p>
+          <a:p>
+            <a:pPr marL="342900" indent="0">
+              <a:spcBef>
+                <a:spcPts val="600"/>
+              </a:spcBef>
+              <a:spcAft>
+                <a:spcPts val="600"/>
+              </a:spcAft>
+              <a:buNone/>
+            </a:pPr>
+            <a:r>
+              <a:rPr sz="1800" b="1">
+                <a:solidFill>
+                  <a:srgbClr val="000000"/>
+                </a:solidFill>
+                <a:latin typeface="맑은 고딕"/>
+                <a:ea typeface="맑은 고딕"/>
+              </a:rPr>
+              <a:t>다음 세션</a:t>
+            </a:r>
+          </a:p>
+          <a:p>
+            <a:pPr lvl="2" marL="723900" indent="-368300">
+              <a:spcBef>
+                <a:spcPts val="600"/>
+              </a:spcBef>
+              <a:spcAft>
+                <a:spcPts val="600"/>
+              </a:spcAft>
+              <a:buSzPct val="90000"/>
+              <a:buFont typeface="Wingdings" pitchFamily="2" charset="2"/>
+              <a:buChar char=""/>
+            </a:pPr>
+            <a:r>
+              <a:rPr sz="1800" b="0">
+                <a:solidFill>
+                  <a:srgbClr val="000000"/>
+                </a:solidFill>
+                <a:latin typeface="맑은 고딕"/>
+                <a:ea typeface="맑은 고딕"/>
+              </a:rPr>
+              <a:t>"</a:t>
+            </a:r>
+            <a:r>
+              <a:rPr sz="1800" b="1">
+                <a:solidFill>
+                  <a:srgbClr val="000000"/>
+                </a:solidFill>
+                <a:latin typeface="맑은 고딕"/>
+                <a:ea typeface="맑은 고딕"/>
+              </a:rPr>
+              <a:t>02. 작업 특성에 따른 AI 활용 방식</a:t>
+            </a:r>
+            <a:r>
+              <a:rPr sz="1800" b="0">
+                <a:solidFill>
+                  <a:srgbClr val="000000"/>
+                </a:solidFill>
+                <a:latin typeface="맑은 고딕"/>
+                <a:ea typeface="맑은 고딕"/>
+              </a:rPr>
+              <a:t>" —</a:t>
+            </a:r>
+            <a:r>
+              <a:rPr sz="1600" b="0">
+                <a:solidFill>
+                  <a:srgbClr val="000000"/>
+                </a:solidFill>
+                <a:latin typeface="맑은 고딕"/>
+                <a:ea typeface="맑은 고딕"/>
+              </a:rPr>
+              <a:t> 작업의 특성으로 수작업·대화형 보조·워크플로·에이전트 중 가장 단순한 충분한 형태를 고른다.</a:t>
+            </a:r>
+          </a:p>
+        </p:txBody>
+      </p:sp>
+    </p:spTree>
+    <p:extLst>
+      <p:ext uri="{BB962C8B-B14F-4D97-AF65-F5344CB8AC3E}">
+        <p14:creationId xmlns:p14="http://schemas.microsoft.com/office/powerpoint/2010/main" val="3555436673"/>
+      </p:ext>
+    </p:extLst>
+  </p:cSld>
+  <p:clrMapOvr>
+    <a:masterClrMapping/>
+  </p:clrMapOvr>
+</p:sld>
+</file>
+
+<file path=ppt/slides/slide28.xml><?xml version="1.0" encoding="utf-8"?>
+<p:sld xmlns:a="http://schemas.openxmlformats.org/drawingml/2006/main" xmlns:r="http://schemas.openxmlformats.org/officeDocument/2006/relationships" xmlns:p="http://schemas.openxmlformats.org/presentationml/2006/main">
+  <p:cSld>
+    <p:spTree>
+      <p:nvGrpSpPr>
+        <p:cNvPr id="1" name="">
+          <a:extLst>
+            <a:ext uri="{FF2B5EF4-FFF2-40B4-BE49-F238E27FC236}">
+              <a16:creationId xmlns:a16="http://schemas.microsoft.com/office/drawing/2014/main" id="{8E4F1F13-426B-086B-7D8C-9A58A0F879DB}"/>
+            </a:ext>
+          </a:extLst>
+        </p:cNvPr>
+        <p:cNvGrpSpPr/>
+        <p:nvPr/>
+      </p:nvGrpSpPr>
+      <p:grpSpPr>
+        <a:xfrm>
+          <a:off x="0" y="0"/>
+          <a:ext cx="0" cy="0"/>
+          <a:chOff x="0" y="0"/>
+          <a:chExt cx="0" cy="0"/>
+        </a:xfrm>
+      </p:grpSpPr>
+      <p:sp>
+        <p:nvSpPr>
+          <p:cNvPr id="2" name="제목 1">
+            <a:extLst>
+              <a:ext uri="{FF2B5EF4-FFF2-40B4-BE49-F238E27FC236}">
+                <a16:creationId xmlns:a16="http://schemas.microsoft.com/office/drawing/2014/main" id="{AA26A92D-924E-0575-9551-F8FD7BFD3FAD}"/>
+              </a:ext>
+            </a:extLst>
+          </p:cNvPr>
+          <p:cNvSpPr>
+            <a:spLocks noGrp="1"/>
+          </p:cNvSpPr>
+          <p:nvPr>
+            <p:ph type="title"/>
+          </p:nvPr>
+        </p:nvSpPr>
+        <p:spPr/>
+        <p:txBody>
+          <a:bodyPr/>
+          <a:lstStyle/>
+          <a:p>
+            <a:r>
+              <a:rPr sz="2400" b="1">
+                <a:solidFill>
+                  <a:srgbClr val="000000"/>
+                </a:solidFill>
+                <a:latin typeface="맑은 고딕"/>
+                <a:ea typeface="맑은 고딕"/>
+              </a:rPr>
+              <a:t>추측 목록과 사람이 정할 결정 </a:t>
+            </a:r>
+            <a:r>
+              <a:rPr sz="1800" b="1">
+                <a:solidFill>
+                  <a:srgbClr val="000000"/>
+                </a:solidFill>
+                <a:latin typeface="맑은 고딕"/>
+                <a:ea typeface="맑은 고딕"/>
+              </a:rPr>
+              <a:t>(안)</a:t>
+            </a:r>
+          </a:p>
+          <a:p>
+            <a:r>
+              <a:rPr sz="1100" b="1">
+                <a:solidFill>
+                  <a:srgbClr val="000000"/>
+                </a:solidFill>
+                <a:latin typeface="맑은 고딕"/>
+                <a:ea typeface="맑은 고딕"/>
+              </a:rPr>
+              <a:t>별첨. 실습 답</a:t>
+            </a:r>
+          </a:p>
+        </p:txBody>
+      </p:sp>
+      <p:sp>
+        <p:nvSpPr>
+          <p:cNvPr id="3" name="슬라이드 번호 개체 틀 2">
+            <a:extLst>
+              <a:ext uri="{FF2B5EF4-FFF2-40B4-BE49-F238E27FC236}">
+                <a16:creationId xmlns:a16="http://schemas.microsoft.com/office/drawing/2014/main" id="{12CF30EE-4DFD-8063-56B8-B8689E76DFCA}"/>
+              </a:ext>
+            </a:extLst>
+          </p:cNvPr>
+          <p:cNvSpPr>
+            <a:spLocks noGrp="1"/>
+          </p:cNvSpPr>
+          <p:nvPr>
+            <p:ph type="sldNum" sz="quarter" idx="10"/>
+          </p:nvPr>
+        </p:nvSpPr>
+        <p:spPr/>
+        <p:txBody>
+          <a:bodyPr/>
+          <a:lstStyle/>
+          <a:p>
+            <a:pPr>
+              <a:defRPr/>
+            </a:pPr>
+            <a:r>
+              <a:rPr lang="en-US" altLang="ko-KR">
+                <a:solidFill>
+                  <a:prstClr val="black"/>
+                </a:solidFill>
+              </a:rPr>
+              <a:t>- 28 -</a:t>
             </a:r>
           </a:p>
         </p:txBody>
@@ -20489,8 +20710,8 @@
         </p:blipFill>
         <p:spPr>
           <a:xfrm>
-            <a:off x="1944688" y="3450336"/>
-            <a:ext cx="5254625" cy="2206625"/>
+            <a:off x="1948346" y="3450336"/>
+            <a:ext cx="5247308" cy="2203552"/>
           </a:xfrm>
           <a:prstGeom prst="rect">
             <a:avLst/>
@@ -23447,7 +23668,7 @@
           </p:nvPr>
         </p:nvGraphicFramePr>
         <p:xfrm>
-          <a:off x="1635316" y="3912172"/>
+          <a:off x="1635316" y="4177592"/>
           <a:ext cx="5859780" cy="3873500"/>
         </p:xfrm>
         <a:graphic>
@@ -24320,7 +24541,7 @@
         </p:nvSpPr>
         <p:spPr>
           <a:xfrm>
-            <a:off x="365760" y="3613722"/>
+            <a:off x="365760" y="3879142"/>
             <a:ext cx="8412480" cy="222250"/>
           </a:xfrm>
           <a:prstGeom prst="rect">
@@ -24420,8 +24641,8 @@
         </p:blipFill>
         <p:spPr>
           <a:xfrm>
-            <a:off x="1453706" y="2124456"/>
-            <a:ext cx="6223000" cy="1150938"/>
+            <a:off x="736156" y="2124456"/>
+            <a:ext cx="7658100" cy="1416358"/>
           </a:xfrm>
           <a:prstGeom prst="rect">
             <a:avLst/>

--- a/courses/ai-native/sessions/s01.pptx
+++ b/courses/ai-native/sessions/s01.pptx
@@ -4495,7 +4495,7 @@
                 <a:latin typeface="맑은 고딕"/>
                 <a:ea typeface="맑은 고딕"/>
               </a:rPr>
-              <a:t>"소프트웨어 시스템을 만드는 일에서 가장 어려운 부분은 </a:t>
+              <a:t>소프트웨어 시스템을 만드는 일에서 가장 어려운 부분은 </a:t>
             </a:r>
             <a:r>
               <a:rPr sz="1800" b="1">
@@ -4515,7 +4515,7 @@
                 <a:latin typeface="맑은 고딕"/>
                 <a:ea typeface="맑은 고딕"/>
               </a:rPr>
-              <a:t>이다"</a:t>
+              <a:t>이다</a:t>
             </a:r>
             <a:r>
               <a:rPr sz="1000" b="0">
@@ -4535,27 +4535,7 @@
                 <a:latin typeface="맑은 고딕"/>
                 <a:ea typeface="맑은 고딕"/>
               </a:rPr>
-              <a:t>"The hardest single part of building a software system is deciding precisely what to build."</a:t>
-            </a:r>
-            <a:r>
-              <a:rPr sz="1000" b="0">
-                <a:solidFill>
-                  <a:srgbClr val="000000"/>
-                </a:solidFill>
-                <a:latin typeface="맑은 고딕"/>
-                <a:ea typeface="맑은 고딕"/>
-              </a:rPr>
-              <a:t>, </a:t>
-            </a:r>
-            <a:r>
-              <a:rPr sz="1000" b="0">
-                <a:solidFill>
-                  <a:srgbClr val="000000"/>
-                </a:solidFill>
-                <a:latin typeface="맑은 고딕"/>
-                <a:ea typeface="맑은 고딕"/>
-              </a:rPr>
-              <a:t>[Brooks 1986]</a:t>
+              <a:t>"The hardest single part of building a software system is deciding precisely what to build.", [Brooks 1986]</a:t>
             </a:r>
           </a:p>
           <a:p>
@@ -5050,6 +5030,26 @@
               <a:buChar char=""/>
             </a:pPr>
             <a:r>
+              <a:rPr sz="1800" b="1">
+                <a:solidFill>
+                  <a:srgbClr val="000000"/>
+                </a:solidFill>
+                <a:latin typeface="맑은 고딕"/>
+                <a:ea typeface="맑은 고딕"/>
+              </a:rPr>
+              <a:t>작화</a:t>
+            </a:r>
+            <a:r>
+              <a:rPr sz="1400" b="0">
+                <a:solidFill>
+                  <a:srgbClr val="000000"/>
+                </a:solidFill>
+                <a:latin typeface="맑은 고딕"/>
+                <a:ea typeface="맑은 고딕"/>
+              </a:rPr>
+              <a:t>(confabulation)</a:t>
+            </a:r>
+            <a:r>
               <a:rPr sz="1800" b="0">
                 <a:solidFill>
                   <a:srgbClr val="000000"/>
@@ -5057,7 +5057,7 @@
                 <a:latin typeface="맑은 고딕"/>
                 <a:ea typeface="맑은 고딕"/>
               </a:rPr>
-              <a:t>"</a:t>
+              <a:t>는 자신 있게 말하지만 </a:t>
             </a:r>
             <a:r>
               <a:rPr sz="1800" b="1">
@@ -5067,17 +5067,7 @@
                 <a:latin typeface="맑은 고딕"/>
                 <a:ea typeface="맑은 고딕"/>
               </a:rPr>
-              <a:t>작화</a:t>
-            </a:r>
-            <a:r>
-              <a:rPr sz="1400" b="0">
-                <a:solidFill>
-                  <a:srgbClr val="000000"/>
-                </a:solidFill>
-                <a:latin typeface="맑은 고딕"/>
-                <a:ea typeface="맑은 고딕"/>
-              </a:rPr>
-              <a:t>(confabulation)</a:t>
+              <a:t>틀리거나 거짓인 내용</a:t>
             </a:r>
             <a:r>
               <a:rPr sz="1800" b="0">
@@ -5087,27 +5077,7 @@
                 <a:latin typeface="맑은 고딕"/>
                 <a:ea typeface="맑은 고딕"/>
               </a:rPr>
-              <a:t>는 자신 있게 말하지만 </a:t>
-            </a:r>
-            <a:r>
-              <a:rPr sz="1800" b="1">
-                <a:solidFill>
-                  <a:srgbClr val="000000"/>
-                </a:solidFill>
-                <a:latin typeface="맑은 고딕"/>
-                <a:ea typeface="맑은 고딕"/>
-              </a:rPr>
-              <a:t>틀리거나 거짓인 내용</a:t>
-            </a:r>
-            <a:r>
-              <a:rPr sz="1800" b="0">
-                <a:solidFill>
-                  <a:srgbClr val="000000"/>
-                </a:solidFill>
-                <a:latin typeface="맑은 고딕"/>
-                <a:ea typeface="맑은 고딕"/>
-              </a:rPr>
-              <a:t>을 만드는 것이다"</a:t>
+              <a:t>을 만들어 내는 것이다</a:t>
             </a:r>
             <a:r>
               <a:rPr sz="1000" b="0">
@@ -5127,27 +5097,7 @@
                 <a:latin typeface="맑은 고딕"/>
                 <a:ea typeface="맑은 고딕"/>
               </a:rPr>
-              <a:t>"Confabulation: The production of confidently stated but erroneous or false content"</a:t>
-            </a:r>
-            <a:r>
-              <a:rPr sz="1000" b="0">
-                <a:solidFill>
-                  <a:srgbClr val="000000"/>
-                </a:solidFill>
-                <a:latin typeface="맑은 고딕"/>
-                <a:ea typeface="맑은 고딕"/>
-              </a:rPr>
-              <a:t>, </a:t>
-            </a:r>
-            <a:r>
-              <a:rPr sz="1000" b="0">
-                <a:solidFill>
-                  <a:srgbClr val="000000"/>
-                </a:solidFill>
-                <a:latin typeface="맑은 고딕"/>
-                <a:ea typeface="맑은 고딕"/>
-              </a:rPr>
-              <a:t>[NIST 2024]</a:t>
+              <a:t>"Confabulation: The production of confidently stated but erroneous or false content", [NIST 2024]</a:t>
             </a:r>
           </a:p>
           <a:p>
@@ -5536,7 +5486,7 @@
                 <a:latin typeface="맑은 고딕"/>
                 <a:ea typeface="맑은 고딕"/>
               </a:rPr>
-              <a:t>"맥락은 </a:t>
+              <a:t>맥락은 </a:t>
             </a:r>
             <a:r>
               <a:rPr sz="1800" b="1">
@@ -5546,7 +5496,7 @@
                 <a:latin typeface="맑은 고딕"/>
                 <a:ea typeface="맑은 고딕"/>
               </a:rPr>
-              <a:t>양이 정해진 자원</a:t>
+              <a:t>한정된 자원</a:t>
             </a:r>
             <a:r>
               <a:rPr sz="1800" b="0">
@@ -5556,7 +5506,7 @@
                 <a:latin typeface="맑은 고딕"/>
                 <a:ea typeface="맑은 고딕"/>
               </a:rPr>
-              <a:t>이며, 더 넣을수록 </a:t>
+              <a:t>으로 다뤄야 하며 더 넣을수록 </a:t>
             </a:r>
             <a:r>
               <a:rPr sz="1800" b="1">
@@ -5566,17 +5516,7 @@
                 <a:latin typeface="맑은 고딕"/>
                 <a:ea typeface="맑은 고딕"/>
               </a:rPr>
-              <a:t>얻는 효과가 줄어든다</a:t>
-            </a:r>
-            <a:r>
-              <a:rPr sz="1800" b="0">
-                <a:solidFill>
-                  <a:srgbClr val="000000"/>
-                </a:solidFill>
-                <a:latin typeface="맑은 고딕"/>
-                <a:ea typeface="맑은 고딕"/>
-              </a:rPr>
-              <a:t>"</a:t>
+              <a:t>한계 효용이 줄어든다</a:t>
             </a:r>
             <a:r>
               <a:rPr sz="1000" b="0">
@@ -5596,27 +5536,7 @@
                 <a:latin typeface="맑은 고딕"/>
                 <a:ea typeface="맑은 고딕"/>
               </a:rPr>
-              <a:t>"Context, therefore, must be treated as a finite resource with diminishing marginal returns."</a:t>
-            </a:r>
-            <a:r>
-              <a:rPr sz="1000" b="0">
-                <a:solidFill>
-                  <a:srgbClr val="000000"/>
-                </a:solidFill>
-                <a:latin typeface="맑은 고딕"/>
-                <a:ea typeface="맑은 고딕"/>
-              </a:rPr>
-              <a:t>, </a:t>
-            </a:r>
-            <a:r>
-              <a:rPr sz="1000" b="0">
-                <a:solidFill>
-                  <a:srgbClr val="000000"/>
-                </a:solidFill>
-                <a:latin typeface="맑은 고딕"/>
-                <a:ea typeface="맑은 고딕"/>
-              </a:rPr>
-              <a:t>[Anthropic 2025c]</a:t>
+              <a:t>"Context, therefore, must be treated as a finite resource with diminishing marginal returns.", [Anthropic 2025c]</a:t>
             </a:r>
           </a:p>
           <a:p>
@@ -5951,7 +5871,7 @@
           </p:nvPr>
         </p:nvGraphicFramePr>
         <p:xfrm>
-          <a:off x="1480375" y="2898948"/>
+          <a:off x="1480375" y="3061046"/>
           <a:ext cx="6169660" cy="3873500"/>
         </p:xfrm>
         <a:graphic>
@@ -6451,7 +6371,7 @@
         <p:spPr>
           <a:xfrm>
             <a:off x="365760" y="960120"/>
-            <a:ext cx="8412480" cy="1587442"/>
+            <a:ext cx="8412480" cy="1739328"/>
           </a:xfrm>
           <a:prstGeom prst="rect">
             <a:avLst/>
@@ -6524,7 +6444,7 @@
                 <a:latin typeface="맑은 고딕"/>
                 <a:ea typeface="맑은 고딕"/>
               </a:rPr>
-              <a:t>"모델을 언어의 </a:t>
+              <a:t>모델을 언어의 </a:t>
             </a:r>
             <a:r>
               <a:rPr sz="1800" b="1">
@@ -6544,7 +6464,7 @@
                 <a:latin typeface="맑은 고딕"/>
                 <a:ea typeface="맑은 고딕"/>
               </a:rPr>
-              <a:t>로 삼고, 팀 안의 모든 소통과 </a:t>
+              <a:t>로 삼고 팀 안의 모든 소통과 </a:t>
             </a:r>
             <a:r>
               <a:rPr sz="1800" b="1">
@@ -6564,7 +6484,7 @@
                 <a:latin typeface="맑은 고딕"/>
                 <a:ea typeface="맑은 고딕"/>
               </a:rPr>
-              <a:t>에서 그 언어를 끈질기게 쓴다"</a:t>
+              <a:t>에서 그 언어를 끈질기게 쓰기로 팀이 약속한다</a:t>
             </a:r>
             <a:r>
               <a:rPr sz="1000" b="0">
@@ -6584,27 +6504,7 @@
                 <a:latin typeface="맑은 고딕"/>
                 <a:ea typeface="맑은 고딕"/>
               </a:rPr>
-              <a:t>"Use the model as the backbone of a language. Commit the team to exercising that language relentlessly in all communication within the team and in the code."</a:t>
-            </a:r>
-            <a:r>
-              <a:rPr sz="1000" b="0">
-                <a:solidFill>
-                  <a:srgbClr val="000000"/>
-                </a:solidFill>
-                <a:latin typeface="맑은 고딕"/>
-                <a:ea typeface="맑은 고딕"/>
-              </a:rPr>
-              <a:t>, </a:t>
-            </a:r>
-            <a:r>
-              <a:rPr sz="1000" b="0">
-                <a:solidFill>
-                  <a:srgbClr val="000000"/>
-                </a:solidFill>
-                <a:latin typeface="맑은 고딕"/>
-                <a:ea typeface="맑은 고딕"/>
-              </a:rPr>
-              <a:t>[Evans 2015]</a:t>
+              <a:t>"Use the model as the backbone of a language. Commit the team to exercising that language relentlessly in all communication within the team and in the code.", [Evans 2015]</a:t>
             </a:r>
           </a:p>
         </p:txBody>
@@ -6688,7 +6588,7 @@
         </p:nvSpPr>
         <p:spPr>
           <a:xfrm>
-            <a:off x="365760" y="2600498"/>
+            <a:off x="365760" y="2762596"/>
             <a:ext cx="8412480" cy="222250"/>
           </a:xfrm>
           <a:prstGeom prst="rect">
@@ -6737,7 +6637,7 @@
         </p:nvSpPr>
         <p:spPr>
           <a:xfrm>
-            <a:off x="365760" y="4279548"/>
+            <a:off x="365760" y="4441646"/>
             <a:ext cx="8412480" cy="781278"/>
           </a:xfrm>
           <a:prstGeom prst="rect">
@@ -8162,7 +8062,7 @@
                 <a:latin typeface="맑은 고딕"/>
                 <a:ea typeface="맑은 고딕"/>
               </a:rPr>
-              <a:t>"온톨로지는 </a:t>
+              <a:t>온톨로지는 </a:t>
             </a:r>
             <a:r>
               <a:rPr sz="1800" b="1">
@@ -8182,7 +8082,7 @@
                 <a:latin typeface="맑은 고딕"/>
                 <a:ea typeface="맑은 고딕"/>
               </a:rPr>
-              <a:t>다"</a:t>
+              <a:t>다</a:t>
             </a:r>
             <a:r>
               <a:rPr sz="1000" b="0">
@@ -8202,27 +8102,7 @@
                 <a:latin typeface="맑은 고딕"/>
                 <a:ea typeface="맑은 고딕"/>
               </a:rPr>
-              <a:t>"An ontology is an explicit specification of a conceptualization."</a:t>
-            </a:r>
-            <a:r>
-              <a:rPr sz="1000" b="0">
-                <a:solidFill>
-                  <a:srgbClr val="000000"/>
-                </a:solidFill>
-                <a:latin typeface="맑은 고딕"/>
-                <a:ea typeface="맑은 고딕"/>
-              </a:rPr>
-              <a:t>, </a:t>
-            </a:r>
-            <a:r>
-              <a:rPr sz="1000" b="0">
-                <a:solidFill>
-                  <a:srgbClr val="000000"/>
-                </a:solidFill>
-                <a:latin typeface="맑은 고딕"/>
-                <a:ea typeface="맑은 고딕"/>
-              </a:rPr>
-              <a:t>[Gruber 1993]</a:t>
+              <a:t>"An ontology is an explicit specification of a conceptualization.", [Gruber 1993]</a:t>
             </a:r>
           </a:p>
           <a:p>
@@ -11999,7 +11879,7 @@
                 <a:latin typeface="맑은 고딕"/>
                 <a:ea typeface="맑은 고딕"/>
               </a:rPr>
-              <a:t>"워크플로는 LLM과 도구가 </a:t>
+              <a:t>워크플로는 LLM과 도구가 </a:t>
             </a:r>
             <a:r>
               <a:rPr sz="1800" b="1">
@@ -12019,7 +11899,7 @@
                 <a:latin typeface="맑은 고딕"/>
                 <a:ea typeface="맑은 고딕"/>
               </a:rPr>
-              <a:t>로 조율되는 시스템이다"</a:t>
+              <a:t>로 조율되는 시스템이다</a:t>
             </a:r>
             <a:r>
               <a:rPr sz="1000" b="0">
@@ -12039,27 +11919,7 @@
                 <a:latin typeface="맑은 고딕"/>
                 <a:ea typeface="맑은 고딕"/>
               </a:rPr>
-              <a:t>"Workflows are systems where LLMs and tools are orchestrated through predefined code paths."</a:t>
-            </a:r>
-            <a:r>
-              <a:rPr sz="1000" b="0">
-                <a:solidFill>
-                  <a:srgbClr val="000000"/>
-                </a:solidFill>
-                <a:latin typeface="맑은 고딕"/>
-                <a:ea typeface="맑은 고딕"/>
-              </a:rPr>
-              <a:t>, </a:t>
-            </a:r>
-            <a:r>
-              <a:rPr sz="1000" b="0">
-                <a:solidFill>
-                  <a:srgbClr val="000000"/>
-                </a:solidFill>
-                <a:latin typeface="맑은 고딕"/>
-                <a:ea typeface="맑은 고딕"/>
-              </a:rPr>
-              <a:t>[Anthropic 2024]</a:t>
+              <a:t>"Workflows are systems where LLMs and tools are orchestrated through predefined code paths.", [Anthropic 2024]</a:t>
             </a:r>
           </a:p>
           <a:p>
@@ -12082,7 +11942,7 @@
                 <a:latin typeface="맑은 고딕"/>
                 <a:ea typeface="맑은 고딕"/>
               </a:rPr>
-              <a:t>"에이전트는 LLM이 </a:t>
+              <a:t>에이전트는 LLM이 </a:t>
             </a:r>
             <a:r>
               <a:rPr sz="1800" b="1">
@@ -12092,7 +11952,7 @@
                 <a:latin typeface="맑은 고딕"/>
                 <a:ea typeface="맑은 고딕"/>
               </a:rPr>
-              <a:t>자기 과정과 도구 사용을 스스로 정하며</a:t>
+              <a:t>자기 과정과 도구 사용을 스스로 정하면서</a:t>
             </a:r>
             <a:r>
               <a:rPr sz="1800" b="0">
@@ -12102,7 +11962,7 @@
                 <a:latin typeface="맑은 고딕"/>
                 <a:ea typeface="맑은 고딕"/>
               </a:rPr>
-              <a:t>, 일을 어떻게 이룰지 통제하는 시스템이다"</a:t>
+              <a:t> 일을 어떻게 이룰지 통제하는 시스템이다</a:t>
             </a:r>
             <a:r>
               <a:rPr sz="1000" b="0">
@@ -12122,27 +11982,7 @@
                 <a:latin typeface="맑은 고딕"/>
                 <a:ea typeface="맑은 고딕"/>
               </a:rPr>
-              <a:t>"Agents, on the other hand, are systems where LLMs dynamically direct their own processes and tool usage, maintaining control over how they accomplish tasks."</a:t>
-            </a:r>
-            <a:r>
-              <a:rPr sz="1000" b="0">
-                <a:solidFill>
-                  <a:srgbClr val="000000"/>
-                </a:solidFill>
-                <a:latin typeface="맑은 고딕"/>
-                <a:ea typeface="맑은 고딕"/>
-              </a:rPr>
-              <a:t>, </a:t>
-            </a:r>
-            <a:r>
-              <a:rPr sz="1000" b="0">
-                <a:solidFill>
-                  <a:srgbClr val="000000"/>
-                </a:solidFill>
-                <a:latin typeface="맑은 고딕"/>
-                <a:ea typeface="맑은 고딕"/>
-              </a:rPr>
-              <a:t>[Anthropic 2024]</a:t>
+              <a:t>"Agents, on the other hand, are systems where LLMs dynamically direct their own processes and tool usage, maintaining control over how they accomplish tasks.", [Anthropic 2024]</a:t>
             </a:r>
           </a:p>
           <a:p>
@@ -12521,7 +12361,7 @@
                 <a:latin typeface="맑은 고딕"/>
                 <a:ea typeface="맑은 고딕"/>
               </a:rPr>
-              <a:t>"바이브 코딩에서는 코드가 아니라 </a:t>
+              <a:t>바이브 코딩에서는 코드가 아니라 </a:t>
             </a:r>
             <a:r>
               <a:rPr sz="1800" b="1">
@@ -12541,7 +12381,7 @@
                 <a:latin typeface="맑은 고딕"/>
                 <a:ea typeface="맑은 고딕"/>
               </a:rPr>
-              <a:t> 신경 쓴다"</a:t>
+              <a:t> 신경 쓴다</a:t>
             </a:r>
             <a:r>
               <a:rPr sz="1000" b="0">
@@ -12561,27 +12401,7 @@
                 <a:latin typeface="맑은 고딕"/>
                 <a:ea typeface="맑은 고딕"/>
               </a:rPr>
-              <a:t>"In vibe coding you don't care about the code, just the behavior of the system."</a:t>
-            </a:r>
-            <a:r>
-              <a:rPr sz="1000" b="0">
-                <a:solidFill>
-                  <a:srgbClr val="000000"/>
-                </a:solidFill>
-                <a:latin typeface="맑은 고딕"/>
-                <a:ea typeface="맑은 고딕"/>
-              </a:rPr>
-              <a:t>, </a:t>
-            </a:r>
-            <a:r>
-              <a:rPr sz="1000" b="0">
-                <a:solidFill>
-                  <a:srgbClr val="000000"/>
-                </a:solidFill>
-                <a:latin typeface="맑은 고딕"/>
-                <a:ea typeface="맑은 고딕"/>
-              </a:rPr>
-              <a:t>[Beck 2025]</a:t>
+              <a:t>"In vibe coding you don't care about the code, just the behavior of the system.", [Beck 2025]</a:t>
             </a:r>
           </a:p>
           <a:p>
@@ -12604,7 +12424,7 @@
                 <a:latin typeface="맑은 고딕"/>
                 <a:ea typeface="맑은 고딕"/>
               </a:rPr>
-              <a:t>"증강 코딩에서는 </a:t>
+              <a:t>증강 코딩에서는 </a:t>
             </a:r>
             <a:r>
               <a:rPr sz="1800" b="1">
@@ -12614,7 +12434,7 @@
                 <a:latin typeface="맑은 고딕"/>
                 <a:ea typeface="맑은 고딕"/>
               </a:rPr>
-              <a:t>코드와 그 복잡도, 테스트와 그 커버리지</a:t>
+              <a:t>코드와 그 복잡도·테스트와 그 커버리지</a:t>
             </a:r>
             <a:r>
               <a:rPr sz="1800" b="0">
@@ -12624,7 +12444,7 @@
                 <a:latin typeface="맑은 고딕"/>
                 <a:ea typeface="맑은 고딕"/>
               </a:rPr>
-              <a:t>를 신경 쓴다"</a:t>
+              <a:t>를 신경 쓴다</a:t>
             </a:r>
             <a:r>
               <a:rPr sz="1000" b="0">
@@ -12644,27 +12464,7 @@
                 <a:latin typeface="맑은 고딕"/>
                 <a:ea typeface="맑은 고딕"/>
               </a:rPr>
-              <a:t>"In augmented coding you care about the code, its complexity, the tests, &amp; their coverage."</a:t>
-            </a:r>
-            <a:r>
-              <a:rPr sz="1000" b="0">
-                <a:solidFill>
-                  <a:srgbClr val="000000"/>
-                </a:solidFill>
-                <a:latin typeface="맑은 고딕"/>
-                <a:ea typeface="맑은 고딕"/>
-              </a:rPr>
-              <a:t>, </a:t>
-            </a:r>
-            <a:r>
-              <a:rPr sz="1000" b="0">
-                <a:solidFill>
-                  <a:srgbClr val="000000"/>
-                </a:solidFill>
-                <a:latin typeface="맑은 고딕"/>
-                <a:ea typeface="맑은 고딕"/>
-              </a:rPr>
-              <a:t>[Beck 2025]</a:t>
+              <a:t>"In augmented coding you care about the code, its complexity, the tests, &amp; their coverage.", [Beck 2025]</a:t>
             </a:r>
           </a:p>
           <a:p>
@@ -13030,7 +12830,7 @@
                 <a:latin typeface="맑은 고딕"/>
                 <a:ea typeface="맑은 고딕"/>
               </a:rPr>
-              <a:t>"사람이 </a:t>
+              <a:t>사람이 </a:t>
             </a:r>
             <a:r>
               <a:rPr sz="1800" b="1">
@@ -13050,7 +12850,7 @@
                 <a:latin typeface="맑은 고딕"/>
                 <a:ea typeface="맑은 고딕"/>
               </a:rPr>
-              <a:t>, 에이전트가 </a:t>
+              <a:t> 에이전트가 </a:t>
             </a:r>
             <a:r>
               <a:rPr sz="1800" b="1">
@@ -13063,16 +12863,6 @@
               <a:t>실행한다</a:t>
             </a:r>
             <a:r>
-              <a:rPr sz="1800" b="0">
-                <a:solidFill>
-                  <a:srgbClr val="000000"/>
-                </a:solidFill>
-                <a:latin typeface="맑은 고딕"/>
-                <a:ea typeface="맑은 고딕"/>
-              </a:rPr>
-              <a:t>"</a:t>
-            </a:r>
-            <a:r>
               <a:rPr sz="1000" b="0">
                 <a:solidFill>
                   <a:srgbClr val="000000"/>
@@ -13090,27 +12880,7 @@
                 <a:latin typeface="맑은 고딕"/>
                 <a:ea typeface="맑은 고딕"/>
               </a:rPr>
-              <a:t>"Humans steer. Agents execute."</a:t>
-            </a:r>
-            <a:r>
-              <a:rPr sz="1000" b="0">
-                <a:solidFill>
-                  <a:srgbClr val="000000"/>
-                </a:solidFill>
-                <a:latin typeface="맑은 고딕"/>
-                <a:ea typeface="맑은 고딕"/>
-              </a:rPr>
-              <a:t>, </a:t>
-            </a:r>
-            <a:r>
-              <a:rPr sz="1000" b="0">
-                <a:solidFill>
-                  <a:srgbClr val="000000"/>
-                </a:solidFill>
-                <a:latin typeface="맑은 고딕"/>
-                <a:ea typeface="맑은 고딕"/>
-              </a:rPr>
-              <a:t>[Lopopolo 2026]</a:t>
+              <a:t>"Humans steer. Agents execute.", [Lopopolo 2026]</a:t>
             </a:r>
           </a:p>
           <a:p>
@@ -13133,7 +12903,7 @@
                 <a:latin typeface="맑은 고딕"/>
                 <a:ea typeface="맑은 고딕"/>
               </a:rPr>
-              <a:t>"사람은 늘 루프 안에 있지만 </a:t>
+              <a:t>사람은 늘 루프 안에 있지만 </a:t>
             </a:r>
             <a:r>
               <a:rPr sz="1800" b="1">
@@ -13153,7 +12923,7 @@
                 <a:latin typeface="맑은 고딕"/>
                 <a:ea typeface="맑은 고딕"/>
               </a:rPr>
-              <a:t>에서 일한다. 일의 우선순위를 정하고, 사용자 피드백을 </a:t>
+              <a:t>에서 일한다 — 일의 우선순위를 정하고 사용자 피드백을 </a:t>
             </a:r>
             <a:r>
               <a:rPr sz="1800" b="1">
@@ -13173,7 +12943,7 @@
                 <a:latin typeface="맑은 고딕"/>
                 <a:ea typeface="맑은 고딕"/>
               </a:rPr>
-              <a:t>으로 옮기고, </a:t>
+              <a:t>으로 옮기고 </a:t>
             </a:r>
             <a:r>
               <a:rPr sz="1800" b="1">
@@ -13193,7 +12963,7 @@
                 <a:latin typeface="맑은 고딕"/>
                 <a:ea typeface="맑은 고딕"/>
               </a:rPr>
-              <a:t>한다"</a:t>
+              <a:t>한다</a:t>
             </a:r>
             <a:r>
               <a:rPr sz="1000" b="0">
@@ -13213,27 +12983,7 @@
                 <a:latin typeface="맑은 고딕"/>
                 <a:ea typeface="맑은 고딕"/>
               </a:rPr>
-              <a:t>"Humans always remain in the loop, but work at a different layer of abstraction than we used to. We prioritize work, translate user feedback into acceptance criteria, and validate outcomes."</a:t>
-            </a:r>
-            <a:r>
-              <a:rPr sz="1000" b="0">
-                <a:solidFill>
-                  <a:srgbClr val="000000"/>
-                </a:solidFill>
-                <a:latin typeface="맑은 고딕"/>
-                <a:ea typeface="맑은 고딕"/>
-              </a:rPr>
-              <a:t>, </a:t>
-            </a:r>
-            <a:r>
-              <a:rPr sz="1000" b="0">
-                <a:solidFill>
-                  <a:srgbClr val="000000"/>
-                </a:solidFill>
-                <a:latin typeface="맑은 고딕"/>
-                <a:ea typeface="맑은 고딕"/>
-              </a:rPr>
-              <a:t>[Lopopolo 2026]</a:t>
+              <a:t>"Humans always remain in the loop, but work at a different layer of abstraction than we used to. We prioritize work, translate user feedback into acceptance criteria, and validate outcomes.", [Lopopolo 2026]</a:t>
             </a:r>
           </a:p>
           <a:p>
@@ -15691,7 +15441,7 @@
                 <a:latin typeface="맑은 고딕"/>
                 <a:ea typeface="맑은 고딕"/>
               </a:rPr>
-              <a:t>"하네스는 AI 에이전트에서 </a:t>
+              <a:t>하네스는 AI 에이전트에서 </a:t>
             </a:r>
             <a:r>
               <a:rPr sz="1800" b="1">
@@ -15711,7 +15461,7 @@
                 <a:latin typeface="맑은 고딕"/>
                 <a:ea typeface="맑은 고딕"/>
               </a:rPr>
-              <a:t>이다 — 에이전트 = 모델 + 하네스"</a:t>
+              <a:t>이다 — 에이전트 = 모델 + 하네스</a:t>
             </a:r>
             <a:r>
               <a:rPr sz="1000" b="0">
@@ -15731,27 +15481,7 @@
                 <a:latin typeface="맑은 고딕"/>
                 <a:ea typeface="맑은 고딕"/>
               </a:rPr>
-              <a:t>"everything in an AI agent except the model itself - Agent = Model + Harness."</a:t>
-            </a:r>
-            <a:r>
-              <a:rPr sz="1000" b="0">
-                <a:solidFill>
-                  <a:srgbClr val="000000"/>
-                </a:solidFill>
-                <a:latin typeface="맑은 고딕"/>
-                <a:ea typeface="맑은 고딕"/>
-              </a:rPr>
-              <a:t>, </a:t>
-            </a:r>
-            <a:r>
-              <a:rPr sz="1000" b="0">
-                <a:solidFill>
-                  <a:srgbClr val="000000"/>
-                </a:solidFill>
-                <a:latin typeface="맑은 고딕"/>
-                <a:ea typeface="맑은 고딕"/>
-              </a:rPr>
-              <a:t>[Böckeler 2026a]</a:t>
+              <a:t>"everything in an AI agent except the model itself - Agent = Model + Harness.", [Böckeler 2026a]</a:t>
             </a:r>
           </a:p>
           <a:p>
@@ -25431,7 +25161,7 @@
                 <a:latin typeface="맑은 고딕"/>
                 <a:ea typeface="맑은 고딕"/>
               </a:rPr>
-              <a:t>"소프트웨어를 만드는 어려운 부분은 이 개념 구조의 </a:t>
+              <a:t>소프트웨어를 만드는 어려운 부분은 이 개념 구조의 </a:t>
             </a:r>
             <a:r>
               <a:rPr sz="1800" b="1">
@@ -25451,7 +25181,7 @@
                 <a:latin typeface="맑은 고딕"/>
                 <a:ea typeface="맑은 고딕"/>
               </a:rPr>
-              <a:t>이지, 그것을 </a:t>
+              <a:t>이며 그것을 </a:t>
             </a:r>
             <a:r>
               <a:rPr sz="1800" b="1">
@@ -25471,7 +25201,7 @@
                 <a:latin typeface="맑은 고딕"/>
                 <a:ea typeface="맑은 고딕"/>
               </a:rPr>
-              <a:t>이 아니다"</a:t>
+              <a:t>이 아니다</a:t>
             </a:r>
             <a:r>
               <a:rPr sz="1000" b="0">
@@ -25491,27 +25221,7 @@
                 <a:latin typeface="맑은 고딕"/>
                 <a:ea typeface="맑은 고딕"/>
               </a:rPr>
-              <a:t>"I believe the hard part of building software to be the specification, design, and testing of this conceptual construct, not the labor of representing it"</a:t>
-            </a:r>
-            <a:r>
-              <a:rPr sz="1000" b="0">
-                <a:solidFill>
-                  <a:srgbClr val="000000"/>
-                </a:solidFill>
-                <a:latin typeface="맑은 고딕"/>
-                <a:ea typeface="맑은 고딕"/>
-              </a:rPr>
-              <a:t>, </a:t>
-            </a:r>
-            <a:r>
-              <a:rPr sz="1000" b="0">
-                <a:solidFill>
-                  <a:srgbClr val="000000"/>
-                </a:solidFill>
-                <a:latin typeface="맑은 고딕"/>
-                <a:ea typeface="맑은 고딕"/>
-              </a:rPr>
-              <a:t>[Brooks 1986]</a:t>
+              <a:t>"I believe the hard part of building software to be the specification, design, and testing of this conceptual construct, not the labor of representing it", [Brooks 1986]</a:t>
             </a:r>
           </a:p>
         </p:txBody>

--- a/courses/ai-native/sessions/s01.pptx
+++ b/courses/ai-native/sessions/s01.pptx
@@ -4535,7 +4535,27 @@
                 <a:latin typeface="맑은 고딕"/>
                 <a:ea typeface="맑은 고딕"/>
               </a:rPr>
-              <a:t>"The hardest single part of building a software system is deciding precisely what to build.", [Brooks 1986]</a:t>
+              <a:t>"The hardest single part of building a software system is deciding precisely what to build."</a:t>
+            </a:r>
+            <a:r>
+              <a:rPr sz="1000" b="0">
+                <a:solidFill>
+                  <a:srgbClr val="000000"/>
+                </a:solidFill>
+                <a:latin typeface="맑은 고딕"/>
+                <a:ea typeface="맑은 고딕"/>
+              </a:rPr>
+              <a:t>, </a:t>
+            </a:r>
+            <a:r>
+              <a:rPr sz="1000" b="0">
+                <a:solidFill>
+                  <a:srgbClr val="000000"/>
+                </a:solidFill>
+                <a:latin typeface="맑은 고딕"/>
+                <a:ea typeface="맑은 고딕"/>
+              </a:rPr>
+              <a:t>[Brooks 1986]</a:t>
             </a:r>
           </a:p>
           <a:p>
@@ -4994,7 +5014,7 @@
                 <a:latin typeface="맑은 고딕"/>
                 <a:ea typeface="맑은 고딕"/>
               </a:rPr>
-              <a:t>LLM은 엔지니어가 다뤄 온 도구와 성질이 다르다. 결정적으로 동작하는 컴파일러와 달리 </a:t>
+              <a:t>LLM은 엔지니어가 써 온 도구와 성질이 다르다. 같은 입력에 같은 결과를 내는 컴파일러와 달리, </a:t>
             </a:r>
             <a:r>
               <a:rPr sz="1800" b="1">
@@ -5004,7 +5024,7 @@
                 <a:latin typeface="맑은 고딕"/>
                 <a:ea typeface="맑은 고딕"/>
               </a:rPr>
-              <a:t>추측하고, 매번 다르게 답한다</a:t>
+              <a:t>모르는 것을 그럴듯하게 채우고 매번 다르게 답한다</a:t>
             </a:r>
             <a:r>
               <a:rPr sz="1800" b="0">
@@ -5097,7 +5117,27 @@
                 <a:latin typeface="맑은 고딕"/>
                 <a:ea typeface="맑은 고딕"/>
               </a:rPr>
-              <a:t>"Confabulation: The production of confidently stated but erroneous or false content", [NIST 2024]</a:t>
+              <a:t>"Confabulation: The production of confidently stated but erroneous or false content"</a:t>
+            </a:r>
+            <a:r>
+              <a:rPr sz="1000" b="0">
+                <a:solidFill>
+                  <a:srgbClr val="000000"/>
+                </a:solidFill>
+                <a:latin typeface="맑은 고딕"/>
+                <a:ea typeface="맑은 고딕"/>
+              </a:rPr>
+              <a:t>, </a:t>
+            </a:r>
+            <a:r>
+              <a:rPr sz="1000" b="0">
+                <a:solidFill>
+                  <a:srgbClr val="000000"/>
+                </a:solidFill>
+                <a:latin typeface="맑은 고딕"/>
+                <a:ea typeface="맑은 고딕"/>
+              </a:rPr>
+              <a:t>[NIST 2024]</a:t>
             </a:r>
           </a:p>
           <a:p>
@@ -5453,7 +5493,7 @@
                 <a:latin typeface="맑은 고딕"/>
                 <a:ea typeface="맑은 고딕"/>
               </a:rPr>
-              <a:t>그 작업에 주어진 것만</a:t>
+              <a:t>그 작업에서 읽을 수 있는 것만</a:t>
             </a:r>
             <a:r>
               <a:rPr sz="1800" b="0">
@@ -5463,7 +5503,7 @@
                 <a:latin typeface="맑은 고딕"/>
                 <a:ea typeface="맑은 고딕"/>
               </a:rPr>
-              <a:t> 보고 판단한다. 업무 담당자와 정한 업무 규칙도 맥락에 넣지 않으면 모른다.</a:t>
+              <a:t> 보고 판단한다. 업무 담당자와 합의한 규칙이라도 맥락에 넣어 주지 않으면 알지 못한다.</a:t>
             </a:r>
           </a:p>
           <a:p>
@@ -5536,7 +5576,27 @@
                 <a:latin typeface="맑은 고딕"/>
                 <a:ea typeface="맑은 고딕"/>
               </a:rPr>
-              <a:t>"Context, therefore, must be treated as a finite resource with diminishing marginal returns.", [Anthropic 2025c]</a:t>
+              <a:t>"Context, therefore, must be treated as a finite resource with diminishing marginal returns."</a:t>
+            </a:r>
+            <a:r>
+              <a:rPr sz="1000" b="0">
+                <a:solidFill>
+                  <a:srgbClr val="000000"/>
+                </a:solidFill>
+                <a:latin typeface="맑은 고딕"/>
+                <a:ea typeface="맑은 고딕"/>
+              </a:rPr>
+              <a:t>, </a:t>
+            </a:r>
+            <a:r>
+              <a:rPr sz="1000" b="0">
+                <a:solidFill>
+                  <a:srgbClr val="000000"/>
+                </a:solidFill>
+                <a:latin typeface="맑은 고딕"/>
+                <a:ea typeface="맑은 고딕"/>
+              </a:rPr>
+              <a:t>[Anthropic 2025c]</a:t>
             </a:r>
           </a:p>
           <a:p>
@@ -5665,7 +5725,7 @@
                 <a:latin typeface="맑은 고딕"/>
                 <a:ea typeface="맑은 고딕"/>
               </a:rPr>
-              <a:t>많이 넣을수록 좋아지지 않는다</a:t>
+              <a:t>많이 넣는다고 좋아지지 않는다</a:t>
             </a:r>
             <a:r>
               <a:rPr sz="1800" b="0">
@@ -5685,7 +5745,7 @@
                 <a:latin typeface="맑은 고딕"/>
                 <a:ea typeface="맑은 고딕"/>
               </a:rPr>
-              <a:t> 맥락이 길어질수록 중요한 것을 놓친다. 판단을 바꾸는 것을 골라 준다.</a:t>
+              <a:t> 맥락이 길어질수록 중요한 내용을 놓친다. 그래서 판단에 영향을 주는 자료만 골라 준다.</a:t>
             </a:r>
           </a:p>
         </p:txBody>
@@ -6401,7 +6461,7 @@
                 <a:latin typeface="맑은 고딕"/>
                 <a:ea typeface="맑은 고딕"/>
               </a:rPr>
-              <a:t>업무 규칙은 그 규칙이 쓰는 </a:t>
+              <a:t>업무 규칙은 그 안에 쓰인 </a:t>
             </a:r>
             <a:r>
               <a:rPr sz="1800" b="1">
@@ -6411,7 +6471,7 @@
                 <a:latin typeface="맑은 고딕"/>
                 <a:ea typeface="맑은 고딕"/>
               </a:rPr>
-              <a:t>말의 뜻이 고정되어야</a:t>
+              <a:t>말의 뜻이 하나로 정해져야</a:t>
             </a:r>
             <a:r>
               <a:rPr sz="1800" b="0">
@@ -6421,7 +6481,7 @@
                 <a:latin typeface="맑은 고딕"/>
                 <a:ea typeface="맑은 고딕"/>
               </a:rPr>
-              <a:t> 지킬 수 있다. "가격"이라는 한 단어로 두면 에이전트는 어느 가격인지 추측한다.</a:t>
+              <a:t> 지킬 수 있다. "가격"이라고만 적어 두면 에이전트는 어느 가격인지 스스로 고른다.</a:t>
             </a:r>
           </a:p>
           <a:p>
@@ -6504,7 +6564,27 @@
                 <a:latin typeface="맑은 고딕"/>
                 <a:ea typeface="맑은 고딕"/>
               </a:rPr>
-              <a:t>"Use the model as the backbone of a language. Commit the team to exercising that language relentlessly in all communication within the team and in the code.", [Evans 2015]</a:t>
+              <a:t>"Use the model as the backbone of a language. Commit the team to exercising that language relentlessly in all communication within the team and in the code."</a:t>
+            </a:r>
+            <a:r>
+              <a:rPr sz="1000" b="0">
+                <a:solidFill>
+                  <a:srgbClr val="000000"/>
+                </a:solidFill>
+                <a:latin typeface="맑은 고딕"/>
+                <a:ea typeface="맑은 고딕"/>
+              </a:rPr>
+              <a:t>, </a:t>
+            </a:r>
+            <a:r>
+              <a:rPr sz="1000" b="0">
+                <a:solidFill>
+                  <a:srgbClr val="000000"/>
+                </a:solidFill>
+                <a:latin typeface="맑은 고딕"/>
+                <a:ea typeface="맑은 고딕"/>
+              </a:rPr>
+              <a:t>[Evans 2015]</a:t>
             </a:r>
           </a:p>
         </p:txBody>
@@ -6909,7 +6989,7 @@
         <p:spPr>
           <a:xfrm>
             <a:off x="365760" y="960120"/>
-            <a:ext cx="8412480" cy="2514600"/>
+            <a:ext cx="8412480" cy="2148840"/>
           </a:xfrm>
         </p:spPr>
         <p:txBody>
@@ -6935,7 +7015,7 @@
                 <a:latin typeface="맑은 고딕"/>
                 <a:ea typeface="맑은 고딕"/>
               </a:rPr>
-              <a:t>업무 규칙을 모델에 그리면 </a:t>
+              <a:t>업무 규칙을 모델로 그려 두면 </a:t>
             </a:r>
             <a:r>
               <a:rPr sz="1800" b="1">
@@ -6945,7 +7025,7 @@
                 <a:latin typeface="맑은 고딕"/>
                 <a:ea typeface="맑은 고딕"/>
               </a:rPr>
-              <a:t>에이전트가 추측할 빈칸</a:t>
+              <a:t>에이전트가 스스로 채울 빈칸</a:t>
             </a:r>
             <a:r>
               <a:rPr sz="1800" b="0">
@@ -6955,7 +7035,7 @@
                 <a:latin typeface="맑은 고딕"/>
                 <a:ea typeface="맑은 고딕"/>
               </a:rPr>
-              <a:t>이 사라진다. 주문 상태 기계에는 결제 거절과 배송 요청의 업무 규칙이 보인다.</a:t>
+              <a:t>이 줄어든다. 주문 상태 기계 하나에 결제 거절과 배송 요청의 규칙이 함께 드러난다.</a:t>
             </a:r>
           </a:p>
           <a:p>
@@ -7060,7 +7140,7 @@
         </p:nvSpPr>
         <p:spPr>
           <a:xfrm>
-            <a:off x="365760" y="3136392"/>
+            <a:off x="365760" y="3410712"/>
             <a:ext cx="8412480" cy="201168"/>
           </a:xfrm>
           <a:prstGeom prst="rect">
@@ -7104,7 +7184,7 @@
         </p:blipFill>
         <p:spPr>
           <a:xfrm>
-            <a:off x="1056298" y="3374136"/>
+            <a:off x="1056298" y="3648456"/>
             <a:ext cx="7031404" cy="1123462"/>
           </a:xfrm>
           <a:prstGeom prst="rect">
@@ -8102,7 +8182,27 @@
                 <a:latin typeface="맑은 고딕"/>
                 <a:ea typeface="맑은 고딕"/>
               </a:rPr>
-              <a:t>"An ontology is an explicit specification of a conceptualization.", [Gruber 1993]</a:t>
+              <a:t>"An ontology is an explicit specification of a conceptualization."</a:t>
+            </a:r>
+            <a:r>
+              <a:rPr sz="1000" b="0">
+                <a:solidFill>
+                  <a:srgbClr val="000000"/>
+                </a:solidFill>
+                <a:latin typeface="맑은 고딕"/>
+                <a:ea typeface="맑은 고딕"/>
+              </a:rPr>
+              <a:t>, </a:t>
+            </a:r>
+            <a:r>
+              <a:rPr sz="1000" b="0">
+                <a:solidFill>
+                  <a:srgbClr val="000000"/>
+                </a:solidFill>
+                <a:latin typeface="맑은 고딕"/>
+                <a:ea typeface="맑은 고딕"/>
+              </a:rPr>
+              <a:t>[Gruber 1993]</a:t>
             </a:r>
           </a:p>
           <a:p>
@@ -9568,7 +9668,7 @@
                 <a:latin typeface="맑은 고딕"/>
                 <a:ea typeface="맑은 고딕"/>
               </a:rPr>
-              <a:t>3가지 방식은 도구가 아니라 </a:t>
+              <a:t>세 방식을 가르는 것은 쓰는 도구가 아니다. </a:t>
             </a:r>
             <a:r>
               <a:rPr sz="1800" b="1">
@@ -9578,7 +9678,7 @@
                 <a:latin typeface="맑은 고딕"/>
                 <a:ea typeface="맑은 고딕"/>
               </a:rPr>
-              <a:t>작업의 단위, 누가 무엇을 하는가, 무엇으로 검증하는가</a:t>
+              <a:t>맡기는 작업의 단위와, 사람과 LLM이 하는 일과, 무엇으로 결과를 확인하는지</a:t>
             </a:r>
             <a:r>
               <a:rPr sz="1800" b="0">
@@ -10105,7 +10205,7 @@
                 <a:latin typeface="맑은 고딕"/>
                 <a:ea typeface="맑은 고딕"/>
               </a:rPr>
-              <a:t>"주문한다"를 3가지 방식으로 개발하면 </a:t>
+              <a:t>같은 "주문한다"를 세 방식으로 개발하면 </a:t>
             </a:r>
             <a:r>
               <a:rPr sz="1800" b="1">
@@ -10115,7 +10215,7 @@
                 <a:latin typeface="맑은 고딕"/>
                 <a:ea typeface="맑은 고딕"/>
               </a:rPr>
-              <a:t>사람이 손대는 곳</a:t>
+              <a:t>사람이 직접 손대는 자리</a:t>
             </a:r>
             <a:r>
               <a:rPr sz="1800" b="0">
@@ -10125,7 +10225,7 @@
                 <a:latin typeface="맑은 고딕"/>
                 <a:ea typeface="맑은 고딕"/>
               </a:rPr>
-              <a:t>이 달라진다.</a:t>
+              <a:t>가 달라진다.</a:t>
             </a:r>
           </a:p>
           <a:p>
@@ -10273,7 +10373,7 @@
         </p:nvSpPr>
         <p:spPr>
           <a:xfrm>
-            <a:off x="365760" y="2938272"/>
+            <a:off x="365760" y="3212592"/>
             <a:ext cx="8412480" cy="201168"/>
           </a:xfrm>
           <a:prstGeom prst="rect">
@@ -10317,7 +10417,7 @@
         </p:blipFill>
         <p:spPr>
           <a:xfrm>
-            <a:off x="679450" y="3176016"/>
+            <a:off x="679450" y="3450336"/>
             <a:ext cx="7785100" cy="2224314"/>
           </a:xfrm>
           <a:prstGeom prst="rect">
@@ -11278,7 +11378,7 @@
                 <a:latin typeface="맑은 고딕"/>
                 <a:ea typeface="맑은 고딕"/>
               </a:rPr>
-              <a:t>무엇을 만들지, 무엇이 옳은 결과인지</a:t>
+              <a:t>무엇을 만들지와 무엇이 옳은 결과인지</a:t>
             </a:r>
             <a:r>
               <a:rPr sz="1800" b="0">
@@ -11919,7 +12019,27 @@
                 <a:latin typeface="맑은 고딕"/>
                 <a:ea typeface="맑은 고딕"/>
               </a:rPr>
-              <a:t>"Workflows are systems where LLMs and tools are orchestrated through predefined code paths.", [Anthropic 2024]</a:t>
+              <a:t>"Workflows are systems where LLMs and tools are orchestrated through predefined code paths."</a:t>
+            </a:r>
+            <a:r>
+              <a:rPr sz="1000" b="0">
+                <a:solidFill>
+                  <a:srgbClr val="000000"/>
+                </a:solidFill>
+                <a:latin typeface="맑은 고딕"/>
+                <a:ea typeface="맑은 고딕"/>
+              </a:rPr>
+              <a:t>, </a:t>
+            </a:r>
+            <a:r>
+              <a:rPr sz="1000" b="0">
+                <a:solidFill>
+                  <a:srgbClr val="000000"/>
+                </a:solidFill>
+                <a:latin typeface="맑은 고딕"/>
+                <a:ea typeface="맑은 고딕"/>
+              </a:rPr>
+              <a:t>[Anthropic 2024]</a:t>
             </a:r>
           </a:p>
           <a:p>
@@ -11982,7 +12102,27 @@
                 <a:latin typeface="맑은 고딕"/>
                 <a:ea typeface="맑은 고딕"/>
               </a:rPr>
-              <a:t>"Agents, on the other hand, are systems where LLMs dynamically direct their own processes and tool usage, maintaining control over how they accomplish tasks.", [Anthropic 2024]</a:t>
+              <a:t>"Agents, on the other hand, are systems where LLMs dynamically direct their own processes and tool usage, maintaining control over how they accomplish tasks."</a:t>
+            </a:r>
+            <a:r>
+              <a:rPr sz="1000" b="0">
+                <a:solidFill>
+                  <a:srgbClr val="000000"/>
+                </a:solidFill>
+                <a:latin typeface="맑은 고딕"/>
+                <a:ea typeface="맑은 고딕"/>
+              </a:rPr>
+              <a:t>, </a:t>
+            </a:r>
+            <a:r>
+              <a:rPr sz="1000" b="0">
+                <a:solidFill>
+                  <a:srgbClr val="000000"/>
+                </a:solidFill>
+                <a:latin typeface="맑은 고딕"/>
+                <a:ea typeface="맑은 고딕"/>
+              </a:rPr>
+              <a:t>[Anthropic 2024]</a:t>
             </a:r>
           </a:p>
           <a:p>
@@ -12401,7 +12541,27 @@
                 <a:latin typeface="맑은 고딕"/>
                 <a:ea typeface="맑은 고딕"/>
               </a:rPr>
-              <a:t>"In vibe coding you don't care about the code, just the behavior of the system.", [Beck 2025]</a:t>
+              <a:t>"In vibe coding you don't care about the code, just the behavior of the system."</a:t>
+            </a:r>
+            <a:r>
+              <a:rPr sz="1000" b="0">
+                <a:solidFill>
+                  <a:srgbClr val="000000"/>
+                </a:solidFill>
+                <a:latin typeface="맑은 고딕"/>
+                <a:ea typeface="맑은 고딕"/>
+              </a:rPr>
+              <a:t>, </a:t>
+            </a:r>
+            <a:r>
+              <a:rPr sz="1000" b="0">
+                <a:solidFill>
+                  <a:srgbClr val="000000"/>
+                </a:solidFill>
+                <a:latin typeface="맑은 고딕"/>
+                <a:ea typeface="맑은 고딕"/>
+              </a:rPr>
+              <a:t>[Beck 2025]</a:t>
             </a:r>
           </a:p>
           <a:p>
@@ -12464,7 +12624,27 @@
                 <a:latin typeface="맑은 고딕"/>
                 <a:ea typeface="맑은 고딕"/>
               </a:rPr>
-              <a:t>"In augmented coding you care about the code, its complexity, the tests, &amp; their coverage.", [Beck 2025]</a:t>
+              <a:t>"In augmented coding you care about the code, its complexity, the tests, &amp; their coverage."</a:t>
+            </a:r>
+            <a:r>
+              <a:rPr sz="1000" b="0">
+                <a:solidFill>
+                  <a:srgbClr val="000000"/>
+                </a:solidFill>
+                <a:latin typeface="맑은 고딕"/>
+                <a:ea typeface="맑은 고딕"/>
+              </a:rPr>
+              <a:t>, </a:t>
+            </a:r>
+            <a:r>
+              <a:rPr sz="1000" b="0">
+                <a:solidFill>
+                  <a:srgbClr val="000000"/>
+                </a:solidFill>
+                <a:latin typeface="맑은 고딕"/>
+                <a:ea typeface="맑은 고딕"/>
+              </a:rPr>
+              <a:t>[Beck 2025]</a:t>
             </a:r>
           </a:p>
           <a:p>
@@ -12547,7 +12727,27 @@
                 <a:latin typeface="맑은 고딕"/>
                 <a:ea typeface="맑은 고딕"/>
               </a:rPr>
-              <a:t>"seasoned professionals accelerate their work with LLMs while staying proudly and confidently accountable for the software they produce", [Willison 2025b]</a:t>
+              <a:t>"seasoned professionals accelerate their work with LLMs while staying proudly and confidently accountable for the software they produce"</a:t>
+            </a:r>
+            <a:r>
+              <a:rPr sz="1000" b="0">
+                <a:solidFill>
+                  <a:srgbClr val="000000"/>
+                </a:solidFill>
+                <a:latin typeface="맑은 고딕"/>
+                <a:ea typeface="맑은 고딕"/>
+              </a:rPr>
+              <a:t>, </a:t>
+            </a:r>
+            <a:r>
+              <a:rPr sz="1000" b="0">
+                <a:solidFill>
+                  <a:srgbClr val="000000"/>
+                </a:solidFill>
+                <a:latin typeface="맑은 고딕"/>
+                <a:ea typeface="맑은 고딕"/>
+              </a:rPr>
+              <a:t>[Willison 2025b]</a:t>
             </a:r>
           </a:p>
           <a:p>
@@ -12880,7 +13080,27 @@
                 <a:latin typeface="맑은 고딕"/>
                 <a:ea typeface="맑은 고딕"/>
               </a:rPr>
-              <a:t>"Humans steer. Agents execute.", [Lopopolo 2026]</a:t>
+              <a:t>"Humans steer. Agents execute."</a:t>
+            </a:r>
+            <a:r>
+              <a:rPr sz="1000" b="0">
+                <a:solidFill>
+                  <a:srgbClr val="000000"/>
+                </a:solidFill>
+                <a:latin typeface="맑은 고딕"/>
+                <a:ea typeface="맑은 고딕"/>
+              </a:rPr>
+              <a:t>, </a:t>
+            </a:r>
+            <a:r>
+              <a:rPr sz="1000" b="0">
+                <a:solidFill>
+                  <a:srgbClr val="000000"/>
+                </a:solidFill>
+                <a:latin typeface="맑은 고딕"/>
+                <a:ea typeface="맑은 고딕"/>
+              </a:rPr>
+              <a:t>[Lopopolo 2026]</a:t>
             </a:r>
           </a:p>
           <a:p>
@@ -12983,7 +13203,27 @@
                 <a:latin typeface="맑은 고딕"/>
                 <a:ea typeface="맑은 고딕"/>
               </a:rPr>
-              <a:t>"Humans always remain in the loop, but work at a different layer of abstraction than we used to. We prioritize work, translate user feedback into acceptance criteria, and validate outcomes.", [Lopopolo 2026]</a:t>
+              <a:t>"Humans always remain in the loop, but work at a different layer of abstraction than we used to. We prioritize work, translate user feedback into acceptance criteria, and validate outcomes."</a:t>
+            </a:r>
+            <a:r>
+              <a:rPr sz="1000" b="0">
+                <a:solidFill>
+                  <a:srgbClr val="000000"/>
+                </a:solidFill>
+                <a:latin typeface="맑은 고딕"/>
+                <a:ea typeface="맑은 고딕"/>
+              </a:rPr>
+              <a:t>, </a:t>
+            </a:r>
+            <a:r>
+              <a:rPr sz="1000" b="0">
+                <a:solidFill>
+                  <a:srgbClr val="000000"/>
+                </a:solidFill>
+                <a:latin typeface="맑은 고딕"/>
+                <a:ea typeface="맑은 고딕"/>
+              </a:rPr>
+              <a:t>[Lopopolo 2026]</a:t>
             </a:r>
           </a:p>
           <a:p>
@@ -15481,7 +15721,27 @@
                 <a:latin typeface="맑은 고딕"/>
                 <a:ea typeface="맑은 고딕"/>
               </a:rPr>
-              <a:t>"everything in an AI agent except the model itself - Agent = Model + Harness.", [Böckeler 2026a]</a:t>
+              <a:t>"everything in an AI agent except the model itself - Agent = Model + Harness."</a:t>
+            </a:r>
+            <a:r>
+              <a:rPr sz="1000" b="0">
+                <a:solidFill>
+                  <a:srgbClr val="000000"/>
+                </a:solidFill>
+                <a:latin typeface="맑은 고딕"/>
+                <a:ea typeface="맑은 고딕"/>
+              </a:rPr>
+              <a:t>, </a:t>
+            </a:r>
+            <a:r>
+              <a:rPr sz="1000" b="0">
+                <a:solidFill>
+                  <a:srgbClr val="000000"/>
+                </a:solidFill>
+                <a:latin typeface="맑은 고딕"/>
+                <a:ea typeface="맑은 고딕"/>
+              </a:rPr>
+              <a:t>[Böckeler 2026a]</a:t>
             </a:r>
           </a:p>
           <a:p>
@@ -20254,7 +20514,7 @@
                 <a:latin typeface="맑은 고딕"/>
                 <a:ea typeface="맑은 고딕"/>
               </a:rPr>
-              <a:t> 만든다. 첫 기능은 </a:t>
+              <a:t> 만든다. 첫 기능은 고객이 결제까지 마치는 </a:t>
             </a:r>
             <a:r>
               <a:rPr sz="1800" b="1">
@@ -20274,7 +20534,7 @@
                 <a:latin typeface="맑은 고딕"/>
                 <a:ea typeface="맑은 고딕"/>
               </a:rPr>
-              <a:t>이다. 주문은 결제를 포함한다.</a:t>
+              <a:t>이다.</a:t>
             </a:r>
           </a:p>
           <a:p>
@@ -20683,7 +20943,7 @@
                 <a:latin typeface="맑은 고딕"/>
                 <a:ea typeface="맑은 고딕"/>
               </a:rPr>
-              <a:t>업무 담당자의 요청은 한 줄이었다. 테크 리드가 이 한 줄을 코딩 에이전트에게 주자 </a:t>
+              <a:t>업무 담당자가 준 요청은 아래 한 줄뿐이었다. 테크 리드가 이 한 줄을 그대로 코딩 에이전트에게 주자 </a:t>
             </a:r>
             <a:r>
               <a:rPr sz="1800" b="1">
@@ -21810,7 +22070,7 @@
                 <a:latin typeface="맑은 고딕"/>
                 <a:ea typeface="맑은 고딕"/>
               </a:rPr>
-              <a:t>테스트는 모두 통과했지만, 업무 담당자의 리뷰에서 </a:t>
+              <a:t>테스트는 모두 통과했지만, 업무 담당자가 결과를 보자 </a:t>
             </a:r>
             <a:r>
               <a:rPr sz="1800" b="1">
@@ -21820,7 +22080,7 @@
                 <a:latin typeface="맑은 고딕"/>
                 <a:ea typeface="맑은 고딕"/>
               </a:rPr>
-              <a:t>고객과 회사가 실제로 겪을 문제</a:t>
+              <a:t>고객과 회사가 실제로 겪게 될 문제</a:t>
             </a:r>
             <a:r>
               <a:rPr sz="1800" b="0">
@@ -21830,7 +22090,7 @@
                 <a:latin typeface="맑은 고딕"/>
                 <a:ea typeface="맑은 고딕"/>
               </a:rPr>
-              <a:t> 3가지가 나왔다.</a:t>
+              <a:t> 세 가지가 드러났다.</a:t>
             </a:r>
           </a:p>
         </p:txBody>
@@ -22291,7 +22551,7 @@
                 <a:latin typeface="맑은 고딕"/>
                 <a:ea typeface="맑은 고딕"/>
               </a:rPr>
-              <a:t>결제 코드는 업무 규칙 3가지을 모두 </a:t>
+              <a:t>에이전트가 만든 결제 코드는 요청에 없던 업무 규칙 세 가지를 모두 </a:t>
             </a:r>
             <a:r>
               <a:rPr sz="1800" b="1">
@@ -22301,7 +22561,7 @@
                 <a:latin typeface="맑은 고딕"/>
                 <a:ea typeface="맑은 고딕"/>
               </a:rPr>
-              <a:t>추측으로 채웠다</a:t>
+              <a:t>스스로 정해 채웠다</a:t>
             </a:r>
             <a:r>
               <a:rPr sz="1800" b="0">
@@ -22483,7 +22743,7 @@
         </p:nvSpPr>
         <p:spPr>
           <a:xfrm>
-            <a:off x="365760" y="2663952"/>
+            <a:off x="365760" y="2938272"/>
             <a:ext cx="8412480" cy="201168"/>
           </a:xfrm>
           <a:prstGeom prst="rect">
@@ -22527,7 +22787,7 @@
         </p:blipFill>
         <p:spPr>
           <a:xfrm>
-            <a:off x="1024548" y="2901696"/>
+            <a:off x="1024548" y="3176016"/>
             <a:ext cx="7094904" cy="2794000"/>
           </a:xfrm>
           <a:prstGeom prst="rect">
@@ -23398,7 +23658,7 @@
           </p:nvPr>
         </p:nvGraphicFramePr>
         <p:xfrm>
-          <a:off x="1635316" y="4177592"/>
+          <a:off x="1635316" y="4451912"/>
           <a:ext cx="5859780" cy="3873500"/>
         </p:xfrm>
         <a:graphic>
@@ -24137,7 +24397,7 @@
         <p:spPr>
           <a:xfrm>
             <a:off x="365760" y="960120"/>
-            <a:ext cx="8412480" cy="781278"/>
+            <a:ext cx="8412480" cy="1038316"/>
           </a:xfrm>
           <a:prstGeom prst="rect">
             <a:avLst/>
@@ -24167,7 +24427,7 @@
                 <a:latin typeface="맑은 고딕"/>
                 <a:ea typeface="맑은 고딕"/>
               </a:rPr>
-              <a:t>에이전트의 테스트는 </a:t>
+              <a:t>에이전트가 만든 테스트는 업무 규칙이 아니라 </a:t>
             </a:r>
             <a:r>
               <a:rPr sz="1800" b="1">
@@ -24177,7 +24437,7 @@
                 <a:latin typeface="맑은 고딕"/>
                 <a:ea typeface="맑은 고딕"/>
               </a:rPr>
-              <a:t>업무 규칙이 아니라 자기 코드의 동작</a:t>
+              <a:t>자기가 쓴 코드의 동작</a:t>
             </a:r>
             <a:r>
               <a:rPr sz="1800" b="0">
@@ -24187,7 +24447,7 @@
                 <a:latin typeface="맑은 고딕"/>
                 <a:ea typeface="맑은 고딕"/>
               </a:rPr>
-              <a:t>을 기대값으로 삼았다. 같은 코드를 업무 규칙으로 확인하면 3곳에서 실패한다.</a:t>
+              <a:t>을 기대값으로 삼았다. 같은 코드를 업무 규칙으로 확인하면 세 곳에서 실패한다.</a:t>
             </a:r>
           </a:p>
         </p:txBody>
@@ -24271,7 +24531,7 @@
         </p:nvSpPr>
         <p:spPr>
           <a:xfrm>
-            <a:off x="365760" y="3879142"/>
+            <a:off x="365760" y="4153462"/>
             <a:ext cx="8412480" cy="222250"/>
           </a:xfrm>
           <a:prstGeom prst="rect">
@@ -24320,7 +24580,7 @@
         </p:nvSpPr>
         <p:spPr>
           <a:xfrm>
-            <a:off x="365760" y="1886712"/>
+            <a:off x="365760" y="2161032"/>
             <a:ext cx="8412480" cy="201168"/>
           </a:xfrm>
           <a:prstGeom prst="rect">
@@ -24371,7 +24631,7 @@
         </p:blipFill>
         <p:spPr>
           <a:xfrm>
-            <a:off x="736156" y="2124456"/>
+            <a:off x="736156" y="2398776"/>
             <a:ext cx="7658100" cy="1416358"/>
           </a:xfrm>
           <a:prstGeom prst="rect">
@@ -25221,7 +25481,27 @@
                 <a:latin typeface="맑은 고딕"/>
                 <a:ea typeface="맑은 고딕"/>
               </a:rPr>
-              <a:t>"I believe the hard part of building software to be the specification, design, and testing of this conceptual construct, not the labor of representing it", [Brooks 1986]</a:t>
+              <a:t>"I believe the hard part of building software to be the specification, design, and testing of this conceptual construct, not the labor of representing it"</a:t>
+            </a:r>
+            <a:r>
+              <a:rPr sz="1000" b="0">
+                <a:solidFill>
+                  <a:srgbClr val="000000"/>
+                </a:solidFill>
+                <a:latin typeface="맑은 고딕"/>
+                <a:ea typeface="맑은 고딕"/>
+              </a:rPr>
+              <a:t>, </a:t>
+            </a:r>
+            <a:r>
+              <a:rPr sz="1000" b="0">
+                <a:solidFill>
+                  <a:srgbClr val="000000"/>
+                </a:solidFill>
+                <a:latin typeface="맑은 고딕"/>
+                <a:ea typeface="맑은 고딕"/>
+              </a:rPr>
+              <a:t>[Brooks 1986]</a:t>
             </a:r>
           </a:p>
         </p:txBody>

--- a/courses/ai-native/sessions/s01.pptx
+++ b/courses/ai-native/sessions/s01.pptx
@@ -2041,28 +2041,56 @@
             <a:pPr lvl="0"/>
             <a:r>
               <a:rPr lang="ko-KR" sz="1200"/>
-              <a:t>실습은 정기배송 시스템을 빈 저장소에서 개발하는 하나의 시나리오다. 강의의 첫 시도와 똑같이 요청 한 줄에서 시작하므로, LLM은 금액·회차·거절을 스스로 정한다.</a:t>
+              <a:t>Codex·ChatGPT·Claude Team 등에서 renderer 없이 수행한다. ②~④에는 실제 받은 질문의 답과 검토 의견을 붙인다. 기본 문구만 기계적으로 반복하지 않는다.</a:t>
             </a:r>
           </a:p>
           <a:p>
             <a:pPr lvl="0"/>
             <a:r>
               <a:rPr lang="ko-KR" sz="1200"/>
-              <a:t>결과물은 실습 2에서 요구사항 정의서로, 실습 3에서 도메인 모델로 이어진다. 이름과 규칙은 course-design.md의 공통 전제를 따른다.</a:t>
+              <a:t>⑤ 이후에도 MD의 누락·불일치·폐기한 안의 재등장을 검토하고 보완·재생성을 반복한다. 다음 작업이 가능하면 탐색을 끝낸다. 제출 여부와 무관하게 최종 MD를 저장해 다음 실습에 명시적으로 첨부한다.</a:t>
             </a:r>
           </a:p>
           <a:p>
             <a:pPr lvl="0"/>
             <a:r>
               <a:rPr lang="ko-KR" sz="1200"/>
-              <a:t>도구는 제한하지 않는다. 평가는 초안이 아니라 찾아낸 추측과 정한 결정, 그리고 방식을 고른 이유를 본다.</a:t>
+              <a:t>최종 MD가 실습 원본이고 교재 슬라이드는 별도 제작물이다. 환경별 파일 생성·다운로드와 도식 표시를 사전에 확인한다. 도식 코드만 보이는 경우를 시각 검토 완료로 보지 않는다.</a:t>
             </a:r>
           </a:p>
           <a:p>
             <a:pPr lvl="0"/>
             <a:r>
               <a:rPr lang="ko-KR" sz="1200"/>
-              <a:t>LLM은 대부분의 일을 에이전트에게 맡기거나, 사내 템플릿이 있는 저장소 골격에도 AI를 쓰기 쉽다. 점검 항목 6으로 되돌린다.</a:t>
+              <a:t>목적은 요구사항을 쓰기 전에 사람이 결정할 업무 조건이 있음을 이해하는 것이다. 상세 요구사항 정의서나 설계는 만들지 않는다.</a:t>
+            </a:r>
+          </a:p>
+          <a:p>
+            <a:pPr lvl="0"/>
+            <a:r>
+              <a:rPr lang="ko-KR" sz="1200"/>
+              <a:t>①~⑤는 대화 횟수가 아니라 단계다. ②~④는 보완 대화 예시이며 수강생에 따라 두 번 또는 열 번이 될 수 있다. 받은 답을 읽고 필요한 만큼 추가·반복한다.</a:t>
+            </a:r>
+          </a:p>
+          <a:p>
+            <a:pPr lvl="0"/>
+            <a:r>
+              <a:rPr lang="ko-KR" sz="1200"/>
+              <a:t>점검 항목은 매 답변을 읽을 때 사용한다. 기술·화면 설계, 기존 기능 재구현, 범위 밖 운영 또는 AI가 채운 미정 정책을 발견하면 다음 요청에 보완 내용을 넣는다.</a:t>
+            </a:r>
+          </a:p>
+          <a:p>
+            <a:pPr lvl="0"/>
+            <a:r>
+              <a:rPr lang="ko-KR" sz="1200"/>
+              <a:t>강사 예시는 code/s01/exercise-conversation/focused-prompts/의 실제 대화다. 앞선 질문에 답하며 확정한 업무 조건을 이어 받아 새 ⑤로 파일화했다. templates.json은 학습자용 기본 문구, prompt-*.txt와 conversation.md는 실제 입력·응답이다.</a:t>
+            </a:r>
+          </a:p>
+          <a:p>
+            <a:pPr lvl="0"/>
+            <a:r>
+              <a:rPr lang="ko-KR" sz="1200"/>
+              <a:t>기존 상품 조회 기능의 구현은 연계 대상이며, 정기배송을 허용할 상품을 정하는 것은 새로운 업무 결정일 수 있다.</a:t>
             </a:r>
           </a:p>
         </p:txBody>
@@ -2191,89 +2219,21 @@
             <a:pPr lvl="0"/>
             <a:r>
               <a:rPr lang="ko-KR" sz="1200"/>
-              <a:t>초안의 추측은 예다. 수강생의 LLM마다 다른 곳을 추측하며, 평가는 추측을 찾아 결정으로 바꾼 것을 본다.</a:t>
+              <a:t>code/s01/exercise-conversation/focused-prompts/codex-response-05.md의 실제 최종 MD 전체를 사용했다. 발췌·요약·문장 수정·강조 추가 없이 제목 단계와 목록 들여쓰기만 대응했다. 도식 원본은 그대로 보존한다.</a:t>
             </a:r>
           </a:p>
           <a:p>
             <a:pPr lvl="0"/>
             <a:r>
               <a:rPr lang="ko-KR" sz="1200"/>
-              <a:t>여기서 정한 값은 실습 2의 요구사항 정의서와 실습 3의 도메인 모델에서 그대로 쓰인다. course-design.md의 공통 전제와 같다.</a:t>
-            </a:r>
-          </a:p>
-        </p:txBody>
-      </p:sp>
-    </p:spTree>
-  </p:cSld>
-  <p:clrMapOvr>
-    <a:masterClrMapping/>
-  </p:clrMapOvr>
-</p:notes>
-</file>
-
-<file path=ppt/notesSlides/notesSlide34.xml><?xml version="1.0" encoding="utf-8"?>
-<p:notes xmlns:a="http://schemas.openxmlformats.org/drawingml/2006/main" xmlns:r="http://schemas.openxmlformats.org/officeDocument/2006/relationships" xmlns:p="http://schemas.openxmlformats.org/presentationml/2006/main">
-  <p:cSld>
-    <p:spTree>
-      <p:nvGrpSpPr>
-        <p:cNvPr id="1" name=""/>
-        <p:cNvGrpSpPr/>
-        <p:nvPr/>
-      </p:nvGrpSpPr>
-      <p:grpSpPr>
-        <a:xfrm>
-          <a:off x="0" y="0"/>
-          <a:ext cx="0" cy="0"/>
-          <a:chOff x="0" y="0"/>
-          <a:chExt cx="0" cy="0"/>
-        </a:xfrm>
-      </p:grpSpPr>
-      <p:sp>
-        <p:nvSpPr>
-          <p:cNvPr id="2" name="슬라이드 이미지 개체 틀"/>
-          <p:cNvSpPr/>
-          <p:nvPr>
-            <p:ph type="sldImg" idx="2"/>
-          </p:nvPr>
-        </p:nvSpPr>
-        <p:spPr/>
-        <p:txBody>
-          <a:bodyPr/>
-          <a:lstStyle/>
-          <a:p/>
-        </p:txBody>
-      </p:sp>
-      <p:sp>
-        <p:nvSpPr>
-          <p:cNvPr id="3" name="슬라이드 노트 개체 틀"/>
-          <p:cNvSpPr/>
-          <p:nvPr>
-            <p:ph type="body" idx="3"/>
-          </p:nvPr>
-        </p:nvSpPr>
-        <p:spPr/>
-        <p:txBody>
-          <a:bodyPr/>
-          <a:lstStyle/>
+              <a:t>①~⑤는 단계이며 실제 대화의 횟수는 예시다. 이전 실제 대화의 합의 내용을 이어 새 ⑤를 실행했다. 실제 입력·응답은 conversation.md, 학습자용 기본 문구는 templates.json에 보존한다. 마지막 파일을 검토한 뒤 보완·재생성할 수 있다.</a:t>
+            </a:r>
+          </a:p>
           <a:p>
             <a:pPr lvl="0"/>
             <a:r>
               <a:rPr lang="ko-KR" sz="1200"/>
-              <a:t>열의 순서는 「08. AI 활용 방식」의 「선택의 순서」와 같다(업무 규칙 → 되돌리기 → 자동 확인 → 절차).</a:t>
-            </a:r>
-          </a:p>
-          <a:p>
-            <a:pPr lvl="0"/>
-            <a:r>
-              <a:rPr lang="ko-KR" sz="1200"/>
-              <a:t>기존 구독 고객 이관에서 LLM은 변환 스크립트 초안을 쓸 수 있다. 실행과 확인은 사람이 한다.</a:t>
-            </a:r>
-          </a:p>
-          <a:p>
-            <a:pPr lvl="0"/>
-            <a:r>
-              <a:rPr lang="ko-KR" sz="1200"/>
-              <a:t>저장소 골격은 사내 템플릿이 있어 AI가 필요 없다. 결제 연동 문서가 부실하다고 판단했다면 에이전트 + 사람 리뷰도 맞는 답이다.</a:t>
+              <a:t>다음 실습에는 최종 MD를 명시적으로 첨부한다. 교재의 슬라이드 배치와 업무 산출물의 구성은 별개다.</a:t>
             </a:r>
           </a:p>
         </p:txBody>
@@ -29397,7 +29357,7 @@
                           <a:ea typeface="맑은 고딕" panose="020B0503020000020004" pitchFamily="34" charset="-127"/>
                           <a:cs typeface="맑은 고딕"/>
                         </a:rPr>
-                        <a:t>빈 저장소와 요청 한 줄</a:t>
+                        <a:t>기존 쇼핑몰에 정기배송 기능 추가</a:t>
                       </a:r>
                     </a:p>
                   </a:txBody>
@@ -29901,7 +29861,7 @@
                           <a:ea typeface="맑은 고딕" panose="020B0503020000020004" pitchFamily="34" charset="-127"/>
                           <a:cs typeface="맑은 고딕"/>
                         </a:rPr>
-                        <a:t>상품·결제·배송</a:t>
+                        <a:t>기존 회원·상품·결제·배송</a:t>
                       </a:r>
                     </a:p>
                   </a:txBody>
@@ -30157,7 +30117,7 @@
                 <a:latin typeface="맑은 고딕"/>
                 <a:ea typeface="맑은 고딕"/>
               </a:rPr>
-              <a:t>강의와 실습 모두 </a:t>
+              <a:t>강의는 </a:t>
             </a:r>
             <a:r>
               <a:rPr sz="1800" b="1">
@@ -30167,7 +30127,7 @@
                 <a:latin typeface="맑은 고딕"/>
                 <a:ea typeface="맑은 고딕"/>
               </a:rPr>
-              <a:t>빈 저장소에서 시작하는 신규 개발</a:t>
+              <a:t>주문 시스템을 새로 개발</a:t>
             </a:r>
             <a:r>
               <a:rPr sz="1800" b="0">
@@ -30177,7 +30137,27 @@
                 <a:latin typeface="맑은 고딕"/>
                 <a:ea typeface="맑은 고딕"/>
               </a:rPr>
-              <a:t>이다. 강의는 "주문한다" 한 과제로 열한 세션을 관통하고, 실습은 정기배송을 같은 순서로 만든다.</a:t>
+              <a:t>하는 과제로 열한 세션을 관통한다. 실습은 기존 쇼핑몰과 연계하는 </a:t>
+            </a:r>
+            <a:r>
+              <a:rPr sz="1800" b="1">
+                <a:solidFill>
+                  <a:srgbClr val="000000"/>
+                </a:solidFill>
+                <a:latin typeface="맑은 고딕"/>
+                <a:ea typeface="맑은 고딕"/>
+              </a:rPr>
+              <a:t>정기배송 기능</a:t>
+            </a:r>
+            <a:r>
+              <a:rPr sz="1800" b="0">
+                <a:solidFill>
+                  <a:srgbClr val="000000"/>
+                </a:solidFill>
+                <a:latin typeface="맑은 고딕"/>
+                <a:ea typeface="맑은 고딕"/>
+              </a:rPr>
+              <a:t>을 개발하며, 먼저 사람이 정할 업무 조건을 확인한다.</a:t>
             </a:r>
           </a:p>
         </p:txBody>
@@ -30738,7 +30718,7 @@
                 <a:latin typeface="맑은 고딕"/>
                 <a:ea typeface="맑은 고딕"/>
               </a:rPr>
-              <a:t> 추측 찾기</a:t>
+              <a:t> 업무 조건 확인</a:t>
             </a:r>
           </a:p>
           <a:p>
@@ -31401,7 +31381,7 @@
                 <a:latin typeface="맑은 고딕"/>
                 <a:ea typeface="맑은 고딕"/>
               </a:rPr>
-              <a:t>11. 실습 — 추측 찾기</a:t>
+              <a:t>11. 실습 — 업무 조건 확인</a:t>
             </a:r>
           </a:p>
         </p:txBody>
@@ -31557,6 +31537,16 @@
               <a:buNone/>
             </a:pPr>
             <a:r>
+              <a:rPr sz="1400" b="1">
+                <a:solidFill>
+                  <a:srgbClr val="000000"/>
+                </a:solidFill>
+                <a:latin typeface="맑은 고딕"/>
+                <a:ea typeface="맑은 고딕"/>
+              </a:rPr>
+              <a:t>①로 시작해 답·질문·수정 요청을 주고받는다.</a:t>
+            </a:r>
+            <a:r>
               <a:rPr sz="1400" b="0">
                 <a:solidFill>
                   <a:srgbClr val="000000"/>
@@ -31564,87 +31554,7 @@
                 <a:latin typeface="맑은 고딕"/>
                 <a:ea typeface="맑은 고딕"/>
               </a:rPr>
-              <a:t>요청 한 줄을 LLM에 제공하여 </a:t>
-            </a:r>
-            <a:r>
-              <a:rPr sz="1400" b="1">
-                <a:solidFill>
-                  <a:srgbClr val="000000"/>
-                </a:solidFill>
-                <a:latin typeface="맑은 고딕"/>
-                <a:ea typeface="맑은 고딕"/>
-              </a:rPr>
-              <a:t>정기배송을 "신청한다"</a:t>
-            </a:r>
-            <a:r>
-              <a:rPr sz="1400" b="0">
-                <a:solidFill>
-                  <a:srgbClr val="000000"/>
-                </a:solidFill>
-                <a:latin typeface="맑은 고딕"/>
-                <a:ea typeface="맑은 고딕"/>
-              </a:rPr>
-              <a:t>의 초안을 만들게 하고, 점검 항목으로 초안이 </a:t>
-            </a:r>
-            <a:r>
-              <a:rPr sz="1400" b="1">
-                <a:solidFill>
-                  <a:srgbClr val="000000"/>
-                </a:solidFill>
-                <a:latin typeface="맑은 고딕"/>
-                <a:ea typeface="맑은 고딕"/>
-              </a:rPr>
-              <a:t>추측한 것</a:t>
-            </a:r>
-            <a:r>
-              <a:rPr sz="1400" b="0">
-                <a:solidFill>
-                  <a:srgbClr val="000000"/>
-                </a:solidFill>
-                <a:latin typeface="맑은 고딕"/>
-                <a:ea typeface="맑은 고딕"/>
-              </a:rPr>
-              <a:t>과 </a:t>
-            </a:r>
-            <a:r>
-              <a:rPr sz="1400" b="1">
-                <a:solidFill>
-                  <a:srgbClr val="000000"/>
-                </a:solidFill>
-                <a:latin typeface="맑은 고딕"/>
-                <a:ea typeface="맑은 고딕"/>
-              </a:rPr>
-              <a:t>사람이 정할 결정</a:t>
-            </a:r>
-            <a:r>
-              <a:rPr sz="1400" b="0">
-                <a:solidFill>
-                  <a:srgbClr val="000000"/>
-                </a:solidFill>
-                <a:latin typeface="맑은 고딕"/>
-                <a:ea typeface="맑은 고딕"/>
-              </a:rPr>
-              <a:t>을 가른 뒤, 첫 릴리스의 일마다 </a:t>
-            </a:r>
-            <a:r>
-              <a:rPr sz="1400" b="1">
-                <a:solidFill>
-                  <a:srgbClr val="000000"/>
-                </a:solidFill>
-                <a:latin typeface="맑은 고딕"/>
-                <a:ea typeface="맑은 고딕"/>
-              </a:rPr>
-              <a:t>활용 방식</a:t>
-            </a:r>
-            <a:r>
-              <a:rPr sz="1400" b="0">
-                <a:solidFill>
-                  <a:srgbClr val="000000"/>
-                </a:solidFill>
-                <a:latin typeface="맑은 고딕"/>
-                <a:ea typeface="맑은 고딕"/>
-              </a:rPr>
-              <a:t>을 고르십시오.</a:t>
+              <a:t> ②~④는 보완 예시다. ⑤로 MD를 만들고 필요하면 보완·재생성한다.</a:t>
             </a:r>
           </a:p>
           <a:p>
@@ -31667,18 +31577,29 @@
                 <a:latin typeface="맑은 고딕"/>
                 <a:ea typeface="맑은 고딕"/>
               </a:rPr>
-              <a:t>서비스 개요</a:t>
-            </a:r>
-          </a:p>
-          <a:p>
-            <a:pPr lvl="3" marL="723900" indent="0">
+              <a:t>프롬프트 —</a:t>
+            </a:r>
+            <a:r>
+              <a:rPr sz="1200" b="1">
+                <a:solidFill>
+                  <a:srgbClr val="000000"/>
+                </a:solidFill>
+                <a:latin typeface="맑은 고딕"/>
+                <a:ea typeface="맑은 고딕"/>
+              </a:rPr>
+              <a:t> 요청사항 포함</a:t>
+            </a:r>
+          </a:p>
+          <a:p>
+            <a:pPr lvl="3" marL="981075" indent="-268288">
               <a:spcBef>
                 <a:spcPts val="300"/>
               </a:spcBef>
               <a:spcAft>
                 <a:spcPts val="300"/>
               </a:spcAft>
-              <a:buNone/>
+              <a:buFont typeface="+mj-ea"/>
+              <a:buAutoNum type="circleNumDbPlain" startAt="1"/>
             </a:pPr>
             <a:r>
               <a:rPr sz="1200" b="0">
@@ -31688,7 +31609,7 @@
                 <a:latin typeface="맑은 고딕"/>
                 <a:ea typeface="맑은 고딕"/>
               </a:rPr>
-              <a:t>생필품을 고객이 정한 주기로 배송하는 정기배송 시스템을 </a:t>
+              <a:t>“기존 쇼핑몰에 정기배송 신청 기능을 추가하려고 한다. 요구사항을 정의하기 전에 내가 결정해야 할 </a:t>
             </a:r>
             <a:r>
               <a:rPr sz="1200" b="1">
@@ -31698,7 +31619,7 @@
                 <a:latin typeface="맑은 고딕"/>
                 <a:ea typeface="맑은 고딕"/>
               </a:rPr>
-              <a:t>빈 저장소</a:t>
+              <a:t>핵심 업무 조건</a:t>
             </a:r>
             <a:r>
               <a:rPr sz="1200" b="0">
@@ -31708,20 +31629,31 @@
                 <a:latin typeface="맑은 고딕"/>
                 <a:ea typeface="맑은 고딕"/>
               </a:rPr>
-              <a:t>에서 개발한다. 고객은 상품·수량·배송 주기·첫 배송일·기간·배송지를 정해 신청하고 일시불로 결제한다. 상품·결제·배송은 외부 시스템이 맡는다.</a:t>
-            </a:r>
-          </a:p>
-          <a:p>
-            <a:pPr lvl="3" marL="723900" indent="0">
+              <a:t>은 무엇인가?”</a:t>
+            </a:r>
+          </a:p>
+          <a:p>
+            <a:pPr lvl="3" marL="981075" indent="-268288">
               <a:spcBef>
                 <a:spcPts val="300"/>
               </a:spcBef>
               <a:spcAft>
                 <a:spcPts val="300"/>
               </a:spcAft>
-              <a:buNone/>
+              <a:buFont typeface="+mj-ea"/>
+              <a:buAutoNum type="circleNumDbPlain" startAt="2"/>
             </a:pPr>
             <a:r>
+              <a:rPr sz="1200" b="0">
+                <a:solidFill>
+                  <a:srgbClr val="000000"/>
+                </a:solidFill>
+                <a:latin typeface="맑은 고딕"/>
+                <a:ea typeface="맑은 고딕"/>
+              </a:rPr>
+              <a:t>“고객이 </a:t>
+            </a:r>
+            <a:r>
               <a:rPr sz="1200" b="1">
                 <a:solidFill>
                   <a:srgbClr val="000000"/>
@@ -31729,7 +31661,7 @@
                 <a:latin typeface="맑은 고딕"/>
                 <a:ea typeface="맑은 고딕"/>
               </a:rPr>
-              <a:t>업무 담당자의 요청</a:t>
+              <a:t>처음 정기배송을 신청</a:t>
             </a:r>
             <a:r>
               <a:rPr sz="1200" b="0">
@@ -31739,30 +31671,31 @@
                 <a:latin typeface="맑은 고딕"/>
                 <a:ea typeface="맑은 고딕"/>
               </a:rPr>
-              <a:t> —</a:t>
-            </a:r>
-            <a:r>
-              <a:rPr sz="1000" b="0">
-                <a:solidFill>
-                  <a:srgbClr val="000000"/>
-                </a:solidFill>
-                <a:latin typeface="맑은 고딕"/>
-                <a:ea typeface="맑은 고딕"/>
-              </a:rPr>
-              <a:t> "고객이 정한 주기로 생필품을 자동으로 배송받게 해 주세요."</a:t>
-            </a:r>
-          </a:p>
-          <a:p>
-            <a:pPr lvl="3" marL="723900" indent="0">
+              <a:t>하는 경우만 다루자. 기존 회원·상품·결제·배송 기능은 연계해서 사용한다. 화면과 기술 설계는 제외해라.”</a:t>
+            </a:r>
+          </a:p>
+          <a:p>
+            <a:pPr lvl="3" marL="981075" indent="-268288">
               <a:spcBef>
                 <a:spcPts val="300"/>
               </a:spcBef>
               <a:spcAft>
                 <a:spcPts val="300"/>
               </a:spcAft>
-              <a:buNone/>
+              <a:buFont typeface="+mj-ea"/>
+              <a:buAutoNum type="circleNumDbPlain" startAt="3"/>
             </a:pPr>
             <a:r>
+              <a:rPr sz="1200" b="0">
+                <a:solidFill>
+                  <a:srgbClr val="000000"/>
+                </a:solidFill>
+                <a:latin typeface="맑은 고딕"/>
+                <a:ea typeface="맑은 고딕"/>
+              </a:rPr>
+              <a:t>“계약 기간은 3개월 또는 6개월, 배송 주기는 2주 또는 4주다. 첫 배송일은 고객이 선택하고 자동 갱신은 하지 않는다. 이 조건에서 신청 기능을 정의하려면 </a:t>
+            </a:r>
+            <a:r>
               <a:rPr sz="1200" b="1">
                 <a:solidFill>
                   <a:srgbClr val="000000"/>
@@ -31770,7 +31703,7 @@
                 <a:latin typeface="맑은 고딕"/>
                 <a:ea typeface="맑은 고딕"/>
               </a:rPr>
-              <a:t>첫 릴리스의 일</a:t>
+              <a:t>꼭 더 결정해야</a:t>
             </a:r>
             <a:r>
               <a:rPr sz="1200" b="0">
@@ -31780,17 +31713,91 @@
                 <a:latin typeface="맑은 고딕"/>
                 <a:ea typeface="맑은 고딕"/>
               </a:rPr>
-              <a:t> —</a:t>
-            </a:r>
-            <a:r>
-              <a:rPr sz="1000" b="0">
-                <a:solidFill>
-                  <a:srgbClr val="000000"/>
-                </a:solidFill>
-                <a:latin typeface="맑은 고딕"/>
-                <a:ea typeface="맑은 고딕"/>
-              </a:rPr>
-              <a:t> 규칙 확정, 저장소 골격, 신청 기능 구현, 결제 연동, 기존 구독 고객 1,200명 이관, 출시 안내 문구</a:t>
+              <a:t> 할 것이 있는가? 필요한 이유도 설명해라.”</a:t>
+            </a:r>
+          </a:p>
+          <a:p>
+            <a:pPr lvl="3" marL="981075" indent="-268288">
+              <a:spcBef>
+                <a:spcPts val="300"/>
+              </a:spcBef>
+              <a:spcAft>
+                <a:spcPts val="300"/>
+              </a:spcAft>
+              <a:buFont typeface="+mj-ea"/>
+              <a:buAutoNum type="circleNumDbPlain" startAt="4"/>
+            </a:pPr>
+            <a:r>
+              <a:rPr sz="1200" b="0">
+                <a:solidFill>
+                  <a:srgbClr val="000000"/>
+                </a:solidFill>
+                <a:latin typeface="맑은 고딕"/>
+                <a:ea typeface="맑은 고딕"/>
+              </a:rPr>
+              <a:t>“계약은 첫 배송일부터 시작한다. 신청할 때 기존 상품·수량·배송지를 선택하고, 기존 결제수단으로 배송 회차마다 결제한다. </a:t>
+            </a:r>
+            <a:r>
+              <a:rPr sz="1200" b="1">
+                <a:solidFill>
+                  <a:srgbClr val="000000"/>
+                </a:solidFill>
+                <a:latin typeface="맑은 고딕"/>
+                <a:ea typeface="맑은 고딕"/>
+              </a:rPr>
+              <a:t>첫 결제에 성공하면</a:t>
+            </a:r>
+            <a:r>
+              <a:rPr sz="1200" b="0">
+                <a:solidFill>
+                  <a:srgbClr val="000000"/>
+                </a:solidFill>
+                <a:latin typeface="맑은 고딕"/>
+                <a:ea typeface="맑은 고딕"/>
+              </a:rPr>
+              <a:t> 신청이 완료된다.”</a:t>
+            </a:r>
+          </a:p>
+          <a:p>
+            <a:pPr lvl="3" marL="981075" indent="-268288">
+              <a:spcBef>
+                <a:spcPts val="300"/>
+              </a:spcBef>
+              <a:spcAft>
+                <a:spcPts val="300"/>
+              </a:spcAft>
+              <a:buFont typeface="+mj-ea"/>
+              <a:buAutoNum type="circleNumDbPlain" startAt="5"/>
+            </a:pPr>
+            <a:r>
+              <a:rPr sz="1200" b="0">
+                <a:solidFill>
+                  <a:srgbClr val="000000"/>
+                </a:solidFill>
+                <a:latin typeface="맑은 고딕"/>
+                <a:ea typeface="맑은 고딕"/>
+              </a:rPr>
+              <a:t>“지금까지 합의한 정기배송 최초 신청의 업무 조건을 다음 실습에 사용할 간결한 </a:t>
+            </a:r>
+            <a:r>
+              <a:rPr sz="1200" b="1">
+                <a:solidFill>
+                  <a:srgbClr val="000000"/>
+                </a:solidFill>
+                <a:latin typeface="맑은 고딕"/>
+                <a:ea typeface="맑은 고딕"/>
+              </a:rPr>
+              <a:t>Markdown 파일</a:t>
+            </a:r>
+            <a:r>
+              <a:rPr sz="1200" b="0">
+                <a:solidFill>
+                  <a:srgbClr val="000000"/>
+                </a:solidFill>
+                <a:latin typeface="맑은 고딕"/>
+                <a:ea typeface="맑은 고딕"/>
+              </a:rPr>
+              <a:t>로 생성해라. 기존 기능은 연계 대상으로 두고 화면·기술 설계와 신청 이후 운영은 제외해라. 모든 경우를 나열하지 말고 합의한 조건과 요구사항 작성에 꼭 필요한 미정 사항만 해당 위치에 표시해라. 새 결정을 추가하거나 폐기한 안을 되살리지 마라. 요구사항 정의서나 기능 목록을 미리 작성하지 말고 업무 조건과 필요한 미정 사항만 짧은 항목으로 정리해라.”</a:t>
             </a:r>
           </a:p>
           <a:p>
@@ -31813,18 +31820,19 @@
                 <a:latin typeface="맑은 고딕"/>
                 <a:ea typeface="맑은 고딕"/>
               </a:rPr>
-              <a:t>프롬프트</a:t>
-            </a:r>
-          </a:p>
-          <a:p>
-            <a:pPr lvl="3" marL="723900" indent="0">
+              <a:t>점검 항목</a:t>
+            </a:r>
+          </a:p>
+          <a:p>
+            <a:pPr lvl="3" marL="1028700" indent="-304800">
               <a:spcBef>
                 <a:spcPts val="300"/>
               </a:spcBef>
               <a:spcAft>
                 <a:spcPts val="300"/>
               </a:spcAft>
-              <a:buNone/>
+              <a:buFont typeface="+mj-lt"/>
+              <a:buAutoNum type="arabicPeriod" startAt="1"/>
             </a:pPr>
             <a:r>
               <a:rPr sz="1200" b="0">
@@ -31834,7 +31842,7 @@
                 <a:latin typeface="맑은 고딕"/>
                 <a:ea typeface="맑은 고딕"/>
               </a:rPr>
-              <a:t>① "이 요청대로 </a:t>
+              <a:t/>
             </a:r>
             <a:r>
               <a:rPr sz="1200" b="1">
@@ -31844,7 +31852,7 @@
                 <a:latin typeface="맑은 고딕"/>
                 <a:ea typeface="맑은 고딕"/>
               </a:rPr>
-              <a:t>정기배송을 신청한다</a:t>
+              <a:t>필요성</a:t>
             </a:r>
             <a:r>
               <a:rPr sz="1200" b="0">
@@ -31854,18 +31862,29 @@
                 <a:latin typeface="맑은 고딕"/>
                 <a:ea typeface="맑은 고딕"/>
               </a:rPr>
-              <a:t>를 설계하고, 자바 코드와 테스트를 만들어줘."</a:t>
-            </a:r>
-          </a:p>
-          <a:p>
-            <a:pPr lvl="3" marL="723900" indent="0">
+              <a:t> —</a:t>
+            </a:r>
+            <a:r>
+              <a:rPr sz="1000" b="0">
+                <a:solidFill>
+                  <a:srgbClr val="000000"/>
+                </a:solidFill>
+                <a:latin typeface="맑은 고딕"/>
+                <a:ea typeface="맑은 고딕"/>
+              </a:rPr>
+              <a:t> 첫 신청 기능에 실제로 필요한 내용인가?</a:t>
+            </a:r>
+          </a:p>
+          <a:p>
+            <a:pPr lvl="3" marL="1028700" indent="-304800">
               <a:spcBef>
                 <a:spcPts val="300"/>
               </a:spcBef>
               <a:spcAft>
                 <a:spcPts val="300"/>
               </a:spcAft>
-              <a:buNone/>
+              <a:buFont typeface="+mj-lt"/>
+              <a:buAutoNum type="arabicPeriod" startAt="2"/>
             </a:pPr>
             <a:r>
               <a:rPr sz="1200" b="0">
@@ -31875,7 +31894,7 @@
                 <a:latin typeface="맑은 고딕"/>
                 <a:ea typeface="맑은 고딕"/>
               </a:rPr>
-              <a:t>② "요청에 없어서 네가 스스로 정한 것을 </a:t>
+              <a:t/>
             </a:r>
             <a:r>
               <a:rPr sz="1200" b="1">
@@ -31885,7 +31904,7 @@
                 <a:latin typeface="맑은 고딕"/>
                 <a:ea typeface="맑은 고딕"/>
               </a:rPr>
-              <a:t>모두 나열</a:t>
+              <a:t>범위</a:t>
             </a:r>
             <a:r>
               <a:rPr sz="1200" b="0">
@@ -31895,7 +31914,121 @@
                 <a:latin typeface="맑은 고딕"/>
                 <a:ea typeface="맑은 고딕"/>
               </a:rPr>
-              <a:t>하고, 사람이 정할 결정과 맡겨도 되는 구현으로 갈라줘."</a:t>
+              <a:t> —</a:t>
+            </a:r>
+            <a:r>
+              <a:rPr sz="1000" b="0">
+                <a:solidFill>
+                  <a:srgbClr val="000000"/>
+                </a:solidFill>
+                <a:latin typeface="맑은 고딕"/>
+                <a:ea typeface="맑은 고딕"/>
+              </a:rPr>
+              <a:t> 기술·화면 설계나 기존 쇼핑몰 기능의 재구현이 섞였는가?</a:t>
+            </a:r>
+          </a:p>
+          <a:p>
+            <a:pPr lvl="3" marL="1028700" indent="-304800">
+              <a:spcBef>
+                <a:spcPts val="300"/>
+              </a:spcBef>
+              <a:spcAft>
+                <a:spcPts val="300"/>
+              </a:spcAft>
+              <a:buFont typeface="+mj-lt"/>
+              <a:buAutoNum type="arabicPeriod" startAt="3"/>
+            </a:pPr>
+            <a:r>
+              <a:rPr sz="1200" b="0">
+                <a:solidFill>
+                  <a:srgbClr val="000000"/>
+                </a:solidFill>
+                <a:latin typeface="맑은 고딕"/>
+                <a:ea typeface="맑은 고딕"/>
+              </a:rPr>
+              <a:t/>
+            </a:r>
+            <a:r>
+              <a:rPr sz="1200" b="1">
+                <a:solidFill>
+                  <a:srgbClr val="000000"/>
+                </a:solidFill>
+                <a:latin typeface="맑은 고딕"/>
+                <a:ea typeface="맑은 고딕"/>
+              </a:rPr>
+              <a:t>판단</a:t>
+            </a:r>
+            <a:r>
+              <a:rPr sz="1200" b="0">
+                <a:solidFill>
+                  <a:srgbClr val="000000"/>
+                </a:solidFill>
+                <a:latin typeface="맑은 고딕"/>
+                <a:ea typeface="맑은 고딕"/>
+              </a:rPr>
+              <a:t> —</a:t>
+            </a:r>
+            <a:r>
+              <a:rPr sz="1000" b="0">
+                <a:solidFill>
+                  <a:srgbClr val="000000"/>
+                </a:solidFill>
+                <a:latin typeface="맑은 고딕"/>
+                <a:ea typeface="맑은 고딕"/>
+              </a:rPr>
+              <a:t> 사람이 정하지 않은 정책을 AI가 확정했는가?</a:t>
+            </a:r>
+          </a:p>
+          <a:p>
+            <a:pPr lvl="3" marL="1028700" indent="-304800">
+              <a:spcBef>
+                <a:spcPts val="300"/>
+              </a:spcBef>
+              <a:spcAft>
+                <a:spcPts val="300"/>
+              </a:spcAft>
+              <a:buFont typeface="+mj-lt"/>
+              <a:buAutoNum type="arabicPeriod" startAt="4"/>
+            </a:pPr>
+            <a:r>
+              <a:rPr sz="1200" b="0">
+                <a:solidFill>
+                  <a:srgbClr val="000000"/>
+                </a:solidFill>
+                <a:latin typeface="맑은 고딕"/>
+                <a:ea typeface="맑은 고딕"/>
+              </a:rPr>
+              <a:t/>
+            </a:r>
+            <a:r>
+              <a:rPr sz="1200" b="1">
+                <a:solidFill>
+                  <a:srgbClr val="000000"/>
+                </a:solidFill>
+                <a:latin typeface="맑은 고딕"/>
+                <a:ea typeface="맑은 고딕"/>
+              </a:rPr>
+              <a:t>종료</a:t>
+            </a:r>
+            <a:r>
+              <a:rPr sz="1200" b="0">
+                <a:solidFill>
+                  <a:srgbClr val="000000"/>
+                </a:solidFill>
+                <a:latin typeface="맑은 고딕"/>
+                <a:ea typeface="맑은 고딕"/>
+              </a:rPr>
+              <a:t> —</a:t>
+            </a:r>
+            <a:r>
+              <a:rPr sz="1000" b="0">
+                <a:solidFill>
+                  <a:srgbClr val="000000"/>
+                </a:solidFill>
+                <a:latin typeface="맑은 고딕"/>
+                <a:ea typeface="맑은 고딕"/>
+              </a:rPr>
+              <a:t> 이제 요구사항을 작성할 수 있는가? 그렇다면 탐색을 끝낸다.</a:t>
             </a:r>
           </a:p>
           <a:p>
@@ -31918,11 +32051,11 @@
                 <a:latin typeface="맑은 고딕"/>
                 <a:ea typeface="맑은 고딕"/>
               </a:rPr>
-              <a:t>점검 항목</a:t>
-            </a:r>
-          </a:p>
-          <a:p>
-            <a:pPr lvl="3" marL="947420" indent="-223520">
+              <a:t>결과물</a:t>
+            </a:r>
+          </a:p>
+          <a:p>
+            <a:pPr lvl="3" marL="723900" indent="0">
               <a:spcBef>
                 <a:spcPts val="300"/>
               </a:spcBef>
@@ -31932,6 +32065,16 @@
               <a:buNone/>
             </a:pPr>
             <a:r>
+              <a:rPr sz="1200" b="1">
+                <a:solidFill>
+                  <a:srgbClr val="000000"/>
+                </a:solidFill>
+                <a:latin typeface="맑은 고딕"/>
+                <a:ea typeface="맑은 고딕"/>
+              </a:rPr>
+              <a:t>합의한 업무 조건의 최종 MD 파일</a:t>
+            </a:r>
+            <a:r>
               <a:rPr sz="1200" b="0">
                 <a:solidFill>
                   <a:srgbClr val="000000"/>
@@ -31939,355 +32082,7 @@
                 <a:latin typeface="맑은 고딕"/>
                 <a:ea typeface="맑은 고딕"/>
               </a:rPr>
-              <a:t>1. </a:t>
-            </a:r>
-            <a:r>
-              <a:rPr sz="1200" b="1">
-                <a:solidFill>
-                  <a:srgbClr val="000000"/>
-                </a:solidFill>
-                <a:latin typeface="맑은 고딕"/>
-                <a:ea typeface="맑은 고딕"/>
-              </a:rPr>
-              <a:t>금액</a:t>
-            </a:r>
-            <a:r>
-              <a:rPr sz="1200" b="0">
-                <a:solidFill>
-                  <a:srgbClr val="000000"/>
-                </a:solidFill>
-                <a:latin typeface="맑은 고딕"/>
-                <a:ea typeface="맑은 고딕"/>
-              </a:rPr>
-              <a:t> —</a:t>
-            </a:r>
-            <a:r>
-              <a:rPr sz="1000" b="0">
-                <a:solidFill>
-                  <a:srgbClr val="000000"/>
-                </a:solidFill>
-                <a:latin typeface="맑은 고딕"/>
-                <a:ea typeface="맑은 고딕"/>
-              </a:rPr>
-              <a:t> 회차 금액을 무엇으로 계산했는가? 신청 때의 가격인가?</a:t>
-            </a:r>
-          </a:p>
-          <a:p>
-            <a:pPr lvl="3" marL="947420" indent="-223520">
-              <a:spcBef>
-                <a:spcPts val="300"/>
-              </a:spcBef>
-              <a:spcAft>
-                <a:spcPts val="300"/>
-              </a:spcAft>
-              <a:buNone/>
-            </a:pPr>
-            <a:r>
-              <a:rPr sz="1200" b="0">
-                <a:solidFill>
-                  <a:srgbClr val="000000"/>
-                </a:solidFill>
-                <a:latin typeface="맑은 고딕"/>
-                <a:ea typeface="맑은 고딕"/>
-              </a:rPr>
-              <a:t>2. </a:t>
-            </a:r>
-            <a:r>
-              <a:rPr sz="1200" b="1">
-                <a:solidFill>
-                  <a:srgbClr val="000000"/>
-                </a:solidFill>
-                <a:latin typeface="맑은 고딕"/>
-                <a:ea typeface="맑은 고딕"/>
-              </a:rPr>
-              <a:t>회차</a:t>
-            </a:r>
-            <a:r>
-              <a:rPr sz="1200" b="0">
-                <a:solidFill>
-                  <a:srgbClr val="000000"/>
-                </a:solidFill>
-                <a:latin typeface="맑은 고딕"/>
-                <a:ea typeface="맑은 고딕"/>
-              </a:rPr>
-              <a:t> —</a:t>
-            </a:r>
-            <a:r>
-              <a:rPr sz="1000" b="0">
-                <a:solidFill>
-                  <a:srgbClr val="000000"/>
-                </a:solidFill>
-                <a:latin typeface="맑은 고딕"/>
-                <a:ea typeface="맑은 고딕"/>
-              </a:rPr>
-              <a:t> 배송 회차를 몇 개, 어느 날짜로 만들었는가? 그 규칙은 누가 정했는가?</a:t>
-            </a:r>
-          </a:p>
-          <a:p>
-            <a:pPr lvl="3" marL="947420" indent="-223520">
-              <a:spcBef>
-                <a:spcPts val="300"/>
-              </a:spcBef>
-              <a:spcAft>
-                <a:spcPts val="300"/>
-              </a:spcAft>
-              <a:buNone/>
-            </a:pPr>
-            <a:r>
-              <a:rPr sz="1200" b="0">
-                <a:solidFill>
-                  <a:srgbClr val="000000"/>
-                </a:solidFill>
-                <a:latin typeface="맑은 고딕"/>
-                <a:ea typeface="맑은 고딕"/>
-              </a:rPr>
-              <a:t>3. </a:t>
-            </a:r>
-            <a:r>
-              <a:rPr sz="1200" b="1">
-                <a:solidFill>
-                  <a:srgbClr val="000000"/>
-                </a:solidFill>
-                <a:latin typeface="맑은 고딕"/>
-                <a:ea typeface="맑은 고딕"/>
-              </a:rPr>
-              <a:t>거절</a:t>
-            </a:r>
-            <a:r>
-              <a:rPr sz="1200" b="0">
-                <a:solidFill>
-                  <a:srgbClr val="000000"/>
-                </a:solidFill>
-                <a:latin typeface="맑은 고딕"/>
-                <a:ea typeface="맑은 고딕"/>
-              </a:rPr>
-              <a:t> —</a:t>
-            </a:r>
-            <a:r>
-              <a:rPr sz="1000" b="0">
-                <a:solidFill>
-                  <a:srgbClr val="000000"/>
-                </a:solidFill>
-                <a:latin typeface="맑은 고딕"/>
-                <a:ea typeface="맑은 고딕"/>
-              </a:rPr>
-              <a:t> 결제가 거절되면 정기배송은 어떤 상태인가?</a:t>
-            </a:r>
-          </a:p>
-          <a:p>
-            <a:pPr lvl="3" marL="947420" indent="-223520">
-              <a:spcBef>
-                <a:spcPts val="300"/>
-              </a:spcBef>
-              <a:spcAft>
-                <a:spcPts val="300"/>
-              </a:spcAft>
-              <a:buNone/>
-            </a:pPr>
-            <a:r>
-              <a:rPr sz="1200" b="0">
-                <a:solidFill>
-                  <a:srgbClr val="000000"/>
-                </a:solidFill>
-                <a:latin typeface="맑은 고딕"/>
-                <a:ea typeface="맑은 고딕"/>
-              </a:rPr>
-              <a:t>4. </a:t>
-            </a:r>
-            <a:r>
-              <a:rPr sz="1200" b="1">
-                <a:solidFill>
-                  <a:srgbClr val="000000"/>
-                </a:solidFill>
-                <a:latin typeface="맑은 고딕"/>
-                <a:ea typeface="맑은 고딕"/>
-              </a:rPr>
-              <a:t>덧붙인 규칙</a:t>
-            </a:r>
-            <a:r>
-              <a:rPr sz="1200" b="0">
-                <a:solidFill>
-                  <a:srgbClr val="000000"/>
-                </a:solidFill>
-                <a:latin typeface="맑은 고딕"/>
-                <a:ea typeface="맑은 고딕"/>
-              </a:rPr>
-              <a:t> —</a:t>
-            </a:r>
-            <a:r>
-              <a:rPr sz="1000" b="0">
-                <a:solidFill>
-                  <a:srgbClr val="000000"/>
-                </a:solidFill>
-                <a:latin typeface="맑은 고딕"/>
-                <a:ea typeface="맑은 고딕"/>
-              </a:rPr>
-              <a:t> 요청에 없는 규칙</a:t>
-            </a:r>
-            <a:r>
-              <a:rPr sz="800" b="0">
-                <a:solidFill>
-                  <a:srgbClr val="000000"/>
-                </a:solidFill>
-                <a:latin typeface="맑은 고딕"/>
-                <a:ea typeface="맑은 고딕"/>
-              </a:rPr>
-              <a:t>(할인, 최소 수량 등)</a:t>
-            </a:r>
-            <a:r>
-              <a:rPr sz="1000" b="0">
-                <a:solidFill>
-                  <a:srgbClr val="000000"/>
-                </a:solidFill>
-                <a:latin typeface="맑은 고딕"/>
-                <a:ea typeface="맑은 고딕"/>
-              </a:rPr>
-              <a:t>이 들어갔는가?</a:t>
-            </a:r>
-          </a:p>
-          <a:p>
-            <a:pPr lvl="3" marL="947420" indent="-223520">
-              <a:spcBef>
-                <a:spcPts val="300"/>
-              </a:spcBef>
-              <a:spcAft>
-                <a:spcPts val="300"/>
-              </a:spcAft>
-              <a:buNone/>
-            </a:pPr>
-            <a:r>
-              <a:rPr sz="1200" b="0">
-                <a:solidFill>
-                  <a:srgbClr val="000000"/>
-                </a:solidFill>
-                <a:latin typeface="맑은 고딕"/>
-                <a:ea typeface="맑은 고딕"/>
-              </a:rPr>
-              <a:t>5. </a:t>
-            </a:r>
-            <a:r>
-              <a:rPr sz="1200" b="1">
-                <a:solidFill>
-                  <a:srgbClr val="000000"/>
-                </a:solidFill>
-                <a:latin typeface="맑은 고딕"/>
-                <a:ea typeface="맑은 고딕"/>
-              </a:rPr>
-              <a:t>테스트</a:t>
-            </a:r>
-            <a:r>
-              <a:rPr sz="1200" b="0">
-                <a:solidFill>
-                  <a:srgbClr val="000000"/>
-                </a:solidFill>
-                <a:latin typeface="맑은 고딕"/>
-                <a:ea typeface="맑은 고딕"/>
-              </a:rPr>
-              <a:t> —</a:t>
-            </a:r>
-            <a:r>
-              <a:rPr sz="1000" b="0">
-                <a:solidFill>
-                  <a:srgbClr val="000000"/>
-                </a:solidFill>
-                <a:latin typeface="맑은 고딕"/>
-                <a:ea typeface="맑은 고딕"/>
-              </a:rPr>
-              <a:t> 승인된 경우만 확인했는가? 기대값은 어디에서 왔는가?</a:t>
-            </a:r>
-          </a:p>
-          <a:p>
-            <a:pPr lvl="3" marL="947420" indent="-223520">
-              <a:spcBef>
-                <a:spcPts val="300"/>
-              </a:spcBef>
-              <a:spcAft>
-                <a:spcPts val="300"/>
-              </a:spcAft>
-              <a:buNone/>
-            </a:pPr>
-            <a:r>
-              <a:rPr sz="1200" b="0">
-                <a:solidFill>
-                  <a:srgbClr val="000000"/>
-                </a:solidFill>
-                <a:latin typeface="맑은 고딕"/>
-                <a:ea typeface="맑은 고딕"/>
-              </a:rPr>
-              <a:t>6. </a:t>
-            </a:r>
-            <a:r>
-              <a:rPr sz="1200" b="1">
-                <a:solidFill>
-                  <a:srgbClr val="000000"/>
-                </a:solidFill>
-                <a:latin typeface="맑은 고딕"/>
-                <a:ea typeface="맑은 고딕"/>
-              </a:rPr>
-              <a:t>활용 방식</a:t>
-            </a:r>
-            <a:r>
-              <a:rPr sz="1200" b="0">
-                <a:solidFill>
-                  <a:srgbClr val="000000"/>
-                </a:solidFill>
-                <a:latin typeface="맑은 고딕"/>
-                <a:ea typeface="맑은 고딕"/>
-              </a:rPr>
-              <a:t> —</a:t>
-            </a:r>
-            <a:r>
-              <a:rPr sz="1000" b="0">
-                <a:solidFill>
-                  <a:srgbClr val="000000"/>
-                </a:solidFill>
-                <a:latin typeface="맑은 고딕"/>
-                <a:ea typeface="맑은 고딕"/>
-              </a:rPr>
-              <a:t> 일마다 작업 특성 4가지로 방식을 골랐는가? 사람이 정할 결정을 에이전트에게 맡기지 않았는가?</a:t>
-            </a:r>
-          </a:p>
-          <a:p>
-            <a:pPr lvl="2" marL="723900" indent="-368300">
-              <a:spcBef>
-                <a:spcPts val="300"/>
-              </a:spcBef>
-              <a:spcAft>
-                <a:spcPts val="300"/>
-              </a:spcAft>
-              <a:buSzPct val="90000"/>
-              <a:buFont typeface="Wingdings" pitchFamily="2" charset="2"/>
-              <a:buChar char=""/>
-            </a:pPr>
-            <a:r>
-              <a:rPr sz="1400" b="1">
-                <a:solidFill>
-                  <a:srgbClr val="000000"/>
-                </a:solidFill>
-                <a:latin typeface="맑은 고딕"/>
-                <a:ea typeface="맑은 고딕"/>
-              </a:rPr>
-              <a:t>결과물</a:t>
-            </a:r>
-            <a:r>
-              <a:rPr sz="1400" b="0">
-                <a:solidFill>
-                  <a:srgbClr val="000000"/>
-                </a:solidFill>
-                <a:latin typeface="맑은 고딕"/>
-                <a:ea typeface="맑은 고딕"/>
-              </a:rPr>
-              <a:t> —</a:t>
-            </a:r>
-            <a:r>
-              <a:rPr sz="1200" b="0">
-                <a:solidFill>
-                  <a:srgbClr val="000000"/>
-                </a:solidFill>
-                <a:latin typeface="맑은 고딕"/>
-                <a:ea typeface="맑은 고딕"/>
-              </a:rPr>
-              <a:t> 추측 목록과 사람이 정할 결정, 첫 릴리스의 일마다 고른 활용 방식. 실습 2의 입력이 됩니다.</a:t>
+              <a:t>. 마지막 합의를 확인하고 실습 2에 첨부한다.</a:t>
             </a:r>
           </a:p>
         </p:txBody>
@@ -32915,17 +32710,17 @@
                 <a:latin typeface="맑은 고딕"/>
                 <a:ea typeface="맑은 고딕"/>
               </a:rPr>
-              <a:t>추측 목록과 사람이 정할 결정 </a:t>
-            </a:r>
-            <a:r>
-              <a:rPr sz="1800" b="1">
-                <a:solidFill>
-                  <a:srgbClr val="000000"/>
-                </a:solidFill>
-                <a:latin typeface="맑은 고딕"/>
-                <a:ea typeface="맑은 고딕"/>
-              </a:rPr>
-              <a:t>(안)</a:t>
+              <a:t>정기배송 최초 신청 업무 조건 </a:t>
+            </a:r>
+            <a:r>
+              <a:rPr sz="2000" b="1">
+                <a:solidFill>
+                  <a:srgbClr val="000000"/>
+                </a:solidFill>
+                <a:latin typeface="맑은 고딕"/>
+                <a:ea typeface="맑은 고딕"/>
+              </a:rPr>
+              <a:t>(1/2)</a:t>
             </a:r>
           </a:p>
           <a:p>
@@ -33073,8 +32868,8 @@
         </p:nvSpPr>
         <p:spPr>
           <a:xfrm>
-            <a:off x="233172" y="1616364"/>
-            <a:ext cx="4338828" cy="4696101"/>
+            <a:off x="233172" y="960120"/>
+            <a:ext cx="4338828" cy="5352345"/>
           </a:xfrm>
         </p:spPr>
         <p:txBody>
@@ -33083,7 +32878,28 @@
           </a:bodyPr>
           <a:lstStyle/>
           <a:p>
-            <a:pPr lvl="2" marL="228600" indent="-182880">
+            <a:pPr marL="322580" indent="-139700">
+              <a:spcBef>
+                <a:spcPts val="300"/>
+              </a:spcBef>
+              <a:spcAft>
+                <a:spcPts val="300"/>
+              </a:spcAft>
+              <a:buNone/>
+            </a:pPr>
+            <a:r>
+              <a:rPr sz="1000" b="1">
+                <a:solidFill>
+                  <a:srgbClr val="000000"/>
+                </a:solidFill>
+                <a:latin typeface="맑은 고딕"/>
+                <a:ea typeface="맑은 고딕"/>
+              </a:rPr>
+              <a:t>1. 범위</a:t>
+            </a:r>
+          </a:p>
+          <a:p>
+            <a:pPr lvl="2" marL="411480" indent="-137160">
               <a:spcBef>
                 <a:spcPts val="300"/>
               </a:spcBef>
@@ -33095,18 +32911,18 @@
               <a:buChar char=""/>
             </a:pPr>
             <a:r>
-              <a:rPr sz="1400" b="1">
-                <a:solidFill>
-                  <a:srgbClr val="000000"/>
-                </a:solidFill>
-                <a:latin typeface="맑은 고딕"/>
-                <a:ea typeface="맑은 고딕"/>
-              </a:rPr>
-              <a:t>초안이 추측한 것</a:t>
-            </a:r>
-          </a:p>
-          <a:p>
-            <a:pPr lvl="3" marL="457200" indent="-182880">
+              <a:rPr sz="1000" b="0">
+                <a:solidFill>
+                  <a:srgbClr val="000000"/>
+                </a:solidFill>
+                <a:latin typeface="맑은 고딕"/>
+                <a:ea typeface="맑은 고딕"/>
+              </a:rPr>
+              <a:t>기존 회원이 정기배송을 최초 신청하는 업무만 다룬다.</a:t>
+            </a:r>
+          </a:p>
+          <a:p>
+            <a:pPr lvl="2" marL="411480" indent="-137160">
               <a:spcBef>
                 <a:spcPts val="300"/>
               </a:spcBef>
@@ -33115,29 +32931,9 @@
               </a:spcAft>
               <a:buSzPct val="90000"/>
               <a:buFont typeface="Wingdings" pitchFamily="2" charset="2"/>
-              <a:buChar char=""/>
+              <a:buChar char=""/>
             </a:pPr>
             <a:r>
-              <a:rPr sz="1200" b="1">
-                <a:solidFill>
-                  <a:srgbClr val="000000"/>
-                </a:solidFill>
-                <a:latin typeface="맑은 고딕"/>
-                <a:ea typeface="맑은 고딕"/>
-              </a:rPr>
-              <a:t>상태</a:t>
-            </a:r>
-            <a:r>
-              <a:rPr sz="1200" b="0">
-                <a:solidFill>
-                  <a:srgbClr val="000000"/>
-                </a:solidFill>
-                <a:latin typeface="맑은 고딕"/>
-                <a:ea typeface="맑은 고딕"/>
-              </a:rPr>
-              <a:t> —</a:t>
-            </a:r>
-            <a:r>
               <a:rPr sz="1000" b="0">
                 <a:solidFill>
                   <a:srgbClr val="000000"/>
@@ -33145,11 +32941,11 @@
                 <a:latin typeface="맑은 고딕"/>
                 <a:ea typeface="맑은 고딕"/>
               </a:rPr>
-              <a:t> 정기배송에 "신청 실패", 배송 회차에 "취소됨" 상태를 더했다.</a:t>
-            </a:r>
-          </a:p>
-          <a:p>
-            <a:pPr lvl="3" marL="457200" indent="-182880">
+              <a:t>회원·상품·결제수단·배송지·주문·결제·배송 기능은 기존 기능과 정책을 연계하여 사용한다.</a:t>
+            </a:r>
+          </a:p>
+          <a:p>
+            <a:pPr lvl="2" marL="411480" indent="-137160">
               <a:spcBef>
                 <a:spcPts val="300"/>
               </a:spcBef>
@@ -33158,29 +32954,9 @@
               </a:spcAft>
               <a:buSzPct val="90000"/>
               <a:buFont typeface="Wingdings" pitchFamily="2" charset="2"/>
-              <a:buChar char=""/>
+              <a:buChar char=""/>
             </a:pPr>
             <a:r>
-              <a:rPr sz="1200" b="1">
-                <a:solidFill>
-                  <a:srgbClr val="000000"/>
-                </a:solidFill>
-                <a:latin typeface="맑은 고딕"/>
-                <a:ea typeface="맑은 고딕"/>
-              </a:rPr>
-              <a:t>금액</a:t>
-            </a:r>
-            <a:r>
-              <a:rPr sz="1200" b="0">
-                <a:solidFill>
-                  <a:srgbClr val="000000"/>
-                </a:solidFill>
-                <a:latin typeface="맑은 고딕"/>
-                <a:ea typeface="맑은 고딕"/>
-              </a:rPr>
-              <a:t> —</a:t>
-            </a:r>
-            <a:r>
               <a:rPr sz="1000" b="0">
                 <a:solidFill>
                   <a:srgbClr val="000000"/>
@@ -33188,11 +32964,11 @@
                 <a:latin typeface="맑은 고딕"/>
                 <a:ea typeface="맑은 고딕"/>
               </a:rPr>
-              <a:t> 회차 금액을 배송할 때마다 상품 시스템의 현재 가격으로 계산했다.</a:t>
-            </a:r>
-          </a:p>
-          <a:p>
-            <a:pPr lvl="3" marL="457200" indent="-182880">
+              <a:t>화면 및 기술 설계는 제외한다.</a:t>
+            </a:r>
+          </a:p>
+          <a:p>
+            <a:pPr lvl="2" marL="411480" indent="-137160">
               <a:spcBef>
                 <a:spcPts val="300"/>
               </a:spcBef>
@@ -33201,29 +32977,9 @@
               </a:spcAft>
               <a:buSzPct val="90000"/>
               <a:buFont typeface="Wingdings" pitchFamily="2" charset="2"/>
-              <a:buChar char=""/>
+              <a:buChar char=""/>
             </a:pPr>
             <a:r>
-              <a:rPr sz="1200" b="1">
-                <a:solidFill>
-                  <a:srgbClr val="000000"/>
-                </a:solidFill>
-                <a:latin typeface="맑은 고딕"/>
-                <a:ea typeface="맑은 고딕"/>
-              </a:rPr>
-              <a:t>회차</a:t>
-            </a:r>
-            <a:r>
-              <a:rPr sz="1200" b="0">
-                <a:solidFill>
-                  <a:srgbClr val="000000"/>
-                </a:solidFill>
-                <a:latin typeface="맑은 고딕"/>
-                <a:ea typeface="맑은 고딕"/>
-              </a:rPr>
-              <a:t> —</a:t>
-            </a:r>
-            <a:r>
               <a:rPr sz="1000" b="0">
                 <a:solidFill>
                   <a:srgbClr val="000000"/>
@@ -33231,11 +32987,32 @@
                 <a:latin typeface="맑은 고딕"/>
                 <a:ea typeface="맑은 고딕"/>
               </a:rPr>
-              <a:t> 회차를 만료일 다음 날까지 만들었다.</a:t>
-            </a:r>
-          </a:p>
-          <a:p>
-            <a:pPr lvl="3" marL="457200" indent="-182880">
+              <a:t>신청 완료 이후의 변경, 해지, 결제 실패, 품절·단종 대응 등 운영 업무는 제외한다.</a:t>
+            </a:r>
+          </a:p>
+          <a:p>
+            <a:pPr marL="322580" indent="-139700">
+              <a:spcBef>
+                <a:spcPts val="300"/>
+              </a:spcBef>
+              <a:spcAft>
+                <a:spcPts val="300"/>
+              </a:spcAft>
+              <a:buNone/>
+            </a:pPr>
+            <a:r>
+              <a:rPr sz="1000" b="1">
+                <a:solidFill>
+                  <a:srgbClr val="000000"/>
+                </a:solidFill>
+                <a:latin typeface="맑은 고딕"/>
+                <a:ea typeface="맑은 고딕"/>
+              </a:rPr>
+              <a:t>2. 신청 대상 정보</a:t>
+            </a:r>
+          </a:p>
+          <a:p>
+            <a:pPr lvl="2" marL="411480" indent="-137160">
               <a:spcBef>
                 <a:spcPts val="300"/>
               </a:spcBef>
@@ -33244,29 +33021,9 @@
               </a:spcAft>
               <a:buSzPct val="90000"/>
               <a:buFont typeface="Wingdings" pitchFamily="2" charset="2"/>
-              <a:buChar char=""/>
+              <a:buChar char=""/>
             </a:pPr>
             <a:r>
-              <a:rPr sz="1200" b="1">
-                <a:solidFill>
-                  <a:srgbClr val="000000"/>
-                </a:solidFill>
-                <a:latin typeface="맑은 고딕"/>
-                <a:ea typeface="맑은 고딕"/>
-              </a:rPr>
-              <a:t>거절</a:t>
-            </a:r>
-            <a:r>
-              <a:rPr sz="1200" b="0">
-                <a:solidFill>
-                  <a:srgbClr val="000000"/>
-                </a:solidFill>
-                <a:latin typeface="맑은 고딕"/>
-                <a:ea typeface="맑은 고딕"/>
-              </a:rPr>
-              <a:t> —</a:t>
-            </a:r>
-            <a:r>
               <a:rPr sz="1000" b="0">
                 <a:solidFill>
                   <a:srgbClr val="000000"/>
@@ -33274,11 +33031,11 @@
                 <a:latin typeface="맑은 고딕"/>
                 <a:ea typeface="맑은 고딕"/>
               </a:rPr>
-              <a:t> 결제가 거절되면 정기배송을 삭제했다.</a:t>
-            </a:r>
-          </a:p>
-          <a:p>
-            <a:pPr lvl="3" marL="457200" indent="-182880">
+              <a:t>고객은 기존 상품과 수량을 선택한다.</a:t>
+            </a:r>
+          </a:p>
+          <a:p>
+            <a:pPr lvl="2" marL="411480" indent="-137160">
               <a:spcBef>
                 <a:spcPts val="300"/>
               </a:spcBef>
@@ -33287,29 +33044,9 @@
               </a:spcAft>
               <a:buSzPct val="90000"/>
               <a:buFont typeface="Wingdings" pitchFamily="2" charset="2"/>
-              <a:buChar char=""/>
+              <a:buChar char=""/>
             </a:pPr>
             <a:r>
-              <a:rPr sz="1200" b="1">
-                <a:solidFill>
-                  <a:srgbClr val="000000"/>
-                </a:solidFill>
-                <a:latin typeface="맑은 고딕"/>
-                <a:ea typeface="맑은 고딕"/>
-              </a:rPr>
-              <a:t>덧붙인 규칙</a:t>
-            </a:r>
-            <a:r>
-              <a:rPr sz="1200" b="0">
-                <a:solidFill>
-                  <a:srgbClr val="000000"/>
-                </a:solidFill>
-                <a:latin typeface="맑은 고딕"/>
-                <a:ea typeface="맑은 고딕"/>
-              </a:rPr>
-              <a:t> —</a:t>
-            </a:r>
-            <a:r>
               <a:rPr sz="1000" b="0">
                 <a:solidFill>
                   <a:srgbClr val="000000"/>
@@ -33317,11 +33054,11 @@
                 <a:latin typeface="맑은 고딕"/>
                 <a:ea typeface="맑은 고딕"/>
               </a:rPr>
-              <a:t> 기간이 6개월 이상이면 5% 할인했다.</a:t>
-            </a:r>
-          </a:p>
-          <a:p>
-            <a:pPr lvl="3" marL="457200" indent="-182880">
+              <a:t>고객은 기존 배송지를 선택한다.</a:t>
+            </a:r>
+          </a:p>
+          <a:p>
+            <a:pPr lvl="2" marL="411480" indent="-137160">
               <a:spcBef>
                 <a:spcPts val="300"/>
               </a:spcBef>
@@ -33330,29 +33067,9 @@
               </a:spcAft>
               <a:buSzPct val="90000"/>
               <a:buFont typeface="Wingdings" pitchFamily="2" charset="2"/>
-              <a:buChar char=""/>
+              <a:buChar char=""/>
             </a:pPr>
             <a:r>
-              <a:rPr sz="1200" b="1">
-                <a:solidFill>
-                  <a:srgbClr val="000000"/>
-                </a:solidFill>
-                <a:latin typeface="맑은 고딕"/>
-                <a:ea typeface="맑은 고딕"/>
-              </a:rPr>
-              <a:t>테스트</a:t>
-            </a:r>
-            <a:r>
-              <a:rPr sz="1200" b="0">
-                <a:solidFill>
-                  <a:srgbClr val="000000"/>
-                </a:solidFill>
-                <a:latin typeface="맑은 고딕"/>
-                <a:ea typeface="맑은 고딕"/>
-              </a:rPr>
-              <a:t> —</a:t>
-            </a:r>
-            <a:r>
               <a:rPr sz="1000" b="0">
                 <a:solidFill>
                   <a:srgbClr val="000000"/>
@@ -33360,7 +33077,233 @@
                 <a:latin typeface="맑은 고딕"/>
                 <a:ea typeface="맑은 고딕"/>
               </a:rPr>
-              <a:t> 승인된 경우만 테스트했다.</a:t>
+              <a:t>고객은 기존 결제수단을 선택한다.</a:t>
+            </a:r>
+          </a:p>
+          <a:p>
+            <a:pPr lvl="2" marL="411480" indent="-137160">
+              <a:spcBef>
+                <a:spcPts val="300"/>
+              </a:spcBef>
+              <a:spcAft>
+                <a:spcPts val="300"/>
+              </a:spcAft>
+              <a:buSzPct val="90000"/>
+              <a:buFont typeface="Wingdings" pitchFamily="2" charset="2"/>
+              <a:buChar char=""/>
+            </a:pPr>
+            <a:r>
+              <a:rPr sz="1000" b="0">
+                <a:solidFill>
+                  <a:srgbClr val="000000"/>
+                </a:solidFill>
+                <a:latin typeface="맑은 고딕"/>
+                <a:ea typeface="맑은 고딕"/>
+              </a:rPr>
+              <a:t>상품·수량·배송지·결제수단의 유효성은 기존 정책을 따른다.</a:t>
+            </a:r>
+          </a:p>
+          <a:p>
+            <a:pPr marL="322580" indent="-139700">
+              <a:spcBef>
+                <a:spcPts val="300"/>
+              </a:spcBef>
+              <a:spcAft>
+                <a:spcPts val="300"/>
+              </a:spcAft>
+              <a:buNone/>
+            </a:pPr>
+            <a:r>
+              <a:rPr sz="1000" b="1">
+                <a:solidFill>
+                  <a:srgbClr val="000000"/>
+                </a:solidFill>
+                <a:latin typeface="맑은 고딕"/>
+                <a:ea typeface="맑은 고딕"/>
+              </a:rPr>
+              <a:t>3. 계약 조건</a:t>
+            </a:r>
+          </a:p>
+          <a:p>
+            <a:pPr lvl="2" marL="411480" indent="-137160">
+              <a:spcBef>
+                <a:spcPts val="300"/>
+              </a:spcBef>
+              <a:spcAft>
+                <a:spcPts val="300"/>
+              </a:spcAft>
+              <a:buSzPct val="90000"/>
+              <a:buFont typeface="Wingdings" pitchFamily="2" charset="2"/>
+              <a:buChar char=""/>
+            </a:pPr>
+            <a:r>
+              <a:rPr sz="1000" b="0">
+                <a:solidFill>
+                  <a:srgbClr val="000000"/>
+                </a:solidFill>
+                <a:latin typeface="맑은 고딕"/>
+                <a:ea typeface="맑은 고딕"/>
+              </a:rPr>
+              <a:t>계약기간은 3개월 또는 6개월 중에서 선택한다.</a:t>
+            </a:r>
+          </a:p>
+          <a:p>
+            <a:pPr lvl="2" marL="411480" indent="-137160">
+              <a:spcBef>
+                <a:spcPts val="300"/>
+              </a:spcBef>
+              <a:spcAft>
+                <a:spcPts val="300"/>
+              </a:spcAft>
+              <a:buSzPct val="90000"/>
+              <a:buFont typeface="Wingdings" pitchFamily="2" charset="2"/>
+              <a:buChar char=""/>
+            </a:pPr>
+            <a:r>
+              <a:rPr sz="1000" b="0">
+                <a:solidFill>
+                  <a:srgbClr val="000000"/>
+                </a:solidFill>
+                <a:latin typeface="맑은 고딕"/>
+                <a:ea typeface="맑은 고딕"/>
+              </a:rPr>
+              <a:t>배송 주기는 2주 또는 4주 중에서 선택한다.</a:t>
+            </a:r>
+          </a:p>
+          <a:p>
+            <a:pPr lvl="2" marL="411480" indent="-137160">
+              <a:spcBef>
+                <a:spcPts val="300"/>
+              </a:spcBef>
+              <a:spcAft>
+                <a:spcPts val="300"/>
+              </a:spcAft>
+              <a:buSzPct val="90000"/>
+              <a:buFont typeface="Wingdings" pitchFamily="2" charset="2"/>
+              <a:buChar char=""/>
+            </a:pPr>
+            <a:r>
+              <a:rPr sz="1000" b="0">
+                <a:solidFill>
+                  <a:srgbClr val="000000"/>
+                </a:solidFill>
+                <a:latin typeface="맑은 고딕"/>
+                <a:ea typeface="맑은 고딕"/>
+              </a:rPr>
+              <a:t>계약은 고객이 선택한 첫 배송일부터 시작한다.</a:t>
+            </a:r>
+          </a:p>
+          <a:p>
+            <a:pPr lvl="2" marL="411480" indent="-137160">
+              <a:spcBef>
+                <a:spcPts val="300"/>
+              </a:spcBef>
+              <a:spcAft>
+                <a:spcPts val="300"/>
+              </a:spcAft>
+              <a:buSzPct val="90000"/>
+              <a:buFont typeface="Wingdings" pitchFamily="2" charset="2"/>
+              <a:buChar char=""/>
+            </a:pPr>
+            <a:r>
+              <a:rPr sz="1000" b="0">
+                <a:solidFill>
+                  <a:srgbClr val="000000"/>
+                </a:solidFill>
+                <a:latin typeface="맑은 고딕"/>
+                <a:ea typeface="맑은 고딕"/>
+              </a:rPr>
+              <a:t>계약기간이 끝나면 자동 종료하며 자동 갱신하지 않는다.</a:t>
+            </a:r>
+          </a:p>
+          <a:p>
+            <a:pPr lvl="2" marL="411480" indent="-137160">
+              <a:spcBef>
+                <a:spcPts val="300"/>
+              </a:spcBef>
+              <a:spcAft>
+                <a:spcPts val="300"/>
+              </a:spcAft>
+              <a:buSzPct val="90000"/>
+              <a:buFont typeface="Wingdings" pitchFamily="2" charset="2"/>
+              <a:buChar char=""/>
+            </a:pPr>
+            <a:r>
+              <a:rPr sz="1000" b="0">
+                <a:solidFill>
+                  <a:srgbClr val="000000"/>
+                </a:solidFill>
+                <a:latin typeface="맑은 고딕"/>
+                <a:ea typeface="맑은 고딕"/>
+              </a:rPr>
+              <a:t>재이용하려면 별도의 신규 신청이 필요하다.</a:t>
+            </a:r>
+          </a:p>
+          <a:p>
+            <a:pPr marL="182880" indent="0">
+              <a:spcBef>
+                <a:spcPts val="300"/>
+              </a:spcBef>
+              <a:spcAft>
+                <a:spcPts val="300"/>
+              </a:spcAft>
+              <a:buNone/>
+            </a:pPr>
+            <a:r>
+              <a:rPr sz="1000" b="1">
+                <a:solidFill>
+                  <a:srgbClr val="000000"/>
+                </a:solidFill>
+                <a:latin typeface="맑은 고딕"/>
+                <a:ea typeface="맑은 고딕"/>
+              </a:rPr>
+              <a:t>미정 사항</a:t>
+            </a:r>
+          </a:p>
+          <a:p>
+            <a:pPr lvl="2" marL="411480" indent="-137160">
+              <a:spcBef>
+                <a:spcPts val="300"/>
+              </a:spcBef>
+              <a:spcAft>
+                <a:spcPts val="300"/>
+              </a:spcAft>
+              <a:buSzPct val="90000"/>
+              <a:buFont typeface="Wingdings" pitchFamily="2" charset="2"/>
+              <a:buChar char=""/>
+            </a:pPr>
+            <a:r>
+              <a:rPr sz="1000" b="0">
+                <a:solidFill>
+                  <a:srgbClr val="000000"/>
+                </a:solidFill>
+                <a:latin typeface="맑은 고딕"/>
+                <a:ea typeface="맑은 고딕"/>
+              </a:rPr>
+              <a:t>계약 종료일 산정 기준</a:t>
+            </a:r>
+          </a:p>
+          <a:p>
+            <a:pPr lvl="2" marL="411480" indent="-137160">
+              <a:spcBef>
+                <a:spcPts val="300"/>
+              </a:spcBef>
+              <a:spcAft>
+                <a:spcPts val="300"/>
+              </a:spcAft>
+              <a:buSzPct val="90000"/>
+              <a:buFont typeface="Wingdings" pitchFamily="2" charset="2"/>
+              <a:buChar char=""/>
+            </a:pPr>
+            <a:r>
+              <a:rPr sz="1000" b="0">
+                <a:solidFill>
+                  <a:srgbClr val="000000"/>
+                </a:solidFill>
+                <a:latin typeface="맑은 고딕"/>
+                <a:ea typeface="맑은 고딕"/>
+              </a:rPr>
+              <a:t>종료일과 같은 날로 예정된 배송 회차의 포함 여부</a:t>
             </a:r>
           </a:p>
         </p:txBody>
@@ -33383,8 +33326,8 @@
         </p:nvSpPr>
         <p:spPr>
           <a:xfrm>
-            <a:off x="233172" y="960120"/>
-            <a:ext cx="8778240" cy="656244"/>
+            <a:off x="4572000" y="960120"/>
+            <a:ext cx="4439412" cy="5352345"/>
           </a:xfrm>
         </p:spPr>
         <p:txBody>
@@ -33393,7 +33336,7 @@
           </a:bodyPr>
           <a:lstStyle/>
           <a:p>
-            <a:pPr marL="0" indent="0">
+            <a:pPr marL="322580" indent="-139700">
               <a:spcBef>
                 <a:spcPts val="300"/>
               </a:spcBef>
@@ -33403,67 +33346,18 @@
               <a:buNone/>
             </a:pPr>
             <a:r>
-              <a:rPr sz="1400" b="0">
-                <a:solidFill>
-                  <a:srgbClr val="000000"/>
-                </a:solidFill>
-                <a:latin typeface="맑은 고딕"/>
-                <a:ea typeface="맑은 고딕"/>
-              </a:rPr>
-              <a:t>LLM 초안은 "신청한다"를 만들면서 요청에 없던 </a:t>
-            </a:r>
-            <a:r>
-              <a:rPr sz="1400" b="1">
-                <a:solidFill>
-                  <a:srgbClr val="000000"/>
-                </a:solidFill>
-                <a:latin typeface="맑은 고딕"/>
-                <a:ea typeface="맑은 고딕"/>
-              </a:rPr>
-              <a:t>상태와 규칙을 스스로 더하고</a:t>
-            </a:r>
-            <a:r>
-              <a:rPr sz="1400" b="0">
-                <a:solidFill>
-                  <a:srgbClr val="000000"/>
-                </a:solidFill>
-                <a:latin typeface="맑은 고딕"/>
-                <a:ea typeface="맑은 고딕"/>
-              </a:rPr>
-              <a:t>, 결제 거절과 회차 생성을 정했다. 추측마다 사람이 정할 결정을 적었다.</a:t>
-            </a:r>
-          </a:p>
-        </p:txBody>
-      </p:sp>
-      <p:sp>
-        <p:nvSpPr>
-          <p:cNvPr id="10" name="내용 개체 틀 7">
-            <a:extLst>
-              <a:ext uri="{FF2B5EF4-FFF2-40B4-BE49-F238E27FC236}">
-                <a16:creationId xmlns:a16="http://schemas.microsoft.com/office/drawing/2014/main" id="{BEBA2C4A-B0BF-F2E4-EA6E-614C99CBA184}"/>
-              </a:ext>
-            </a:extLst>
-          </p:cNvPr>
-          <p:cNvSpPr>
-            <a:spLocks noGrp="1"/>
-          </p:cNvSpPr>
-          <p:nvPr>
-            <p:ph idx="1"/>
-          </p:nvPr>
-        </p:nvSpPr>
-        <p:spPr>
-          <a:xfrm>
-            <a:off x="4572000" y="1616364"/>
-            <a:ext cx="4439412" cy="4696101"/>
-          </a:xfrm>
-        </p:spPr>
-        <p:txBody>
-          <a:bodyPr>
-            <a:normAutofit/>
-          </a:bodyPr>
-          <a:lstStyle/>
-          <a:p>
-            <a:pPr lvl="2" marL="228600" indent="-182880">
+              <a:rPr sz="1000" b="1">
+                <a:solidFill>
+                  <a:srgbClr val="000000"/>
+                </a:solidFill>
+                <a:latin typeface="맑은 고딕"/>
+                <a:ea typeface="맑은 고딕"/>
+              </a:rPr>
+              <a:t>4. 첫 배송일</a:t>
+            </a:r>
+          </a:p>
+          <a:p>
+            <a:pPr lvl="2" marL="411480" indent="-137160">
               <a:spcBef>
                 <a:spcPts val="300"/>
               </a:spcBef>
@@ -33475,18 +33369,18 @@
               <a:buChar char=""/>
             </a:pPr>
             <a:r>
-              <a:rPr sz="1400" b="1">
-                <a:solidFill>
-                  <a:srgbClr val="000000"/>
-                </a:solidFill>
-                <a:latin typeface="맑은 고딕"/>
-                <a:ea typeface="맑은 고딕"/>
-              </a:rPr>
-              <a:t>사람이 정할 결정</a:t>
-            </a:r>
-          </a:p>
-          <a:p>
-            <a:pPr lvl="3" marL="457200" indent="-182880">
+              <a:rPr sz="1000" b="0">
+                <a:solidFill>
+                  <a:srgbClr val="000000"/>
+                </a:solidFill>
+                <a:latin typeface="맑은 고딕"/>
+                <a:ea typeface="맑은 고딕"/>
+              </a:rPr>
+              <a:t>고객이 첫 배송일을 선택한다.</a:t>
+            </a:r>
+          </a:p>
+          <a:p>
+            <a:pPr lvl="2" marL="411480" indent="-137160">
               <a:spcBef>
                 <a:spcPts val="300"/>
               </a:spcBef>
@@ -33495,29 +33389,9 @@
               </a:spcAft>
               <a:buSzPct val="90000"/>
               <a:buFont typeface="Wingdings" pitchFamily="2" charset="2"/>
-              <a:buChar char=""/>
+              <a:buChar char=""/>
             </a:pPr>
             <a:r>
-              <a:rPr sz="1200" b="1">
-                <a:solidFill>
-                  <a:srgbClr val="000000"/>
-                </a:solidFill>
-                <a:latin typeface="맑은 고딕"/>
-                <a:ea typeface="맑은 고딕"/>
-              </a:rPr>
-              <a:t>상태</a:t>
-            </a:r>
-            <a:r>
-              <a:rPr sz="1200" b="0">
-                <a:solidFill>
-                  <a:srgbClr val="000000"/>
-                </a:solidFill>
-                <a:latin typeface="맑은 고딕"/>
-                <a:ea typeface="맑은 고딕"/>
-              </a:rPr>
-              <a:t> —</a:t>
-            </a:r>
-            <a:r>
               <a:rPr sz="1000" b="0">
                 <a:solidFill>
                   <a:srgbClr val="000000"/>
@@ -33525,11 +33399,32 @@
                 <a:latin typeface="맑은 고딕"/>
                 <a:ea typeface="맑은 고딕"/>
               </a:rPr>
-              <a:t> 정기배송은 결제 대기 → 확정, 회차는 예정으로 시작한다. 그 밖의 상태는 두지 않는다.</a:t>
-            </a:r>
-          </a:p>
-          <a:p>
-            <a:pPr lvl="3" marL="457200" indent="-182880">
+              <a:t>선택한 첫 배송일이 계약 시작일이자 첫 회차 배송일이다.</a:t>
+            </a:r>
+          </a:p>
+          <a:p>
+            <a:pPr marL="182880" indent="0">
+              <a:spcBef>
+                <a:spcPts val="300"/>
+              </a:spcBef>
+              <a:spcAft>
+                <a:spcPts val="300"/>
+              </a:spcAft>
+              <a:buNone/>
+            </a:pPr>
+            <a:r>
+              <a:rPr sz="1000" b="1">
+                <a:solidFill>
+                  <a:srgbClr val="000000"/>
+                </a:solidFill>
+                <a:latin typeface="맑은 고딕"/>
+                <a:ea typeface="맑은 고딕"/>
+              </a:rPr>
+              <a:t>미정 사항</a:t>
+            </a:r>
+          </a:p>
+          <a:p>
+            <a:pPr lvl="2" marL="411480" indent="-137160">
               <a:spcBef>
                 <a:spcPts val="300"/>
               </a:spcBef>
@@ -33538,29 +33433,9 @@
               </a:spcAft>
               <a:buSzPct val="90000"/>
               <a:buFont typeface="Wingdings" pitchFamily="2" charset="2"/>
-              <a:buChar char=""/>
+              <a:buChar char=""/>
             </a:pPr>
             <a:r>
-              <a:rPr sz="1200" b="1">
-                <a:solidFill>
-                  <a:srgbClr val="000000"/>
-                </a:solidFill>
-                <a:latin typeface="맑은 고딕"/>
-                <a:ea typeface="맑은 고딕"/>
-              </a:rPr>
-              <a:t>금액</a:t>
-            </a:r>
-            <a:r>
-              <a:rPr sz="1200" b="0">
-                <a:solidFill>
-                  <a:srgbClr val="000000"/>
-                </a:solidFill>
-                <a:latin typeface="맑은 고딕"/>
-                <a:ea typeface="맑은 고딕"/>
-              </a:rPr>
-              <a:t> —</a:t>
-            </a:r>
-            <a:r>
               <a:rPr sz="1000" b="0">
                 <a:solidFill>
                   <a:srgbClr val="000000"/>
@@ -33568,11 +33443,11 @@
                 <a:latin typeface="맑은 고딕"/>
                 <a:ea typeface="맑은 고딕"/>
               </a:rPr>
-              <a:t> 회차 금액은 신청 때의 가격 × 수량이며 기간 끝까지 같다.</a:t>
-            </a:r>
-          </a:p>
-          <a:p>
-            <a:pPr lvl="3" marL="457200" indent="-182880">
+              <a:t>신청일로부터 첫 배송일까지 필요한 최소 준비기간</a:t>
+            </a:r>
+          </a:p>
+          <a:p>
+            <a:pPr lvl="2" marL="411480" indent="-137160">
               <a:spcBef>
                 <a:spcPts val="300"/>
               </a:spcBef>
@@ -33581,29 +33456,9 @@
               </a:spcAft>
               <a:buSzPct val="90000"/>
               <a:buFont typeface="Wingdings" pitchFamily="2" charset="2"/>
-              <a:buChar char=""/>
+              <a:buChar char=""/>
             </a:pPr>
             <a:r>
-              <a:rPr sz="1200" b="1">
-                <a:solidFill>
-                  <a:srgbClr val="000000"/>
-                </a:solidFill>
-                <a:latin typeface="맑은 고딕"/>
-                <a:ea typeface="맑은 고딕"/>
-              </a:rPr>
-              <a:t>회차</a:t>
-            </a:r>
-            <a:r>
-              <a:rPr sz="1200" b="0">
-                <a:solidFill>
-                  <a:srgbClr val="000000"/>
-                </a:solidFill>
-                <a:latin typeface="맑은 고딕"/>
-                <a:ea typeface="맑은 고딕"/>
-              </a:rPr>
-              <a:t> —</a:t>
-            </a:r>
-            <a:r>
               <a:rPr sz="1000" b="0">
                 <a:solidFill>
                   <a:srgbClr val="000000"/>
@@ -33611,11 +33466,32 @@
                 <a:latin typeface="맑은 고딕"/>
                 <a:ea typeface="맑은 고딕"/>
               </a:rPr>
-              <a:t> 첫 배송일부터 배송 주기마다, 만료일까지의 날짜로 예정 회차를 만든다.</a:t>
-            </a:r>
-          </a:p>
-          <a:p>
-            <a:pPr lvl="3" marL="457200" indent="-182880">
+              <a:t>휴일 또는 배송 불가일에 대한 날짜 적용 기준</a:t>
+            </a:r>
+          </a:p>
+          <a:p>
+            <a:pPr marL="322580" indent="-139700">
+              <a:spcBef>
+                <a:spcPts val="300"/>
+              </a:spcBef>
+              <a:spcAft>
+                <a:spcPts val="300"/>
+              </a:spcAft>
+              <a:buNone/>
+            </a:pPr>
+            <a:r>
+              <a:rPr sz="1000" b="1">
+                <a:solidFill>
+                  <a:srgbClr val="000000"/>
+                </a:solidFill>
+                <a:latin typeface="맑은 고딕"/>
+                <a:ea typeface="맑은 고딕"/>
+              </a:rPr>
+              <a:t>5. 배송 회차</a:t>
+            </a:r>
+          </a:p>
+          <a:p>
+            <a:pPr lvl="2" marL="411480" indent="-137160">
               <a:spcBef>
                 <a:spcPts val="300"/>
               </a:spcBef>
@@ -33624,29 +33500,9 @@
               </a:spcAft>
               <a:buSzPct val="90000"/>
               <a:buFont typeface="Wingdings" pitchFamily="2" charset="2"/>
-              <a:buChar char=""/>
+              <a:buChar char=""/>
             </a:pPr>
             <a:r>
-              <a:rPr sz="1200" b="1">
-                <a:solidFill>
-                  <a:srgbClr val="000000"/>
-                </a:solidFill>
-                <a:latin typeface="맑은 고딕"/>
-                <a:ea typeface="맑은 고딕"/>
-              </a:rPr>
-              <a:t>거절</a:t>
-            </a:r>
-            <a:r>
-              <a:rPr sz="1200" b="0">
-                <a:solidFill>
-                  <a:srgbClr val="000000"/>
-                </a:solidFill>
-                <a:latin typeface="맑은 고딕"/>
-                <a:ea typeface="맑은 고딕"/>
-              </a:rPr>
-              <a:t> —</a:t>
-            </a:r>
-            <a:r>
               <a:rPr sz="1000" b="0">
                 <a:solidFill>
                   <a:srgbClr val="000000"/>
@@ -33654,11 +33510,11 @@
                 <a:latin typeface="맑은 고딕"/>
                 <a:ea typeface="맑은 고딕"/>
               </a:rPr>
-              <a:t> 결제가 거절되면 결제 대기를 유지한다.</a:t>
-            </a:r>
-          </a:p>
-          <a:p>
-            <a:pPr lvl="3" marL="457200" indent="-182880">
+              <a:t>첫 배송일을 기준으로 선택한 주기마다 배송 회차를 산정한다.</a:t>
+            </a:r>
+          </a:p>
+          <a:p>
+            <a:pPr lvl="2" marL="411480" indent="-137160">
               <a:spcBef>
                 <a:spcPts val="300"/>
               </a:spcBef>
@@ -33667,29 +33523,9 @@
               </a:spcAft>
               <a:buSzPct val="90000"/>
               <a:buFont typeface="Wingdings" pitchFamily="2" charset="2"/>
-              <a:buChar char=""/>
+              <a:buChar char=""/>
             </a:pPr>
             <a:r>
-              <a:rPr sz="1200" b="1">
-                <a:solidFill>
-                  <a:srgbClr val="000000"/>
-                </a:solidFill>
-                <a:latin typeface="맑은 고딕"/>
-                <a:ea typeface="맑은 고딕"/>
-              </a:rPr>
-              <a:t>덧붙인 규칙</a:t>
-            </a:r>
-            <a:r>
-              <a:rPr sz="1200" b="0">
-                <a:solidFill>
-                  <a:srgbClr val="000000"/>
-                </a:solidFill>
-                <a:latin typeface="맑은 고딕"/>
-                <a:ea typeface="맑은 고딕"/>
-              </a:rPr>
-              <a:t> —</a:t>
-            </a:r>
-            <a:r>
               <a:rPr sz="1000" b="0">
                 <a:solidFill>
                   <a:srgbClr val="000000"/>
@@ -33697,11 +33533,32 @@
                 <a:latin typeface="맑은 고딕"/>
                 <a:ea typeface="맑은 고딕"/>
               </a:rPr>
-              <a:t> 요청에 없는 규칙은 넣지 않는다. 필요하면 업무 담당자에게 묻는다.</a:t>
-            </a:r>
-          </a:p>
-          <a:p>
-            <a:pPr lvl="3" marL="457200" indent="-182880">
+              <a:t>배송 회차별로 기존 주문·배송 기능을 연계한다.</a:t>
+            </a:r>
+          </a:p>
+          <a:p>
+            <a:pPr marL="182880" indent="0">
+              <a:spcBef>
+                <a:spcPts val="300"/>
+              </a:spcBef>
+              <a:spcAft>
+                <a:spcPts val="300"/>
+              </a:spcAft>
+              <a:buNone/>
+            </a:pPr>
+            <a:r>
+              <a:rPr sz="1000" b="1">
+                <a:solidFill>
+                  <a:srgbClr val="000000"/>
+                </a:solidFill>
+                <a:latin typeface="맑은 고딕"/>
+                <a:ea typeface="맑은 고딕"/>
+              </a:rPr>
+              <a:t>미정 사항</a:t>
+            </a:r>
+          </a:p>
+          <a:p>
+            <a:pPr lvl="2" marL="411480" indent="-137160">
               <a:spcBef>
                 <a:spcPts val="300"/>
               </a:spcBef>
@@ -33710,29 +33567,9 @@
               </a:spcAft>
               <a:buSzPct val="90000"/>
               <a:buFont typeface="Wingdings" pitchFamily="2" charset="2"/>
-              <a:buChar char=""/>
+              <a:buChar char=""/>
             </a:pPr>
             <a:r>
-              <a:rPr sz="1200" b="1">
-                <a:solidFill>
-                  <a:srgbClr val="000000"/>
-                </a:solidFill>
-                <a:latin typeface="맑은 고딕"/>
-                <a:ea typeface="맑은 고딕"/>
-              </a:rPr>
-              <a:t>테스트</a:t>
-            </a:r>
-            <a:r>
-              <a:rPr sz="1200" b="0">
-                <a:solidFill>
-                  <a:srgbClr val="000000"/>
-                </a:solidFill>
-                <a:latin typeface="맑은 고딕"/>
-                <a:ea typeface="맑은 고딕"/>
-              </a:rPr>
-              <a:t> —</a:t>
-            </a:r>
-            <a:r>
               <a:rPr sz="1000" b="0">
                 <a:solidFill>
                   <a:srgbClr val="000000"/>
@@ -33740,7 +33577,187 @@
                 <a:latin typeface="맑은 고딕"/>
                 <a:ea typeface="맑은 고딕"/>
               </a:rPr>
-              <a:t> 승인·거절 두 경로와 회차의 날짜를 확인한다.</a:t>
+              <a:t>계약 종료 기준에 따른 총 배송 횟수와 마지막 배송일</a:t>
+            </a:r>
+          </a:p>
+          <a:p>
+            <a:pPr marL="322580" indent="-139700">
+              <a:spcBef>
+                <a:spcPts val="300"/>
+              </a:spcBef>
+              <a:spcAft>
+                <a:spcPts val="300"/>
+              </a:spcAft>
+              <a:buNone/>
+            </a:pPr>
+            <a:r>
+              <a:rPr sz="1000" b="1">
+                <a:solidFill>
+                  <a:srgbClr val="000000"/>
+                </a:solidFill>
+                <a:latin typeface="맑은 고딕"/>
+                <a:ea typeface="맑은 고딕"/>
+              </a:rPr>
+              <a:t>6. 결제 및 신청 완료</a:t>
+            </a:r>
+          </a:p>
+          <a:p>
+            <a:pPr lvl="2" marL="411480" indent="-137160">
+              <a:spcBef>
+                <a:spcPts val="300"/>
+              </a:spcBef>
+              <a:spcAft>
+                <a:spcPts val="300"/>
+              </a:spcAft>
+              <a:buSzPct val="90000"/>
+              <a:buFont typeface="Wingdings" pitchFamily="2" charset="2"/>
+              <a:buChar char=""/>
+            </a:pPr>
+            <a:r>
+              <a:rPr sz="1000" b="0">
+                <a:solidFill>
+                  <a:srgbClr val="000000"/>
+                </a:solidFill>
+                <a:latin typeface="맑은 고딕"/>
+                <a:ea typeface="맑은 고딕"/>
+              </a:rPr>
+              <a:t>기존 결제수단으로 배송 회차마다 결제한다.</a:t>
+            </a:r>
+          </a:p>
+          <a:p>
+            <a:pPr lvl="2" marL="411480" indent="-137160">
+              <a:spcBef>
+                <a:spcPts val="300"/>
+              </a:spcBef>
+              <a:spcAft>
+                <a:spcPts val="300"/>
+              </a:spcAft>
+              <a:buSzPct val="90000"/>
+              <a:buFont typeface="Wingdings" pitchFamily="2" charset="2"/>
+              <a:buChar char=""/>
+            </a:pPr>
+            <a:r>
+              <a:rPr sz="1000" b="0">
+                <a:solidFill>
+                  <a:srgbClr val="000000"/>
+                </a:solidFill>
+                <a:latin typeface="맑은 고딕"/>
+                <a:ea typeface="맑은 고딕"/>
+              </a:rPr>
+              <a:t>최초 신청 과정에서 첫 회차를 결제한다.</a:t>
+            </a:r>
+          </a:p>
+          <a:p>
+            <a:pPr lvl="2" marL="411480" indent="-137160">
+              <a:spcBef>
+                <a:spcPts val="300"/>
+              </a:spcBef>
+              <a:spcAft>
+                <a:spcPts val="300"/>
+              </a:spcAft>
+              <a:buSzPct val="90000"/>
+              <a:buFont typeface="Wingdings" pitchFamily="2" charset="2"/>
+              <a:buChar char=""/>
+            </a:pPr>
+            <a:r>
+              <a:rPr sz="1000" b="0">
+                <a:solidFill>
+                  <a:srgbClr val="000000"/>
+                </a:solidFill>
+                <a:latin typeface="맑은 고딕"/>
+                <a:ea typeface="맑은 고딕"/>
+              </a:rPr>
+              <a:t>첫 회차 결제에 성공하면 정기배송 신청이 완료된다.</a:t>
+            </a:r>
+          </a:p>
+          <a:p>
+            <a:pPr lvl="2" marL="411480" indent="-137160">
+              <a:spcBef>
+                <a:spcPts val="300"/>
+              </a:spcBef>
+              <a:spcAft>
+                <a:spcPts val="300"/>
+              </a:spcAft>
+              <a:buSzPct val="90000"/>
+              <a:buFont typeface="Wingdings" pitchFamily="2" charset="2"/>
+              <a:buChar char=""/>
+            </a:pPr>
+            <a:r>
+              <a:rPr sz="1000" b="0">
+                <a:solidFill>
+                  <a:srgbClr val="000000"/>
+                </a:solidFill>
+                <a:latin typeface="맑은 고딕"/>
+                <a:ea typeface="맑은 고딕"/>
+              </a:rPr>
+              <a:t>첫 회차 결제에 실패하면 신청은 완료되지 않는다.</a:t>
+            </a:r>
+          </a:p>
+          <a:p>
+            <a:pPr marL="182880" indent="0">
+              <a:spcBef>
+                <a:spcPts val="300"/>
+              </a:spcBef>
+              <a:spcAft>
+                <a:spcPts val="300"/>
+              </a:spcAft>
+              <a:buNone/>
+            </a:pPr>
+            <a:r>
+              <a:rPr sz="1000" b="1">
+                <a:solidFill>
+                  <a:srgbClr val="000000"/>
+                </a:solidFill>
+                <a:latin typeface="맑은 고딕"/>
+                <a:ea typeface="맑은 고딕"/>
+              </a:rPr>
+              <a:t>미정 사항</a:t>
+            </a:r>
+          </a:p>
+          <a:p>
+            <a:pPr lvl="2" marL="411480" indent="-137160">
+              <a:spcBef>
+                <a:spcPts val="300"/>
+              </a:spcBef>
+              <a:spcAft>
+                <a:spcPts val="300"/>
+              </a:spcAft>
+              <a:buSzPct val="90000"/>
+              <a:buFont typeface="Wingdings" pitchFamily="2" charset="2"/>
+              <a:buChar char=""/>
+            </a:pPr>
+            <a:r>
+              <a:rPr sz="1000" b="0">
+                <a:solidFill>
+                  <a:srgbClr val="000000"/>
+                </a:solidFill>
+                <a:latin typeface="맑은 고딕"/>
+                <a:ea typeface="맑은 고딕"/>
+              </a:rPr>
+              <a:t>첫 결제 실패 건의 보관 또는 무효 처리 기준</a:t>
+            </a:r>
+          </a:p>
+          <a:p>
+            <a:pPr lvl="2" marL="411480" indent="-137160">
+              <a:spcBef>
+                <a:spcPts val="300"/>
+              </a:spcBef>
+              <a:spcAft>
+                <a:spcPts val="300"/>
+              </a:spcAft>
+              <a:buSzPct val="90000"/>
+              <a:buFont typeface="Wingdings" pitchFamily="2" charset="2"/>
+              <a:buChar char=""/>
+            </a:pPr>
+            <a:r>
+              <a:rPr sz="1000" b="0">
+                <a:solidFill>
+                  <a:srgbClr val="000000"/>
+                </a:solidFill>
+                <a:latin typeface="맑은 고딕"/>
+                <a:ea typeface="맑은 고딕"/>
+              </a:rPr>
+              <a:t>각 회차 결제금액에 적용할 상품 가격, 할인 및 배송비 기준</a:t>
             </a:r>
           </a:p>
         </p:txBody>
@@ -33766,7 +33783,7 @@
         <p:cNvPr id="1" name="">
           <a:extLst>
             <a:ext uri="{FF2B5EF4-FFF2-40B4-BE49-F238E27FC236}">
-              <a16:creationId xmlns:a16="http://schemas.microsoft.com/office/drawing/2014/main" id="{60B87152-D004-1569-E429-90A42420A65C}"/>
+              <a16:creationId xmlns:a16="http://schemas.microsoft.com/office/drawing/2014/main" id="{8E4F1F13-426B-086B-7D8C-9A58A0F879DB}"/>
             </a:ext>
           </a:extLst>
         </p:cNvPr>
@@ -33786,7 +33803,7 @@
           <p:cNvPr id="2" name="제목 1">
             <a:extLst>
               <a:ext uri="{FF2B5EF4-FFF2-40B4-BE49-F238E27FC236}">
-                <a16:creationId xmlns:a16="http://schemas.microsoft.com/office/drawing/2014/main" id="{F2E2AB02-3ADE-69B8-887E-7981AD15EF24}"/>
+                <a16:creationId xmlns:a16="http://schemas.microsoft.com/office/drawing/2014/main" id="{AA26A92D-924E-0575-9551-F8FD7BFD3FAD}"/>
               </a:ext>
             </a:extLst>
           </p:cNvPr>
@@ -33810,17 +33827,17 @@
                 <a:latin typeface="맑은 고딕"/>
                 <a:ea typeface="맑은 고딕"/>
               </a:rPr>
-              <a:t>첫 릴리스의 활용 방식 </a:t>
-            </a:r>
-            <a:r>
-              <a:rPr sz="1800" b="1">
-                <a:solidFill>
-                  <a:srgbClr val="000000"/>
-                </a:solidFill>
-                <a:latin typeface="맑은 고딕"/>
-                <a:ea typeface="맑은 고딕"/>
-              </a:rPr>
-              <a:t>(안)</a:t>
+              <a:t>정기배송 최초 신청 업무 조건 </a:t>
+            </a:r>
+            <a:r>
+              <a:rPr sz="2000" b="1">
+                <a:solidFill>
+                  <a:srgbClr val="000000"/>
+                </a:solidFill>
+                <a:latin typeface="맑은 고딕"/>
+                <a:ea typeface="맑은 고딕"/>
+              </a:rPr>
+              <a:t>(2/2)</a:t>
             </a:r>
           </a:p>
           <a:p>
@@ -33833,6 +33850,41 @@
                 <a:ea typeface="맑은 고딕"/>
               </a:rPr>
               <a:t>별첨. 실습 답</a:t>
+            </a:r>
+          </a:p>
+        </p:txBody>
+      </p:sp>
+      <p:sp>
+        <p:nvSpPr>
+          <p:cNvPr id="3" name="슬라이드 번호 개체 틀 2">
+            <a:extLst>
+              <a:ext uri="{FF2B5EF4-FFF2-40B4-BE49-F238E27FC236}">
+                <a16:creationId xmlns:a16="http://schemas.microsoft.com/office/drawing/2014/main" id="{12CF30EE-4DFD-8063-56B8-B8689E76DFCA}"/>
+              </a:ext>
+            </a:extLst>
+          </p:cNvPr>
+          <p:cNvSpPr>
+            <a:spLocks noGrp="1"/>
+          </p:cNvSpPr>
+          <p:nvPr>
+            <p:ph type="sldNum" sz="quarter" idx="10"/>
+          </p:nvPr>
+        </p:nvSpPr>
+        <p:spPr/>
+        <p:txBody>
+          <a:bodyPr/>
+          <a:lstStyle/>
+          <a:p>
+            <a:pPr>
+              <a:defRPr/>
+            </a:pPr>
+            <a:r>
+              <a:rPr lang="en-US" altLang="ko-KR">
+                <a:solidFill>
+                  <a:prstClr val="black"/>
+                </a:solidFill>
+              </a:rPr>
+              <a:t>- 34 -</a:t>
             </a:r>
           </a:p>
         </p:txBody>
@@ -33842,7 +33894,7 @@
           <p:cNvPr id="5" name="텍스트 개체 틀 4">
             <a:extLst>
               <a:ext uri="{FF2B5EF4-FFF2-40B4-BE49-F238E27FC236}">
-                <a16:creationId xmlns:a16="http://schemas.microsoft.com/office/drawing/2014/main" id="{F0895985-68EF-30BA-2165-4B3D90ECD41C}"/>
+                <a16:creationId xmlns:a16="http://schemas.microsoft.com/office/drawing/2014/main" id="{D66274C8-E16F-5AEB-614B-D8D32DA3E8C6}"/>
               </a:ext>
             </a:extLst>
           </p:cNvPr>
@@ -33870,7 +33922,7 @@
           <p:cNvPr id="6" name="텍스트 개체 틀 5">
             <a:extLst>
               <a:ext uri="{FF2B5EF4-FFF2-40B4-BE49-F238E27FC236}">
-                <a16:creationId xmlns:a16="http://schemas.microsoft.com/office/drawing/2014/main" id="{D985C1FD-84C4-10F9-372D-6A84E1680E07}"/>
+                <a16:creationId xmlns:a16="http://schemas.microsoft.com/office/drawing/2014/main" id="{A24E58E1-194B-A320-AEEE-24D08685BB67}"/>
               </a:ext>
             </a:extLst>
           </p:cNvPr>
@@ -33895,7 +33947,7 @@
           <p:cNvPr id="7" name="텍스트 개체 틀 6">
             <a:extLst>
               <a:ext uri="{FF2B5EF4-FFF2-40B4-BE49-F238E27FC236}">
-                <a16:creationId xmlns:a16="http://schemas.microsoft.com/office/drawing/2014/main" id="{E26A8878-48FF-5E3A-5D05-0F900C22011B}"/>
+                <a16:creationId xmlns:a16="http://schemas.microsoft.com/office/drawing/2014/main" id="{A219F420-613B-6234-45F6-0955A9A4505F}"/>
               </a:ext>
             </a:extLst>
           </p:cNvPr>
@@ -33911,2550 +33963,16 @@
           <a:bodyPr/>
           <a:lstStyle/>
           <a:p>
-            <a:endParaRPr lang="en-US" altLang="ko-KR" dirty="0"/>
-          </a:p>
-        </p:txBody>
-      </p:sp>
-      <p:graphicFrame>
-        <p:nvGraphicFramePr>
-          <p:cNvPr id="11" name="표 10">
-            <a:extLst>
-              <a:ext uri="{FF2B5EF4-FFF2-40B4-BE49-F238E27FC236}">
-                <a16:creationId xmlns:a16="http://schemas.microsoft.com/office/drawing/2014/main" id="{93753AB9-526C-CE2D-446D-7615D9B6D6D2}"/>
-              </a:ext>
-            </a:extLst>
-          </p:cNvPr>
-          <p:cNvGraphicFramePr>
-            <a:graphicFrameLocks noGrp="1"/>
-          </p:cNvGraphicFramePr>
-          <p:nvPr>
-            <p:extLst>
-              <p:ext uri="{D42A27DB-BD31-4B8C-83A1-F6EECF244321}">
-                <p14:modId xmlns:p14="http://schemas.microsoft.com/office/powerpoint/2010/main" val="1761827855"/>
-              </p:ext>
-            </p:extLst>
-          </p:nvPr>
-        </p:nvGraphicFramePr>
-        <p:xfrm>
-          <a:off x="564706" y="2112010"/>
-          <a:ext cx="8001000" cy="3873500"/>
-        </p:xfrm>
-        <a:graphic>
-          <a:graphicData uri="http://schemas.openxmlformats.org/drawingml/2006/table">
-            <a:tbl>
-              <a:tblPr/>
-              <a:tblGrid>
-                <a:gridCol w="1673860"/>
-                <a:gridCol w="1115060"/>
-                <a:gridCol w="1394460"/>
-                <a:gridCol w="947420"/>
-                <a:gridCol w="889000"/>
-                <a:gridCol w="1981200"/>
-              </a:tblGrid>
-              <a:tr h="288000">
-                <a:tc>
-                  <a:txBody>
-                    <a:bodyPr/>
-                    <a:lstStyle/>
-                    <a:p>
-                      <a:pPr algn="ctr" fontAlgn="ctr">
-                        <a:buNone/>
-                      </a:pPr>
-                      <a:r>
-                        <a:rPr lang="ko-KR" altLang="en-US" sz="1000" b="1" i="0" u="none" strike="noStrike" dirty="0">
-                          <a:solidFill>
-                            <a:schemeClr val="bg1"/>
-                          </a:solidFill>
-                          <a:effectLst/>
-                          <a:latin typeface="맑은 고딕" panose="020B0503020000020004" pitchFamily="34" charset="-127"/>
-                          <a:ea typeface="맑은 고딕" panose="020B0503020000020004" pitchFamily="34" charset="-127"/>
-                          <a:cs typeface="맑은 고딕"/>
-                        </a:rPr>
-                        <a:t>작업</a:t>
-                      </a:r>
-                    </a:p>
-                  </a:txBody>
-                  <a:tcPr marL="6750" marR="6750" marT="6750" marB="0" anchor="ctr">
-                    <a:lnL>
-                      <a:noFill/>
-                    </a:lnL>
-                    <a:lnR w="9525" cap="flat" cmpd="sng" algn="ctr">
-                      <a:solidFill>
-                        <a:schemeClr val="bg1">
-                          <a:lumMod val="50000"/>
-                        </a:schemeClr>
-                      </a:solidFill>
-                      <a:prstDash val="solid"/>
-                      <a:round/>
-                      <a:headEnd type="none" w="med" len="med"/>
-                      <a:tailEnd type="none" w="med" len="med"/>
-                    </a:lnR>
-                    <a:lnT w="9525" cap="flat" cmpd="sng" algn="ctr">
-                      <a:solidFill>
-                        <a:schemeClr val="tx1"/>
-                      </a:solidFill>
-                      <a:prstDash val="solid"/>
-                      <a:round/>
-                      <a:headEnd type="none" w="med" len="med"/>
-                      <a:tailEnd type="none" w="med" len="med"/>
-                    </a:lnT>
-                    <a:lnB w="9525" cap="flat" cmpd="sng" algn="ctr">
-                      <a:solidFill>
-                        <a:schemeClr val="bg1">
-                          <a:lumMod val="50000"/>
-                        </a:schemeClr>
-                      </a:solidFill>
-                      <a:prstDash val="solid"/>
-                      <a:round/>
-                      <a:headEnd type="none" w="med" len="med"/>
-                      <a:tailEnd type="none" w="med" len="med"/>
-                    </a:lnB>
-                    <a:solidFill>
-                      <a:srgbClr val="002060"/>
-                    </a:solidFill>
-                  </a:tcPr>
-                </a:tc>
-                <a:tc>
-                  <a:txBody>
-                    <a:bodyPr/>
-                    <a:lstStyle/>
-                    <a:p>
-                      <a:pPr algn="ctr" fontAlgn="ctr">
-                        <a:buNone/>
-                      </a:pPr>
-                      <a:r>
-                        <a:rPr lang="ko-KR" altLang="en-US" sz="1000" b="1" i="0" u="none" strike="noStrike" dirty="0">
-                          <a:solidFill>
-                            <a:schemeClr val="bg1"/>
-                          </a:solidFill>
-                          <a:effectLst/>
-                          <a:latin typeface="맑은 고딕" panose="020B0503020000020004" pitchFamily="34" charset="-127"/>
-                          <a:ea typeface="맑은 고딕" panose="020B0503020000020004" pitchFamily="34" charset="-127"/>
-                          <a:cs typeface="맑은 고딕"/>
-                        </a:rPr>
-                        <a:t>업무 규칙</a:t>
-                      </a:r>
-                    </a:p>
-                  </a:txBody>
-                  <a:tcPr marL="6750" marR="6750" marT="6750" marB="0" anchor="ctr">
-                    <a:lnL w="9525" cap="flat" cmpd="sng" algn="ctr">
-                      <a:solidFill>
-                        <a:schemeClr val="bg1">
-                          <a:lumMod val="50000"/>
-                        </a:schemeClr>
-                      </a:solidFill>
-                      <a:prstDash val="solid"/>
-                      <a:round/>
-                      <a:headEnd type="none" w="med" len="med"/>
-                      <a:tailEnd type="none" w="med" len="med"/>
-                    </a:lnL>
-                    <a:lnR w="9525" cap="flat" cmpd="sng" algn="ctr">
-                      <a:solidFill>
-                        <a:schemeClr val="bg1">
-                          <a:lumMod val="50000"/>
-                        </a:schemeClr>
-                      </a:solidFill>
-                      <a:prstDash val="solid"/>
-                      <a:round/>
-                      <a:headEnd type="none" w="med" len="med"/>
-                      <a:tailEnd type="none" w="med" len="med"/>
-                    </a:lnR>
-                    <a:lnT w="9525" cap="flat" cmpd="sng" algn="ctr">
-                      <a:solidFill>
-                        <a:schemeClr val="tx1"/>
-                      </a:solidFill>
-                      <a:prstDash val="solid"/>
-                      <a:round/>
-                      <a:headEnd type="none" w="med" len="med"/>
-                      <a:tailEnd type="none" w="med" len="med"/>
-                    </a:lnT>
-                    <a:lnB w="9525" cap="flat" cmpd="sng" algn="ctr">
-                      <a:solidFill>
-                        <a:schemeClr val="bg1">
-                          <a:lumMod val="50000"/>
-                        </a:schemeClr>
-                      </a:solidFill>
-                      <a:prstDash val="solid"/>
-                      <a:round/>
-                      <a:headEnd type="none" w="med" len="med"/>
-                      <a:tailEnd type="none" w="med" len="med"/>
-                    </a:lnB>
-                    <a:solidFill>
-                      <a:srgbClr val="002060"/>
-                    </a:solidFill>
-                  </a:tcPr>
-                </a:tc>
-                <a:tc>
-                  <a:txBody>
-                    <a:bodyPr/>
-                    <a:lstStyle/>
-                    <a:p>
-                      <a:pPr algn="ctr" fontAlgn="ctr">
-                        <a:buNone/>
-                      </a:pPr>
-                      <a:r>
-                        <a:rPr lang="ko-KR" altLang="en-US" sz="1000" b="1" i="0" u="none" strike="noStrike" dirty="0" err="1">
-                          <a:solidFill>
-                            <a:schemeClr val="bg1"/>
-                          </a:solidFill>
-                          <a:effectLst/>
-                          <a:latin typeface="맑은 고딕" panose="020B0503020000020004" pitchFamily="34" charset="-127"/>
-                          <a:ea typeface="맑은 고딕" panose="020B0503020000020004" pitchFamily="34" charset="-127"/>
-                          <a:cs typeface="맑은 고딕"/>
-                        </a:rPr>
-                        <a:t>되돌리기</a:t>
-                      </a:r>
-                    </a:p>
-                  </a:txBody>
-                  <a:tcPr marL="6750" marR="6750" marT="6750" marB="0" anchor="ctr">
-                    <a:lnL w="9525" cap="flat" cmpd="sng" algn="ctr">
-                      <a:solidFill>
-                        <a:schemeClr val="bg1">
-                          <a:lumMod val="50000"/>
-                        </a:schemeClr>
-                      </a:solidFill>
-                      <a:prstDash val="solid"/>
-                      <a:round/>
-                      <a:headEnd type="none" w="med" len="med"/>
-                      <a:tailEnd type="none" w="med" len="med"/>
-                    </a:lnL>
-                    <a:lnR w="9525" cap="flat" cmpd="sng" algn="ctr">
-                      <a:solidFill>
-                        <a:schemeClr val="bg1">
-                          <a:lumMod val="50000"/>
-                        </a:schemeClr>
-                      </a:solidFill>
-                      <a:prstDash val="solid"/>
-                      <a:round/>
-                      <a:headEnd type="none" w="med" len="med"/>
-                      <a:tailEnd type="none" w="med" len="med"/>
-                    </a:lnR>
-                    <a:lnT w="9525" cap="flat" cmpd="sng" algn="ctr">
-                      <a:solidFill>
-                        <a:schemeClr val="tx1"/>
-                      </a:solidFill>
-                      <a:prstDash val="solid"/>
-                      <a:round/>
-                      <a:headEnd type="none" w="med" len="med"/>
-                      <a:tailEnd type="none" w="med" len="med"/>
-                    </a:lnT>
-                    <a:lnB w="9525" cap="flat" cmpd="sng" algn="ctr">
-                      <a:solidFill>
-                        <a:schemeClr val="bg1">
-                          <a:lumMod val="50000"/>
-                        </a:schemeClr>
-                      </a:solidFill>
-                      <a:prstDash val="solid"/>
-                      <a:round/>
-                      <a:headEnd type="none" w="med" len="med"/>
-                      <a:tailEnd type="none" w="med" len="med"/>
-                    </a:lnB>
-                    <a:solidFill>
-                      <a:srgbClr val="002060"/>
-                    </a:solidFill>
-                  </a:tcPr>
-                </a:tc>
-                <a:tc>
-                  <a:txBody>
-                    <a:bodyPr/>
-                    <a:lstStyle/>
-                    <a:p>
-                      <a:pPr algn="ctr" fontAlgn="ctr">
-                        <a:buNone/>
-                      </a:pPr>
-                      <a:r>
-                        <a:rPr lang="ko-KR" altLang="en-US" sz="1000" b="1" i="0" u="none" strike="noStrike" dirty="0" err="1">
-                          <a:solidFill>
-                            <a:schemeClr val="bg1"/>
-                          </a:solidFill>
-                          <a:effectLst/>
-                          <a:latin typeface="맑은 고딕" panose="020B0503020000020004" pitchFamily="34" charset="-127"/>
-                          <a:ea typeface="맑은 고딕" panose="020B0503020000020004" pitchFamily="34" charset="-127"/>
-                          <a:cs typeface="맑은 고딕"/>
-                        </a:rPr>
-                        <a:t>자동 확인</a:t>
-                      </a:r>
-                    </a:p>
-                  </a:txBody>
-                  <a:tcPr marL="6750" marR="6750" marT="6750" marB="0" anchor="ctr">
-                    <a:lnL w="9525" cap="flat" cmpd="sng" algn="ctr">
-                      <a:solidFill>
-                        <a:schemeClr val="bg1">
-                          <a:lumMod val="50000"/>
-                        </a:schemeClr>
-                      </a:solidFill>
-                      <a:prstDash val="solid"/>
-                      <a:round/>
-                      <a:headEnd type="none" w="med" len="med"/>
-                      <a:tailEnd type="none" w="med" len="med"/>
-                    </a:lnL>
-                    <a:lnR w="9525" cap="flat" cmpd="sng" algn="ctr">
-                      <a:solidFill>
-                        <a:schemeClr val="bg1">
-                          <a:lumMod val="50000"/>
-                        </a:schemeClr>
-                      </a:solidFill>
-                      <a:prstDash val="solid"/>
-                      <a:round/>
-                      <a:headEnd type="none" w="med" len="med"/>
-                      <a:tailEnd type="none" w="med" len="med"/>
-                    </a:lnR>
-                    <a:lnT w="9525" cap="flat" cmpd="sng" algn="ctr">
-                      <a:solidFill>
-                        <a:schemeClr val="tx1"/>
-                      </a:solidFill>
-                      <a:prstDash val="solid"/>
-                      <a:round/>
-                      <a:headEnd type="none" w="med" len="med"/>
-                      <a:tailEnd type="none" w="med" len="med"/>
-                    </a:lnT>
-                    <a:lnB w="9525" cap="flat" cmpd="sng" algn="ctr">
-                      <a:solidFill>
-                        <a:schemeClr val="bg1">
-                          <a:lumMod val="50000"/>
-                        </a:schemeClr>
-                      </a:solidFill>
-                      <a:prstDash val="solid"/>
-                      <a:round/>
-                      <a:headEnd type="none" w="med" len="med"/>
-                      <a:tailEnd type="none" w="med" len="med"/>
-                    </a:lnB>
-                    <a:solidFill>
-                      <a:srgbClr val="002060"/>
-                    </a:solidFill>
-                  </a:tcPr>
-                </a:tc>
-                <a:tc>
-                  <a:txBody>
-                    <a:bodyPr/>
-                    <a:lstStyle/>
-                    <a:p>
-                      <a:pPr algn="ctr" fontAlgn="ctr">
-                        <a:buNone/>
-                      </a:pPr>
-                      <a:r>
-                        <a:rPr lang="ko-KR" altLang="en-US" sz="1000" b="1" i="0" u="none" strike="noStrike" dirty="0" err="1">
-                          <a:solidFill>
-                            <a:schemeClr val="bg1"/>
-                          </a:solidFill>
-                          <a:effectLst/>
-                          <a:latin typeface="맑은 고딕" panose="020B0503020000020004" pitchFamily="34" charset="-127"/>
-                          <a:ea typeface="맑은 고딕" panose="020B0503020000020004" pitchFamily="34" charset="-127"/>
-                          <a:cs typeface="맑은 고딕"/>
-                        </a:rPr>
-                        <a:t>절차</a:t>
-                      </a:r>
-                    </a:p>
-                  </a:txBody>
-                  <a:tcPr marL="6750" marR="6750" marT="6750" marB="0" anchor="ctr">
-                    <a:lnL w="9525" cap="flat" cmpd="sng" algn="ctr">
-                      <a:solidFill>
-                        <a:schemeClr val="bg1">
-                          <a:lumMod val="50000"/>
-                        </a:schemeClr>
-                      </a:solidFill>
-                      <a:prstDash val="solid"/>
-                      <a:round/>
-                      <a:headEnd type="none" w="med" len="med"/>
-                      <a:tailEnd type="none" w="med" len="med"/>
-                    </a:lnL>
-                    <a:lnR>
-                      <a:noFill/>
-                    </a:lnR>
-                    <a:lnT w="9525" cap="flat" cmpd="sng" algn="ctr">
-                      <a:solidFill>
-                        <a:schemeClr val="tx1"/>
-                      </a:solidFill>
-                      <a:prstDash val="solid"/>
-                      <a:round/>
-                      <a:headEnd type="none" w="med" len="med"/>
-                      <a:tailEnd type="none" w="med" len="med"/>
-                    </a:lnT>
-                    <a:lnB w="9525" cap="flat" cmpd="sng" algn="ctr">
-                      <a:solidFill>
-                        <a:schemeClr val="bg1">
-                          <a:lumMod val="50000"/>
-                        </a:schemeClr>
-                      </a:solidFill>
-                      <a:prstDash val="solid"/>
-                      <a:round/>
-                      <a:headEnd type="none" w="med" len="med"/>
-                      <a:tailEnd type="none" w="med" len="med"/>
-                    </a:lnB>
-                    <a:solidFill>
-                      <a:srgbClr val="002060"/>
-                    </a:solidFill>
-                  </a:tcPr>
-                </a:tc>
-                <a:tc>
-                  <a:txBody>
-                    <a:bodyPr/>
-                    <a:lstStyle/>
-                    <a:p>
-                      <a:pPr algn="ctr" fontAlgn="ctr">
-                        <a:buNone/>
-                      </a:pPr>
-                      <a:r>
-                        <a:rPr lang="ko-KR" altLang="en-US" sz="1000" b="1" i="0" u="none" strike="noStrike" dirty="0" err="1">
-                          <a:solidFill>
-                            <a:schemeClr val="bg1"/>
-                          </a:solidFill>
-                          <a:effectLst/>
-                          <a:latin typeface="맑은 고딕" panose="020B0503020000020004" pitchFamily="34" charset="-127"/>
-                          <a:ea typeface="맑은 고딕" panose="020B0503020000020004" pitchFamily="34" charset="-127"/>
-                          <a:cs typeface="맑은 고딕"/>
-                        </a:rPr>
-                        <a:t>방식</a:t>
-                      </a:r>
-                    </a:p>
-                  </a:txBody>
-                  <a:tcPr marL="6750" marR="6750" marT="6750" marB="0" anchor="ctr">
-                    <a:lnL w="9525" cap="flat" cmpd="sng" algn="ctr">
-                      <a:solidFill>
-                        <a:schemeClr val="bg1">
-                          <a:lumMod val="50000"/>
-                        </a:schemeClr>
-                      </a:solidFill>
-                      <a:prstDash val="solid"/>
-                      <a:round/>
-                      <a:headEnd type="none" w="med" len="med"/>
-                      <a:tailEnd type="none" w="med" len="med"/>
-                    </a:lnL>
-                    <a:lnR>
-                      <a:noFill/>
-                    </a:lnR>
-                    <a:lnT w="9525" cap="flat" cmpd="sng" algn="ctr">
-                      <a:solidFill>
-                        <a:schemeClr val="tx1"/>
-                      </a:solidFill>
-                      <a:prstDash val="solid"/>
-                      <a:round/>
-                      <a:headEnd type="none" w="med" len="med"/>
-                      <a:tailEnd type="none" w="med" len="med"/>
-                    </a:lnT>
-                    <a:lnB w="9525" cap="flat" cmpd="sng" algn="ctr">
-                      <a:solidFill>
-                        <a:schemeClr val="bg1">
-                          <a:lumMod val="50000"/>
-                        </a:schemeClr>
-                      </a:solidFill>
-                      <a:prstDash val="solid"/>
-                      <a:round/>
-                      <a:headEnd type="none" w="med" len="med"/>
-                      <a:tailEnd type="none" w="med" len="med"/>
-                    </a:lnB>
-                    <a:solidFill>
-                      <a:srgbClr val="002060"/>
-                    </a:solidFill>
-                  </a:tcPr>
-                </a:tc>
-              </a:tr>
-              <a:tr h="288000">
-                <a:tc>
-                  <a:txBody>
-                    <a:bodyPr/>
-                    <a:lstStyle/>
-                    <a:p>
-                      <a:pPr algn="l" fontAlgn="ctr">
-                        <a:buNone/>
-                      </a:pPr>
-                      <a:r>
-                        <a:rPr lang="en" sz="1000" b="1" i="0" u="none" strike="noStrike" dirty="0">
-                          <a:solidFill>
-                            <a:schemeClr val="tx1"/>
-                          </a:solidFill>
-                          <a:effectLst/>
-                          <a:latin typeface="맑은 고딕" panose="020B0503020000020004" pitchFamily="34" charset="-127"/>
-                          <a:ea typeface="맑은 고딕" panose="020B0503020000020004" pitchFamily="34" charset="-127"/>
-                          <a:cs typeface="맑은 고딕"/>
-                        </a:rPr>
-                        <a:t>규칙 확정</a:t>
-                      </a:r>
-                    </a:p>
-                  </a:txBody>
-                  <a:tcPr marL="81005" marR="6750" marT="6750" marB="0" anchor="ctr">
-                    <a:lnL>
-                      <a:noFill/>
-                    </a:lnL>
-                    <a:lnR>
-                      <a:noFill/>
-                    </a:lnR>
-                    <a:lnT w="9525" cap="flat" cmpd="sng" algn="ctr">
-                      <a:solidFill>
-                        <a:schemeClr val="bg1">
-                          <a:lumMod val="50000"/>
-                        </a:schemeClr>
-                      </a:solidFill>
-                      <a:prstDash val="solid"/>
-                      <a:round/>
-                      <a:headEnd type="none" w="med" len="med"/>
-                      <a:tailEnd type="none" w="med" len="med"/>
-                    </a:lnT>
-                    <a:lnB w="9525" cap="flat" cmpd="sng" algn="ctr">
-                      <a:solidFill>
-                        <a:schemeClr val="bg1">
-                          <a:lumMod val="50000"/>
-                        </a:schemeClr>
-                      </a:solidFill>
-                      <a:prstDash val="solid"/>
-                      <a:round/>
-                      <a:headEnd type="none" w="med" len="med"/>
-                      <a:tailEnd type="none" w="med" len="med"/>
-                    </a:lnB>
-                    <a:noFill/>
-                  </a:tcPr>
-                </a:tc>
-                <a:tc>
-                  <a:txBody>
-                    <a:bodyPr/>
-                    <a:lstStyle/>
-                    <a:p>
-                      <a:pPr algn="l" fontAlgn="ctr">
-                        <a:buNone/>
-                      </a:pPr>
-                      <a:r>
-                        <a:rPr lang="ko-KR" altLang="en-US" sz="1000" b="0" i="0" u="none" strike="noStrike" dirty="0">
-                          <a:solidFill>
-                            <a:srgbClr val="000000"/>
-                          </a:solidFill>
-                          <a:effectLst/>
-                          <a:latin typeface="맑은 고딕" panose="020B0503020000020004" pitchFamily="34" charset="-127"/>
-                          <a:ea typeface="맑은 고딕" panose="020B0503020000020004" pitchFamily="34" charset="-127"/>
-                          <a:cs typeface="맑은 고딕"/>
-                        </a:rPr>
-                        <a:t>아니오</a:t>
-                      </a:r>
-                    </a:p>
-                  </a:txBody>
-                  <a:tcPr marL="81005" marR="6750" marT="6750" marB="0" anchor="ctr">
-                    <a:lnL>
-                      <a:noFill/>
-                    </a:lnL>
-                    <a:lnR>
-                      <a:noFill/>
-                    </a:lnR>
-                    <a:lnT w="9525" cap="flat" cmpd="sng" algn="ctr">
-                      <a:solidFill>
-                        <a:schemeClr val="bg1">
-                          <a:lumMod val="50000"/>
-                        </a:schemeClr>
-                      </a:solidFill>
-                      <a:prstDash val="solid"/>
-                      <a:round/>
-                      <a:headEnd type="none" w="med" len="med"/>
-                      <a:tailEnd type="none" w="med" len="med"/>
-                    </a:lnT>
-                    <a:lnB w="9525" cap="flat" cmpd="sng" algn="ctr">
-                      <a:solidFill>
-                        <a:schemeClr val="bg1">
-                          <a:lumMod val="50000"/>
-                        </a:schemeClr>
-                      </a:solidFill>
-                      <a:prstDash val="solid"/>
-                      <a:round/>
-                      <a:headEnd type="none" w="med" len="med"/>
-                      <a:tailEnd type="none" w="med" len="med"/>
-                    </a:lnB>
-                    <a:solidFill>
-                      <a:srgbClr val="FFFFFF"/>
-                    </a:solidFill>
-                  </a:tcPr>
-                </a:tc>
-                <a:tc>
-                  <a:txBody>
-                    <a:bodyPr/>
-                    <a:lstStyle/>
-                    <a:p>
-                      <a:pPr algn="l" fontAlgn="ctr">
-                        <a:buNone/>
-                      </a:pPr>
-                      <a:r>
-                        <a:rPr lang="ko-KR" altLang="en-US" sz="1000" b="0" i="0" u="none" strike="noStrike" dirty="0">
-                          <a:solidFill>
-                            <a:srgbClr val="000000"/>
-                          </a:solidFill>
-                          <a:effectLst/>
-                          <a:latin typeface="맑은 고딕" panose="020B0503020000020004" pitchFamily="34" charset="-127"/>
-                          <a:ea typeface="맑은 고딕" panose="020B0503020000020004" pitchFamily="34" charset="-127"/>
-                          <a:cs typeface="맑은 고딕"/>
-                        </a:rPr>
-                        <a:t>—</a:t>
-                      </a:r>
-                    </a:p>
-                  </a:txBody>
-                  <a:tcPr marL="81005" marR="6750" marT="6750" marB="0" anchor="ctr">
-                    <a:lnL>
-                      <a:noFill/>
-                    </a:lnL>
-                    <a:lnR>
-                      <a:noFill/>
-                    </a:lnR>
-                    <a:lnT w="9525" cap="flat" cmpd="sng" algn="ctr">
-                      <a:solidFill>
-                        <a:schemeClr val="bg1">
-                          <a:lumMod val="50000"/>
-                        </a:schemeClr>
-                      </a:solidFill>
-                      <a:prstDash val="solid"/>
-                      <a:round/>
-                      <a:headEnd type="none" w="med" len="med"/>
-                      <a:tailEnd type="none" w="med" len="med"/>
-                    </a:lnT>
-                    <a:lnB w="9525" cap="flat" cmpd="sng" algn="ctr">
-                      <a:solidFill>
-                        <a:schemeClr val="bg1">
-                          <a:lumMod val="50000"/>
-                        </a:schemeClr>
-                      </a:solidFill>
-                      <a:prstDash val="solid"/>
-                      <a:round/>
-                      <a:headEnd type="none" w="med" len="med"/>
-                      <a:tailEnd type="none" w="med" len="med"/>
-                    </a:lnB>
-                    <a:solidFill>
-                      <a:srgbClr val="FFFFFF"/>
-                    </a:solidFill>
-                  </a:tcPr>
-                </a:tc>
-                <a:tc>
-                  <a:txBody>
-                    <a:bodyPr/>
-                    <a:lstStyle/>
-                    <a:p>
-                      <a:pPr algn="l" fontAlgn="ctr">
-                        <a:buNone/>
-                      </a:pPr>
-                      <a:r>
-                        <a:rPr lang="ko-KR" altLang="en-US" sz="1000" b="0" i="0" u="none" strike="noStrike" dirty="0">
-                          <a:solidFill>
-                            <a:srgbClr val="000000"/>
-                          </a:solidFill>
-                          <a:effectLst/>
-                          <a:latin typeface="맑은 고딕" panose="020B0503020000020004" pitchFamily="34" charset="-127"/>
-                          <a:ea typeface="맑은 고딕" panose="020B0503020000020004" pitchFamily="34" charset="-127"/>
-                          <a:cs typeface="맑은 고딕"/>
-                        </a:rPr>
-                        <a:t>—</a:t>
-                      </a:r>
-                    </a:p>
-                  </a:txBody>
-                  <a:tcPr marL="81005" marR="6750" marT="6750" marB="0" anchor="ctr">
-                    <a:lnL>
-                      <a:noFill/>
-                    </a:lnL>
-                    <a:lnR>
-                      <a:noFill/>
-                    </a:lnR>
-                    <a:lnT w="9525" cap="flat" cmpd="sng" algn="ctr">
-                      <a:solidFill>
-                        <a:schemeClr val="bg1">
-                          <a:lumMod val="50000"/>
-                        </a:schemeClr>
-                      </a:solidFill>
-                      <a:prstDash val="solid"/>
-                      <a:round/>
-                      <a:headEnd type="none" w="med" len="med"/>
-                      <a:tailEnd type="none" w="med" len="med"/>
-                    </a:lnT>
-                    <a:lnB w="9525" cap="flat" cmpd="sng" algn="ctr">
-                      <a:solidFill>
-                        <a:schemeClr val="bg1">
-                          <a:lumMod val="50000"/>
-                        </a:schemeClr>
-                      </a:solidFill>
-                      <a:prstDash val="solid"/>
-                      <a:round/>
-                      <a:headEnd type="none" w="med" len="med"/>
-                      <a:tailEnd type="none" w="med" len="med"/>
-                    </a:lnB>
-                    <a:solidFill>
-                      <a:srgbClr val="FFFFFF"/>
-                    </a:solidFill>
-                  </a:tcPr>
-                </a:tc>
-                <a:tc>
-                  <a:txBody>
-                    <a:bodyPr/>
-                    <a:lstStyle/>
-                    <a:p>
-                      <a:pPr algn="l" fontAlgn="ctr">
-                        <a:buNone/>
-                      </a:pPr>
-                      <a:r>
-                        <a:rPr lang="ko-KR" altLang="en-US" sz="1000" b="0" i="0" u="none" strike="noStrike" dirty="0">
-                          <a:solidFill>
-                            <a:srgbClr val="000000"/>
-                          </a:solidFill>
-                          <a:effectLst/>
-                          <a:latin typeface="맑은 고딕" panose="020B0503020000020004" pitchFamily="34" charset="-127"/>
-                          <a:ea typeface="맑은 고딕" panose="020B0503020000020004" pitchFamily="34" charset="-127"/>
-                          <a:cs typeface="맑은 고딕"/>
-                        </a:rPr>
-                        <a:t>—</a:t>
-                      </a:r>
-                    </a:p>
-                  </a:txBody>
-                  <a:tcPr marL="81005" marR="6750" marT="6750" marB="0" anchor="ctr">
-                    <a:lnL>
-                      <a:noFill/>
-                    </a:lnL>
-                    <a:lnR>
-                      <a:noFill/>
-                    </a:lnR>
-                    <a:lnT w="9525" cap="flat" cmpd="sng" algn="ctr">
-                      <a:solidFill>
-                        <a:schemeClr val="bg1">
-                          <a:lumMod val="50000"/>
-                        </a:schemeClr>
-                      </a:solidFill>
-                      <a:prstDash val="solid"/>
-                      <a:round/>
-                      <a:headEnd type="none" w="med" len="med"/>
-                      <a:tailEnd type="none" w="med" len="med"/>
-                    </a:lnT>
-                    <a:lnB w="9525" cap="flat" cmpd="sng" algn="ctr">
-                      <a:solidFill>
-                        <a:schemeClr val="bg1">
-                          <a:lumMod val="50000"/>
-                        </a:schemeClr>
-                      </a:solidFill>
-                      <a:prstDash val="solid"/>
-                      <a:round/>
-                      <a:headEnd type="none" w="med" len="med"/>
-                      <a:tailEnd type="none" w="med" len="med"/>
-                    </a:lnB>
-                    <a:solidFill>
-                      <a:srgbClr val="FFFFFF"/>
-                    </a:solidFill>
-                  </a:tcPr>
-                </a:tc>
-                <a:tc>
-                  <a:txBody>
-                    <a:bodyPr/>
-                    <a:lstStyle/>
-                    <a:p>
-                      <a:pPr algn="l" fontAlgn="ctr">
-                        <a:buNone/>
-                      </a:pPr>
-                      <a:r>
-                        <a:rPr lang="ko-KR" altLang="en-US" sz="1000" b="0" i="0" u="none" strike="noStrike" dirty="0">
-                          <a:solidFill>
-                            <a:srgbClr val="000000"/>
-                          </a:solidFill>
-                          <a:effectLst/>
-                          <a:latin typeface="맑은 고딕" panose="020B0503020000020004" pitchFamily="34" charset="-127"/>
-                          <a:ea typeface="맑은 고딕" panose="020B0503020000020004" pitchFamily="34" charset="-127"/>
-                          <a:cs typeface="맑은 고딕"/>
-                        </a:rPr>
-                        <a:t>수작업 + 대화형 보조</a:t>
-                      </a:r>
-                    </a:p>
-                  </a:txBody>
-                  <a:tcPr marL="81005" marR="6750" marT="6750" marB="0" anchor="ctr">
-                    <a:lnL>
-                      <a:noFill/>
-                    </a:lnL>
-                    <a:lnR>
-                      <a:noFill/>
-                    </a:lnR>
-                    <a:lnT w="9525" cap="flat" cmpd="sng" algn="ctr">
-                      <a:solidFill>
-                        <a:schemeClr val="bg1">
-                          <a:lumMod val="50000"/>
-                        </a:schemeClr>
-                      </a:solidFill>
-                      <a:prstDash val="solid"/>
-                      <a:round/>
-                      <a:headEnd type="none" w="med" len="med"/>
-                      <a:tailEnd type="none" w="med" len="med"/>
-                    </a:lnT>
-                    <a:lnB w="9525" cap="flat" cmpd="sng" algn="ctr">
-                      <a:solidFill>
-                        <a:schemeClr val="bg1">
-                          <a:lumMod val="50000"/>
-                        </a:schemeClr>
-                      </a:solidFill>
-                      <a:prstDash val="solid"/>
-                      <a:round/>
-                      <a:headEnd type="none" w="med" len="med"/>
-                      <a:tailEnd type="none" w="med" len="med"/>
-                    </a:lnB>
-                    <a:solidFill>
-                      <a:srgbClr val="FFFFFF"/>
-                    </a:solidFill>
-                  </a:tcPr>
-                </a:tc>
-              </a:tr>
-              <a:tr h="288000">
-                <a:tc>
-                  <a:txBody>
-                    <a:bodyPr/>
-                    <a:lstStyle/>
-                    <a:p>
-                      <a:pPr algn="l" fontAlgn="ctr">
-                        <a:buNone/>
-                      </a:pPr>
-                      <a:r>
-                        <a:rPr lang="en" sz="1000" b="1" i="0" u="none" strike="noStrike" dirty="0">
-                          <a:solidFill>
-                            <a:schemeClr val="tx1"/>
-                          </a:solidFill>
-                          <a:effectLst/>
-                          <a:latin typeface="맑은 고딕" panose="020B0503020000020004" pitchFamily="34" charset="-127"/>
-                          <a:ea typeface="맑은 고딕" panose="020B0503020000020004" pitchFamily="34" charset="-127"/>
-                          <a:cs typeface="맑은 고딕"/>
-                        </a:rPr>
-                        <a:t>저장소 골격</a:t>
-                      </a:r>
-                    </a:p>
-                  </a:txBody>
-                  <a:tcPr marL="81005" marR="6750" marT="6750" marB="0" anchor="ctr">
-                    <a:lnL>
-                      <a:noFill/>
-                    </a:lnL>
-                    <a:lnR>
-                      <a:noFill/>
-                    </a:lnR>
-                    <a:lnT w="9525" cap="flat" cmpd="sng" algn="ctr">
-                      <a:solidFill>
-                        <a:schemeClr val="bg1">
-                          <a:lumMod val="50000"/>
-                        </a:schemeClr>
-                      </a:solidFill>
-                      <a:prstDash val="solid"/>
-                      <a:round/>
-                      <a:headEnd type="none" w="med" len="med"/>
-                      <a:tailEnd type="none" w="med" len="med"/>
-                    </a:lnT>
-                    <a:lnB w="9525" cap="flat" cmpd="sng" algn="ctr">
-                      <a:solidFill>
-                        <a:schemeClr val="bg1">
-                          <a:lumMod val="50000"/>
-                        </a:schemeClr>
-                      </a:solidFill>
-                      <a:prstDash val="solid"/>
-                      <a:round/>
-                      <a:headEnd type="none" w="med" len="med"/>
-                      <a:tailEnd type="none" w="med" len="med"/>
-                    </a:lnB>
-                    <a:noFill/>
-                  </a:tcPr>
-                </a:tc>
-                <a:tc>
-                  <a:txBody>
-                    <a:bodyPr/>
-                    <a:lstStyle/>
-                    <a:p>
-                      <a:pPr algn="l" fontAlgn="ctr">
-                        <a:buNone/>
-                      </a:pPr>
-                      <a:r>
-                        <a:rPr lang="ko-KR" altLang="en-US" sz="1000" b="0" i="0" u="none" strike="noStrike" dirty="0">
-                          <a:solidFill>
-                            <a:srgbClr val="000000"/>
-                          </a:solidFill>
-                          <a:effectLst/>
-                          <a:latin typeface="맑은 고딕" panose="020B0503020000020004" pitchFamily="34" charset="-127"/>
-                          <a:ea typeface="맑은 고딕" panose="020B0503020000020004" pitchFamily="34" charset="-127"/>
-                          <a:cs typeface="맑은 고딕"/>
-                        </a:rPr>
-                        <a:t>예</a:t>
-                      </a:r>
-                    </a:p>
-                  </a:txBody>
-                  <a:tcPr marL="81005" marR="6750" marT="6750" marB="0" anchor="ctr">
-                    <a:lnL>
-                      <a:noFill/>
-                    </a:lnL>
-                    <a:lnR>
-                      <a:noFill/>
-                    </a:lnR>
-                    <a:lnT w="9525" cap="flat" cmpd="sng" algn="ctr">
-                      <a:solidFill>
-                        <a:schemeClr val="bg1">
-                          <a:lumMod val="50000"/>
-                        </a:schemeClr>
-                      </a:solidFill>
-                      <a:prstDash val="solid"/>
-                      <a:round/>
-                      <a:headEnd type="none" w="med" len="med"/>
-                      <a:tailEnd type="none" w="med" len="med"/>
-                    </a:lnT>
-                    <a:lnB w="9525" cap="flat" cmpd="sng" algn="ctr">
-                      <a:solidFill>
-                        <a:schemeClr val="bg1">
-                          <a:lumMod val="50000"/>
-                        </a:schemeClr>
-                      </a:solidFill>
-                      <a:prstDash val="solid"/>
-                      <a:round/>
-                      <a:headEnd type="none" w="med" len="med"/>
-                      <a:tailEnd type="none" w="med" len="med"/>
-                    </a:lnB>
-                    <a:solidFill>
-                      <a:srgbClr val="FFFFFF"/>
-                    </a:solidFill>
-                  </a:tcPr>
-                </a:tc>
-                <a:tc>
-                  <a:txBody>
-                    <a:bodyPr/>
-                    <a:lstStyle/>
-                    <a:p>
-                      <a:pPr algn="l" fontAlgn="ctr">
-                        <a:buNone/>
-                      </a:pPr>
-                      <a:r>
-                        <a:rPr lang="ko-KR" altLang="en-US" sz="1000" b="0" i="0" u="none" strike="noStrike" dirty="0">
-                          <a:solidFill>
-                            <a:srgbClr val="000000"/>
-                          </a:solidFill>
-                          <a:effectLst/>
-                          <a:latin typeface="맑은 고딕" panose="020B0503020000020004" pitchFamily="34" charset="-127"/>
-                          <a:ea typeface="맑은 고딕" panose="020B0503020000020004" pitchFamily="34" charset="-127"/>
-                          <a:cs typeface="맑은 고딕"/>
-                        </a:rPr>
-                        <a:t>예</a:t>
-                      </a:r>
-                    </a:p>
-                  </a:txBody>
-                  <a:tcPr marL="81005" marR="6750" marT="6750" marB="0" anchor="ctr">
-                    <a:lnL>
-                      <a:noFill/>
-                    </a:lnL>
-                    <a:lnR>
-                      <a:noFill/>
-                    </a:lnR>
-                    <a:lnT w="9525" cap="flat" cmpd="sng" algn="ctr">
-                      <a:solidFill>
-                        <a:schemeClr val="bg1">
-                          <a:lumMod val="50000"/>
-                        </a:schemeClr>
-                      </a:solidFill>
-                      <a:prstDash val="solid"/>
-                      <a:round/>
-                      <a:headEnd type="none" w="med" len="med"/>
-                      <a:tailEnd type="none" w="med" len="med"/>
-                    </a:lnT>
-                    <a:lnB w="9525" cap="flat" cmpd="sng" algn="ctr">
-                      <a:solidFill>
-                        <a:schemeClr val="bg1">
-                          <a:lumMod val="50000"/>
-                        </a:schemeClr>
-                      </a:solidFill>
-                      <a:prstDash val="solid"/>
-                      <a:round/>
-                      <a:headEnd type="none" w="med" len="med"/>
-                      <a:tailEnd type="none" w="med" len="med"/>
-                    </a:lnB>
-                    <a:solidFill>
-                      <a:srgbClr val="FFFFFF"/>
-                    </a:solidFill>
-                  </a:tcPr>
-                </a:tc>
-                <a:tc>
-                  <a:txBody>
-                    <a:bodyPr/>
-                    <a:lstStyle/>
-                    <a:p>
-                      <a:pPr algn="l" fontAlgn="ctr">
-                        <a:buNone/>
-                      </a:pPr>
-                      <a:r>
-                        <a:rPr lang="ko-KR" altLang="en-US" sz="1000" b="0" i="0" u="none" strike="noStrike" dirty="0">
-                          <a:solidFill>
-                            <a:srgbClr val="000000"/>
-                          </a:solidFill>
-                          <a:effectLst/>
-                          <a:latin typeface="맑은 고딕" panose="020B0503020000020004" pitchFamily="34" charset="-127"/>
-                          <a:ea typeface="맑은 고딕" panose="020B0503020000020004" pitchFamily="34" charset="-127"/>
-                          <a:cs typeface="맑은 고딕"/>
-                        </a:rPr>
-                        <a:t>예</a:t>
-                      </a:r>
-                    </a:p>
-                  </a:txBody>
-                  <a:tcPr marL="81005" marR="6750" marT="6750" marB="0" anchor="ctr">
-                    <a:lnL>
-                      <a:noFill/>
-                    </a:lnL>
-                    <a:lnR>
-                      <a:noFill/>
-                    </a:lnR>
-                    <a:lnT w="9525" cap="flat" cmpd="sng" algn="ctr">
-                      <a:solidFill>
-                        <a:schemeClr val="bg1">
-                          <a:lumMod val="50000"/>
-                        </a:schemeClr>
-                      </a:solidFill>
-                      <a:prstDash val="solid"/>
-                      <a:round/>
-                      <a:headEnd type="none" w="med" len="med"/>
-                      <a:tailEnd type="none" w="med" len="med"/>
-                    </a:lnT>
-                    <a:lnB w="9525" cap="flat" cmpd="sng" algn="ctr">
-                      <a:solidFill>
-                        <a:schemeClr val="bg1">
-                          <a:lumMod val="50000"/>
-                        </a:schemeClr>
-                      </a:solidFill>
-                      <a:prstDash val="solid"/>
-                      <a:round/>
-                      <a:headEnd type="none" w="med" len="med"/>
-                      <a:tailEnd type="none" w="med" len="med"/>
-                    </a:lnB>
-                    <a:solidFill>
-                      <a:srgbClr val="FFFFFF"/>
-                    </a:solidFill>
-                  </a:tcPr>
-                </a:tc>
-                <a:tc>
-                  <a:txBody>
-                    <a:bodyPr/>
-                    <a:lstStyle/>
-                    <a:p>
-                      <a:pPr algn="l" fontAlgn="ctr">
-                        <a:buNone/>
-                      </a:pPr>
-                      <a:r>
-                        <a:rPr lang="ko-KR" altLang="en-US" sz="1000" b="0" i="0" u="none" strike="noStrike" dirty="0">
-                          <a:solidFill>
-                            <a:srgbClr val="000000"/>
-                          </a:solidFill>
-                          <a:effectLst/>
-                          <a:latin typeface="맑은 고딕" panose="020B0503020000020004" pitchFamily="34" charset="-127"/>
-                          <a:ea typeface="맑은 고딕" panose="020B0503020000020004" pitchFamily="34" charset="-127"/>
-                          <a:cs typeface="맑은 고딕"/>
-                        </a:rPr>
-                        <a:t>예</a:t>
-                      </a:r>
-                    </a:p>
-                  </a:txBody>
-                  <a:tcPr marL="81005" marR="6750" marT="6750" marB="0" anchor="ctr">
-                    <a:lnL>
-                      <a:noFill/>
-                    </a:lnL>
-                    <a:lnR>
-                      <a:noFill/>
-                    </a:lnR>
-                    <a:lnT w="9525" cap="flat" cmpd="sng" algn="ctr">
-                      <a:solidFill>
-                        <a:schemeClr val="bg1">
-                          <a:lumMod val="50000"/>
-                        </a:schemeClr>
-                      </a:solidFill>
-                      <a:prstDash val="solid"/>
-                      <a:round/>
-                      <a:headEnd type="none" w="med" len="med"/>
-                      <a:tailEnd type="none" w="med" len="med"/>
-                    </a:lnT>
-                    <a:lnB w="9525" cap="flat" cmpd="sng" algn="ctr">
-                      <a:solidFill>
-                        <a:schemeClr val="bg1">
-                          <a:lumMod val="50000"/>
-                        </a:schemeClr>
-                      </a:solidFill>
-                      <a:prstDash val="solid"/>
-                      <a:round/>
-                      <a:headEnd type="none" w="med" len="med"/>
-                      <a:tailEnd type="none" w="med" len="med"/>
-                    </a:lnB>
-                    <a:solidFill>
-                      <a:srgbClr val="FFFFFF"/>
-                    </a:solidFill>
-                  </a:tcPr>
-                </a:tc>
-                <a:tc>
-                  <a:txBody>
-                    <a:bodyPr/>
-                    <a:lstStyle/>
-                    <a:p>
-                      <a:pPr algn="l" fontAlgn="ctr">
-                        <a:buNone/>
-                      </a:pPr>
-                      <a:r>
-                        <a:rPr lang="ko-KR" altLang="en-US" sz="1000" b="0" i="0" u="none" strike="noStrike" dirty="0">
-                          <a:solidFill>
-                            <a:srgbClr val="000000"/>
-                          </a:solidFill>
-                          <a:effectLst/>
-                          <a:latin typeface="맑은 고딕" panose="020B0503020000020004" pitchFamily="34" charset="-127"/>
-                          <a:ea typeface="맑은 고딕" panose="020B0503020000020004" pitchFamily="34" charset="-127"/>
-                          <a:cs typeface="맑은 고딕"/>
-                        </a:rPr>
-                        <a:t>수작업(사내 템플릿)</a:t>
-                      </a:r>
-                    </a:p>
-                  </a:txBody>
-                  <a:tcPr marL="81005" marR="6750" marT="6750" marB="0" anchor="ctr">
-                    <a:lnL>
-                      <a:noFill/>
-                    </a:lnL>
-                    <a:lnR>
-                      <a:noFill/>
-                    </a:lnR>
-                    <a:lnT w="9525" cap="flat" cmpd="sng" algn="ctr">
-                      <a:solidFill>
-                        <a:schemeClr val="bg1">
-                          <a:lumMod val="50000"/>
-                        </a:schemeClr>
-                      </a:solidFill>
-                      <a:prstDash val="solid"/>
-                      <a:round/>
-                      <a:headEnd type="none" w="med" len="med"/>
-                      <a:tailEnd type="none" w="med" len="med"/>
-                    </a:lnT>
-                    <a:lnB w="9525" cap="flat" cmpd="sng" algn="ctr">
-                      <a:solidFill>
-                        <a:schemeClr val="bg1">
-                          <a:lumMod val="50000"/>
-                        </a:schemeClr>
-                      </a:solidFill>
-                      <a:prstDash val="solid"/>
-                      <a:round/>
-                      <a:headEnd type="none" w="med" len="med"/>
-                      <a:tailEnd type="none" w="med" len="med"/>
-                    </a:lnB>
-                    <a:solidFill>
-                      <a:srgbClr val="FFFFFF"/>
-                    </a:solidFill>
-                  </a:tcPr>
-                </a:tc>
-              </a:tr>
-              <a:tr h="288000">
-                <a:tc>
-                  <a:txBody>
-                    <a:bodyPr/>
-                    <a:lstStyle/>
-                    <a:p>
-                      <a:pPr algn="l" fontAlgn="ctr">
-                        <a:buNone/>
-                      </a:pPr>
-                      <a:r>
-                        <a:rPr lang="en" sz="1000" b="1" i="0" u="none" strike="noStrike" dirty="0">
-                          <a:solidFill>
-                            <a:schemeClr val="tx1"/>
-                          </a:solidFill>
-                          <a:effectLst/>
-                          <a:latin typeface="맑은 고딕" panose="020B0503020000020004" pitchFamily="34" charset="-127"/>
-                          <a:ea typeface="맑은 고딕" panose="020B0503020000020004" pitchFamily="34" charset="-127"/>
-                          <a:cs typeface="맑은 고딕"/>
-                        </a:rPr>
-                        <a:t>신청 기능 구현</a:t>
-                      </a:r>
-                    </a:p>
-                  </a:txBody>
-                  <a:tcPr marL="81005" marR="6750" marT="6750" marB="0" anchor="ctr">
-                    <a:lnL>
-                      <a:noFill/>
-                    </a:lnL>
-                    <a:lnR>
-                      <a:noFill/>
-                    </a:lnR>
-                    <a:lnT w="9525" cap="flat" cmpd="sng" algn="ctr">
-                      <a:solidFill>
-                        <a:schemeClr val="bg1">
-                          <a:lumMod val="50000"/>
-                        </a:schemeClr>
-                      </a:solidFill>
-                      <a:prstDash val="solid"/>
-                      <a:round/>
-                      <a:headEnd type="none" w="med" len="med"/>
-                      <a:tailEnd type="none" w="med" len="med"/>
-                    </a:lnT>
-                    <a:lnB w="9525" cap="flat" cmpd="sng" algn="ctr">
-                      <a:solidFill>
-                        <a:schemeClr val="bg1">
-                          <a:lumMod val="50000"/>
-                        </a:schemeClr>
-                      </a:solidFill>
-                      <a:prstDash val="solid"/>
-                      <a:round/>
-                      <a:headEnd type="none" w="med" len="med"/>
-                      <a:tailEnd type="none" w="med" len="med"/>
-                    </a:lnB>
-                    <a:noFill/>
-                  </a:tcPr>
-                </a:tc>
-                <a:tc>
-                  <a:txBody>
-                    <a:bodyPr/>
-                    <a:lstStyle/>
-                    <a:p>
-                      <a:pPr algn="l" fontAlgn="ctr">
-                        <a:buNone/>
-                      </a:pPr>
-                      <a:r>
-                        <a:rPr lang="ko-KR" altLang="en-US" sz="1000" b="0" i="0" u="none" strike="noStrike" dirty="0">
-                          <a:solidFill>
-                            <a:srgbClr val="000000"/>
-                          </a:solidFill>
-                          <a:effectLst/>
-                          <a:latin typeface="맑은 고딕" panose="020B0503020000020004" pitchFamily="34" charset="-127"/>
-                          <a:ea typeface="맑은 고딕" panose="020B0503020000020004" pitchFamily="34" charset="-127"/>
-                          <a:cs typeface="맑은 고딕"/>
-                        </a:rPr>
-                        <a:t>예(확정 뒤)</a:t>
-                      </a:r>
-                    </a:p>
-                  </a:txBody>
-                  <a:tcPr marL="81005" marR="6750" marT="6750" marB="0" anchor="ctr">
-                    <a:lnL>
-                      <a:noFill/>
-                    </a:lnL>
-                    <a:lnR>
-                      <a:noFill/>
-                    </a:lnR>
-                    <a:lnT w="9525" cap="flat" cmpd="sng" algn="ctr">
-                      <a:solidFill>
-                        <a:schemeClr val="bg1">
-                          <a:lumMod val="50000"/>
-                        </a:schemeClr>
-                      </a:solidFill>
-                      <a:prstDash val="solid"/>
-                      <a:round/>
-                      <a:headEnd type="none" w="med" len="med"/>
-                      <a:tailEnd type="none" w="med" len="med"/>
-                    </a:lnT>
-                    <a:lnB w="9525" cap="flat" cmpd="sng" algn="ctr">
-                      <a:solidFill>
-                        <a:schemeClr val="bg1">
-                          <a:lumMod val="50000"/>
-                        </a:schemeClr>
-                      </a:solidFill>
-                      <a:prstDash val="solid"/>
-                      <a:round/>
-                      <a:headEnd type="none" w="med" len="med"/>
-                      <a:tailEnd type="none" w="med" len="med"/>
-                    </a:lnB>
-                    <a:solidFill>
-                      <a:srgbClr val="FFFFFF"/>
-                    </a:solidFill>
-                  </a:tcPr>
-                </a:tc>
-                <a:tc>
-                  <a:txBody>
-                    <a:bodyPr/>
-                    <a:lstStyle/>
-                    <a:p>
-                      <a:pPr algn="l" fontAlgn="ctr">
-                        <a:buNone/>
-                      </a:pPr>
-                      <a:r>
-                        <a:rPr lang="ko-KR" altLang="en-US" sz="1000" b="0" i="0" u="none" strike="noStrike" dirty="0">
-                          <a:solidFill>
-                            <a:srgbClr val="000000"/>
-                          </a:solidFill>
-                          <a:effectLst/>
-                          <a:latin typeface="맑은 고딕" panose="020B0503020000020004" pitchFamily="34" charset="-127"/>
-                          <a:ea typeface="맑은 고딕" panose="020B0503020000020004" pitchFamily="34" charset="-127"/>
-                          <a:cs typeface="맑은 고딕"/>
-                        </a:rPr>
-                        <a:t>예</a:t>
-                      </a:r>
-                    </a:p>
-                  </a:txBody>
-                  <a:tcPr marL="81005" marR="6750" marT="6750" marB="0" anchor="ctr">
-                    <a:lnL>
-                      <a:noFill/>
-                    </a:lnL>
-                    <a:lnR>
-                      <a:noFill/>
-                    </a:lnR>
-                    <a:lnT w="9525" cap="flat" cmpd="sng" algn="ctr">
-                      <a:solidFill>
-                        <a:schemeClr val="bg1">
-                          <a:lumMod val="50000"/>
-                        </a:schemeClr>
-                      </a:solidFill>
-                      <a:prstDash val="solid"/>
-                      <a:round/>
-                      <a:headEnd type="none" w="med" len="med"/>
-                      <a:tailEnd type="none" w="med" len="med"/>
-                    </a:lnT>
-                    <a:lnB w="9525" cap="flat" cmpd="sng" algn="ctr">
-                      <a:solidFill>
-                        <a:schemeClr val="bg1">
-                          <a:lumMod val="50000"/>
-                        </a:schemeClr>
-                      </a:solidFill>
-                      <a:prstDash val="solid"/>
-                      <a:round/>
-                      <a:headEnd type="none" w="med" len="med"/>
-                      <a:tailEnd type="none" w="med" len="med"/>
-                    </a:lnB>
-                    <a:solidFill>
-                      <a:srgbClr val="FFFFFF"/>
-                    </a:solidFill>
-                  </a:tcPr>
-                </a:tc>
-                <a:tc>
-                  <a:txBody>
-                    <a:bodyPr/>
-                    <a:lstStyle/>
-                    <a:p>
-                      <a:pPr algn="l" fontAlgn="ctr">
-                        <a:buNone/>
-                      </a:pPr>
-                      <a:r>
-                        <a:rPr lang="ko-KR" altLang="en-US" sz="1000" b="0" i="0" u="none" strike="noStrike" dirty="0">
-                          <a:solidFill>
-                            <a:srgbClr val="000000"/>
-                          </a:solidFill>
-                          <a:effectLst/>
-                          <a:latin typeface="맑은 고딕" panose="020B0503020000020004" pitchFamily="34" charset="-127"/>
-                          <a:ea typeface="맑은 고딕" panose="020B0503020000020004" pitchFamily="34" charset="-127"/>
-                          <a:cs typeface="맑은 고딕"/>
-                        </a:rPr>
-                        <a:t>예</a:t>
-                      </a:r>
-                    </a:p>
-                  </a:txBody>
-                  <a:tcPr marL="81005" marR="6750" marT="6750" marB="0" anchor="ctr">
-                    <a:lnL>
-                      <a:noFill/>
-                    </a:lnL>
-                    <a:lnR>
-                      <a:noFill/>
-                    </a:lnR>
-                    <a:lnT w="9525" cap="flat" cmpd="sng" algn="ctr">
-                      <a:solidFill>
-                        <a:schemeClr val="bg1">
-                          <a:lumMod val="50000"/>
-                        </a:schemeClr>
-                      </a:solidFill>
-                      <a:prstDash val="solid"/>
-                      <a:round/>
-                      <a:headEnd type="none" w="med" len="med"/>
-                      <a:tailEnd type="none" w="med" len="med"/>
-                    </a:lnT>
-                    <a:lnB w="9525" cap="flat" cmpd="sng" algn="ctr">
-                      <a:solidFill>
-                        <a:schemeClr val="bg1">
-                          <a:lumMod val="50000"/>
-                        </a:schemeClr>
-                      </a:solidFill>
-                      <a:prstDash val="solid"/>
-                      <a:round/>
-                      <a:headEnd type="none" w="med" len="med"/>
-                      <a:tailEnd type="none" w="med" len="med"/>
-                    </a:lnB>
-                    <a:solidFill>
-                      <a:srgbClr val="FFFFFF"/>
-                    </a:solidFill>
-                  </a:tcPr>
-                </a:tc>
-                <a:tc>
-                  <a:txBody>
-                    <a:bodyPr/>
-                    <a:lstStyle/>
-                    <a:p>
-                      <a:pPr algn="l" fontAlgn="ctr">
-                        <a:buNone/>
-                      </a:pPr>
-                      <a:r>
-                        <a:rPr lang="ko-KR" altLang="en-US" sz="1000" b="0" i="0" u="none" strike="noStrike" dirty="0" err="1">
-                          <a:solidFill>
-                            <a:srgbClr val="000000"/>
-                          </a:solidFill>
-                          <a:effectLst/>
-                          <a:latin typeface="맑은 고딕" panose="020B0503020000020004" pitchFamily="34" charset="-127"/>
-                          <a:ea typeface="맑은 고딕" panose="020B0503020000020004" pitchFamily="34" charset="-127"/>
-                          <a:cs typeface="맑은 고딕"/>
-                        </a:rPr>
-                        <a:t>아니오</a:t>
-                      </a:r>
-                    </a:p>
-                  </a:txBody>
-                  <a:tcPr marL="81005" marR="6750" marT="6750" marB="0" anchor="ctr">
-                    <a:lnL>
-                      <a:noFill/>
-                    </a:lnL>
-                    <a:lnR>
-                      <a:noFill/>
-                    </a:lnR>
-                    <a:lnT w="9525" cap="flat" cmpd="sng" algn="ctr">
-                      <a:solidFill>
-                        <a:schemeClr val="bg1">
-                          <a:lumMod val="50000"/>
-                        </a:schemeClr>
-                      </a:solidFill>
-                      <a:prstDash val="solid"/>
-                      <a:round/>
-                      <a:headEnd type="none" w="med" len="med"/>
-                      <a:tailEnd type="none" w="med" len="med"/>
-                    </a:lnT>
-                    <a:lnB w="9525" cap="flat" cmpd="sng" algn="ctr">
-                      <a:solidFill>
-                        <a:schemeClr val="bg1">
-                          <a:lumMod val="50000"/>
-                        </a:schemeClr>
-                      </a:solidFill>
-                      <a:prstDash val="solid"/>
-                      <a:round/>
-                      <a:headEnd type="none" w="med" len="med"/>
-                      <a:tailEnd type="none" w="med" len="med"/>
-                    </a:lnB>
-                    <a:solidFill>
-                      <a:srgbClr val="FFFFFF"/>
-                    </a:solidFill>
-                  </a:tcPr>
-                </a:tc>
-                <a:tc>
-                  <a:txBody>
-                    <a:bodyPr/>
-                    <a:lstStyle/>
-                    <a:p>
-                      <a:pPr algn="l" fontAlgn="ctr">
-                        <a:buNone/>
-                      </a:pPr>
-                      <a:r>
-                        <a:rPr lang="ko-KR" altLang="en-US" sz="1000" b="0" i="0" u="none" strike="noStrike" dirty="0" err="1">
-                          <a:solidFill>
-                            <a:srgbClr val="000000"/>
-                          </a:solidFill>
-                          <a:effectLst/>
-                          <a:latin typeface="맑은 고딕" panose="020B0503020000020004" pitchFamily="34" charset="-127"/>
-                          <a:ea typeface="맑은 고딕" panose="020B0503020000020004" pitchFamily="34" charset="-127"/>
-                          <a:cs typeface="맑은 고딕"/>
-                        </a:rPr>
-                        <a:t>에이전트</a:t>
-                      </a:r>
-                    </a:p>
-                  </a:txBody>
-                  <a:tcPr marL="81005" marR="6750" marT="6750" marB="0" anchor="ctr">
-                    <a:lnL>
-                      <a:noFill/>
-                    </a:lnL>
-                    <a:lnR>
-                      <a:noFill/>
-                    </a:lnR>
-                    <a:lnT w="9525" cap="flat" cmpd="sng" algn="ctr">
-                      <a:solidFill>
-                        <a:schemeClr val="bg1">
-                          <a:lumMod val="50000"/>
-                        </a:schemeClr>
-                      </a:solidFill>
-                      <a:prstDash val="solid"/>
-                      <a:round/>
-                      <a:headEnd type="none" w="med" len="med"/>
-                      <a:tailEnd type="none" w="med" len="med"/>
-                    </a:lnT>
-                    <a:lnB w="9525" cap="flat" cmpd="sng" algn="ctr">
-                      <a:solidFill>
-                        <a:schemeClr val="bg1">
-                          <a:lumMod val="50000"/>
-                        </a:schemeClr>
-                      </a:solidFill>
-                      <a:prstDash val="solid"/>
-                      <a:round/>
-                      <a:headEnd type="none" w="med" len="med"/>
-                      <a:tailEnd type="none" w="med" len="med"/>
-                    </a:lnB>
-                    <a:solidFill>
-                      <a:srgbClr val="FFFFFF"/>
-                    </a:solidFill>
-                  </a:tcPr>
-                </a:tc>
-              </a:tr>
-              <a:tr h="288000">
-                <a:tc>
-                  <a:txBody>
-                    <a:bodyPr/>
-                    <a:lstStyle/>
-                    <a:p>
-                      <a:pPr algn="l" fontAlgn="ctr">
-                        <a:buNone/>
-                      </a:pPr>
-                      <a:r>
-                        <a:rPr lang="en" sz="1000" b="1" i="0" u="none" strike="noStrike" dirty="0">
-                          <a:solidFill>
-                            <a:schemeClr val="tx1"/>
-                          </a:solidFill>
-                          <a:effectLst/>
-                          <a:latin typeface="맑은 고딕" panose="020B0503020000020004" pitchFamily="34" charset="-127"/>
-                          <a:ea typeface="맑은 고딕" panose="020B0503020000020004" pitchFamily="34" charset="-127"/>
-                          <a:cs typeface="맑은 고딕"/>
-                        </a:rPr>
-                        <a:t>결제 연동</a:t>
-                      </a:r>
-                    </a:p>
-                  </a:txBody>
-                  <a:tcPr marL="81005" marR="6750" marT="6750" marB="0" anchor="ctr">
-                    <a:lnL>
-                      <a:noFill/>
-                    </a:lnL>
-                    <a:lnR>
-                      <a:noFill/>
-                    </a:lnR>
-                    <a:lnT w="9525" cap="flat" cmpd="sng" algn="ctr">
-                      <a:solidFill>
-                        <a:schemeClr val="bg1">
-                          <a:lumMod val="50000"/>
-                        </a:schemeClr>
-                      </a:solidFill>
-                      <a:prstDash val="solid"/>
-                      <a:round/>
-                      <a:headEnd type="none" w="med" len="med"/>
-                      <a:tailEnd type="none" w="med" len="med"/>
-                    </a:lnT>
-                    <a:lnB w="9525" cap="flat" cmpd="sng" algn="ctr">
-                      <a:solidFill>
-                        <a:schemeClr val="bg1">
-                          <a:lumMod val="50000"/>
-                        </a:schemeClr>
-                      </a:solidFill>
-                      <a:prstDash val="solid"/>
-                      <a:round/>
-                      <a:headEnd type="none" w="med" len="med"/>
-                      <a:tailEnd type="none" w="med" len="med"/>
-                    </a:lnB>
-                    <a:noFill/>
-                  </a:tcPr>
-                </a:tc>
-                <a:tc>
-                  <a:txBody>
-                    <a:bodyPr/>
-                    <a:lstStyle/>
-                    <a:p>
-                      <a:pPr algn="l" fontAlgn="ctr">
-                        <a:buNone/>
-                      </a:pPr>
-                      <a:r>
-                        <a:rPr lang="ko-KR" altLang="en-US" sz="1000" b="0" i="0" u="none" strike="noStrike" dirty="0">
-                          <a:solidFill>
-                            <a:srgbClr val="000000"/>
-                          </a:solidFill>
-                          <a:effectLst/>
-                          <a:latin typeface="맑은 고딕" panose="020B0503020000020004" pitchFamily="34" charset="-127"/>
-                          <a:ea typeface="맑은 고딕" panose="020B0503020000020004" pitchFamily="34" charset="-127"/>
-                          <a:cs typeface="맑은 고딕"/>
-                        </a:rPr>
-                        <a:t>예</a:t>
-                      </a:r>
-                    </a:p>
-                  </a:txBody>
-                  <a:tcPr marL="81005" marR="6750" marT="6750" marB="0" anchor="ctr">
-                    <a:lnL>
-                      <a:noFill/>
-                    </a:lnL>
-                    <a:lnR>
-                      <a:noFill/>
-                    </a:lnR>
-                    <a:lnT w="9525" cap="flat" cmpd="sng" algn="ctr">
-                      <a:solidFill>
-                        <a:schemeClr val="bg1">
-                          <a:lumMod val="50000"/>
-                        </a:schemeClr>
-                      </a:solidFill>
-                      <a:prstDash val="solid"/>
-                      <a:round/>
-                      <a:headEnd type="none" w="med" len="med"/>
-                      <a:tailEnd type="none" w="med" len="med"/>
-                    </a:lnT>
-                    <a:lnB w="9525" cap="flat" cmpd="sng" algn="ctr">
-                      <a:solidFill>
-                        <a:schemeClr val="bg1">
-                          <a:lumMod val="50000"/>
-                        </a:schemeClr>
-                      </a:solidFill>
-                      <a:prstDash val="solid"/>
-                      <a:round/>
-                      <a:headEnd type="none" w="med" len="med"/>
-                      <a:tailEnd type="none" w="med" len="med"/>
-                    </a:lnB>
-                    <a:solidFill>
-                      <a:srgbClr val="FFFFFF"/>
-                    </a:solidFill>
-                  </a:tcPr>
-                </a:tc>
-                <a:tc>
-                  <a:txBody>
-                    <a:bodyPr/>
-                    <a:lstStyle/>
-                    <a:p>
-                      <a:pPr algn="l" fontAlgn="ctr">
-                        <a:buNone/>
-                      </a:pPr>
-                      <a:r>
-                        <a:rPr lang="ko-KR" altLang="en-US" sz="1000" b="0" i="0" u="none" strike="noStrike" dirty="0">
-                          <a:solidFill>
-                            <a:srgbClr val="000000"/>
-                          </a:solidFill>
-                          <a:effectLst/>
-                          <a:latin typeface="맑은 고딕" panose="020B0503020000020004" pitchFamily="34" charset="-127"/>
-                          <a:ea typeface="맑은 고딕" panose="020B0503020000020004" pitchFamily="34" charset="-127"/>
-                          <a:cs typeface="맑은 고딕"/>
-                        </a:rPr>
-                        <a:t>예</a:t>
-                      </a:r>
-                    </a:p>
-                  </a:txBody>
-                  <a:tcPr marL="81005" marR="6750" marT="6750" marB="0" anchor="ctr">
-                    <a:lnL>
-                      <a:noFill/>
-                    </a:lnL>
-                    <a:lnR>
-                      <a:noFill/>
-                    </a:lnR>
-                    <a:lnT w="9525" cap="flat" cmpd="sng" algn="ctr">
-                      <a:solidFill>
-                        <a:schemeClr val="bg1">
-                          <a:lumMod val="50000"/>
-                        </a:schemeClr>
-                      </a:solidFill>
-                      <a:prstDash val="solid"/>
-                      <a:round/>
-                      <a:headEnd type="none" w="med" len="med"/>
-                      <a:tailEnd type="none" w="med" len="med"/>
-                    </a:lnT>
-                    <a:lnB w="9525" cap="flat" cmpd="sng" algn="ctr">
-                      <a:solidFill>
-                        <a:schemeClr val="bg1">
-                          <a:lumMod val="50000"/>
-                        </a:schemeClr>
-                      </a:solidFill>
-                      <a:prstDash val="solid"/>
-                      <a:round/>
-                      <a:headEnd type="none" w="med" len="med"/>
-                      <a:tailEnd type="none" w="med" len="med"/>
-                    </a:lnB>
-                    <a:solidFill>
-                      <a:srgbClr val="FFFFFF"/>
-                    </a:solidFill>
-                  </a:tcPr>
-                </a:tc>
-                <a:tc>
-                  <a:txBody>
-                    <a:bodyPr/>
-                    <a:lstStyle/>
-                    <a:p>
-                      <a:pPr algn="l" fontAlgn="ctr">
-                        <a:buNone/>
-                      </a:pPr>
-                      <a:r>
-                        <a:rPr lang="ko-KR" altLang="en-US" sz="1000" b="0" i="0" u="none" strike="noStrike" dirty="0">
-                          <a:solidFill>
-                            <a:srgbClr val="000000"/>
-                          </a:solidFill>
-                          <a:effectLst/>
-                          <a:latin typeface="맑은 고딕" panose="020B0503020000020004" pitchFamily="34" charset="-127"/>
-                          <a:ea typeface="맑은 고딕" panose="020B0503020000020004" pitchFamily="34" charset="-127"/>
-                          <a:cs typeface="맑은 고딕"/>
-                        </a:rPr>
-                        <a:t>예</a:t>
-                      </a:r>
-                    </a:p>
-                  </a:txBody>
-                  <a:tcPr marL="81005" marR="6750" marT="6750" marB="0" anchor="ctr">
-                    <a:lnL>
-                      <a:noFill/>
-                    </a:lnL>
-                    <a:lnR>
-                      <a:noFill/>
-                    </a:lnR>
-                    <a:lnT w="9525" cap="flat" cmpd="sng" algn="ctr">
-                      <a:solidFill>
-                        <a:schemeClr val="bg1">
-                          <a:lumMod val="50000"/>
-                        </a:schemeClr>
-                      </a:solidFill>
-                      <a:prstDash val="solid"/>
-                      <a:round/>
-                      <a:headEnd type="none" w="med" len="med"/>
-                      <a:tailEnd type="none" w="med" len="med"/>
-                    </a:lnT>
-                    <a:lnB w="9525" cap="flat" cmpd="sng" algn="ctr">
-                      <a:solidFill>
-                        <a:schemeClr val="bg1">
-                          <a:lumMod val="50000"/>
-                        </a:schemeClr>
-                      </a:solidFill>
-                      <a:prstDash val="solid"/>
-                      <a:round/>
-                      <a:headEnd type="none" w="med" len="med"/>
-                      <a:tailEnd type="none" w="med" len="med"/>
-                    </a:lnB>
-                    <a:solidFill>
-                      <a:srgbClr val="FFFFFF"/>
-                    </a:solidFill>
-                  </a:tcPr>
-                </a:tc>
-                <a:tc>
-                  <a:txBody>
-                    <a:bodyPr/>
-                    <a:lstStyle/>
-                    <a:p>
-                      <a:pPr algn="l" fontAlgn="ctr">
-                        <a:buNone/>
-                      </a:pPr>
-                      <a:r>
-                        <a:rPr lang="ko-KR" altLang="en-US" sz="1000" b="0" i="0" u="none" strike="noStrike" dirty="0">
-                          <a:solidFill>
-                            <a:srgbClr val="000000"/>
-                          </a:solidFill>
-                          <a:effectLst/>
-                          <a:latin typeface="맑은 고딕" panose="020B0503020000020004" pitchFamily="34" charset="-127"/>
-                          <a:ea typeface="맑은 고딕" panose="020B0503020000020004" pitchFamily="34" charset="-127"/>
-                          <a:cs typeface="맑은 고딕"/>
-                        </a:rPr>
-                        <a:t>예</a:t>
-                      </a:r>
-                    </a:p>
-                  </a:txBody>
-                  <a:tcPr marL="81005" marR="6750" marT="6750" marB="0" anchor="ctr">
-                    <a:lnL>
-                      <a:noFill/>
-                    </a:lnL>
-                    <a:lnR>
-                      <a:noFill/>
-                    </a:lnR>
-                    <a:lnT w="9525" cap="flat" cmpd="sng" algn="ctr">
-                      <a:solidFill>
-                        <a:schemeClr val="bg1">
-                          <a:lumMod val="50000"/>
-                        </a:schemeClr>
-                      </a:solidFill>
-                      <a:prstDash val="solid"/>
-                      <a:round/>
-                      <a:headEnd type="none" w="med" len="med"/>
-                      <a:tailEnd type="none" w="med" len="med"/>
-                    </a:lnT>
-                    <a:lnB w="9525" cap="flat" cmpd="sng" algn="ctr">
-                      <a:solidFill>
-                        <a:schemeClr val="bg1">
-                          <a:lumMod val="50000"/>
-                        </a:schemeClr>
-                      </a:solidFill>
-                      <a:prstDash val="solid"/>
-                      <a:round/>
-                      <a:headEnd type="none" w="med" len="med"/>
-                      <a:tailEnd type="none" w="med" len="med"/>
-                    </a:lnB>
-                    <a:solidFill>
-                      <a:srgbClr val="FFFFFF"/>
-                    </a:solidFill>
-                  </a:tcPr>
-                </a:tc>
-                <a:tc>
-                  <a:txBody>
-                    <a:bodyPr/>
-                    <a:lstStyle/>
-                    <a:p>
-                      <a:pPr algn="l" fontAlgn="ctr">
-                        <a:buNone/>
-                      </a:pPr>
-                      <a:r>
-                        <a:rPr lang="ko-KR" altLang="en-US" sz="1000" b="0" i="0" u="none" strike="noStrike" dirty="0">
-                          <a:solidFill>
-                            <a:srgbClr val="000000"/>
-                          </a:solidFill>
-                          <a:effectLst/>
-                          <a:latin typeface="맑은 고딕" panose="020B0503020000020004" pitchFamily="34" charset="-127"/>
-                          <a:ea typeface="맑은 고딕" panose="020B0503020000020004" pitchFamily="34" charset="-127"/>
-                          <a:cs typeface="맑은 고딕"/>
-                        </a:rPr>
-                        <a:t>워크플로</a:t>
-                      </a:r>
-                    </a:p>
-                  </a:txBody>
-                  <a:tcPr marL="81005" marR="6750" marT="6750" marB="0" anchor="ctr">
-                    <a:lnL>
-                      <a:noFill/>
-                    </a:lnL>
-                    <a:lnR>
-                      <a:noFill/>
-                    </a:lnR>
-                    <a:lnT w="9525" cap="flat" cmpd="sng" algn="ctr">
-                      <a:solidFill>
-                        <a:schemeClr val="bg1">
-                          <a:lumMod val="50000"/>
-                        </a:schemeClr>
-                      </a:solidFill>
-                      <a:prstDash val="solid"/>
-                      <a:round/>
-                      <a:headEnd type="none" w="med" len="med"/>
-                      <a:tailEnd type="none" w="med" len="med"/>
-                    </a:lnT>
-                    <a:lnB w="9525" cap="flat" cmpd="sng" algn="ctr">
-                      <a:solidFill>
-                        <a:schemeClr val="bg1">
-                          <a:lumMod val="50000"/>
-                        </a:schemeClr>
-                      </a:solidFill>
-                      <a:prstDash val="solid"/>
-                      <a:round/>
-                      <a:headEnd type="none" w="med" len="med"/>
-                      <a:tailEnd type="none" w="med" len="med"/>
-                    </a:lnB>
-                    <a:solidFill>
-                      <a:srgbClr val="FFFFFF"/>
-                    </a:solidFill>
-                  </a:tcPr>
-                </a:tc>
-              </a:tr>
-              <a:tr h="288000">
-                <a:tc>
-                  <a:txBody>
-                    <a:bodyPr/>
-                    <a:lstStyle/>
-                    <a:p>
-                      <a:pPr algn="l" fontAlgn="ctr">
-                        <a:buNone/>
-                      </a:pPr>
-                      <a:r>
-                        <a:rPr lang="en" sz="1000" b="1" i="0" u="none" strike="noStrike" dirty="0">
-                          <a:solidFill>
-                            <a:schemeClr val="tx1"/>
-                          </a:solidFill>
-                          <a:effectLst/>
-                          <a:latin typeface="맑은 고딕" panose="020B0503020000020004" pitchFamily="34" charset="-127"/>
-                          <a:ea typeface="맑은 고딕" panose="020B0503020000020004" pitchFamily="34" charset="-127"/>
-                          <a:cs typeface="맑은 고딕"/>
-                        </a:rPr>
-                        <a:t>기존 구독 고객 이관</a:t>
-                      </a:r>
-                    </a:p>
-                  </a:txBody>
-                  <a:tcPr marL="81005" marR="6750" marT="6750" marB="0" anchor="ctr">
-                    <a:lnL>
-                      <a:noFill/>
-                    </a:lnL>
-                    <a:lnR>
-                      <a:noFill/>
-                    </a:lnR>
-                    <a:lnT w="9525" cap="flat" cmpd="sng" algn="ctr">
-                      <a:solidFill>
-                        <a:schemeClr val="bg1">
-                          <a:lumMod val="50000"/>
-                        </a:schemeClr>
-                      </a:solidFill>
-                      <a:prstDash val="solid"/>
-                      <a:round/>
-                      <a:headEnd type="none" w="med" len="med"/>
-                      <a:tailEnd type="none" w="med" len="med"/>
-                    </a:lnT>
-                    <a:lnB w="9525" cap="flat" cmpd="sng" algn="ctr">
-                      <a:solidFill>
-                        <a:schemeClr val="bg1">
-                          <a:lumMod val="50000"/>
-                        </a:schemeClr>
-                      </a:solidFill>
-                      <a:prstDash val="solid"/>
-                      <a:round/>
-                      <a:headEnd type="none" w="med" len="med"/>
-                      <a:tailEnd type="none" w="med" len="med"/>
-                    </a:lnB>
-                    <a:noFill/>
-                  </a:tcPr>
-                </a:tc>
-                <a:tc>
-                  <a:txBody>
-                    <a:bodyPr/>
-                    <a:lstStyle/>
-                    <a:p>
-                      <a:pPr algn="l" fontAlgn="ctr">
-                        <a:buNone/>
-                      </a:pPr>
-                      <a:r>
-                        <a:rPr lang="ko-KR" altLang="en-US" sz="1000" b="0" i="0" u="none" strike="noStrike" dirty="0">
-                          <a:solidFill>
-                            <a:srgbClr val="000000"/>
-                          </a:solidFill>
-                          <a:effectLst/>
-                          <a:latin typeface="맑은 고딕" panose="020B0503020000020004" pitchFamily="34" charset="-127"/>
-                          <a:ea typeface="맑은 고딕" panose="020B0503020000020004" pitchFamily="34" charset="-127"/>
-                          <a:cs typeface="맑은 고딕"/>
-                        </a:rPr>
-                        <a:t>예</a:t>
-                      </a:r>
-                    </a:p>
-                  </a:txBody>
-                  <a:tcPr marL="81005" marR="6750" marT="6750" marB="0" anchor="ctr">
-                    <a:lnL>
-                      <a:noFill/>
-                    </a:lnL>
-                    <a:lnR>
-                      <a:noFill/>
-                    </a:lnR>
-                    <a:lnT w="9525" cap="flat" cmpd="sng" algn="ctr">
-                      <a:solidFill>
-                        <a:schemeClr val="bg1">
-                          <a:lumMod val="50000"/>
-                        </a:schemeClr>
-                      </a:solidFill>
-                      <a:prstDash val="solid"/>
-                      <a:round/>
-                      <a:headEnd type="none" w="med" len="med"/>
-                      <a:tailEnd type="none" w="med" len="med"/>
-                    </a:lnT>
-                    <a:lnB w="9525" cap="flat" cmpd="sng" algn="ctr">
-                      <a:solidFill>
-                        <a:schemeClr val="bg1">
-                          <a:lumMod val="50000"/>
-                        </a:schemeClr>
-                      </a:solidFill>
-                      <a:prstDash val="solid"/>
-                      <a:round/>
-                      <a:headEnd type="none" w="med" len="med"/>
-                      <a:tailEnd type="none" w="med" len="med"/>
-                    </a:lnB>
-                    <a:solidFill>
-                      <a:srgbClr val="FFFFFF"/>
-                    </a:solidFill>
-                  </a:tcPr>
-                </a:tc>
-                <a:tc>
-                  <a:txBody>
-                    <a:bodyPr/>
-                    <a:lstStyle/>
-                    <a:p>
-                      <a:pPr algn="l" fontAlgn="ctr">
-                        <a:buNone/>
-                      </a:pPr>
-                      <a:r>
-                        <a:rPr lang="ko-KR" altLang="en-US" sz="1000" b="0" i="0" u="none" strike="noStrike" dirty="0">
-                          <a:solidFill>
-                            <a:srgbClr val="000000"/>
-                          </a:solidFill>
-                          <a:effectLst/>
-                          <a:latin typeface="맑은 고딕" panose="020B0503020000020004" pitchFamily="34" charset="-127"/>
-                          <a:ea typeface="맑은 고딕" panose="020B0503020000020004" pitchFamily="34" charset="-127"/>
-                          <a:cs typeface="맑은 고딕"/>
-                        </a:rPr>
-                        <a:t>아니오</a:t>
-                      </a:r>
-                    </a:p>
-                  </a:txBody>
-                  <a:tcPr marL="81005" marR="6750" marT="6750" marB="0" anchor="ctr">
-                    <a:lnL>
-                      <a:noFill/>
-                    </a:lnL>
-                    <a:lnR>
-                      <a:noFill/>
-                    </a:lnR>
-                    <a:lnT w="9525" cap="flat" cmpd="sng" algn="ctr">
-                      <a:solidFill>
-                        <a:schemeClr val="bg1">
-                          <a:lumMod val="50000"/>
-                        </a:schemeClr>
-                      </a:solidFill>
-                      <a:prstDash val="solid"/>
-                      <a:round/>
-                      <a:headEnd type="none" w="med" len="med"/>
-                      <a:tailEnd type="none" w="med" len="med"/>
-                    </a:lnT>
-                    <a:lnB w="9525" cap="flat" cmpd="sng" algn="ctr">
-                      <a:solidFill>
-                        <a:schemeClr val="bg1">
-                          <a:lumMod val="50000"/>
-                        </a:schemeClr>
-                      </a:solidFill>
-                      <a:prstDash val="solid"/>
-                      <a:round/>
-                      <a:headEnd type="none" w="med" len="med"/>
-                      <a:tailEnd type="none" w="med" len="med"/>
-                    </a:lnB>
-                    <a:solidFill>
-                      <a:srgbClr val="FFFFFF"/>
-                    </a:solidFill>
-                  </a:tcPr>
-                </a:tc>
-                <a:tc>
-                  <a:txBody>
-                    <a:bodyPr/>
-                    <a:lstStyle/>
-                    <a:p>
-                      <a:pPr algn="l" fontAlgn="ctr">
-                        <a:buNone/>
-                      </a:pPr>
-                      <a:r>
-                        <a:rPr lang="ko-KR" altLang="en-US" sz="1000" b="0" i="0" u="none" strike="noStrike" dirty="0">
-                          <a:solidFill>
-                            <a:srgbClr val="000000"/>
-                          </a:solidFill>
-                          <a:effectLst/>
-                          <a:latin typeface="맑은 고딕" panose="020B0503020000020004" pitchFamily="34" charset="-127"/>
-                          <a:ea typeface="맑은 고딕" panose="020B0503020000020004" pitchFamily="34" charset="-127"/>
-                          <a:cs typeface="맑은 고딕"/>
-                        </a:rPr>
-                        <a:t>—</a:t>
-                      </a:r>
-                    </a:p>
-                  </a:txBody>
-                  <a:tcPr marL="81005" marR="6750" marT="6750" marB="0" anchor="ctr">
-                    <a:lnL>
-                      <a:noFill/>
-                    </a:lnL>
-                    <a:lnR>
-                      <a:noFill/>
-                    </a:lnR>
-                    <a:lnT w="9525" cap="flat" cmpd="sng" algn="ctr">
-                      <a:solidFill>
-                        <a:schemeClr val="bg1">
-                          <a:lumMod val="50000"/>
-                        </a:schemeClr>
-                      </a:solidFill>
-                      <a:prstDash val="solid"/>
-                      <a:round/>
-                      <a:headEnd type="none" w="med" len="med"/>
-                      <a:tailEnd type="none" w="med" len="med"/>
-                    </a:lnT>
-                    <a:lnB w="9525" cap="flat" cmpd="sng" algn="ctr">
-                      <a:solidFill>
-                        <a:schemeClr val="bg1">
-                          <a:lumMod val="50000"/>
-                        </a:schemeClr>
-                      </a:solidFill>
-                      <a:prstDash val="solid"/>
-                      <a:round/>
-                      <a:headEnd type="none" w="med" len="med"/>
-                      <a:tailEnd type="none" w="med" len="med"/>
-                    </a:lnB>
-                    <a:solidFill>
-                      <a:srgbClr val="FFFFFF"/>
-                    </a:solidFill>
-                  </a:tcPr>
-                </a:tc>
-                <a:tc>
-                  <a:txBody>
-                    <a:bodyPr/>
-                    <a:lstStyle/>
-                    <a:p>
-                      <a:pPr algn="l" fontAlgn="ctr">
-                        <a:buNone/>
-                      </a:pPr>
-                      <a:r>
-                        <a:rPr lang="ko-KR" altLang="en-US" sz="1000" b="0" i="0" u="none" strike="noStrike" dirty="0">
-                          <a:solidFill>
-                            <a:srgbClr val="000000"/>
-                          </a:solidFill>
-                          <a:effectLst/>
-                          <a:latin typeface="맑은 고딕" panose="020B0503020000020004" pitchFamily="34" charset="-127"/>
-                          <a:ea typeface="맑은 고딕" panose="020B0503020000020004" pitchFamily="34" charset="-127"/>
-                          <a:cs typeface="맑은 고딕"/>
-                        </a:rPr>
-                        <a:t>—</a:t>
-                      </a:r>
-                    </a:p>
-                  </a:txBody>
-                  <a:tcPr marL="81005" marR="6750" marT="6750" marB="0" anchor="ctr">
-                    <a:lnL>
-                      <a:noFill/>
-                    </a:lnL>
-                    <a:lnR>
-                      <a:noFill/>
-                    </a:lnR>
-                    <a:lnT w="9525" cap="flat" cmpd="sng" algn="ctr">
-                      <a:solidFill>
-                        <a:schemeClr val="bg1">
-                          <a:lumMod val="50000"/>
-                        </a:schemeClr>
-                      </a:solidFill>
-                      <a:prstDash val="solid"/>
-                      <a:round/>
-                      <a:headEnd type="none" w="med" len="med"/>
-                      <a:tailEnd type="none" w="med" len="med"/>
-                    </a:lnT>
-                    <a:lnB w="9525" cap="flat" cmpd="sng" algn="ctr">
-                      <a:solidFill>
-                        <a:schemeClr val="bg1">
-                          <a:lumMod val="50000"/>
-                        </a:schemeClr>
-                      </a:solidFill>
-                      <a:prstDash val="solid"/>
-                      <a:round/>
-                      <a:headEnd type="none" w="med" len="med"/>
-                      <a:tailEnd type="none" w="med" len="med"/>
-                    </a:lnB>
-                    <a:solidFill>
-                      <a:srgbClr val="FFFFFF"/>
-                    </a:solidFill>
-                  </a:tcPr>
-                </a:tc>
-                <a:tc>
-                  <a:txBody>
-                    <a:bodyPr/>
-                    <a:lstStyle/>
-                    <a:p>
-                      <a:pPr algn="l" fontAlgn="ctr">
-                        <a:buNone/>
-                      </a:pPr>
-                      <a:r>
-                        <a:rPr lang="ko-KR" altLang="en-US" sz="1000" b="0" i="0" u="none" strike="noStrike" dirty="0">
-                          <a:solidFill>
-                            <a:srgbClr val="000000"/>
-                          </a:solidFill>
-                          <a:effectLst/>
-                          <a:latin typeface="맑은 고딕" panose="020B0503020000020004" pitchFamily="34" charset="-127"/>
-                          <a:ea typeface="맑은 고딕" panose="020B0503020000020004" pitchFamily="34" charset="-127"/>
-                          <a:cs typeface="맑은 고딕"/>
-                        </a:rPr>
-                        <a:t>수작업</a:t>
-                      </a:r>
-                    </a:p>
-                  </a:txBody>
-                  <a:tcPr marL="81005" marR="6750" marT="6750" marB="0" anchor="ctr">
-                    <a:lnL>
-                      <a:noFill/>
-                    </a:lnL>
-                    <a:lnR>
-                      <a:noFill/>
-                    </a:lnR>
-                    <a:lnT w="9525" cap="flat" cmpd="sng" algn="ctr">
-                      <a:solidFill>
-                        <a:schemeClr val="bg1">
-                          <a:lumMod val="50000"/>
-                        </a:schemeClr>
-                      </a:solidFill>
-                      <a:prstDash val="solid"/>
-                      <a:round/>
-                      <a:headEnd type="none" w="med" len="med"/>
-                      <a:tailEnd type="none" w="med" len="med"/>
-                    </a:lnT>
-                    <a:lnB w="9525" cap="flat" cmpd="sng" algn="ctr">
-                      <a:solidFill>
-                        <a:schemeClr val="bg1">
-                          <a:lumMod val="50000"/>
-                        </a:schemeClr>
-                      </a:solidFill>
-                      <a:prstDash val="solid"/>
-                      <a:round/>
-                      <a:headEnd type="none" w="med" len="med"/>
-                      <a:tailEnd type="none" w="med" len="med"/>
-                    </a:lnB>
-                    <a:solidFill>
-                      <a:srgbClr val="FFFFFF"/>
-                    </a:solidFill>
-                  </a:tcPr>
-                </a:tc>
-              </a:tr>
-              <a:tr h="288000">
-                <a:tc>
-                  <a:txBody>
-                    <a:bodyPr/>
-                    <a:lstStyle/>
-                    <a:p>
-                      <a:pPr algn="l" fontAlgn="ctr">
-                        <a:buNone/>
-                      </a:pPr>
-                      <a:r>
-                        <a:rPr lang="en" sz="1000" b="1" i="0" u="none" strike="noStrike" dirty="0">
-                          <a:solidFill>
-                            <a:schemeClr val="tx1"/>
-                          </a:solidFill>
-                          <a:effectLst/>
-                          <a:latin typeface="맑은 고딕" panose="020B0503020000020004" pitchFamily="34" charset="-127"/>
-                          <a:ea typeface="맑은 고딕" panose="020B0503020000020004" pitchFamily="34" charset="-127"/>
-                          <a:cs typeface="맑은 고딕"/>
-                        </a:rPr>
-                        <a:t>출시 안내 문구</a:t>
-                      </a:r>
-                    </a:p>
-                  </a:txBody>
-                  <a:tcPr marL="81005" marR="6750" marT="6750" marB="0" anchor="ctr">
-                    <a:lnL>
-                      <a:noFill/>
-                    </a:lnL>
-                    <a:lnR>
-                      <a:noFill/>
-                    </a:lnR>
-                    <a:lnT w="9525" cap="flat" cmpd="sng" algn="ctr">
-                      <a:solidFill>
-                        <a:schemeClr val="bg1">
-                          <a:lumMod val="50000"/>
-                        </a:schemeClr>
-                      </a:solidFill>
-                      <a:prstDash val="solid"/>
-                      <a:round/>
-                      <a:headEnd type="none" w="med" len="med"/>
-                      <a:tailEnd type="none" w="med" len="med"/>
-                    </a:lnT>
-                    <a:lnB w="9525" cap="flat" cmpd="sng" algn="ctr">
-                      <a:solidFill>
-                        <a:schemeClr val="bg1">
-                          <a:lumMod val="50000"/>
-                        </a:schemeClr>
-                      </a:solidFill>
-                      <a:prstDash val="solid"/>
-                      <a:round/>
-                      <a:headEnd type="none" w="med" len="med"/>
-                      <a:tailEnd type="none" w="med" len="med"/>
-                    </a:lnB>
-                    <a:noFill/>
-                  </a:tcPr>
-                </a:tc>
-                <a:tc>
-                  <a:txBody>
-                    <a:bodyPr/>
-                    <a:lstStyle/>
-                    <a:p>
-                      <a:pPr algn="l" fontAlgn="ctr">
-                        <a:buNone/>
-                      </a:pPr>
-                      <a:r>
-                        <a:rPr lang="ko-KR" altLang="en-US" sz="1000" b="0" i="0" u="none" strike="noStrike" dirty="0">
-                          <a:solidFill>
-                            <a:srgbClr val="000000"/>
-                          </a:solidFill>
-                          <a:effectLst/>
-                          <a:latin typeface="맑은 고딕" panose="020B0503020000020004" pitchFamily="34" charset="-127"/>
-                          <a:ea typeface="맑은 고딕" panose="020B0503020000020004" pitchFamily="34" charset="-127"/>
-                          <a:cs typeface="맑은 고딕"/>
-                        </a:rPr>
-                        <a:t>예</a:t>
-                      </a:r>
-                    </a:p>
-                  </a:txBody>
-                  <a:tcPr marL="81005" marR="6750" marT="6750" marB="0" anchor="ctr">
-                    <a:lnL>
-                      <a:noFill/>
-                    </a:lnL>
-                    <a:lnR>
-                      <a:noFill/>
-                    </a:lnR>
-                    <a:lnT w="9525" cap="flat" cmpd="sng" algn="ctr">
-                      <a:solidFill>
-                        <a:schemeClr val="bg1">
-                          <a:lumMod val="50000"/>
-                        </a:schemeClr>
-                      </a:solidFill>
-                      <a:prstDash val="solid"/>
-                      <a:round/>
-                      <a:headEnd type="none" w="med" len="med"/>
-                      <a:tailEnd type="none" w="med" len="med"/>
-                    </a:lnT>
-                    <a:lnB w="9525" cap="flat" cmpd="sng" algn="ctr">
-                      <a:solidFill>
-                        <a:schemeClr val="bg1">
-                          <a:lumMod val="50000"/>
-                        </a:schemeClr>
-                      </a:solidFill>
-                      <a:prstDash val="solid"/>
-                      <a:round/>
-                      <a:headEnd type="none" w="med" len="med"/>
-                      <a:tailEnd type="none" w="med" len="med"/>
-                    </a:lnB>
-                    <a:solidFill>
-                      <a:srgbClr val="FFFFFF"/>
-                    </a:solidFill>
-                  </a:tcPr>
-                </a:tc>
-                <a:tc>
-                  <a:txBody>
-                    <a:bodyPr/>
-                    <a:lstStyle/>
-                    <a:p>
-                      <a:pPr algn="l" fontAlgn="ctr">
-                        <a:buNone/>
-                      </a:pPr>
-                      <a:r>
-                        <a:rPr lang="ko-KR" altLang="en-US" sz="1000" b="0" i="0" u="none" strike="noStrike" dirty="0">
-                          <a:solidFill>
-                            <a:srgbClr val="000000"/>
-                          </a:solidFill>
-                          <a:effectLst/>
-                          <a:latin typeface="맑은 고딕" panose="020B0503020000020004" pitchFamily="34" charset="-127"/>
-                          <a:ea typeface="맑은 고딕" panose="020B0503020000020004" pitchFamily="34" charset="-127"/>
-                          <a:cs typeface="맑은 고딕"/>
-                        </a:rPr>
-                        <a:t>아니오(발송 뒤)</a:t>
-                      </a:r>
-                    </a:p>
-                  </a:txBody>
-                  <a:tcPr marL="81005" marR="6750" marT="6750" marB="0" anchor="ctr">
-                    <a:lnL>
-                      <a:noFill/>
-                    </a:lnL>
-                    <a:lnR>
-                      <a:noFill/>
-                    </a:lnR>
-                    <a:lnT w="9525" cap="flat" cmpd="sng" algn="ctr">
-                      <a:solidFill>
-                        <a:schemeClr val="bg1">
-                          <a:lumMod val="50000"/>
-                        </a:schemeClr>
-                      </a:solidFill>
-                      <a:prstDash val="solid"/>
-                      <a:round/>
-                      <a:headEnd type="none" w="med" len="med"/>
-                      <a:tailEnd type="none" w="med" len="med"/>
-                    </a:lnT>
-                    <a:lnB w="9525" cap="flat" cmpd="sng" algn="ctr">
-                      <a:solidFill>
-                        <a:schemeClr val="bg1">
-                          <a:lumMod val="50000"/>
-                        </a:schemeClr>
-                      </a:solidFill>
-                      <a:prstDash val="solid"/>
-                      <a:round/>
-                      <a:headEnd type="none" w="med" len="med"/>
-                      <a:tailEnd type="none" w="med" len="med"/>
-                    </a:lnB>
-                    <a:solidFill>
-                      <a:srgbClr val="FFFFFF"/>
-                    </a:solidFill>
-                  </a:tcPr>
-                </a:tc>
-                <a:tc>
-                  <a:txBody>
-                    <a:bodyPr/>
-                    <a:lstStyle/>
-                    <a:p>
-                      <a:pPr algn="l" fontAlgn="ctr">
-                        <a:buNone/>
-                      </a:pPr>
-                      <a:r>
-                        <a:rPr lang="ko-KR" altLang="en-US" sz="1000" b="0" i="0" u="none" strike="noStrike" dirty="0">
-                          <a:solidFill>
-                            <a:srgbClr val="000000"/>
-                          </a:solidFill>
-                          <a:effectLst/>
-                          <a:latin typeface="맑은 고딕" panose="020B0503020000020004" pitchFamily="34" charset="-127"/>
-                          <a:ea typeface="맑은 고딕" panose="020B0503020000020004" pitchFamily="34" charset="-127"/>
-                          <a:cs typeface="맑은 고딕"/>
-                        </a:rPr>
-                        <a:t>—</a:t>
-                      </a:r>
-                    </a:p>
-                  </a:txBody>
-                  <a:tcPr marL="81005" marR="6750" marT="6750" marB="0" anchor="ctr">
-                    <a:lnL>
-                      <a:noFill/>
-                    </a:lnL>
-                    <a:lnR>
-                      <a:noFill/>
-                    </a:lnR>
-                    <a:lnT w="9525" cap="flat" cmpd="sng" algn="ctr">
-                      <a:solidFill>
-                        <a:schemeClr val="bg1">
-                          <a:lumMod val="50000"/>
-                        </a:schemeClr>
-                      </a:solidFill>
-                      <a:prstDash val="solid"/>
-                      <a:round/>
-                      <a:headEnd type="none" w="med" len="med"/>
-                      <a:tailEnd type="none" w="med" len="med"/>
-                    </a:lnT>
-                    <a:lnB w="9525" cap="flat" cmpd="sng" algn="ctr">
-                      <a:solidFill>
-                        <a:schemeClr val="bg1">
-                          <a:lumMod val="50000"/>
-                        </a:schemeClr>
-                      </a:solidFill>
-                      <a:prstDash val="solid"/>
-                      <a:round/>
-                      <a:headEnd type="none" w="med" len="med"/>
-                      <a:tailEnd type="none" w="med" len="med"/>
-                    </a:lnB>
-                    <a:solidFill>
-                      <a:srgbClr val="FFFFFF"/>
-                    </a:solidFill>
-                  </a:tcPr>
-                </a:tc>
-                <a:tc>
-                  <a:txBody>
-                    <a:bodyPr/>
-                    <a:lstStyle/>
-                    <a:p>
-                      <a:pPr algn="l" fontAlgn="ctr">
-                        <a:buNone/>
-                      </a:pPr>
-                      <a:r>
-                        <a:rPr lang="ko-KR" altLang="en-US" sz="1000" b="0" i="0" u="none" strike="noStrike" dirty="0" err="1">
-                          <a:solidFill>
-                            <a:srgbClr val="000000"/>
-                          </a:solidFill>
-                          <a:effectLst/>
-                          <a:latin typeface="맑은 고딕" panose="020B0503020000020004" pitchFamily="34" charset="-127"/>
-                          <a:ea typeface="맑은 고딕" panose="020B0503020000020004" pitchFamily="34" charset="-127"/>
-                          <a:cs typeface="맑은 고딕"/>
-                        </a:rPr>
-                        <a:t>—</a:t>
-                      </a:r>
-                    </a:p>
-                  </a:txBody>
-                  <a:tcPr marL="81005" marR="6750" marT="6750" marB="0" anchor="ctr">
-                    <a:lnL>
-                      <a:noFill/>
-                    </a:lnL>
-                    <a:lnR>
-                      <a:noFill/>
-                    </a:lnR>
-                    <a:lnT w="9525" cap="flat" cmpd="sng" algn="ctr">
-                      <a:solidFill>
-                        <a:schemeClr val="bg1">
-                          <a:lumMod val="50000"/>
-                        </a:schemeClr>
-                      </a:solidFill>
-                      <a:prstDash val="solid"/>
-                      <a:round/>
-                      <a:headEnd type="none" w="med" len="med"/>
-                      <a:tailEnd type="none" w="med" len="med"/>
-                    </a:lnT>
-                    <a:lnB w="9525" cap="flat" cmpd="sng" algn="ctr">
-                      <a:solidFill>
-                        <a:schemeClr val="bg1">
-                          <a:lumMod val="50000"/>
-                        </a:schemeClr>
-                      </a:solidFill>
-                      <a:prstDash val="solid"/>
-                      <a:round/>
-                      <a:headEnd type="none" w="med" len="med"/>
-                      <a:tailEnd type="none" w="med" len="med"/>
-                    </a:lnB>
-                    <a:solidFill>
-                      <a:srgbClr val="FFFFFF"/>
-                    </a:solidFill>
-                  </a:tcPr>
-                </a:tc>
-                <a:tc>
-                  <a:txBody>
-                    <a:bodyPr/>
-                    <a:lstStyle/>
-                    <a:p>
-                      <a:pPr algn="l" fontAlgn="ctr">
-                        <a:buNone/>
-                      </a:pPr>
-                      <a:r>
-                        <a:rPr lang="ko-KR" altLang="en-US" sz="1000" b="0" i="0" u="none" strike="noStrike" dirty="0" err="1">
-                          <a:solidFill>
-                            <a:srgbClr val="000000"/>
-                          </a:solidFill>
-                          <a:effectLst/>
-                          <a:latin typeface="맑은 고딕" panose="020B0503020000020004" pitchFamily="34" charset="-127"/>
-                          <a:ea typeface="맑은 고딕" panose="020B0503020000020004" pitchFamily="34" charset="-127"/>
-                          <a:cs typeface="맑은 고딕"/>
-                        </a:rPr>
-                        <a:t>대화형 보조 + 사람 검토</a:t>
-                      </a:r>
-                    </a:p>
-                  </a:txBody>
-                  <a:tcPr marL="81005" marR="6750" marT="6750" marB="0" anchor="ctr">
-                    <a:lnL>
-                      <a:noFill/>
-                    </a:lnL>
-                    <a:lnR>
-                      <a:noFill/>
-                    </a:lnR>
-                    <a:lnT w="9525" cap="flat" cmpd="sng" algn="ctr">
-                      <a:solidFill>
-                        <a:schemeClr val="bg1">
-                          <a:lumMod val="50000"/>
-                        </a:schemeClr>
-                      </a:solidFill>
-                      <a:prstDash val="solid"/>
-                      <a:round/>
-                      <a:headEnd type="none" w="med" len="med"/>
-                      <a:tailEnd type="none" w="med" len="med"/>
-                    </a:lnT>
-                    <a:lnB w="9525" cap="flat" cmpd="sng" algn="ctr">
-                      <a:solidFill>
-                        <a:schemeClr val="bg1">
-                          <a:lumMod val="50000"/>
-                        </a:schemeClr>
-                      </a:solidFill>
-                      <a:prstDash val="solid"/>
-                      <a:round/>
-                      <a:headEnd type="none" w="med" len="med"/>
-                      <a:tailEnd type="none" w="med" len="med"/>
-                    </a:lnB>
-                    <a:solidFill>
-                      <a:srgbClr val="FFFFFF"/>
-                    </a:solidFill>
-                  </a:tcPr>
-                </a:tc>
-              </a:tr>
-            </a:tbl>
-          </a:graphicData>
-        </a:graphic>
-      </p:graphicFrame>
-      <p:sp>
-        <p:nvSpPr>
-          <p:cNvPr id="13" name="TextBox 12">
-            <a:extLst>
-              <a:ext uri="{FF2B5EF4-FFF2-40B4-BE49-F238E27FC236}">
-                <a16:creationId xmlns:a16="http://schemas.microsoft.com/office/drawing/2014/main" id="{654EDDB4-901F-3D48-A715-17D163E8A7AC}"/>
-              </a:ext>
-            </a:extLst>
-          </p:cNvPr>
-          <p:cNvSpPr txBox="1"/>
-          <p:nvPr/>
-        </p:nvSpPr>
-        <p:spPr>
-          <a:xfrm>
-            <a:off x="365760" y="960120"/>
-            <a:ext cx="8412480" cy="781278"/>
-          </a:xfrm>
-          <a:prstGeom prst="rect">
-            <a:avLst/>
-          </a:prstGeom>
-          <a:noFill/>
-        </p:spPr>
-        <p:txBody>
-          <a:bodyPr wrap="square">
-            <a:spAutoFit/>
-          </a:bodyPr>
-          <a:lstStyle/>
-          <a:p>
-            <a:pPr marL="0" indent="0">
-              <a:spcBef>
-                <a:spcPts val="600"/>
-              </a:spcBef>
-              <a:spcAft>
-                <a:spcPts val="600"/>
-              </a:spcAft>
-              <a:buNone/>
-            </a:pPr>
-            <a:r>
-              <a:rPr sz="1800" b="0">
-                <a:solidFill>
-                  <a:srgbClr val="000000"/>
-                </a:solidFill>
-                <a:latin typeface="맑은 고딕"/>
-                <a:ea typeface="맑은 고딕"/>
-              </a:rPr>
-              <a:t>첫 릴리스의 일 여섯 가지를 </a:t>
-            </a:r>
-            <a:r>
-              <a:rPr sz="1800" b="1">
-                <a:solidFill>
-                  <a:srgbClr val="000000"/>
-                </a:solidFill>
-                <a:latin typeface="맑은 고딕"/>
-                <a:ea typeface="맑은 고딕"/>
-              </a:rPr>
-              <a:t>작업 특성</a:t>
-            </a:r>
-            <a:r>
-              <a:rPr sz="1800" b="0">
-                <a:solidFill>
-                  <a:srgbClr val="000000"/>
-                </a:solidFill>
-                <a:latin typeface="맑은 고딕"/>
-                <a:ea typeface="맑은 고딕"/>
-              </a:rPr>
-              <a:t>으로 판단했다. 앞 질문에서 방식이 정해지면 뒤 칸은 "—</a:t>
-            </a:r>
-            <a:r>
-              <a:rPr sz="1600" b="0">
-                <a:solidFill>
-                  <a:srgbClr val="000000"/>
-                </a:solidFill>
-                <a:latin typeface="맑은 고딕"/>
-                <a:ea typeface="맑은 고딕"/>
-              </a:rPr>
-              <a:t>"로 둔다.</a:t>
-            </a:r>
+            <a:endParaRPr kumimoji="1" lang="en-US" altLang="ko-KR" dirty="0"/>
           </a:p>
         </p:txBody>
       </p:sp>
       <p:sp>
         <p:nvSpPr>
-          <p:cNvPr id="8" name="슬라이드 번호 개체 틀 2">
+          <p:cNvPr id="8" name="내용 개체 틀 7">
             <a:extLst>
               <a:ext uri="{FF2B5EF4-FFF2-40B4-BE49-F238E27FC236}">
-                <a16:creationId xmlns:a16="http://schemas.microsoft.com/office/drawing/2014/main" id="{741B75C6-7ED3-AA4C-41B6-F69C599EA447}"/>
+                <a16:creationId xmlns:a16="http://schemas.microsoft.com/office/drawing/2014/main" id="{BEBA2C4A-B0BF-F2E4-EA6E-614C99CBA184}"/>
               </a:ext>
             </a:extLst>
           </p:cNvPr>
@@ -36462,13 +33980,13 @@
             <a:spLocks noGrp="1"/>
           </p:cNvSpPr>
           <p:nvPr>
-            <p:ph type="sldNum" sz="quarter" idx="10"/>
+            <p:ph idx="1"/>
           </p:nvPr>
         </p:nvSpPr>
         <p:spPr>
           <a:xfrm>
-            <a:off x="3508472" y="6449625"/>
-            <a:ext cx="2133600" cy="238277"/>
+            <a:off x="233172" y="960120"/>
+            <a:ext cx="4338828" cy="5352345"/>
           </a:xfrm>
         </p:spPr>
         <p:txBody>
@@ -36477,88 +33995,208 @@
           </a:bodyPr>
           <a:lstStyle/>
           <a:p>
-            <a:pPr marL="0" marR="0" lvl="0" indent="0" algn="ctr" defTabSz="457200" rtl="0" eaLnBrk="1" fontAlgn="auto" latinLnBrk="0" hangingPunct="1">
-              <a:lnSpc>
-                <a:spcPct val="100000"/>
-              </a:lnSpc>
+            <a:pPr marL="322580" indent="-139700">
               <a:spcBef>
-                <a:spcPts val="0"/>
+                <a:spcPts val="300"/>
               </a:spcBef>
               <a:spcAft>
-                <a:spcPts val="600"/>
+                <a:spcPts val="300"/>
               </a:spcAft>
-              <a:buClrTx/>
-              <a:buSzTx/>
-              <a:buFontTx/>
               <a:buNone/>
-              <a:tabLst/>
-              <a:defRPr/>
             </a:pPr>
             <a:r>
-              <a:rPr kumimoji="0" lang="en-US" altLang="ko-KR" sz="800" b="0" i="0" u="none" strike="noStrike" kern="1200" cap="none" spc="0" normalizeH="0" baseline="0" noProof="0">
-                <a:ln>
-                  <a:noFill/>
-                </a:ln>
-                <a:solidFill>
-                  <a:prstClr val="black"/>
-                </a:solidFill>
-                <a:effectLst/>
-                <a:uLnTx/>
-                <a:uFillTx/>
-                <a:latin typeface="맑은 고딕" panose="020B0503020000020004" pitchFamily="34" charset="-127"/>
-                <a:ea typeface="맑은 고딕" panose="020B0503020000020004" pitchFamily="34" charset="-127"/>
-                <a:cs typeface="+mn-cs"/>
-              </a:rPr>
-              <a:t>- 34 -</a:t>
-            </a:r>
-          </a:p>
-        </p:txBody>
-      </p:sp>
-      <p:sp>
-        <p:nvSpPr>
-          <p:cNvPr id="14" name="TextBox 12">
-            <a:extLst>
-              <a:ext uri="{FF2B5EF4-FFF2-40B4-BE49-F238E27FC236}">
-                <a16:creationId xmlns:a16="http://schemas.microsoft.com/office/drawing/2014/main" id="{654EDDB4-901F-3D48-A715-17D163E8A7AC}"/>
-              </a:ext>
-            </a:extLst>
-          </p:cNvPr>
-          <p:cNvSpPr txBox="1"/>
-          <p:nvPr/>
-        </p:nvSpPr>
-        <p:spPr>
-          <a:xfrm>
-            <a:off x="365760" y="1813560"/>
-            <a:ext cx="8412480" cy="222250"/>
-          </a:xfrm>
-          <a:prstGeom prst="rect">
-            <a:avLst/>
-          </a:prstGeom>
-          <a:noFill/>
-        </p:spPr>
-        <p:txBody>
-          <a:bodyPr wrap="square" tIns="0" bIns="0">
-            <a:spAutoFit/>
-          </a:bodyPr>
-          <a:lstStyle/>
-          <a:p>
-            <a:pPr algn="ctr">
+              <a:rPr sz="1000" b="1">
+                <a:solidFill>
+                  <a:srgbClr val="000000"/>
+                </a:solidFill>
+                <a:latin typeface="맑은 고딕"/>
+                <a:ea typeface="맑은 고딕"/>
+              </a:rPr>
+              <a:t>7. 신청 시 확정할 계약 정보</a:t>
+            </a:r>
+          </a:p>
+          <a:p>
+            <a:pPr lvl="2" marL="411480" indent="-137160">
               <a:spcBef>
-                <a:spcPts val="0"/>
+                <a:spcPts val="300"/>
               </a:spcBef>
               <a:spcAft>
-                <a:spcPts val="0"/>
+                <a:spcPts val="300"/>
               </a:spcAft>
+              <a:buSzPct val="90000"/>
+              <a:buFont typeface="Wingdings" pitchFamily="2" charset="2"/>
+              <a:buChar char=""/>
             </a:pPr>
             <a:r>
-              <a:rPr sz="1400" b="1">
-                <a:solidFill>
-                  <a:srgbClr val="000000"/>
-                </a:solidFill>
-                <a:latin typeface="맑은 고딕"/>
-                <a:ea typeface="맑은 고딕"/>
-              </a:rPr>
-              <a:t>정기배송 첫 릴리스의 활용 방식</a:t>
+              <a:rPr sz="1000" b="0">
+                <a:solidFill>
+                  <a:srgbClr val="000000"/>
+                </a:solidFill>
+                <a:latin typeface="맑은 고딕"/>
+                <a:ea typeface="맑은 고딕"/>
+              </a:rPr>
+              <a:t>선택 상품과 수량</a:t>
+            </a:r>
+          </a:p>
+          <a:p>
+            <a:pPr lvl="2" marL="411480" indent="-137160">
+              <a:spcBef>
+                <a:spcPts val="300"/>
+              </a:spcBef>
+              <a:spcAft>
+                <a:spcPts val="300"/>
+              </a:spcAft>
+              <a:buSzPct val="90000"/>
+              <a:buFont typeface="Wingdings" pitchFamily="2" charset="2"/>
+              <a:buChar char=""/>
+            </a:pPr>
+            <a:r>
+              <a:rPr sz="1000" b="0">
+                <a:solidFill>
+                  <a:srgbClr val="000000"/>
+                </a:solidFill>
+                <a:latin typeface="맑은 고딕"/>
+                <a:ea typeface="맑은 고딕"/>
+              </a:rPr>
+              <a:t>배송지와 결제수단</a:t>
+            </a:r>
+          </a:p>
+          <a:p>
+            <a:pPr lvl="2" marL="411480" indent="-137160">
+              <a:spcBef>
+                <a:spcPts val="300"/>
+              </a:spcBef>
+              <a:spcAft>
+                <a:spcPts val="300"/>
+              </a:spcAft>
+              <a:buSzPct val="90000"/>
+              <a:buFont typeface="Wingdings" pitchFamily="2" charset="2"/>
+              <a:buChar char=""/>
+            </a:pPr>
+            <a:r>
+              <a:rPr sz="1000" b="0">
+                <a:solidFill>
+                  <a:srgbClr val="000000"/>
+                </a:solidFill>
+                <a:latin typeface="맑은 고딕"/>
+                <a:ea typeface="맑은 고딕"/>
+              </a:rPr>
+              <a:t>계약기간과 배송 주기</a:t>
+            </a:r>
+          </a:p>
+          <a:p>
+            <a:pPr lvl="2" marL="411480" indent="-137160">
+              <a:spcBef>
+                <a:spcPts val="300"/>
+              </a:spcBef>
+              <a:spcAft>
+                <a:spcPts val="300"/>
+              </a:spcAft>
+              <a:buSzPct val="90000"/>
+              <a:buFont typeface="Wingdings" pitchFamily="2" charset="2"/>
+              <a:buChar char=""/>
+            </a:pPr>
+            <a:r>
+              <a:rPr sz="1000" b="0">
+                <a:solidFill>
+                  <a:srgbClr val="000000"/>
+                </a:solidFill>
+                <a:latin typeface="맑은 고딕"/>
+                <a:ea typeface="맑은 고딕"/>
+              </a:rPr>
+              <a:t>첫 배송일과 계약 종료일</a:t>
+            </a:r>
+          </a:p>
+          <a:p>
+            <a:pPr lvl="2" marL="411480" indent="-137160">
+              <a:spcBef>
+                <a:spcPts val="300"/>
+              </a:spcBef>
+              <a:spcAft>
+                <a:spcPts val="300"/>
+              </a:spcAft>
+              <a:buSzPct val="90000"/>
+              <a:buFont typeface="Wingdings" pitchFamily="2" charset="2"/>
+              <a:buChar char=""/>
+            </a:pPr>
+            <a:r>
+              <a:rPr sz="1000" b="0">
+                <a:solidFill>
+                  <a:srgbClr val="000000"/>
+                </a:solidFill>
+                <a:latin typeface="맑은 고딕"/>
+                <a:ea typeface="맑은 고딕"/>
+              </a:rPr>
+              <a:t>총 배송 횟수와 예정 배송일</a:t>
+            </a:r>
+          </a:p>
+          <a:p>
+            <a:pPr lvl="2" marL="411480" indent="-137160">
+              <a:spcBef>
+                <a:spcPts val="300"/>
+              </a:spcBef>
+              <a:spcAft>
+                <a:spcPts val="300"/>
+              </a:spcAft>
+              <a:buSzPct val="90000"/>
+              <a:buFont typeface="Wingdings" pitchFamily="2" charset="2"/>
+              <a:buChar char=""/>
+            </a:pPr>
+            <a:r>
+              <a:rPr sz="1000" b="0">
+                <a:solidFill>
+                  <a:srgbClr val="000000"/>
+                </a:solidFill>
+                <a:latin typeface="맑은 고딕"/>
+                <a:ea typeface="맑은 고딕"/>
+              </a:rPr>
+              <a:t>첫 회차 결제금액</a:t>
+            </a:r>
+          </a:p>
+          <a:p>
+            <a:pPr lvl="2" marL="411480" indent="-137160">
+              <a:spcBef>
+                <a:spcPts val="300"/>
+              </a:spcBef>
+              <a:spcAft>
+                <a:spcPts val="300"/>
+              </a:spcAft>
+              <a:buSzPct val="90000"/>
+              <a:buFont typeface="Wingdings" pitchFamily="2" charset="2"/>
+              <a:buChar char=""/>
+            </a:pPr>
+            <a:r>
+              <a:rPr sz="1000" b="0">
+                <a:solidFill>
+                  <a:srgbClr val="000000"/>
+                </a:solidFill>
+                <a:latin typeface="맑은 고딕"/>
+                <a:ea typeface="맑은 고딕"/>
+              </a:rPr>
+              <a:t>회차별 결제금액 결정 기준</a:t>
+            </a:r>
+          </a:p>
+          <a:p>
+            <a:pPr lvl="2" marL="411480" indent="-137160">
+              <a:spcBef>
+                <a:spcPts val="300"/>
+              </a:spcBef>
+              <a:spcAft>
+                <a:spcPts val="300"/>
+              </a:spcAft>
+              <a:buSzPct val="90000"/>
+              <a:buFont typeface="Wingdings" pitchFamily="2" charset="2"/>
+              <a:buChar char=""/>
+            </a:pPr>
+            <a:r>
+              <a:rPr sz="1000" b="0">
+                <a:solidFill>
+                  <a:srgbClr val="000000"/>
+                </a:solidFill>
+                <a:latin typeface="맑은 고딕"/>
+                <a:ea typeface="맑은 고딕"/>
+              </a:rPr>
+              <a:t>자동 갱신 없이 종료된다는 조건</a:t>
             </a:r>
           </a:p>
         </p:txBody>
@@ -36566,7 +34204,7 @@
     </p:spTree>
     <p:extLst>
       <p:ext uri="{BB962C8B-B14F-4D97-AF65-F5344CB8AC3E}">
-        <p14:creationId xmlns:p14="http://schemas.microsoft.com/office/powerpoint/2010/main" val="2789569477"/>
+        <p14:creationId xmlns:p14="http://schemas.microsoft.com/office/powerpoint/2010/main" val="3555436673"/>
       </p:ext>
     </p:extLst>
   </p:cSld>

--- a/courses/ai-native/sessions/s01.pptx
+++ b/courses/ai-native/sessions/s01.pptx
@@ -1980,7 +1980,7 @@
             <a:pPr lvl="0"/>
             <a:r>
               <a:rPr lang="ko-KR" sz="1200"/>
-              <a:t>산출물을 모두 만들어야 하는 것은 아니다. 무엇을 넣을지는 도메인·기술 복잡성이 정하며, 그 판단은 "세션 02. 요구와 유저 스토리"에서 경로와 함께 다룬다.</a:t>
+              <a:t>산출물을 모두 만들어야 하는 것은 아니다. 무엇을 넣을지는 도메인·기술 복잡성이 정하며, 그 판단은 "세션 02. 요구와 사용자 이야기"에서 경로와 함께 다룬다.</a:t>
             </a:r>
           </a:p>
         </p:txBody>
@@ -15298,7 +15298,7 @@
                 <a:latin typeface="맑은 고딕"/>
                 <a:ea typeface="맑은 고딕"/>
               </a:rPr>
-              <a:t>02. 요구와 유저 스토리</a:t>
+              <a:t>02. 요구와 사용자 이야기</a:t>
             </a:r>
           </a:p>
           <a:p>
@@ -32620,7 +32620,7 @@
                 <a:latin typeface="맑은 고딕"/>
                 <a:ea typeface="맑은 고딕"/>
               </a:rPr>
-              <a:t>세션 02. 요구와 유저 스토리</a:t>
+              <a:t>세션 02. 요구와 사용자 이야기</a:t>
             </a:r>
             <a:r>
               <a:rPr sz="1800" b="0">
@@ -32640,7 +32640,7 @@
                 <a:latin typeface="맑은 고딕"/>
                 <a:ea typeface="맑은 고딕"/>
               </a:rPr>
-              <a:t> 요청 한 줄을 요구사항과 유저 스토리로 구체화한다.</a:t>
+              <a:t> 요청 한 줄을 요구사항과 사용자 이야기로 구체화한다.</a:t>
             </a:r>
           </a:p>
         </p:txBody>

--- a/courses/ai-native/sessions/s01.pptx
+++ b/courses/ai-native/sessions/s01.pptx
@@ -942,7 +942,7 @@
             <a:pPr lvl="0"/>
             <a:r>
               <a:rPr lang="ko-KR" sz="1200"/>
-              <a:t>표의 세 행은 그 구분과 같은 자리를 가른다. 다만 작업의 단위·검증 열로 다시 쓴 것과 활동별 역할 구분은 이 과정이 그 위에 둔 것이다(course-design.md의 「원전 적용 결정」).</a:t>
+              <a:t>표의 세 행은 그 구분과 같은 자리를 구분한다. 다만 작업의 단위·검증 열로 다시 쓴 것과 활동별 역할 구분은 이 과정이 그 위에 둔 것이다(course-design.md의 「원전 적용 결정」).</a:t>
             </a:r>
           </a:p>
           <a:p>
@@ -1235,7 +1235,7 @@
             <a:pPr lvl="0"/>
             <a:r>
               <a:rPr lang="ko-KR" sz="1200"/>
-              <a:t>표의 행 하나하나가 뒤 세션의 주제다. 각 행의 결정을 무엇으로 재는지는 「06. 결정과 검사의 짝」에서 이어 본다.</a:t>
+              <a:t>표의 행 하나하나가 뒤 세션의 주제다. 각 행의 결정을 무엇으로 확인하는지는 「06. 결정과 검사의 짝」에서 이어 본다.</a:t>
             </a:r>
           </a:p>
         </p:txBody>
@@ -1959,7 +1959,7 @@
             <a:pPr lvl="0"/>
             <a:r>
               <a:rPr lang="ko-KR" sz="1200"/>
-              <a:t>이 세션에서 보완된 모델은 없다. 업무 규칙 3가지가 리뷰에서 처음 드러났을 뿐이며, 모델로 적는 일은 뒤 세션이 한다.</a:t>
+              <a:t>모델에서 보완된 것 — 없다. 업무 규칙 3가지가 리뷰에서 처음 드러났을 뿐이며, 모델로 적는 일은 뒤 세션이 한다.</a:t>
             </a:r>
           </a:p>
         </p:txBody>
@@ -2049,6 +2049,202 @@
             <a:r>
               <a:rPr lang="ko-KR" sz="1200"/>
               <a:t>수강생의 답은 이와 다를 수 있다. 업무 규칙을 다르게 정하면 미정의 목록도 달라진다.</a:t>
+            </a:r>
+          </a:p>
+          <a:p>
+            <a:pPr lvl="0"/>
+            <a:r>
+              <a:rPr lang="ko-KR" sz="1200"/>
+              <a:t>실제로 실행한 프롬프트 — 아래가 이 별첨을 만든 입력 그대로다. 본문 실습의 ①~⑤는 수강생용 문구이고, 실제 실행은 앞 응답을 읽고 답한 내용이 붙어 길다. 원본은 code/s01/exercise-conversation/order/prompt-NN.txt다.</a:t>
+            </a:r>
+          </a:p>
+          <a:p>
+            <a:pPr lvl="1"/>
+            <a:r>
+              <a:rPr lang="ko-KR" sz="1200"/>
+              <a:t>1. 실제 프롬프트 1</a:t>
+            </a:r>
+          </a:p>
+          <a:p>
+            <a:pPr lvl="0">
+              <a:buNone/>
+            </a:pPr>
+            <a:r>
+              <a:rPr lang="ko-KR" sz="1200"/>
+              <a:t>    쇼핑몰의 주문 시스템을 빈 저장소에서 새로 만든다. 업무 담당자의 요청은 "장바구니에 담은 상품을 결제하면 주문이 되고 배송이 시작되게 해 주세요" 한 줄이다. 요구사항을 정의하기 전에 내가 정해야 할 업무 조건은 무엇인가?</a:t>
+            </a:r>
+          </a:p>
+          <a:p>
+            <a:pPr lvl="1"/>
+            <a:r>
+              <a:rPr lang="ko-KR" sz="1200"/>
+              <a:t>2. 실제 프롬프트 2</a:t>
+            </a:r>
+          </a:p>
+          <a:p>
+            <a:pPr lvl="0">
+              <a:buNone/>
+            </a:pPr>
+            <a:r>
+              <a:rPr lang="ko-KR" sz="1200"/>
+              <a:t>    고객이 배송지를 정하고 카드로 결제까지 마치는 범위만 다루자. 상품·결제·배송은 이미 운영 중인 외부 시스템이며 화면과 기술 설계는 제외해라.</a:t>
+            </a:r>
+          </a:p>
+          <a:p>
+            <a:pPr lvl="1"/>
+            <a:r>
+              <a:rPr lang="ko-KR" sz="1200"/>
+              <a:t>3. 실제 프롬프트 3</a:t>
+            </a:r>
+          </a:p>
+          <a:p>
+            <a:pPr lvl="0">
+              <a:buNone/>
+            </a:pPr>
+            <a:r>
+              <a:rPr lang="ko-KR" sz="1200"/>
+              <a:t>    [앞선 질문에 대한 답]</a:t>
+            </a:r>
+          </a:p>
+          <a:p>
+            <a:pPr lvl="2"/>
+            <a:r>
+              <a:rPr lang="ko-KR" sz="1200"/>
+              <a:t>주문 금액: 주문이 생길 때의 판매가로 정한다. 결제 직전에 판매가가 올라도 주문할 때의 금액을 청구한다.</a:t>
+            </a:r>
+          </a:p>
+          <a:p>
+            <a:pPr lvl="2"/>
+            <a:r>
+              <a:rPr lang="ko-KR" sz="1200"/>
+              <a:t>배송 요청: 결제가 승인된 뒤에만 배송 시스템에 요청한다.</a:t>
+            </a:r>
+          </a:p>
+          <a:p>
+            <a:pPr lvl="2"/>
+            <a:r>
+              <a:rPr lang="ko-KR" sz="1200"/>
+              <a:t>결제 거절: 주문을 취소하지 않고 결제대기로 남겨 다른 카드로 다시 결제할 수 있게 한다.</a:t>
+            </a:r>
+          </a:p>
+          <a:p>
+            <a:pPr lvl="2"/>
+            <a:r>
+              <a:rPr lang="ko-KR" sz="1200"/>
+              <a:t>주문 성립: 카드 승인이 완료된 때다. 재고는 상품 시스템의 판단을 그대로 따른다.</a:t>
+            </a:r>
+          </a:p>
+          <a:p>
+            <a:pPr lvl="2"/>
+            <a:r>
+              <a:rPr lang="ko-KR" sz="1200"/>
+              <a:t>주문자와 수령인은 같은 사람으로 본다. 카드 외 결제 수단은 이번 범위가 아니다.</a:t>
+            </a:r>
+          </a:p>
+          <a:p>
+            <a:pPr lvl="0">
+              <a:buNone/>
+            </a:pPr>
+            <a:r>
+              <a:rPr lang="ko-KR" sz="1200"/>
+              <a:t>    [추가 질문·수정 요청] 이 셋 말고 요구사항을 쓰기 전에 꼭 정해야 할 조건이 더 있는가? 필요한 이유도 설명해라. 지금 정하지 않아도 요구사항을 쓸 수 있는 것은 그렇다고 말해라.</a:t>
+            </a:r>
+          </a:p>
+          <a:p>
+            <a:pPr lvl="1"/>
+            <a:r>
+              <a:rPr lang="ko-KR" sz="1200"/>
+              <a:t>4. 실제 프롬프트 4</a:t>
+            </a:r>
+          </a:p>
+          <a:p>
+            <a:pPr lvl="0">
+              <a:buNone/>
+            </a:pPr>
+            <a:r>
+              <a:rPr lang="ko-KR" sz="1200"/>
+              <a:t>    [앞선 질문에 대한 답]</a:t>
+            </a:r>
+          </a:p>
+          <a:p>
+            <a:pPr lvl="2"/>
+            <a:r>
+              <a:rPr lang="ko-KR" sz="1200"/>
+              <a:t>A 주문이 생기는 때: 고객이 배송지를 확정하면 주문이 생기고 그때의 판매가로 주문 금액이 정해진다. 상태는 결제대기다.</a:t>
+            </a:r>
+          </a:p>
+          <a:p>
+            <a:pPr lvl="2"/>
+            <a:r>
+              <a:rPr lang="ko-KR" sz="1200"/>
+              <a:t>C 주문 금액: 항목의 단가 x 수량의 합이다. 배송비와 쿠폰·할인은 이번 범위가 아니다. 판매가가 내려가도 주문할 때의 금액을 유지한다.</a:t>
+            </a:r>
+          </a:p>
+          <a:p>
+            <a:pPr lvl="2"/>
+            <a:r>
+              <a:rPr lang="ko-KR" sz="1200"/>
+              <a:t>D 결제대기 중 변경: 상품·수량·배송지를 바꿀 수 없다. 바꾸려면 새로 주문한다.</a:t>
+            </a:r>
+          </a:p>
+          <a:p>
+            <a:pPr lvl="2"/>
+            <a:r>
+              <a:rPr lang="ko-KR" sz="1200"/>
+              <a:t>E 재고: 상품 시스템의 판단을 그대로 따르고, 주문 쪽에서 재고를 따로 확보하지 않는다.</a:t>
+            </a:r>
+          </a:p>
+          <a:p>
+            <a:pPr lvl="0">
+              <a:buNone/>
+            </a:pPr>
+            <a:r>
+              <a:rPr lang="ko-KR" sz="1200"/>
+              <a:t>    [추가 질문·수정 요청] 다음 네 가지는 이번 범위에서 정하지 않고 미정으로 남긴다. 미정인 채로 요구사항을 쓸 수 있는지, 미정이라서 구현에서 임의로 정해지면 안 되는 것이 무엇인지 한 줄씩 밝혀라.</a:t>
+            </a:r>
+          </a:p>
+          <a:p>
+            <a:pPr lvl="2"/>
+            <a:r>
+              <a:rPr lang="ko-KR" sz="1200"/>
+              <a:t>B 결제대기의 기한과 기한이 지난 뒤의 처리</a:t>
+            </a:r>
+          </a:p>
+          <a:p>
+            <a:pPr lvl="2"/>
+            <a:r>
+              <a:rPr lang="ko-KR" sz="1200"/>
+              <a:t>E 승인 뒤 재고가 없는 경우의 처리</a:t>
+            </a:r>
+          </a:p>
+          <a:p>
+            <a:pPr lvl="2"/>
+            <a:r>
+              <a:rPr lang="ko-KR" sz="1200"/>
+              <a:t>F 결제 시스템의 응답을 확인할 수 없는 경우의 처리(확정할 수 없는 응답을 실패로 바꾸지 않는다는 것만 정했다)</a:t>
+            </a:r>
+          </a:p>
+          <a:p>
+            <a:pPr lvl="2"/>
+            <a:r>
+              <a:rPr lang="ko-KR" sz="1200"/>
+              <a:t>G 결제가 승인된 뒤 배송 요청이 실패한 경우의 처리</a:t>
+            </a:r>
+          </a:p>
+          <a:p>
+            <a:pPr lvl="1"/>
+            <a:r>
+              <a:rPr lang="ko-KR" sz="1200"/>
+              <a:t>5. 실제 프롬프트 5</a:t>
+            </a:r>
+          </a:p>
+          <a:p>
+            <a:pPr lvl="0">
+              <a:buNone/>
+            </a:pPr>
+            <a:r>
+              <a:rPr lang="ko-KR" sz="1200"/>
+              <a:t>    지금까지 합의한 "주문한다"의 업무 조건을 다음 실습에 사용할 간결한 Markdown 파일로 생성해라. 외부 시스템은 연계 대상으로 두고 화면·기술 설계와 결제 이후 운영은 제외해라. 모든 경우를 나열하지 말고 합의한 조건과 요구사항 작성에 꼭 필요한 미정 사항만 해당 위치에 표시해라. 새 결정을 추가하거나 폐기한 안을 되살리지 마라. 요구사항 정의서나 기능 목록을 미리 작성하지 말고 업무 조건과 미정 사항만 짧은 항목으로 정리해라. 항목마다 한 줄로 쓰고 도식 없이 한 쪽 분량으로 줄여라.</a:t>
             </a:r>
           </a:p>
         </p:txBody>
@@ -13072,7 +13268,7 @@
                 <a:latin typeface="맑은 고딕"/>
                 <a:ea typeface="맑은 고딕"/>
               </a:rPr>
-              <a:t>세 방식을 가르는 것은 쓰는 도구가 아니다. </a:t>
+              <a:t>세 방식을 구분하는 것은 쓰는 도구가 아니다. </a:t>
             </a:r>
             <a:r>
               <a:rPr sz="1800" b="1">
@@ -21812,7 +22008,7 @@
                 <a:latin typeface="맑은 고딕"/>
                 <a:ea typeface="맑은 고딕"/>
               </a:rPr>
-              <a:t> 받아들일 조건을 요구에서 정하고 내내 잰다.</a:t>
+              <a:t> 받아들일 조건을 요구에서 정하고 내내 확인한다.</a:t>
             </a:r>
           </a:p>
         </p:txBody>
@@ -24308,7 +24504,7 @@
                 <a:latin typeface="맑은 고딕"/>
                 <a:ea typeface="맑은 고딕"/>
               </a:rPr>
-              <a:t>로 재야 교환이 보인다.</a:t>
+              <a:t>로 측정해야 득실이 보인다.</a:t>
             </a:r>
           </a:p>
           <a:p>
@@ -25350,7 +25546,7 @@
                 <a:latin typeface="맑은 고딕"/>
                 <a:ea typeface="맑은 고딕"/>
               </a:rPr>
-              <a:t>09. 실습 — 업무 조건 확인</a:t>
+              <a:t>09. 실습 1 — 업무 조건 확인</a:t>
             </a:r>
           </a:p>
         </p:txBody>
@@ -26086,16 +26282,6 @@
               <a:buNone/>
             </a:pPr>
             <a:r>
-              <a:rPr sz="1000" b="1">
-                <a:solidFill>
-                  <a:srgbClr val="000000"/>
-                </a:solidFill>
-                <a:latin typeface="맑은 고딕"/>
-                <a:ea typeface="맑은 고딕"/>
-              </a:rPr>
-              <a:t>합의한 업무 조건의 최종 MD 파일</a:t>
-            </a:r>
-            <a:r>
               <a:rPr sz="1000" b="0">
                 <a:solidFill>
                   <a:srgbClr val="000000"/>
@@ -26103,7 +26289,7 @@
                 <a:latin typeface="맑은 고딕"/>
                 <a:ea typeface="맑은 고딕"/>
               </a:rPr>
-              <a:t>. 마지막 합의를 확인하고 저장소의 </a:t>
+              <a:t>주문한다-업무조건.md</a:t>
             </a:r>
             <a:r>
               <a:rPr sz="1000" b="0">
@@ -26113,17 +26299,57 @@
                 <a:latin typeface="맑은 고딕"/>
                 <a:ea typeface="맑은 고딕"/>
               </a:rPr>
+              <a:t> —</a:t>
+            </a:r>
+            <a:r>
+              <a:rPr sz="800" b="0">
+                <a:solidFill>
+                  <a:srgbClr val="000000"/>
+                </a:solidFill>
+                <a:latin typeface="맑은 고딕"/>
+                <a:ea typeface="맑은 고딕"/>
+              </a:rPr>
+              <a:t> 합의한 업무 조건을 확인하고 저장소의 </a:t>
+            </a:r>
+            <a:r>
+              <a:rPr sz="800" b="0">
+                <a:solidFill>
+                  <a:srgbClr val="000000"/>
+                </a:solidFill>
+                <a:latin typeface="맑은 고딕"/>
+                <a:ea typeface="맑은 고딕"/>
+              </a:rPr>
               <a:t>docs</a:t>
             </a:r>
             <a:r>
-              <a:rPr sz="1000" b="0">
-                <a:solidFill>
-                  <a:srgbClr val="000000"/>
-                </a:solidFill>
-                <a:latin typeface="맑은 고딕"/>
-                <a:ea typeface="맑은 고딕"/>
-              </a:rPr>
-              <a:t>에 두어 커밋한다.</a:t>
+              <a:rPr sz="800" b="0">
+                <a:solidFill>
+                  <a:srgbClr val="000000"/>
+                </a:solidFill>
+                <a:latin typeface="맑은 고딕"/>
+                <a:ea typeface="맑은 고딕"/>
+              </a:rPr>
+              <a:t>에 두어 커밋한다. </a:t>
+            </a:r>
+            <a:r>
+              <a:rPr sz="800" b="1">
+                <a:solidFill>
+                  <a:srgbClr val="000000"/>
+                </a:solidFill>
+                <a:latin typeface="맑은 고딕"/>
+                <a:ea typeface="맑은 고딕"/>
+              </a:rPr>
+              <a:t>실습 2의 투입물</a:t>
+            </a:r>
+            <a:r>
+              <a:rPr sz="800" b="0">
+                <a:solidFill>
+                  <a:srgbClr val="000000"/>
+                </a:solidFill>
+                <a:latin typeface="맑은 고딕"/>
+                <a:ea typeface="맑은 고딕"/>
+              </a:rPr>
+              <a:t>이다</a:t>
             </a:r>
           </a:p>
         </p:txBody>
@@ -27047,7 +27273,7 @@
                 <a:latin typeface="맑은 고딕"/>
                 <a:ea typeface="맑은 고딕"/>
               </a:rPr>
-              <a:t>09. 실습 —</a:t>
+              <a:t>09. 실습 1 —</a:t>
             </a:r>
             <a:r>
               <a:rPr sz="1400" b="0">
@@ -28527,7 +28753,7 @@
                 <a:latin typeface="맑은 고딕"/>
                 <a:ea typeface="맑은 고딕"/>
               </a:rPr>
-              <a:t>을 가른다.</a:t>
+              <a:t>을 구분한다.</a:t>
             </a:r>
           </a:p>
           <a:p>
@@ -28593,7 +28819,7 @@
                 <a:latin typeface="맑은 고딕"/>
                 <a:ea typeface="맑은 고딕"/>
               </a:rPr>
-              <a:t> 개발을 구분하고, 규율이 없는 사용과 가른다.</a:t>
+              <a:t> 개발을 구분하고, 규율이 없는 사용과 구분한다.</a:t>
             </a:r>
           </a:p>
           <a:p>
@@ -28742,7 +28968,7 @@
                 <a:latin typeface="맑은 고딕"/>
                 <a:ea typeface="맑은 고딕"/>
               </a:rPr>
-              <a:t>을 가른다.</a:t>
+              <a:t>을 구분한다.</a:t>
             </a:r>
           </a:p>
         </p:txBody>

--- a/courses/ai-native/sessions/s01.pptx
+++ b/courses/ai-native/sessions/s01.pptx
@@ -717,7 +717,7 @@
             <a:pPr lvl="0"/>
             <a:r>
               <a:rPr lang="ko-KR" sz="1200"/>
-              <a:t>다섯 자리의 묶음은 이 과정의 정리다. 각 행의 잃는 쪽은 뒤 세션이 하나씩 받는다 — 복잡도는 "세션 10. 비용과 평가", 같은 가정은 "세션 09. 검사 파이프라인", 연쇄 확산은 "세션 08. 위임"이다.</a:t>
+              <a:t>5가지의 묶음은 이 과정의 정리다. 각 행의 잃는 쪽은 뒤 세션이 하나씩 받는다 — 복잡도는 "세션 10. 비용과 평가", 같은 가정은 "세션 09. 검사 파이프라인", 연쇄 확산은 "세션 08. 위임"이다.</a:t>
             </a:r>
           </a:p>
           <a:p>
@@ -785,7 +785,7 @@
             <a:pPr lvl="0"/>
             <a:r>
               <a:rPr lang="ko-KR" sz="1200"/>
-              <a:t>여섯 원칙은 이 과정이 요구·모델·아키텍처·설계·검사로 다루는 축과 짝이 맞는다. 수강생이 자기 팀에서 이미 하는 일을 먼저 말하게 한 뒤 오른쪽 열을 짚는다.</a:t>
+              <a:t>6원칙은 이 과정이 요구·모델·아키텍처·설계·검사로 다루는 축과 짝이 맞는다. 수강생이 자기 팀에서 이미 하는 일을 먼저 말하게 한 뒤 오른쪽 열을 짚는다.</a:t>
             </a:r>
           </a:p>
           <a:p>
@@ -942,7 +942,7 @@
             <a:pPr lvl="0"/>
             <a:r>
               <a:rPr lang="ko-KR" sz="1200"/>
-              <a:t>표의 세 행은 그 구분과 같은 자리를 구분한다. 다만 작업의 단위·검증 열로 다시 쓴 것과 활동별 역할 구분은 이 과정이 그 위에 둔 것이다(course-design.md의 「원전 적용 결정」).</a:t>
+              <a:t>표의 3행은 그 구분과 같은 자리를 구분한다. 다만 작업의 단위·검증 열로 다시 쓴 것과 활동별 역할 구분은 이 과정이 그 위에 둔 것이다(course-design.md의 「원전 적용 결정」).</a:t>
             </a:r>
           </a:p>
           <a:p>
@@ -1460,7 +1460,7 @@
             <a:pPr lvl="0"/>
             <a:r>
               <a:rPr lang="ko-KR" sz="1200"/>
-              <a:t>이 여섯을 결정하는 쪽과 증거를 받는 쪽으로 다시 그린 것이 「과정의 지도」다.</a:t>
+              <a:t>이 6단계를 결정하는 영역과 증거를 받는 영역으로 다시 그린 것이 「과정의 지도」다.</a:t>
             </a:r>
           </a:p>
         </p:txBody>
@@ -2200,7 +2200,7 @@
             </a:pPr>
             <a:r>
               <a:rPr lang="ko-KR" sz="1200"/>
-              <a:t>    [추가 질문·수정 요청] 다음 네 가지는 이번 범위에서 정하지 않고 미정으로 남긴다. 미정인 채로 요구사항을 쓸 수 있는지, 미정이라서 구현에서 임의로 정해지면 안 되는 것이 무엇인지 한 줄씩 밝혀라.</a:t>
+              <a:t>    [추가 질문·수정 요청] 다음 4가지는 이번 범위에서 정하지 않고 미정으로 남긴다. 미정인 채로 요구사항을 쓸 수 있는지, 미정이라서 구현에서 임의로 정해지면 안 되는 것이 무엇인지 한 줄씩 밝혀라.</a:t>
             </a:r>
           </a:p>
           <a:p>
@@ -2394,7 +2394,7 @@
             <a:pPr lvl="0"/>
             <a:r>
               <a:rPr lang="ko-KR" sz="1200"/>
-              <a:t>업무 담당자 한 명이 주문 정책을 정하고, 개발자 세 명(테크 리드 한 명, 개발자 두 명)이 코딩 에이전트를 쓴다.</a:t>
+              <a:t>업무 담당자 한 명이 주문 정책을 정하고, 개발자 3명(테크 리드 한 명, 개발자 2명)이 코딩 에이전트를 쓴다.</a:t>
             </a:r>
           </a:p>
           <a:p>
@@ -5769,7 +5769,7 @@
                       </a:r>
                     </a:p>
                   </a:txBody>
-                  <a:tcPr marL="6750" marR="6750" marT="6750" marB="0" anchor="ctr">
+                  <a:tcPr marL="6750" marR="6750" marT="6750" marB="6750" anchor="ctr">
                     <a:lnL>
                       <a:noFill/>
                     </a:lnL>
@@ -5831,7 +5831,7 @@
                       </a:r>
                     </a:p>
                   </a:txBody>
-                  <a:tcPr marL="6750" marR="6750" marT="6750" marB="0" anchor="ctr">
+                  <a:tcPr marL="6750" marR="6750" marT="6750" marB="6750" anchor="ctr">
                     <a:lnL w="9525" cap="flat" cmpd="sng" algn="ctr">
                       <a:solidFill>
                         <a:schemeClr val="bg1">
@@ -5901,7 +5901,7 @@
                       </a:r>
                     </a:p>
                   </a:txBody>
-                  <a:tcPr marL="6750" marR="6750" marT="6750" marB="0" anchor="ctr">
+                  <a:tcPr marL="6750" marR="6750" marT="6750" marB="6750" anchor="ctr">
                     <a:lnL w="9525" cap="flat" cmpd="sng" algn="ctr">
                       <a:solidFill>
                         <a:schemeClr val="bg1">
@@ -5973,7 +5973,7 @@
                       </a:r>
                     </a:p>
                   </a:txBody>
-                  <a:tcPr marL="81005" marR="6750" marT="6750" marB="0" anchor="ctr">
+                  <a:tcPr marL="81005" marR="6750" marT="6750" marB="6750" anchor="ctr">
                     <a:lnL>
                       <a:noFill/>
                     </a:lnL>
@@ -6027,7 +6027,7 @@
                       </a:r>
                     </a:p>
                   </a:txBody>
-                  <a:tcPr marL="81005" marR="6750" marT="6750" marB="0" anchor="ctr">
+                  <a:tcPr marL="81005" marR="6750" marT="6750" marB="6750" anchor="ctr">
                     <a:lnL>
                       <a:noFill/>
                     </a:lnL>
@@ -6083,7 +6083,7 @@
                       </a:r>
                     </a:p>
                   </a:txBody>
-                  <a:tcPr marL="81005" marR="6750" marT="6750" marB="0" anchor="ctr">
+                  <a:tcPr marL="81005" marR="6750" marT="6750" marB="6750" anchor="ctr">
                     <a:lnL>
                       <a:noFill/>
                     </a:lnL>
@@ -6141,7 +6141,7 @@
                       </a:r>
                     </a:p>
                   </a:txBody>
-                  <a:tcPr marL="81005" marR="6750" marT="6750" marB="0" anchor="ctr">
+                  <a:tcPr marL="81005" marR="6750" marT="6750" marB="6750" anchor="ctr">
                     <a:lnL>
                       <a:noFill/>
                     </a:lnL>
@@ -6195,7 +6195,7 @@
                       </a:r>
                     </a:p>
                   </a:txBody>
-                  <a:tcPr marL="81005" marR="6750" marT="6750" marB="0" anchor="ctr">
+                  <a:tcPr marL="81005" marR="6750" marT="6750" marB="6750" anchor="ctr">
                     <a:lnL>
                       <a:noFill/>
                     </a:lnL>
@@ -6251,7 +6251,7 @@
                       </a:r>
                     </a:p>
                   </a:txBody>
-                  <a:tcPr marL="81005" marR="6750" marT="6750" marB="0" anchor="ctr">
+                  <a:tcPr marL="81005" marR="6750" marT="6750" marB="6750" anchor="ctr">
                     <a:lnL>
                       <a:noFill/>
                     </a:lnL>
@@ -6309,7 +6309,7 @@
                       </a:r>
                     </a:p>
                   </a:txBody>
-                  <a:tcPr marL="81005" marR="6750" marT="6750" marB="0" anchor="ctr">
+                  <a:tcPr marL="81005" marR="6750" marT="6750" marB="6750" anchor="ctr">
                     <a:lnL>
                       <a:noFill/>
                     </a:lnL>
@@ -6363,7 +6363,7 @@
                       </a:r>
                     </a:p>
                   </a:txBody>
-                  <a:tcPr marL="81005" marR="6750" marT="6750" marB="0" anchor="ctr">
+                  <a:tcPr marL="81005" marR="6750" marT="6750" marB="6750" anchor="ctr">
                     <a:lnL>
                       <a:noFill/>
                     </a:lnL>
@@ -6419,7 +6419,7 @@
                       </a:r>
                     </a:p>
                   </a:txBody>
-                  <a:tcPr marL="81005" marR="6750" marT="6750" marB="0" anchor="ctr">
+                  <a:tcPr marL="81005" marR="6750" marT="6750" marB="6750" anchor="ctr">
                     <a:lnL>
                       <a:noFill/>
                     </a:lnL>
@@ -6496,6 +6496,16 @@
               <a:buNone/>
             </a:pPr>
             <a:r>
+              <a:rPr sz="1800" b="1">
+                <a:solidFill>
+                  <a:srgbClr val="000000"/>
+                </a:solidFill>
+                <a:latin typeface="맑은 고딕"/>
+                <a:ea typeface="맑은 고딕"/>
+              </a:rPr>
+              <a:t>에이전트가 만든 테스트</a:t>
+            </a:r>
+            <a:r>
               <a:rPr sz="1800" b="0">
                 <a:solidFill>
                   <a:srgbClr val="000000"/>
@@ -6503,7 +6513,7 @@
                 <a:latin typeface="맑은 고딕"/>
                 <a:ea typeface="맑은 고딕"/>
               </a:rPr>
-              <a:t>에이전트가 만든 테스트는 업무 규칙이 아니라 </a:t>
+              <a:t>는 업무 규칙이 아니라 </a:t>
             </a:r>
             <a:r>
               <a:rPr sz="1800" b="1">
@@ -6546,7 +6556,7 @@
                 <a:latin typeface="맑은 고딕"/>
                 <a:ea typeface="맑은 고딕"/>
               </a:rPr>
-              <a:t>코드에서 테스트를 끌어내는 것은 AI를 SW 공학에 쓸 때 </a:t>
+              <a:t>코드에서 테스트를 만드는 것은 AI를 SW 공학에 쓸 때 </a:t>
             </a:r>
             <a:r>
               <a:rPr sz="1800" b="1">
@@ -7034,7 +7044,7 @@
                       </a:r>
                     </a:p>
                   </a:txBody>
-                  <a:tcPr marL="6750" marR="6750" marT="6750" marB="0" anchor="ctr">
+                  <a:tcPr marL="6750" marR="6750" marT="6750" marB="6750" anchor="ctr">
                     <a:lnL>
                       <a:noFill/>
                     </a:lnL>
@@ -7096,7 +7106,7 @@
                       </a:r>
                     </a:p>
                   </a:txBody>
-                  <a:tcPr marL="6750" marR="6750" marT="6750" marB="0" anchor="ctr">
+                  <a:tcPr marL="6750" marR="6750" marT="6750" marB="6750" anchor="ctr">
                     <a:lnL w="9525" cap="flat" cmpd="sng" algn="ctr">
                       <a:solidFill>
                         <a:schemeClr val="bg1">
@@ -7166,7 +7176,7 @@
                       </a:r>
                     </a:p>
                   </a:txBody>
-                  <a:tcPr marL="6750" marR="6750" marT="6750" marB="0" anchor="ctr">
+                  <a:tcPr marL="6750" marR="6750" marT="6750" marB="6750" anchor="ctr">
                     <a:lnL w="9525" cap="flat" cmpd="sng" algn="ctr">
                       <a:solidFill>
                         <a:schemeClr val="bg1">
@@ -7238,7 +7248,7 @@
                       </a:r>
                     </a:p>
                   </a:txBody>
-                  <a:tcPr marL="81005" marR="6750" marT="6750" marB="0" anchor="ctr">
+                  <a:tcPr marL="81005" marR="6750" marT="6750" marB="6750" anchor="ctr">
                     <a:lnL>
                       <a:noFill/>
                     </a:lnL>
@@ -7292,7 +7302,7 @@
                       </a:r>
                     </a:p>
                   </a:txBody>
-                  <a:tcPr marL="81005" marR="6750" marT="6750" marB="0" anchor="ctr">
+                  <a:tcPr marL="81005" marR="6750" marT="6750" marB="6750" anchor="ctr">
                     <a:lnL>
                       <a:noFill/>
                     </a:lnL>
@@ -7348,7 +7358,7 @@
                       </a:r>
                     </a:p>
                   </a:txBody>
-                  <a:tcPr marL="81005" marR="6750" marT="6750" marB="0" anchor="ctr">
+                  <a:tcPr marL="81005" marR="6750" marT="6750" marB="6750" anchor="ctr">
                     <a:lnL>
                       <a:noFill/>
                     </a:lnL>
@@ -7406,7 +7416,7 @@
                       </a:r>
                     </a:p>
                   </a:txBody>
-                  <a:tcPr marL="81005" marR="6750" marT="6750" marB="0" anchor="ctr">
+                  <a:tcPr marL="81005" marR="6750" marT="6750" marB="6750" anchor="ctr">
                     <a:lnL>
                       <a:noFill/>
                     </a:lnL>
@@ -7460,7 +7470,7 @@
                       </a:r>
                     </a:p>
                   </a:txBody>
-                  <a:tcPr marL="81005" marR="6750" marT="6750" marB="0" anchor="ctr">
+                  <a:tcPr marL="81005" marR="6750" marT="6750" marB="6750" anchor="ctr">
                     <a:lnL>
                       <a:noFill/>
                     </a:lnL>
@@ -7516,7 +7526,7 @@
                       </a:r>
                     </a:p>
                   </a:txBody>
-                  <a:tcPr marL="81005" marR="6750" marT="6750" marB="0" anchor="ctr">
+                  <a:tcPr marL="81005" marR="6750" marT="6750" marB="6750" anchor="ctr">
                     <a:lnL>
                       <a:noFill/>
                     </a:lnL>
@@ -7917,7 +7927,7 @@
         <p:spPr>
           <a:xfrm>
             <a:off x="365760" y="4752163"/>
-            <a:ext cx="8412480" cy="1051560"/>
+            <a:ext cx="8412480" cy="777240"/>
           </a:xfrm>
           <a:prstGeom prst="rect">
             <a:avLst/>
@@ -8012,7 +8022,7 @@
                 <a:latin typeface="맑은 고딕"/>
                 <a:ea typeface="맑은 고딕"/>
               </a:rPr>
-              <a:t> 이제 시간은 업무 규칙을 찾고, 정하고, 검증하는 데 든다.</a:t>
+              <a:t> 이제 업무 규칙을 찾고, 정하고, 검증하는 것이다.</a:t>
             </a:r>
           </a:p>
         </p:txBody>
@@ -8082,7 +8092,7 @@
                 <a:latin typeface="맑은 고딕"/>
                 <a:ea typeface="맑은 고딕"/>
               </a:rPr>
-              <a:t>다섯 가지가 달라진다</a:t>
+              <a:t>5가지가 달라진다</a:t>
             </a:r>
           </a:p>
           <a:p>
@@ -8233,7 +8243,7 @@
                       </a:r>
                     </a:p>
                   </a:txBody>
-                  <a:tcPr marL="6750" marR="6750" marT="6750" marB="0" anchor="ctr">
+                  <a:tcPr marL="6750" marR="6750" marT="6750" marB="6750" anchor="ctr">
                     <a:lnL>
                       <a:noFill/>
                     </a:lnL>
@@ -8295,7 +8305,7 @@
                       </a:r>
                     </a:p>
                   </a:txBody>
-                  <a:tcPr marL="6750" marR="6750" marT="6750" marB="0" anchor="ctr">
+                  <a:tcPr marL="6750" marR="6750" marT="6750" marB="6750" anchor="ctr">
                     <a:lnL w="9525" cap="flat" cmpd="sng" algn="ctr">
                       <a:solidFill>
                         <a:schemeClr val="bg1">
@@ -8365,7 +8375,7 @@
                       </a:r>
                     </a:p>
                   </a:txBody>
-                  <a:tcPr marL="6750" marR="6750" marT="6750" marB="0" anchor="ctr">
+                  <a:tcPr marL="6750" marR="6750" marT="6750" marB="6750" anchor="ctr">
                     <a:lnL w="9525" cap="flat" cmpd="sng" algn="ctr">
                       <a:solidFill>
                         <a:schemeClr val="bg1">
@@ -8437,7 +8447,7 @@
                       </a:r>
                     </a:p>
                   </a:txBody>
-                  <a:tcPr marL="81005" marR="6750" marT="6750" marB="0" anchor="ctr">
+                  <a:tcPr marL="81005" marR="6750" marT="6750" marB="6750" anchor="ctr">
                     <a:lnL>
                       <a:noFill/>
                     </a:lnL>
@@ -8491,7 +8501,7 @@
                       </a:r>
                     </a:p>
                   </a:txBody>
-                  <a:tcPr marL="81005" marR="6750" marT="6750" marB="0" anchor="ctr">
+                  <a:tcPr marL="81005" marR="6750" marT="6750" marB="6750" anchor="ctr">
                     <a:lnL>
                       <a:noFill/>
                     </a:lnL>
@@ -8547,7 +8557,7 @@
                       </a:r>
                     </a:p>
                   </a:txBody>
-                  <a:tcPr marL="81005" marR="6750" marT="6750" marB="0" anchor="ctr">
+                  <a:tcPr marL="81005" marR="6750" marT="6750" marB="6750" anchor="ctr">
                     <a:lnL>
                       <a:noFill/>
                     </a:lnL>
@@ -8605,7 +8615,7 @@
                       </a:r>
                     </a:p>
                   </a:txBody>
-                  <a:tcPr marL="81005" marR="6750" marT="6750" marB="0" anchor="ctr">
+                  <a:tcPr marL="81005" marR="6750" marT="6750" marB="6750" anchor="ctr">
                     <a:lnL>
                       <a:noFill/>
                     </a:lnL>
@@ -8659,7 +8669,7 @@
                       </a:r>
                     </a:p>
                   </a:txBody>
-                  <a:tcPr marL="81005" marR="6750" marT="6750" marB="0" anchor="ctr">
+                  <a:tcPr marL="81005" marR="6750" marT="6750" marB="6750" anchor="ctr">
                     <a:lnL>
                       <a:noFill/>
                     </a:lnL>
@@ -8715,7 +8725,7 @@
                       </a:r>
                     </a:p>
                   </a:txBody>
-                  <a:tcPr marL="81005" marR="6750" marT="6750" marB="0" anchor="ctr">
+                  <a:tcPr marL="81005" marR="6750" marT="6750" marB="6750" anchor="ctr">
                     <a:lnL>
                       <a:noFill/>
                     </a:lnL>
@@ -8773,7 +8783,7 @@
                       </a:r>
                     </a:p>
                   </a:txBody>
-                  <a:tcPr marL="81005" marR="6750" marT="6750" marB="0" anchor="ctr">
+                  <a:tcPr marL="81005" marR="6750" marT="6750" marB="6750" anchor="ctr">
                     <a:lnL>
                       <a:noFill/>
                     </a:lnL>
@@ -8823,11 +8833,11 @@
                           <a:ea typeface="맑은 고딕" panose="020B0503020000020004" pitchFamily="34" charset="-127"/>
                           <a:cs typeface="맑은 고딕"/>
                         </a:rPr>
-                        <a:t>테스트·정적 분석을 넓힌다</a:t>
+                        <a:t>테스트·정적 분석이 많아진다</a:t>
                       </a:r>
                     </a:p>
                   </a:txBody>
-                  <a:tcPr marL="81005" marR="6750" marT="6750" marB="0" anchor="ctr">
+                  <a:tcPr marL="81005" marR="6750" marT="6750" marB="6750" anchor="ctr">
                     <a:lnL>
                       <a:noFill/>
                     </a:lnL>
@@ -8883,7 +8893,7 @@
                       </a:r>
                     </a:p>
                   </a:txBody>
-                  <a:tcPr marL="81005" marR="6750" marT="6750" marB="0" anchor="ctr">
+                  <a:tcPr marL="81005" marR="6750" marT="6750" marB="6750" anchor="ctr">
                     <a:lnL>
                       <a:noFill/>
                     </a:lnL>
@@ -8941,7 +8951,7 @@
                       </a:r>
                     </a:p>
                   </a:txBody>
-                  <a:tcPr marL="81005" marR="6750" marT="6750" marB="0" anchor="ctr">
+                  <a:tcPr marL="81005" marR="6750" marT="6750" marB="6750" anchor="ctr">
                     <a:lnL>
                       <a:noFill/>
                     </a:lnL>
@@ -8995,7 +9005,7 @@
                       </a:r>
                     </a:p>
                   </a:txBody>
-                  <a:tcPr marL="81005" marR="6750" marT="6750" marB="0" anchor="ctr">
+                  <a:tcPr marL="81005" marR="6750" marT="6750" marB="6750" anchor="ctr">
                     <a:lnL>
                       <a:noFill/>
                     </a:lnL>
@@ -9051,7 +9061,7 @@
                       </a:r>
                     </a:p>
                   </a:txBody>
-                  <a:tcPr marL="81005" marR="6750" marT="6750" marB="0" anchor="ctr">
+                  <a:tcPr marL="81005" marR="6750" marT="6750" marB="6750" anchor="ctr">
                     <a:lnL>
                       <a:noFill/>
                     </a:lnL>
@@ -9109,7 +9119,7 @@
                       </a:r>
                     </a:p>
                   </a:txBody>
-                  <a:tcPr marL="81005" marR="6750" marT="6750" marB="0" anchor="ctr">
+                  <a:tcPr marL="81005" marR="6750" marT="6750" marB="6750" anchor="ctr">
                     <a:lnL>
                       <a:noFill/>
                     </a:lnL>
@@ -9163,7 +9173,7 @@
                       </a:r>
                     </a:p>
                   </a:txBody>
-                  <a:tcPr marL="81005" marR="6750" marT="6750" marB="0" anchor="ctr">
+                  <a:tcPr marL="81005" marR="6750" marT="6750" marB="6750" anchor="ctr">
                     <a:lnL>
                       <a:noFill/>
                     </a:lnL>
@@ -9219,7 +9229,7 @@
                       </a:r>
                     </a:p>
                   </a:txBody>
-                  <a:tcPr marL="81005" marR="6750" marT="6750" marB="0" anchor="ctr">
+                  <a:tcPr marL="81005" marR="6750" marT="6750" marB="6750" anchor="ctr">
                     <a:lnL>
                       <a:noFill/>
                     </a:lnL>
@@ -9313,7 +9323,7 @@
                 <a:latin typeface="맑은 고딕"/>
                 <a:ea typeface="맑은 고딕"/>
               </a:rPr>
-              <a:t>다섯 자리가 함께 움직인다</a:t>
+              <a:t>5가지가 함께 움직인다</a:t>
             </a:r>
             <a:r>
               <a:rPr sz="1800" b="0">
@@ -9437,7 +9447,7 @@
                 <a:latin typeface="맑은 고딕"/>
                 <a:ea typeface="맑은 고딕"/>
               </a:rPr>
-              <a:t>달라지는 다섯 자리</a:t>
+              <a:t>달라지는 5가지</a:t>
             </a:r>
           </a:p>
         </p:txBody>
@@ -9655,7 +9665,7 @@
                 <a:latin typeface="맑은 고딕"/>
                 <a:ea typeface="맑은 고딕"/>
               </a:rPr>
-              <a:t>가 있어야 다섯 자리 모두에서 얻는 쪽이 커진다.</a:t>
+              <a:t>가 있어야 5가지 모두에서 얻는 쪽이 커진다.</a:t>
             </a:r>
           </a:p>
         </p:txBody>
@@ -9875,7 +9885,7 @@
                       </a:r>
                     </a:p>
                   </a:txBody>
-                  <a:tcPr marL="6750" marR="6750" marT="6750" marB="0" anchor="ctr">
+                  <a:tcPr marL="6750" marR="6750" marT="6750" marB="6750" anchor="ctr">
                     <a:lnL>
                       <a:noFill/>
                     </a:lnL>
@@ -9937,7 +9947,7 @@
                       </a:r>
                     </a:p>
                   </a:txBody>
-                  <a:tcPr marL="6750" marR="6750" marT="6750" marB="0" anchor="ctr">
+                  <a:tcPr marL="6750" marR="6750" marT="6750" marB="6750" anchor="ctr">
                     <a:lnL w="9525" cap="flat" cmpd="sng" algn="ctr">
                       <a:solidFill>
                         <a:schemeClr val="bg1">
@@ -10009,7 +10019,7 @@
                       </a:r>
                     </a:p>
                   </a:txBody>
-                  <a:tcPr marL="81005" marR="6750" marT="6750" marB="0" anchor="ctr">
+                  <a:tcPr marL="81005" marR="6750" marT="6750" marB="6750" anchor="ctr">
                     <a:lnL>
                       <a:noFill/>
                     </a:lnL>
@@ -10063,7 +10073,7 @@
                       </a:r>
                     </a:p>
                   </a:txBody>
-                  <a:tcPr marL="81005" marR="6750" marT="6750" marB="0" anchor="ctr">
+                  <a:tcPr marL="81005" marR="6750" marT="6750" marB="6750" anchor="ctr">
                     <a:lnL>
                       <a:noFill/>
                     </a:lnL>
@@ -10121,7 +10131,7 @@
                       </a:r>
                     </a:p>
                   </a:txBody>
-                  <a:tcPr marL="81005" marR="6750" marT="6750" marB="0" anchor="ctr">
+                  <a:tcPr marL="81005" marR="6750" marT="6750" marB="6750" anchor="ctr">
                     <a:lnL>
                       <a:noFill/>
                     </a:lnL>
@@ -10175,7 +10185,7 @@
                       </a:r>
                     </a:p>
                   </a:txBody>
-                  <a:tcPr marL="81005" marR="6750" marT="6750" marB="0" anchor="ctr">
+                  <a:tcPr marL="81005" marR="6750" marT="6750" marB="6750" anchor="ctr">
                     <a:lnL>
                       <a:noFill/>
                     </a:lnL>
@@ -10233,7 +10243,7 @@
                       </a:r>
                     </a:p>
                   </a:txBody>
-                  <a:tcPr marL="81005" marR="6750" marT="6750" marB="0" anchor="ctr">
+                  <a:tcPr marL="81005" marR="6750" marT="6750" marB="6750" anchor="ctr">
                     <a:lnL>
                       <a:noFill/>
                     </a:lnL>
@@ -10287,7 +10297,7 @@
                       </a:r>
                     </a:p>
                   </a:txBody>
-                  <a:tcPr marL="81005" marR="6750" marT="6750" marB="0" anchor="ctr">
+                  <a:tcPr marL="81005" marR="6750" marT="6750" marB="6750" anchor="ctr">
                     <a:lnL>
                       <a:noFill/>
                     </a:lnL>
@@ -10345,7 +10355,7 @@
                       </a:r>
                     </a:p>
                   </a:txBody>
-                  <a:tcPr marL="81005" marR="6750" marT="6750" marB="0" anchor="ctr">
+                  <a:tcPr marL="81005" marR="6750" marT="6750" marB="6750" anchor="ctr">
                     <a:lnL>
                       <a:noFill/>
                     </a:lnL>
@@ -10399,7 +10409,7 @@
                       </a:r>
                     </a:p>
                   </a:txBody>
-                  <a:tcPr marL="81005" marR="6750" marT="6750" marB="0" anchor="ctr">
+                  <a:tcPr marL="81005" marR="6750" marT="6750" marB="6750" anchor="ctr">
                     <a:lnL>
                       <a:noFill/>
                     </a:lnL>
@@ -10457,7 +10467,7 @@
                       </a:r>
                     </a:p>
                   </a:txBody>
-                  <a:tcPr marL="81005" marR="6750" marT="6750" marB="0" anchor="ctr">
+                  <a:tcPr marL="81005" marR="6750" marT="6750" marB="6750" anchor="ctr">
                     <a:lnL>
                       <a:noFill/>
                     </a:lnL>
@@ -10511,7 +10521,7 @@
                       </a:r>
                     </a:p>
                   </a:txBody>
-                  <a:tcPr marL="81005" marR="6750" marT="6750" marB="0" anchor="ctr">
+                  <a:tcPr marL="81005" marR="6750" marT="6750" marB="6750" anchor="ctr">
                     <a:lnL>
                       <a:noFill/>
                     </a:lnL>
@@ -10569,7 +10579,7 @@
                       </a:r>
                     </a:p>
                   </a:txBody>
-                  <a:tcPr marL="81005" marR="6750" marT="6750" marB="0" anchor="ctr">
+                  <a:tcPr marL="81005" marR="6750" marT="6750" marB="6750" anchor="ctr">
                     <a:lnL>
                       <a:noFill/>
                     </a:lnL>
@@ -10623,7 +10633,7 @@
                       </a:r>
                     </a:p>
                   </a:txBody>
-                  <a:tcPr marL="81005" marR="6750" marT="6750" marB="0" anchor="ctr">
+                  <a:tcPr marL="81005" marR="6750" marT="6750" marB="6750" anchor="ctr">
                     <a:lnL>
                       <a:noFill/>
                     </a:lnL>
@@ -10707,7 +10717,7 @@
                 <a:latin typeface="맑은 고딕"/>
                 <a:ea typeface="맑은 고딕"/>
               </a:rPr>
-              <a:t>달라지는 것이 다섯이어도 </a:t>
+              <a:t>달라지는 것이 5가지여도 </a:t>
             </a:r>
             <a:r>
               <a:rPr sz="1800" b="1">
@@ -10933,7 +10943,7 @@
                 <a:latin typeface="맑은 고딕"/>
                 <a:ea typeface="맑은 고딕"/>
               </a:rPr>
-              <a:t> 적용하게 만든다.</a:t>
+              <a:t> 적용한다.</a:t>
             </a:r>
           </a:p>
           <a:p>
@@ -10986,7 +10996,7 @@
                 <a:latin typeface="맑은 고딕"/>
                 <a:ea typeface="맑은 고딕"/>
               </a:rPr>
-              <a:t>무엇에서 가져오는지</a:t>
+              <a:t>정의하는 것</a:t>
             </a:r>
             <a:r>
               <a:rPr sz="1600" b="0">
@@ -10996,7 +11006,7 @@
                 <a:latin typeface="맑은 고딕"/>
                 <a:ea typeface="맑은 고딕"/>
               </a:rPr>
-              <a:t>는 그만큼 중요해졌다.</a:t>
+              <a:t>이 더 중요해졌다.</a:t>
             </a:r>
           </a:p>
         </p:txBody>
@@ -11216,7 +11226,7 @@
                       </a:r>
                     </a:p>
                   </a:txBody>
-                  <a:tcPr marL="6750" marR="6750" marT="6750" marB="0" anchor="ctr">
+                  <a:tcPr marL="6750" marR="6750" marT="6750" marB="6750" anchor="ctr">
                     <a:lnL>
                       <a:noFill/>
                     </a:lnL>
@@ -11278,7 +11288,7 @@
                       </a:r>
                     </a:p>
                   </a:txBody>
-                  <a:tcPr marL="6750" marR="6750" marT="6750" marB="0" anchor="ctr">
+                  <a:tcPr marL="6750" marR="6750" marT="6750" marB="6750" anchor="ctr">
                     <a:lnL w="9525" cap="flat" cmpd="sng" algn="ctr">
                       <a:solidFill>
                         <a:schemeClr val="bg1">
@@ -11350,7 +11360,7 @@
                       </a:r>
                     </a:p>
                   </a:txBody>
-                  <a:tcPr marL="81005" marR="6750" marT="6750" marB="0" anchor="ctr">
+                  <a:tcPr marL="81005" marR="6750" marT="6750" marB="6750" anchor="ctr">
                     <a:lnL>
                       <a:noFill/>
                     </a:lnL>
@@ -11404,7 +11414,7 @@
                       </a:r>
                     </a:p>
                   </a:txBody>
-                  <a:tcPr marL="81005" marR="6750" marT="6750" marB="0" anchor="ctr">
+                  <a:tcPr marL="81005" marR="6750" marT="6750" marB="6750" anchor="ctr">
                     <a:lnL>
                       <a:noFill/>
                     </a:lnL>
@@ -11462,7 +11472,7 @@
                       </a:r>
                     </a:p>
                   </a:txBody>
-                  <a:tcPr marL="81005" marR="6750" marT="6750" marB="0" anchor="ctr">
+                  <a:tcPr marL="81005" marR="6750" marT="6750" marB="6750" anchor="ctr">
                     <a:lnL>
                       <a:noFill/>
                     </a:lnL>
@@ -11516,7 +11526,7 @@
                       </a:r>
                     </a:p>
                   </a:txBody>
-                  <a:tcPr marL="81005" marR="6750" marT="6750" marB="0" anchor="ctr">
+                  <a:tcPr marL="81005" marR="6750" marT="6750" marB="6750" anchor="ctr">
                     <a:lnL>
                       <a:noFill/>
                     </a:lnL>
@@ -11574,7 +11584,7 @@
                       </a:r>
                     </a:p>
                   </a:txBody>
-                  <a:tcPr marL="81005" marR="6750" marT="6750" marB="0" anchor="ctr">
+                  <a:tcPr marL="81005" marR="6750" marT="6750" marB="6750" anchor="ctr">
                     <a:lnL>
                       <a:noFill/>
                     </a:lnL>
@@ -11628,7 +11638,7 @@
                       </a:r>
                     </a:p>
                   </a:txBody>
-                  <a:tcPr marL="81005" marR="6750" marT="6750" marB="0" anchor="ctr">
+                  <a:tcPr marL="81005" marR="6750" marT="6750" marB="6750" anchor="ctr">
                     <a:lnL>
                       <a:noFill/>
                     </a:lnL>
@@ -12268,10 +12278,10 @@
             <a:tbl>
               <a:tblPr/>
               <a:tblGrid>
-                <a:gridCol w="1925320"/>
-                <a:gridCol w="1450340"/>
-                <a:gridCol w="2837180"/>
-                <a:gridCol w="2092960"/>
+                <a:gridCol w="1779479"/>
+                <a:gridCol w="1598714"/>
+                <a:gridCol w="2864069"/>
+                <a:gridCol w="2063538"/>
               </a:tblGrid>
               <a:tr h="288000">
                 <a:tc>
@@ -12296,7 +12306,7 @@
                       </a:r>
                     </a:p>
                   </a:txBody>
-                  <a:tcPr marL="6750" marR="6750" marT="6750" marB="0" anchor="ctr">
+                  <a:tcPr marL="6750" marR="6750" marT="6750" marB="6750" anchor="ctr">
                     <a:lnL>
                       <a:noFill/>
                     </a:lnL>
@@ -12358,7 +12368,7 @@
                       </a:r>
                     </a:p>
                   </a:txBody>
-                  <a:tcPr marL="6750" marR="6750" marT="6750" marB="0" anchor="ctr">
+                  <a:tcPr marL="6750" marR="6750" marT="6750" marB="6750" anchor="ctr">
                     <a:lnL w="9525" cap="flat" cmpd="sng" algn="ctr">
                       <a:solidFill>
                         <a:schemeClr val="bg1">
@@ -12428,7 +12438,7 @@
                       </a:r>
                     </a:p>
                   </a:txBody>
-                  <a:tcPr marL="6750" marR="6750" marT="6750" marB="0" anchor="ctr">
+                  <a:tcPr marL="6750" marR="6750" marT="6750" marB="6750" anchor="ctr">
                     <a:lnL w="9525" cap="flat" cmpd="sng" algn="ctr">
                       <a:solidFill>
                         <a:schemeClr val="bg1">
@@ -12498,7 +12508,7 @@
                       </a:r>
                     </a:p>
                   </a:txBody>
-                  <a:tcPr marL="6750" marR="6750" marT="6750" marB="0" anchor="ctr">
+                  <a:tcPr marL="6750" marR="6750" marT="6750" marB="6750" anchor="ctr">
                     <a:lnL w="9525" cap="flat" cmpd="sng" algn="ctr">
                       <a:solidFill>
                         <a:schemeClr val="bg1">
@@ -12570,7 +12580,7 @@
                       </a:r>
                     </a:p>
                   </a:txBody>
-                  <a:tcPr marL="81005" marR="6750" marT="6750" marB="0" anchor="ctr">
+                  <a:tcPr marL="81005" marR="6750" marT="6750" marB="6750" anchor="ctr">
                     <a:lnL>
                       <a:noFill/>
                     </a:lnL>
@@ -12620,11 +12630,11 @@
                           <a:ea typeface="맑은 고딕" panose="020B0503020000020004" pitchFamily="34" charset="-127"/>
                           <a:cs typeface="맑은 고딕"/>
                         </a:rPr>
-                        <a:t>사람이 쓰는 코드</a:t>
+                        <a:t>사람이 작성하는 코드</a:t>
                       </a:r>
                     </a:p>
                   </a:txBody>
-                  <a:tcPr marL="81005" marR="6750" marT="6750" marB="0" anchor="ctr">
+                  <a:tcPr marL="81005" marR="6750" marT="6750" marB="6750" anchor="ctr">
                     <a:lnL>
                       <a:noFill/>
                     </a:lnL>
@@ -12676,11 +12686,11 @@
                           <a:ea typeface="맑은 고딕" panose="020B0503020000020004" pitchFamily="34" charset="-127"/>
                           <a:cs typeface="맑은 고딕"/>
                         </a:rPr>
-                        <a:t>사람이 명세·설계·코드·테스트를 쓴다</a:t>
+                        <a:t>사람이 명세·설계·코드·테스트를 작성한다</a:t>
                       </a:r>
                     </a:p>
                   </a:txBody>
-                  <a:tcPr marL="81005" marR="6750" marT="6750" marB="0" anchor="ctr">
+                  <a:tcPr marL="81005" marR="6750" marT="6750" marB="6750" anchor="ctr">
                     <a:lnL>
                       <a:noFill/>
                     </a:lnL>
@@ -12732,11 +12742,11 @@
                           <a:ea typeface="맑은 고딕" panose="020B0503020000020004" pitchFamily="34" charset="-127"/>
                           <a:cs typeface="맑은 고딕"/>
                         </a:rPr>
-                        <a:t>사람이 쓴 테스트와 리뷰</a:t>
+                        <a:t>사람이 작성한 테스트와 리뷰</a:t>
                       </a:r>
                     </a:p>
                   </a:txBody>
-                  <a:tcPr marL="81005" marR="6750" marT="6750" marB="0" anchor="ctr">
+                  <a:tcPr marL="81005" marR="6750" marT="6750" marB="6750" anchor="ctr">
                     <a:lnL>
                       <a:noFill/>
                     </a:lnL>
@@ -12794,7 +12804,7 @@
                       </a:r>
                     </a:p>
                   </a:txBody>
-                  <a:tcPr marL="81005" marR="6750" marT="6750" marB="0" anchor="ctr">
+                  <a:tcPr marL="81005" marR="6750" marT="6750" marB="6750" anchor="ctr">
                     <a:lnL>
                       <a:noFill/>
                     </a:lnL>
@@ -12848,7 +12858,7 @@
                       </a:r>
                     </a:p>
                   </a:txBody>
-                  <a:tcPr marL="81005" marR="6750" marT="6750" marB="0" anchor="ctr">
+                  <a:tcPr marL="81005" marR="6750" marT="6750" marB="6750" anchor="ctr">
                     <a:lnL>
                       <a:noFill/>
                     </a:lnL>
@@ -12904,7 +12914,7 @@
                       </a:r>
                     </a:p>
                   </a:txBody>
-                  <a:tcPr marL="81005" marR="6750" marT="6750" marB="0" anchor="ctr">
+                  <a:tcPr marL="81005" marR="6750" marT="6750" marB="6750" anchor="ctr">
                     <a:lnL>
                       <a:noFill/>
                     </a:lnL>
@@ -12960,7 +12970,7 @@
                       </a:r>
                     </a:p>
                   </a:txBody>
-                  <a:tcPr marL="81005" marR="6750" marT="6750" marB="0" anchor="ctr">
+                  <a:tcPr marL="81005" marR="6750" marT="6750" marB="6750" anchor="ctr">
                     <a:lnL>
                       <a:noFill/>
                     </a:lnL>
@@ -13018,7 +13028,7 @@
                       </a:r>
                     </a:p>
                   </a:txBody>
-                  <a:tcPr marL="81005" marR="6750" marT="6750" marB="0" anchor="ctr">
+                  <a:tcPr marL="81005" marR="6750" marT="6750" marB="6750" anchor="ctr">
                     <a:lnL>
                       <a:noFill/>
                     </a:lnL>
@@ -13072,7 +13082,7 @@
                       </a:r>
                     </a:p>
                   </a:txBody>
-                  <a:tcPr marL="81005" marR="6750" marT="6750" marB="0" anchor="ctr">
+                  <a:tcPr marL="81005" marR="6750" marT="6750" marB="6750" anchor="ctr">
                     <a:lnL>
                       <a:noFill/>
                     </a:lnL>
@@ -13128,7 +13138,7 @@
                       </a:r>
                     </a:p>
                   </a:txBody>
-                  <a:tcPr marL="81005" marR="6750" marT="6750" marB="0" anchor="ctr">
+                  <a:tcPr marL="81005" marR="6750" marT="6750" marB="6750" anchor="ctr">
                     <a:lnL>
                       <a:noFill/>
                     </a:lnL>
@@ -13184,7 +13194,7 @@
                       </a:r>
                     </a:p>
                   </a:txBody>
-                  <a:tcPr marL="81005" marR="6750" marT="6750" marB="0" anchor="ctr">
+                  <a:tcPr marL="81005" marR="6750" marT="6750" marB="6750" anchor="ctr">
                     <a:lnL>
                       <a:noFill/>
                     </a:lnL>
@@ -13261,6 +13271,26 @@
               <a:buNone/>
             </a:pPr>
             <a:r>
+              <a:rPr sz="1800" b="1">
+                <a:solidFill>
+                  <a:srgbClr val="000000"/>
+                </a:solidFill>
+                <a:latin typeface="맑은 고딕"/>
+                <a:ea typeface="맑은 고딕"/>
+              </a:rPr>
+              <a:t>3가지 개발 방식</a:t>
+            </a:r>
+            <a:r>
+              <a:rPr sz="1400" b="0">
+                <a:solidFill>
+                  <a:srgbClr val="000000"/>
+                </a:solidFill>
+                <a:latin typeface="맑은 고딕"/>
+                <a:ea typeface="맑은 고딕"/>
+              </a:rPr>
+              <a:t>(LLM 이전·AI 지원·AI-native)</a:t>
+            </a:r>
+            <a:r>
               <a:rPr sz="1800" b="0">
                 <a:solidFill>
                   <a:srgbClr val="000000"/>
@@ -13268,7 +13298,7 @@
                 <a:latin typeface="맑은 고딕"/>
                 <a:ea typeface="맑은 고딕"/>
               </a:rPr>
-              <a:t>세 방식을 구분하는 것은 쓰는 도구가 아니다. </a:t>
+              <a:t>을 가르는 것은 도구가 아니라 </a:t>
             </a:r>
             <a:r>
               <a:rPr sz="1800" b="1">
@@ -13278,7 +13308,7 @@
                 <a:latin typeface="맑은 고딕"/>
                 <a:ea typeface="맑은 고딕"/>
               </a:rPr>
-              <a:t>맡기는 작업의 단위와, 사람과 LLM이 하는 일과, 무엇으로 결과를 확인하는지</a:t>
+              <a:t>작업의 단위와 사람·LLM의 일, 결과를 확인하는 방법</a:t>
             </a:r>
             <a:r>
               <a:rPr sz="1800" b="0">
@@ -13288,7 +13318,7 @@
                 <a:latin typeface="맑은 고딕"/>
                 <a:ea typeface="맑은 고딕"/>
               </a:rPr>
-              <a:t>가 다르다.</a:t>
+              <a:t>이다.</a:t>
             </a:r>
           </a:p>
           <a:p>
@@ -13557,7 +13587,7 @@
                 <a:latin typeface="맑은 고딕"/>
                 <a:ea typeface="맑은 고딕"/>
               </a:rPr>
-              <a:t> 코드를 쓰고 읽던 일이 업무 규칙을 정하고 검증하는 일로 옮겨 간다.</a:t>
+              <a:t> 코드를 작성하고 읽던 일이 업무 규칙을 정하고 검증하는 일로 옮겨 간다.</a:t>
             </a:r>
           </a:p>
           <a:p>
@@ -14054,7 +14084,7 @@
                 <a:latin typeface="맑은 고딕"/>
                 <a:ea typeface="맑은 고딕"/>
               </a:rPr>
-              <a:t> 사람이 결제 코드와 테스트를 쓴다.</a:t>
+              <a:t> 사람이 결제 코드와 테스트를 작성한다.</a:t>
             </a:r>
           </a:p>
           <a:p>
@@ -14446,7 +14476,7 @@
                 <a:latin typeface="맑은 고딕"/>
                 <a:ea typeface="맑은 고딕"/>
               </a:rPr>
-              <a:t>첫 시도는 데모 한 번을 보고 받아들일 뻔했다. 결과의 동작만 보고 받아들이는 방식이 </a:t>
+              <a:t>결과의 동작만 보고 받아들이는 방식이 </a:t>
             </a:r>
             <a:r>
               <a:rPr sz="1800" b="1">
@@ -14695,7 +14725,7 @@
                 <a:latin typeface="맑은 고딕"/>
                 <a:ea typeface="맑은 고딕"/>
               </a:rPr>
-              <a:t> 규율을 지키며 LLM을 쓰는 숙련자의 방식을 가리키는 이름이다.</a:t>
+              <a:t> 규율을 지키며 LLM을 사용하는 숙련자의 방식을 가리키는 이름이다.</a:t>
             </a:r>
           </a:p>
           <a:p>
@@ -15594,7 +15624,7 @@
                       </a:r>
                     </a:p>
                   </a:txBody>
-                  <a:tcPr marL="6750" marR="6750" marT="6750" marB="0" anchor="ctr">
+                  <a:tcPr marL="6750" marR="6750" marT="6750" marB="6750" anchor="ctr">
                     <a:lnL>
                       <a:noFill/>
                     </a:lnL>
@@ -15656,7 +15686,7 @@
                       </a:r>
                     </a:p>
                   </a:txBody>
-                  <a:tcPr marL="6750" marR="6750" marT="6750" marB="0" anchor="ctr">
+                  <a:tcPr marL="6750" marR="6750" marT="6750" marB="6750" anchor="ctr">
                     <a:lnL w="9525" cap="flat" cmpd="sng" algn="ctr">
                       <a:solidFill>
                         <a:schemeClr val="bg1">
@@ -15726,7 +15756,7 @@
                       </a:r>
                     </a:p>
                   </a:txBody>
-                  <a:tcPr marL="6750" marR="6750" marT="6750" marB="0" anchor="ctr">
+                  <a:tcPr marL="6750" marR="6750" marT="6750" marB="6750" anchor="ctr">
                     <a:lnL w="9525" cap="flat" cmpd="sng" algn="ctr">
                       <a:solidFill>
                         <a:schemeClr val="bg1">
@@ -15798,7 +15828,7 @@
                       </a:r>
                     </a:p>
                   </a:txBody>
-                  <a:tcPr marL="81005" marR="6750" marT="6750" marB="0" anchor="ctr">
+                  <a:tcPr marL="81005" marR="6750" marT="6750" marB="6750" anchor="ctr">
                     <a:lnL>
                       <a:noFill/>
                     </a:lnL>
@@ -15852,7 +15882,7 @@
                       </a:r>
                     </a:p>
                   </a:txBody>
-                  <a:tcPr marL="81005" marR="6750" marT="6750" marB="0" anchor="ctr">
+                  <a:tcPr marL="81005" marR="6750" marT="6750" marB="6750" anchor="ctr">
                     <a:lnL>
                       <a:noFill/>
                     </a:lnL>
@@ -15908,7 +15938,7 @@
                       </a:r>
                     </a:p>
                   </a:txBody>
-                  <a:tcPr marL="81005" marR="6750" marT="6750" marB="0" anchor="ctr">
+                  <a:tcPr marL="81005" marR="6750" marT="6750" marB="6750" anchor="ctr">
                     <a:lnL>
                       <a:noFill/>
                     </a:lnL>
@@ -15966,7 +15996,7 @@
                       </a:r>
                     </a:p>
                   </a:txBody>
-                  <a:tcPr marL="81005" marR="6750" marT="6750" marB="0" anchor="ctr">
+                  <a:tcPr marL="81005" marR="6750" marT="6750" marB="6750" anchor="ctr">
                     <a:lnL>
                       <a:noFill/>
                     </a:lnL>
@@ -16020,7 +16050,7 @@
                       </a:r>
                     </a:p>
                   </a:txBody>
-                  <a:tcPr marL="81005" marR="6750" marT="6750" marB="0" anchor="ctr">
+                  <a:tcPr marL="81005" marR="6750" marT="6750" marB="6750" anchor="ctr">
                     <a:lnL>
                       <a:noFill/>
                     </a:lnL>
@@ -16072,11 +16102,11 @@
                           <a:ea typeface="맑은 고딕" panose="020B0503020000020004" pitchFamily="34" charset="-127"/>
                           <a:cs typeface="맑은 고딕"/>
                         </a:rPr>
-                        <a:t>초안을 쓰고 애매한 것을 묻는다</a:t>
+                        <a:t>초안을 작성하고 애매한 것을 묻는다</a:t>
                       </a:r>
                     </a:p>
                   </a:txBody>
-                  <a:tcPr marL="81005" marR="6750" marT="6750" marB="0" anchor="ctr">
+                  <a:tcPr marL="81005" marR="6750" marT="6750" marB="6750" anchor="ctr">
                     <a:lnL>
                       <a:noFill/>
                     </a:lnL>
@@ -16134,7 +16164,7 @@
                       </a:r>
                     </a:p>
                   </a:txBody>
-                  <a:tcPr marL="81005" marR="6750" marT="6750" marB="0" anchor="ctr">
+                  <a:tcPr marL="81005" marR="6750" marT="6750" marB="6750" anchor="ctr">
                     <a:lnL>
                       <a:noFill/>
                     </a:lnL>
@@ -16188,7 +16218,7 @@
                       </a:r>
                     </a:p>
                   </a:txBody>
-                  <a:tcPr marL="81005" marR="6750" marT="6750" marB="0" anchor="ctr">
+                  <a:tcPr marL="81005" marR="6750" marT="6750" marB="6750" anchor="ctr">
                     <a:lnL>
                       <a:noFill/>
                     </a:lnL>
@@ -16240,11 +16270,11 @@
                           <a:ea typeface="맑은 고딕" panose="020B0503020000020004" pitchFamily="34" charset="-127"/>
                           <a:cs typeface="맑은 고딕"/>
                         </a:rPr>
-                        <a:t>초안을 쓰고 모순과 누락을 낸다</a:t>
+                        <a:t>초안을 작성하고 모순과 누락을 낸다</a:t>
                       </a:r>
                     </a:p>
                   </a:txBody>
-                  <a:tcPr marL="81005" marR="6750" marT="6750" marB="0" anchor="ctr">
+                  <a:tcPr marL="81005" marR="6750" marT="6750" marB="6750" anchor="ctr">
                     <a:lnL>
                       <a:noFill/>
                     </a:lnL>
@@ -16302,7 +16332,7 @@
                       </a:r>
                     </a:p>
                   </a:txBody>
-                  <a:tcPr marL="81005" marR="6750" marT="6750" marB="0" anchor="ctr">
+                  <a:tcPr marL="81005" marR="6750" marT="6750" marB="6750" anchor="ctr">
                     <a:lnL>
                       <a:noFill/>
                     </a:lnL>
@@ -16356,7 +16386,7 @@
                       </a:r>
                     </a:p>
                   </a:txBody>
-                  <a:tcPr marL="81005" marR="6750" marT="6750" marB="0" anchor="ctr">
+                  <a:tcPr marL="81005" marR="6750" marT="6750" marB="6750" anchor="ctr">
                     <a:lnL>
                       <a:noFill/>
                     </a:lnL>
@@ -16408,11 +16438,11 @@
                           <a:ea typeface="맑은 고딕" panose="020B0503020000020004" pitchFamily="34" charset="-127"/>
                           <a:cs typeface="맑은 고딕"/>
                         </a:rPr>
-                        <a:t>초안을 쓰고 빠진 전이를 묻는다</a:t>
+                        <a:t>초안을 작성하고 빠진 전이를 묻는다</a:t>
                       </a:r>
                     </a:p>
                   </a:txBody>
-                  <a:tcPr marL="81005" marR="6750" marT="6750" marB="0" anchor="ctr">
+                  <a:tcPr marL="81005" marR="6750" marT="6750" marB="6750" anchor="ctr">
                     <a:lnL>
                       <a:noFill/>
                     </a:lnL>
@@ -16470,7 +16500,7 @@
                       </a:r>
                     </a:p>
                   </a:txBody>
-                  <a:tcPr marL="81005" marR="6750" marT="6750" marB="0" anchor="ctr">
+                  <a:tcPr marL="81005" marR="6750" marT="6750" marB="6750" anchor="ctr">
                     <a:lnL>
                       <a:noFill/>
                     </a:lnL>
@@ -16524,7 +16554,7 @@
                       </a:r>
                     </a:p>
                   </a:txBody>
-                  <a:tcPr marL="81005" marR="6750" marT="6750" marB="0" anchor="ctr">
+                  <a:tcPr marL="81005" marR="6750" marT="6750" marB="6750" anchor="ctr">
                     <a:lnL>
                       <a:noFill/>
                     </a:lnL>
@@ -16580,7 +16610,7 @@
                       </a:r>
                     </a:p>
                   </a:txBody>
-                  <a:tcPr marL="81005" marR="6750" marT="6750" marB="0" anchor="ctr">
+                  <a:tcPr marL="81005" marR="6750" marT="6750" marB="6750" anchor="ctr">
                     <a:lnL>
                       <a:noFill/>
                     </a:lnL>
@@ -16638,7 +16668,7 @@
                       </a:r>
                     </a:p>
                   </a:txBody>
-                  <a:tcPr marL="81005" marR="6750" marT="6750" marB="0" anchor="ctr">
+                  <a:tcPr marL="81005" marR="6750" marT="6750" marB="6750" anchor="ctr">
                     <a:lnL>
                       <a:noFill/>
                     </a:lnL>
@@ -16692,7 +16722,7 @@
                       </a:r>
                     </a:p>
                   </a:txBody>
-                  <a:tcPr marL="81005" marR="6750" marT="6750" marB="0" anchor="ctr">
+                  <a:tcPr marL="81005" marR="6750" marT="6750" marB="6750" anchor="ctr">
                     <a:lnL>
                       <a:noFill/>
                     </a:lnL>
@@ -16748,7 +16778,7 @@
                       </a:r>
                     </a:p>
                   </a:txBody>
-                  <a:tcPr marL="81005" marR="6750" marT="6750" marB="0" anchor="ctr">
+                  <a:tcPr marL="81005" marR="6750" marT="6750" marB="6750" anchor="ctr">
                     <a:lnL>
                       <a:noFill/>
                     </a:lnL>
@@ -16806,7 +16836,7 @@
                       </a:r>
                     </a:p>
                   </a:txBody>
-                  <a:tcPr marL="81005" marR="6750" marT="6750" marB="0" anchor="ctr">
+                  <a:tcPr marL="81005" marR="6750" marT="6750" marB="6750" anchor="ctr">
                     <a:lnL>
                       <a:noFill/>
                     </a:lnL>
@@ -16860,7 +16890,7 @@
                       </a:r>
                     </a:p>
                   </a:txBody>
-                  <a:tcPr marL="81005" marR="6750" marT="6750" marB="0" anchor="ctr">
+                  <a:tcPr marL="81005" marR="6750" marT="6750" marB="6750" anchor="ctr">
                     <a:lnL>
                       <a:noFill/>
                     </a:lnL>
@@ -16916,7 +16946,7 @@
                       </a:r>
                     </a:p>
                   </a:txBody>
-                  <a:tcPr marL="81005" marR="6750" marT="6750" marB="0" anchor="ctr">
+                  <a:tcPr marL="81005" marR="6750" marT="6750" marB="6750" anchor="ctr">
                     <a:lnL>
                       <a:noFill/>
                     </a:lnL>
@@ -16974,7 +17004,7 @@
                       </a:r>
                     </a:p>
                   </a:txBody>
-                  <a:tcPr marL="81005" marR="6750" marT="6750" marB="0" anchor="ctr">
+                  <a:tcPr marL="81005" marR="6750" marT="6750" marB="6750" anchor="ctr">
                     <a:lnL>
                       <a:noFill/>
                     </a:lnL>
@@ -17028,7 +17058,7 @@
                       </a:r>
                     </a:p>
                   </a:txBody>
-                  <a:tcPr marL="81005" marR="6750" marT="6750" marB="0" anchor="ctr">
+                  <a:tcPr marL="81005" marR="6750" marT="6750" marB="6750" anchor="ctr">
                     <a:lnL>
                       <a:noFill/>
                     </a:lnL>
@@ -17084,7 +17114,7 @@
                       </a:r>
                     </a:p>
                   </a:txBody>
-                  <a:tcPr marL="81005" marR="6750" marT="6750" marB="0" anchor="ctr">
+                  <a:tcPr marL="81005" marR="6750" marT="6750" marB="6750" anchor="ctr">
                     <a:lnL>
                       <a:noFill/>
                     </a:lnL>
@@ -17142,7 +17172,7 @@
                       </a:r>
                     </a:p>
                   </a:txBody>
-                  <a:tcPr marL="81005" marR="6750" marT="6750" marB="0" anchor="ctr">
+                  <a:tcPr marL="81005" marR="6750" marT="6750" marB="6750" anchor="ctr">
                     <a:lnL>
                       <a:noFill/>
                     </a:lnL>
@@ -17196,7 +17226,7 @@
                       </a:r>
                     </a:p>
                   </a:txBody>
-                  <a:tcPr marL="81005" marR="6750" marT="6750" marB="0" anchor="ctr">
+                  <a:tcPr marL="81005" marR="6750" marT="6750" marB="6750" anchor="ctr">
                     <a:lnL>
                       <a:noFill/>
                     </a:lnL>
@@ -17252,7 +17282,7 @@
                       </a:r>
                     </a:p>
                   </a:txBody>
-                  <a:tcPr marL="81005" marR="6750" marT="6750" marB="0" anchor="ctr">
+                  <a:tcPr marL="81005" marR="6750" marT="6750" marB="6750" anchor="ctr">
                     <a:lnL>
                       <a:noFill/>
                     </a:lnL>
@@ -17310,7 +17340,7 @@
                       </a:r>
                     </a:p>
                   </a:txBody>
-                  <a:tcPr marL="81005" marR="6750" marT="6750" marB="0" anchor="ctr">
+                  <a:tcPr marL="81005" marR="6750" marT="6750" marB="6750" anchor="ctr">
                     <a:lnL>
                       <a:noFill/>
                     </a:lnL>
@@ -17364,7 +17394,7 @@
                       </a:r>
                     </a:p>
                   </a:txBody>
-                  <a:tcPr marL="81005" marR="6750" marT="6750" marB="0" anchor="ctr">
+                  <a:tcPr marL="81005" marR="6750" marT="6750" marB="6750" anchor="ctr">
                     <a:lnL>
                       <a:noFill/>
                     </a:lnL>
@@ -17420,7 +17450,7 @@
                       </a:r>
                     </a:p>
                   </a:txBody>
-                  <a:tcPr marL="81005" marR="6750" marT="6750" marB="0" anchor="ctr">
+                  <a:tcPr marL="81005" marR="6750" marT="6750" marB="6750" anchor="ctr">
                     <a:lnL>
                       <a:noFill/>
                     </a:lnL>
@@ -18498,7 +18528,7 @@
                 <a:latin typeface="맑은 고딕"/>
                 <a:ea typeface="맑은 고딕"/>
               </a:rPr>
-              <a:t>왼쪽에서 정하지 않은 것은 오른쪽에 검사가 없다</a:t>
+              <a:t>왼쪽에서 정하지 않은 것은 오른쪽 검사에 없다</a:t>
             </a:r>
             <a:r>
               <a:rPr sz="1800" b="0">
@@ -18848,7 +18878,7 @@
                       </a:r>
                     </a:p>
                   </a:txBody>
-                  <a:tcPr marL="6750" marR="6750" marT="6750" marB="0" anchor="ctr">
+                  <a:tcPr marL="6750" marR="6750" marT="6750" marB="6750" anchor="ctr">
                     <a:lnL>
                       <a:noFill/>
                     </a:lnL>
@@ -18910,7 +18940,7 @@
                       </a:r>
                     </a:p>
                   </a:txBody>
-                  <a:tcPr marL="6750" marR="6750" marT="6750" marB="0" anchor="ctr">
+                  <a:tcPr marL="6750" marR="6750" marT="6750" marB="6750" anchor="ctr">
                     <a:lnL w="9525" cap="flat" cmpd="sng" algn="ctr">
                       <a:solidFill>
                         <a:schemeClr val="bg1">
@@ -18980,7 +19010,7 @@
                       </a:r>
                     </a:p>
                   </a:txBody>
-                  <a:tcPr marL="6750" marR="6750" marT="6750" marB="0" anchor="ctr">
+                  <a:tcPr marL="6750" marR="6750" marT="6750" marB="6750" anchor="ctr">
                     <a:lnL w="9525" cap="flat" cmpd="sng" algn="ctr">
                       <a:solidFill>
                         <a:schemeClr val="bg1">
@@ -19052,7 +19082,7 @@
                       </a:r>
                     </a:p>
                   </a:txBody>
-                  <a:tcPr marL="81005" marR="6750" marT="6750" marB="0" anchor="ctr">
+                  <a:tcPr marL="81005" marR="6750" marT="6750" marB="6750" anchor="ctr">
                     <a:lnL>
                       <a:noFill/>
                     </a:lnL>
@@ -19106,7 +19136,7 @@
                       </a:r>
                     </a:p>
                   </a:txBody>
-                  <a:tcPr marL="81005" marR="6750" marT="6750" marB="0" anchor="ctr">
+                  <a:tcPr marL="81005" marR="6750" marT="6750" marB="6750" anchor="ctr">
                     <a:lnL>
                       <a:noFill/>
                     </a:lnL>
@@ -19162,7 +19192,7 @@
                       </a:r>
                     </a:p>
                   </a:txBody>
-                  <a:tcPr marL="81005" marR="6750" marT="6750" marB="0" anchor="ctr">
+                  <a:tcPr marL="81005" marR="6750" marT="6750" marB="6750" anchor="ctr">
                     <a:lnL>
                       <a:noFill/>
                     </a:lnL>
@@ -19220,7 +19250,7 @@
                       </a:r>
                     </a:p>
                   </a:txBody>
-                  <a:tcPr marL="81005" marR="6750" marT="6750" marB="0" anchor="ctr">
+                  <a:tcPr marL="81005" marR="6750" marT="6750" marB="6750" anchor="ctr">
                     <a:lnL>
                       <a:noFill/>
                     </a:lnL>
@@ -19274,7 +19304,7 @@
                       </a:r>
                     </a:p>
                   </a:txBody>
-                  <a:tcPr marL="81005" marR="6750" marT="6750" marB="0" anchor="ctr">
+                  <a:tcPr marL="81005" marR="6750" marT="6750" marB="6750" anchor="ctr">
                     <a:lnL>
                       <a:noFill/>
                     </a:lnL>
@@ -19330,7 +19360,7 @@
                       </a:r>
                     </a:p>
                   </a:txBody>
-                  <a:tcPr marL="81005" marR="6750" marT="6750" marB="0" anchor="ctr">
+                  <a:tcPr marL="81005" marR="6750" marT="6750" marB="6750" anchor="ctr">
                     <a:lnL>
                       <a:noFill/>
                     </a:lnL>
@@ -19388,7 +19418,7 @@
                       </a:r>
                     </a:p>
                   </a:txBody>
-                  <a:tcPr marL="81005" marR="6750" marT="6750" marB="0" anchor="ctr">
+                  <a:tcPr marL="81005" marR="6750" marT="6750" marB="6750" anchor="ctr">
                     <a:lnL>
                       <a:noFill/>
                     </a:lnL>
@@ -19442,7 +19472,7 @@
                       </a:r>
                     </a:p>
                   </a:txBody>
-                  <a:tcPr marL="81005" marR="6750" marT="6750" marB="0" anchor="ctr">
+                  <a:tcPr marL="81005" marR="6750" marT="6750" marB="6750" anchor="ctr">
                     <a:lnL>
                       <a:noFill/>
                     </a:lnL>
@@ -19498,7 +19528,7 @@
                       </a:r>
                     </a:p>
                   </a:txBody>
-                  <a:tcPr marL="81005" marR="6750" marT="6750" marB="0" anchor="ctr">
+                  <a:tcPr marL="81005" marR="6750" marT="6750" marB="6750" anchor="ctr">
                     <a:lnL>
                       <a:noFill/>
                     </a:lnL>
@@ -19811,7 +19841,7 @@
                 <a:latin typeface="맑은 고딕"/>
                 <a:ea typeface="맑은 고딕"/>
               </a:rPr>
-              <a:t>녹색은 쓴 검사만큼만 보장한다</a:t>
+              <a:t>녹색은 작성한 검사만큼만 보장한다</a:t>
             </a:r>
             <a:r>
               <a:rPr sz="1800" b="0">
@@ -20062,7 +20092,7 @@
                       </a:r>
                     </a:p>
                   </a:txBody>
-                  <a:tcPr marL="6750" marR="6750" marT="6750" marB="0" anchor="ctr">
+                  <a:tcPr marL="6750" marR="6750" marT="6750" marB="6750" anchor="ctr">
                     <a:lnL>
                       <a:noFill/>
                     </a:lnL>
@@ -20124,7 +20154,7 @@
                       </a:r>
                     </a:p>
                   </a:txBody>
-                  <a:tcPr marL="6750" marR="6750" marT="6750" marB="0" anchor="ctr">
+                  <a:tcPr marL="6750" marR="6750" marT="6750" marB="6750" anchor="ctr">
                     <a:lnL w="9525" cap="flat" cmpd="sng" algn="ctr">
                       <a:solidFill>
                         <a:schemeClr val="bg1">
@@ -20194,7 +20224,7 @@
                       </a:r>
                     </a:p>
                   </a:txBody>
-                  <a:tcPr marL="6750" marR="6750" marT="6750" marB="0" anchor="ctr">
+                  <a:tcPr marL="6750" marR="6750" marT="6750" marB="6750" anchor="ctr">
                     <a:lnL w="9525" cap="flat" cmpd="sng" algn="ctr">
                       <a:solidFill>
                         <a:schemeClr val="bg1">
@@ -20266,7 +20296,7 @@
                       </a:r>
                     </a:p>
                   </a:txBody>
-                  <a:tcPr marL="81005" marR="6750" marT="6750" marB="0" anchor="ctr">
+                  <a:tcPr marL="81005" marR="6750" marT="6750" marB="6750" anchor="ctr">
                     <a:lnL>
                       <a:noFill/>
                     </a:lnL>
@@ -20320,7 +20350,7 @@
                       </a:r>
                     </a:p>
                   </a:txBody>
-                  <a:tcPr marL="81005" marR="6750" marT="6750" marB="0" anchor="ctr">
+                  <a:tcPr marL="81005" marR="6750" marT="6750" marB="6750" anchor="ctr">
                     <a:lnL>
                       <a:noFill/>
                     </a:lnL>
@@ -20376,7 +20406,7 @@
                       </a:r>
                     </a:p>
                   </a:txBody>
-                  <a:tcPr marL="81005" marR="6750" marT="6750" marB="0" anchor="ctr">
+                  <a:tcPr marL="81005" marR="6750" marT="6750" marB="6750" anchor="ctr">
                     <a:lnL>
                       <a:noFill/>
                     </a:lnL>
@@ -20434,7 +20464,7 @@
                       </a:r>
                     </a:p>
                   </a:txBody>
-                  <a:tcPr marL="81005" marR="6750" marT="6750" marB="0" anchor="ctr">
+                  <a:tcPr marL="81005" marR="6750" marT="6750" marB="6750" anchor="ctr">
                     <a:lnL>
                       <a:noFill/>
                     </a:lnL>
@@ -20488,7 +20518,7 @@
                       </a:r>
                     </a:p>
                   </a:txBody>
-                  <a:tcPr marL="81005" marR="6750" marT="6750" marB="0" anchor="ctr">
+                  <a:tcPr marL="81005" marR="6750" marT="6750" marB="6750" anchor="ctr">
                     <a:lnL>
                       <a:noFill/>
                     </a:lnL>
@@ -20544,7 +20574,7 @@
                       </a:r>
                     </a:p>
                   </a:txBody>
-                  <a:tcPr marL="81005" marR="6750" marT="6750" marB="0" anchor="ctr">
+                  <a:tcPr marL="81005" marR="6750" marT="6750" marB="6750" anchor="ctr">
                     <a:lnL>
                       <a:noFill/>
                     </a:lnL>
@@ -20602,7 +20632,7 @@
                       </a:r>
                     </a:p>
                   </a:txBody>
-                  <a:tcPr marL="81005" marR="6750" marT="6750" marB="0" anchor="ctr">
+                  <a:tcPr marL="81005" marR="6750" marT="6750" marB="6750" anchor="ctr">
                     <a:lnL>
                       <a:noFill/>
                     </a:lnL>
@@ -20656,7 +20686,7 @@
                       </a:r>
                     </a:p>
                   </a:txBody>
-                  <a:tcPr marL="81005" marR="6750" marT="6750" marB="0" anchor="ctr">
+                  <a:tcPr marL="81005" marR="6750" marT="6750" marB="6750" anchor="ctr">
                     <a:lnL>
                       <a:noFill/>
                     </a:lnL>
@@ -20712,7 +20742,7 @@
                       </a:r>
                     </a:p>
                   </a:txBody>
-                  <a:tcPr marL="81005" marR="6750" marT="6750" marB="0" anchor="ctr">
+                  <a:tcPr marL="81005" marR="6750" marT="6750" marB="6750" anchor="ctr">
                     <a:lnL>
                       <a:noFill/>
                     </a:lnL>
@@ -20770,7 +20800,7 @@
                       </a:r>
                     </a:p>
                   </a:txBody>
-                  <a:tcPr marL="81005" marR="6750" marT="6750" marB="0" anchor="ctr">
+                  <a:tcPr marL="81005" marR="6750" marT="6750" marB="6750" anchor="ctr">
                     <a:lnL>
                       <a:noFill/>
                     </a:lnL>
@@ -20824,7 +20854,7 @@
                       </a:r>
                     </a:p>
                   </a:txBody>
-                  <a:tcPr marL="81005" marR="6750" marT="6750" marB="0" anchor="ctr">
+                  <a:tcPr marL="81005" marR="6750" marT="6750" marB="6750" anchor="ctr">
                     <a:lnL>
                       <a:noFill/>
                     </a:lnL>
@@ -20880,7 +20910,7 @@
                       </a:r>
                     </a:p>
                   </a:txBody>
-                  <a:tcPr marL="81005" marR="6750" marT="6750" marB="0" anchor="ctr">
+                  <a:tcPr marL="81005" marR="6750" marT="6750" marB="6750" anchor="ctr">
                     <a:lnL>
                       <a:noFill/>
                     </a:lnL>
@@ -20938,7 +20968,7 @@
                       </a:r>
                     </a:p>
                   </a:txBody>
-                  <a:tcPr marL="81005" marR="6750" marT="6750" marB="0" anchor="ctr">
+                  <a:tcPr marL="81005" marR="6750" marT="6750" marB="6750" anchor="ctr">
                     <a:lnL>
                       <a:noFill/>
                     </a:lnL>
@@ -20992,7 +21022,7 @@
                       </a:r>
                     </a:p>
                   </a:txBody>
-                  <a:tcPr marL="81005" marR="6750" marT="6750" marB="0" anchor="ctr">
+                  <a:tcPr marL="81005" marR="6750" marT="6750" marB="6750" anchor="ctr">
                     <a:lnL>
                       <a:noFill/>
                     </a:lnL>
@@ -21048,7 +21078,7 @@
                       </a:r>
                     </a:p>
                   </a:txBody>
-                  <a:tcPr marL="81005" marR="6750" marT="6750" marB="0" anchor="ctr">
+                  <a:tcPr marL="81005" marR="6750" marT="6750" marB="6750" anchor="ctr">
                     <a:lnL>
                       <a:noFill/>
                     </a:lnL>
@@ -21106,7 +21136,7 @@
                       </a:r>
                     </a:p>
                   </a:txBody>
-                  <a:tcPr marL="81005" marR="6750" marT="6750" marB="0" anchor="ctr">
+                  <a:tcPr marL="81005" marR="6750" marT="6750" marB="6750" anchor="ctr">
                     <a:lnL>
                       <a:noFill/>
                     </a:lnL>
@@ -21160,7 +21190,7 @@
                       </a:r>
                     </a:p>
                   </a:txBody>
-                  <a:tcPr marL="81005" marR="6750" marT="6750" marB="0" anchor="ctr">
+                  <a:tcPr marL="81005" marR="6750" marT="6750" marB="6750" anchor="ctr">
                     <a:lnL>
                       <a:noFill/>
                     </a:lnL>
@@ -21216,7 +21246,7 @@
                       </a:r>
                     </a:p>
                   </a:txBody>
-                  <a:tcPr marL="81005" marR="6750" marT="6750" marB="0" anchor="ctr">
+                  <a:tcPr marL="81005" marR="6750" marT="6750" marB="6750" anchor="ctr">
                     <a:lnL>
                       <a:noFill/>
                     </a:lnL>
@@ -21922,7 +21952,7 @@
                 <a:latin typeface="맑은 고딕"/>
                 <a:ea typeface="맑은 고딕"/>
               </a:rPr>
-              <a:t> 작업 단위 하나마다 이 여섯을 한 바퀴 돈다.</a:t>
+              <a:t> 작업 단위 하나마다 이 6단계를 한 바퀴 돈다.</a:t>
             </a:r>
           </a:p>
           <a:p>
@@ -21965,7 +21995,7 @@
                 <a:latin typeface="맑은 고딕"/>
                 <a:ea typeface="맑은 고딕"/>
               </a:rPr>
-              <a:t> 코드가 빨라진 것이 분석을 생략할 근거는 아니다.</a:t>
+              <a:t> 코드가 빨라진 것이 분석을 생략할 이유는 아니다.</a:t>
             </a:r>
           </a:p>
           <a:p>
@@ -22008,7 +22038,7 @@
                 <a:latin typeface="맑은 고딕"/>
                 <a:ea typeface="맑은 고딕"/>
               </a:rPr>
-              <a:t> 받아들일 조건을 요구에서 정하고 내내 확인한다.</a:t>
+              <a:t> 받아들일 조건을 요구에서 정하고 계속 확인한다.</a:t>
             </a:r>
           </a:p>
         </p:txBody>
@@ -22253,7 +22283,7 @@
                 <a:latin typeface="맑은 고딕"/>
                 <a:ea typeface="맑은 고딕"/>
               </a:rPr>
-              <a:t>열한 세션은 </a:t>
+              <a:t>이 11세션은 </a:t>
             </a:r>
             <a:r>
               <a:rPr sz="1800" b="1">
@@ -22263,7 +22293,7 @@
                 <a:latin typeface="맑은 고딕"/>
                 <a:ea typeface="맑은 고딕"/>
               </a:rPr>
-              <a:t>결정하는 쪽과 실행하고 증거를 받는 쪽</a:t>
+              <a:t>결정하는 영역과 실행하고 증거를 받는 영역</a:t>
             </a:r>
             <a:r>
               <a:rPr sz="1800" b="0">
@@ -22273,7 +22303,7 @@
                 <a:latin typeface="맑은 고딕"/>
                 <a:ea typeface="맑은 고딕"/>
               </a:rPr>
-              <a:t>으로 나뉜다. 한 과제를 작업 단위로 쪼개 이 두 쪽을 돈다.</a:t>
+              <a:t>으로 나뉜다. 한 과제를 작업 단위로 나눠 이 두 영역을 수행한다.</a:t>
             </a:r>
           </a:p>
           <a:p>
@@ -22581,7 +22611,7 @@
                 <a:latin typeface="맑은 고딕"/>
                 <a:ea typeface="맑은 고딕"/>
               </a:rPr>
-              <a:t>맡기지 않는 작업 세 가지</a:t>
+              <a:t>맡기지 않는 작업 3가지</a:t>
             </a:r>
           </a:p>
           <a:p>
@@ -22751,7 +22781,7 @@
                 <a:latin typeface="맑은 고딕"/>
                 <a:ea typeface="맑은 고딕"/>
               </a:rPr>
-              <a:t>맡기지 않는 작업은 세 가지다 —</a:t>
+              <a:t>맡기지 않는 작업은 3가지다 —</a:t>
             </a:r>
             <a:r>
               <a:rPr sz="1600" b="0">
@@ -22771,7 +22801,7 @@
                 <a:latin typeface="맑은 고딕"/>
                 <a:ea typeface="맑은 고딕"/>
               </a:rPr>
-              <a:t>AI가 할 수 없는 작업</a:t>
+              <a:t>AI가 하지 못하는 작업</a:t>
             </a:r>
             <a:r>
               <a:rPr sz="1600" b="0">
@@ -22791,7 +22821,7 @@
                 <a:latin typeface="맑은 고딕"/>
                 <a:ea typeface="맑은 고딕"/>
               </a:rPr>
-              <a:t>쓸 이유가 없는 작업</a:t>
+              <a:t>사용할 이유가 없는 작업</a:t>
             </a:r>
             <a:r>
               <a:rPr sz="1600" b="0">
@@ -22844,7 +22874,7 @@
                 <a:latin typeface="맑은 고딕"/>
                 <a:ea typeface="맑은 고딕"/>
               </a:rPr>
-              <a:t>AI가 할 수 없는 작업</a:t>
+              <a:t>AI가 하지 못하는 작업</a:t>
             </a:r>
             <a:r>
               <a:rPr sz="1800" b="0">
@@ -22950,7 +22980,7 @@
                 <a:latin typeface="맑은 고딕"/>
                 <a:ea typeface="맑은 고딕"/>
               </a:rPr>
-              <a:t> 책임은 사람이 진다. AI는 초안만 쓴다.</a:t>
+              <a:t> 책임은 사람이 진다. AI는 초안만 작성한다.</a:t>
             </a:r>
           </a:p>
           <a:p>
@@ -22973,7 +23003,7 @@
                 <a:latin typeface="맑은 고딕"/>
                 <a:ea typeface="맑은 고딕"/>
               </a:rPr>
-              <a:t>AI를 쓸 이유가 없는 작업</a:t>
+              <a:t>AI를 사용할 이유가 없는 작업</a:t>
             </a:r>
             <a:r>
               <a:rPr sz="1800" b="0">
@@ -23142,7 +23172,7 @@
                 <a:latin typeface="맑은 고딕"/>
                 <a:ea typeface="맑은 고딕"/>
               </a:rPr>
-              <a:t>만들기로 하기 전에 </a:t>
+              <a:t>에이전트를 만들기 전에 </a:t>
             </a:r>
             <a:r>
               <a:rPr sz="1600" b="1">
@@ -23245,7 +23275,7 @@
                 <a:latin typeface="맑은 고딕"/>
                 <a:ea typeface="맑은 고딕"/>
               </a:rPr>
-              <a:t> 받아들일 기준을 쓸 수 없으면 검사도 없다. 검사가 없는 작업은 맡기지 않는다.</a:t>
+              <a:t> 받아들일 기준을 작성할 수 없으면 검사도 없다. 검사가 없는 작업은 맡기지 않는다.</a:t>
             </a:r>
           </a:p>
         </p:txBody>
@@ -23465,7 +23495,7 @@
                       </a:r>
                     </a:p>
                   </a:txBody>
-                  <a:tcPr marL="6750" marR="6750" marT="6750" marB="0" anchor="ctr">
+                  <a:tcPr marL="6750" marR="6750" marT="6750" marB="6750" anchor="ctr">
                     <a:lnL>
                       <a:noFill/>
                     </a:lnL>
@@ -23527,7 +23557,7 @@
                       </a:r>
                     </a:p>
                   </a:txBody>
-                  <a:tcPr marL="6750" marR="6750" marT="6750" marB="0" anchor="ctr">
+                  <a:tcPr marL="6750" marR="6750" marT="6750" marB="6750" anchor="ctr">
                     <a:lnL w="9525" cap="flat" cmpd="sng" algn="ctr">
                       <a:solidFill>
                         <a:schemeClr val="bg1">
@@ -23599,7 +23629,7 @@
                       </a:r>
                     </a:p>
                   </a:txBody>
-                  <a:tcPr marL="81005" marR="6750" marT="6750" marB="0" anchor="ctr">
+                  <a:tcPr marL="81005" marR="6750" marT="6750" marB="6750" anchor="ctr">
                     <a:lnL>
                       <a:noFill/>
                     </a:lnL>
@@ -23653,7 +23683,7 @@
                       </a:r>
                     </a:p>
                   </a:txBody>
-                  <a:tcPr marL="81005" marR="6750" marT="6750" marB="0" anchor="ctr">
+                  <a:tcPr marL="81005" marR="6750" marT="6750" marB="6750" anchor="ctr">
                     <a:lnL>
                       <a:noFill/>
                     </a:lnL>
@@ -23711,7 +23741,7 @@
                       </a:r>
                     </a:p>
                   </a:txBody>
-                  <a:tcPr marL="81005" marR="6750" marT="6750" marB="0" anchor="ctr">
+                  <a:tcPr marL="81005" marR="6750" marT="6750" marB="6750" anchor="ctr">
                     <a:lnL>
                       <a:noFill/>
                     </a:lnL>
@@ -23765,7 +23795,7 @@
                       </a:r>
                     </a:p>
                   </a:txBody>
-                  <a:tcPr marL="81005" marR="6750" marT="6750" marB="0" anchor="ctr">
+                  <a:tcPr marL="81005" marR="6750" marT="6750" marB="6750" anchor="ctr">
                     <a:lnL>
                       <a:noFill/>
                     </a:lnL>
@@ -23823,7 +23853,7 @@
                       </a:r>
                     </a:p>
                   </a:txBody>
-                  <a:tcPr marL="81005" marR="6750" marT="6750" marB="0" anchor="ctr">
+                  <a:tcPr marL="81005" marR="6750" marT="6750" marB="6750" anchor="ctr">
                     <a:lnL>
                       <a:noFill/>
                     </a:lnL>
@@ -23877,7 +23907,7 @@
                       </a:r>
                     </a:p>
                   </a:txBody>
-                  <a:tcPr marL="81005" marR="6750" marT="6750" marB="0" anchor="ctr">
+                  <a:tcPr marL="81005" marR="6750" marT="6750" marB="6750" anchor="ctr">
                     <a:lnL>
                       <a:noFill/>
                     </a:lnL>
@@ -23935,7 +23965,7 @@
                       </a:r>
                     </a:p>
                   </a:txBody>
-                  <a:tcPr marL="81005" marR="6750" marT="6750" marB="0" anchor="ctr">
+                  <a:tcPr marL="81005" marR="6750" marT="6750" marB="6750" anchor="ctr">
                     <a:lnL>
                       <a:noFill/>
                     </a:lnL>
@@ -23989,7 +24019,7 @@
                       </a:r>
                     </a:p>
                   </a:txBody>
-                  <a:tcPr marL="81005" marR="6750" marT="6750" marB="0" anchor="ctr">
+                  <a:tcPr marL="81005" marR="6750" marT="6750" marB="6750" anchor="ctr">
                     <a:lnL>
                       <a:noFill/>
                     </a:lnL>
@@ -24047,7 +24077,7 @@
                       </a:r>
                     </a:p>
                   </a:txBody>
-                  <a:tcPr marL="81005" marR="6750" marT="6750" marB="0" anchor="ctr">
+                  <a:tcPr marL="81005" marR="6750" marT="6750" marB="6750" anchor="ctr">
                     <a:lnL>
                       <a:noFill/>
                     </a:lnL>
@@ -24101,7 +24131,7 @@
                       </a:r>
                     </a:p>
                   </a:txBody>
-                  <a:tcPr marL="81005" marR="6750" marT="6750" marB="0" anchor="ctr">
+                  <a:tcPr marL="81005" marR="6750" marT="6750" marB="6750" anchor="ctr">
                     <a:lnL>
                       <a:noFill/>
                     </a:lnL>
@@ -24855,7 +24885,7 @@
                 <a:latin typeface="맑은 고딕"/>
                 <a:ea typeface="맑은 고딕"/>
               </a:rPr>
-              <a:t>에서 다섯 가지를 준비한다 —</a:t>
+              <a:t>에서 5가지를 준비한다 —</a:t>
             </a:r>
             <a:r>
               <a:rPr sz="1600" b="0">
@@ -26577,7 +26607,7 @@
                 <a:latin typeface="맑은 고딕"/>
                 <a:ea typeface="맑은 고딕"/>
               </a:rPr>
-              <a:t>AI는 업무 규칙을 코드로 옮기는 일을 줄였고, 그것을 </a:t>
+              <a:t>AI는 업무 규칙을 코드로 옮기는 일을 담당하고, 그것을 </a:t>
             </a:r>
             <a:r>
               <a:rPr sz="1800" b="1">
@@ -26704,7 +26734,7 @@
                 <a:latin typeface="맑은 고딕"/>
                 <a:ea typeface="맑은 고딕"/>
               </a:rPr>
-              <a:t> 다섯 자리가 달라져도 공학 원칙은 남고, 검사할 수 있는 것이 시작 지점을 정한다</a:t>
+              <a:t> 5가지가 달라져도 공학 원칙은 남고, 검사할 수 있는 것이 시작 지점을 정한다</a:t>
             </a:r>
           </a:p>
           <a:p>
@@ -28637,7 +28667,7 @@
                 <a:latin typeface="맑은 고딕"/>
                 <a:ea typeface="맑은 고딕"/>
               </a:rPr>
-              <a:t>AI는 코드를 만드는 비용을 크게 줄였다. 그러나 </a:t>
+              <a:t>AI는 코드를 만드는 비용을 크게 줄인다. 그러나 </a:t>
             </a:r>
             <a:r>
               <a:rPr sz="1800" b="1">
@@ -28723,7 +28753,7 @@
                 <a:latin typeface="맑은 고딕"/>
                 <a:ea typeface="맑은 고딕"/>
               </a:rPr>
-              <a:t>달라지는 다섯 자리</a:t>
+              <a:t>달라지는 5가지</a:t>
             </a:r>
             <a:r>
               <a:rPr sz="1800" b="0">
@@ -28733,7 +28763,7 @@
                 <a:latin typeface="맑은 고딕"/>
                 <a:ea typeface="맑은 고딕"/>
               </a:rPr>
-              <a:t>를 얻는 것·잃는 것과 함께 말하고, 그래도 </a:t>
+              <a:t>를 설명하고, 그래도 </a:t>
             </a:r>
             <a:r>
               <a:rPr sz="1800" b="1">
@@ -28786,7 +28816,7 @@
                 <a:latin typeface="맑은 고딕"/>
                 <a:ea typeface="맑은 고딕"/>
               </a:rPr>
-              <a:t>은 도메인 지식이며, 주어지지 않으면 LLM이 추측으로 채운다는 것을 코드와 테스트로 확인한다.</a:t>
+              <a:t>은 도메인 지식이며, 주어지지 않으면 LLM이 추측으로 채우는 것을 코드와 테스트로 확인한다.</a:t>
             </a:r>
           </a:p>
           <a:p>
@@ -29223,7 +29253,7 @@
                 <a:latin typeface="맑은 고딕"/>
                 <a:ea typeface="맑은 고딕"/>
               </a:rPr>
-              <a:t>빈 저장소에서 새로</a:t>
+              <a:t>새로</a:t>
             </a:r>
             <a:r>
               <a:rPr sz="1800" b="0">
@@ -29335,7 +29365,7 @@
                 <a:latin typeface="맑은 고딕"/>
                 <a:ea typeface="맑은 고딕"/>
               </a:rPr>
-              <a:t>를 정하면 주문이 생기고 주문 금액 2,000원이 정해진다.</a:t>
+              <a:t>를 정하면 주문이 생기고 주문 금액 2,000원이 결정된다.</a:t>
             </a:r>
           </a:p>
           <a:p>
@@ -29662,7 +29692,7 @@
                 <a:latin typeface="맑은 고딕"/>
                 <a:ea typeface="맑은 고딕"/>
               </a:rPr>
-              <a:t>업무 담당자가 준 요청은 아래 한 줄뿐이었다. 테크 리드가 이 한 줄을 그대로 코딩 에이전트에게 주자 </a:t>
+              <a:t>업무 담당자가 준 요청은 아래 한 줄뿐이었다. 테크 리드가 이것을 그대로 코딩 에이전트에게 주자 </a:t>
             </a:r>
             <a:r>
               <a:rPr sz="1800" b="1">
@@ -30055,7 +30085,7 @@
                       </a:r>
                     </a:p>
                   </a:txBody>
-                  <a:tcPr marL="6750" marR="6750" marT="6750" marB="0" anchor="ctr">
+                  <a:tcPr marL="6750" marR="6750" marT="6750" marB="6750" anchor="ctr">
                     <a:lnL>
                       <a:noFill/>
                     </a:lnL>
@@ -30117,7 +30147,7 @@
                       </a:r>
                     </a:p>
                   </a:txBody>
-                  <a:tcPr marL="6750" marR="6750" marT="6750" marB="0" anchor="ctr">
+                  <a:tcPr marL="6750" marR="6750" marT="6750" marB="6750" anchor="ctr">
                     <a:lnL w="9525" cap="flat" cmpd="sng" algn="ctr">
                       <a:solidFill>
                         <a:schemeClr val="bg1">
@@ -30187,7 +30217,7 @@
                       </a:r>
                     </a:p>
                   </a:txBody>
-                  <a:tcPr marL="6750" marR="6750" marT="6750" marB="0" anchor="ctr">
+                  <a:tcPr marL="6750" marR="6750" marT="6750" marB="6750" anchor="ctr">
                     <a:lnL w="9525" cap="flat" cmpd="sng" algn="ctr">
                       <a:solidFill>
                         <a:schemeClr val="bg1">
@@ -30259,7 +30289,7 @@
                       </a:r>
                     </a:p>
                   </a:txBody>
-                  <a:tcPr marL="81005" marR="6750" marT="6750" marB="0" anchor="ctr">
+                  <a:tcPr marL="81005" marR="6750" marT="6750" marB="6750" anchor="ctr">
                     <a:lnL>
                       <a:noFill/>
                     </a:lnL>
@@ -30313,7 +30343,7 @@
                       </a:r>
                     </a:p>
                   </a:txBody>
-                  <a:tcPr marL="81005" marR="6750" marT="6750" marB="0" anchor="ctr">
+                  <a:tcPr marL="81005" marR="6750" marT="6750" marB="6750" anchor="ctr">
                     <a:lnL>
                       <a:noFill/>
                     </a:lnL>
@@ -30369,7 +30399,7 @@
                       </a:r>
                     </a:p>
                   </a:txBody>
-                  <a:tcPr marL="81005" marR="6750" marT="6750" marB="0" anchor="ctr">
+                  <a:tcPr marL="81005" marR="6750" marT="6750" marB="6750" anchor="ctr">
                     <a:lnL>
                       <a:noFill/>
                     </a:lnL>
@@ -30427,7 +30457,7 @@
                       </a:r>
                     </a:p>
                   </a:txBody>
-                  <a:tcPr marL="81005" marR="6750" marT="6750" marB="0" anchor="ctr">
+                  <a:tcPr marL="81005" marR="6750" marT="6750" marB="6750" anchor="ctr">
                     <a:lnL>
                       <a:noFill/>
                     </a:lnL>
@@ -30481,7 +30511,7 @@
                       </a:r>
                     </a:p>
                   </a:txBody>
-                  <a:tcPr marL="81005" marR="6750" marT="6750" marB="0" anchor="ctr">
+                  <a:tcPr marL="81005" marR="6750" marT="6750" marB="6750" anchor="ctr">
                     <a:lnL>
                       <a:noFill/>
                     </a:lnL>
@@ -30537,7 +30567,7 @@
                       </a:r>
                     </a:p>
                   </a:txBody>
-                  <a:tcPr marL="81005" marR="6750" marT="6750" marB="0" anchor="ctr">
+                  <a:tcPr marL="81005" marR="6750" marT="6750" marB="6750" anchor="ctr">
                     <a:lnL>
                       <a:noFill/>
                     </a:lnL>
@@ -30595,7 +30625,7 @@
                       </a:r>
                     </a:p>
                   </a:txBody>
-                  <a:tcPr marL="81005" marR="6750" marT="6750" marB="0" anchor="ctr">
+                  <a:tcPr marL="81005" marR="6750" marT="6750" marB="6750" anchor="ctr">
                     <a:lnL>
                       <a:noFill/>
                     </a:lnL>
@@ -30649,7 +30679,7 @@
                       </a:r>
                     </a:p>
                   </a:txBody>
-                  <a:tcPr marL="81005" marR="6750" marT="6750" marB="0" anchor="ctr">
+                  <a:tcPr marL="81005" marR="6750" marT="6750" marB="6750" anchor="ctr">
                     <a:lnL>
                       <a:noFill/>
                     </a:lnL>
@@ -30705,7 +30735,7 @@
                       </a:r>
                     </a:p>
                   </a:txBody>
-                  <a:tcPr marL="81005" marR="6750" marT="6750" marB="0" anchor="ctr">
+                  <a:tcPr marL="81005" marR="6750" marT="6750" marB="6750" anchor="ctr">
                     <a:lnL>
                       <a:noFill/>
                     </a:lnL>
@@ -30799,7 +30829,7 @@
                 <a:latin typeface="맑은 고딕"/>
                 <a:ea typeface="맑은 고딕"/>
               </a:rPr>
-              <a:t>고객과 회사가 실제로 겪게 될 문제</a:t>
+              <a:t>3가지를 발견했다</a:t>
             </a:r>
             <a:r>
               <a:rPr sz="1800" b="0">
@@ -30809,7 +30839,7 @@
                 <a:latin typeface="맑은 고딕"/>
                 <a:ea typeface="맑은 고딕"/>
               </a:rPr>
-              <a:t> 세 가지가 드러났다.</a:t>
+              <a:t>.</a:t>
             </a:r>
           </a:p>
         </p:txBody>
@@ -31015,7 +31045,7 @@
                 <a:latin typeface="맑은 고딕"/>
                 <a:ea typeface="맑은 고딕"/>
               </a:rPr>
-              <a:t>이다. 에이전트는 묻지 않고 골랐다.</a:t>
+              <a:t>이다. 에이전트는 묻지 않고 임의로 선택했다.</a:t>
             </a:r>
           </a:p>
         </p:txBody>
@@ -31270,7 +31300,7 @@
                 <a:latin typeface="맑은 고딕"/>
                 <a:ea typeface="맑은 고딕"/>
               </a:rPr>
-              <a:t>에이전트가 만든 결제 코드는 요청에 없던 업무 규칙 세 가지를 모두 </a:t>
+              <a:t>에이전트가 만든 결제 코드는 요청에 없던 업무 규칙 3가지를 모두 </a:t>
             </a:r>
             <a:r>
               <a:rPr sz="1800" b="1">
@@ -31280,7 +31310,7 @@
                 <a:latin typeface="맑은 고딕"/>
                 <a:ea typeface="맑은 고딕"/>
               </a:rPr>
-              <a:t>스스로 정해 채웠다</a:t>
+              <a:t>스스로 정했다</a:t>
             </a:r>
             <a:r>
               <a:rPr sz="1800" b="0">

--- a/courses/ai-native/sessions/s01.pptx
+++ b/courses/ai-native/sessions/s01.pptx
@@ -867,7 +867,7 @@
             <a:pPr lvl="0"/>
             <a:r>
               <a:rPr lang="ko-KR" sz="1200"/>
-              <a:t>"LLM은 흔히 보이는 답을 고른다"는 이 과정의 설명이다. 출처로 인용하지 않는다.</a:t>
+              <a:t>"LLM은 임의의 답을 선택한다"는 이 과정의 설명이다. 출처로 인용하지 않는다.</a:t>
             </a:r>
           </a:p>
           <a:p>
@@ -956,7 +956,7 @@
             <a:pPr lvl="0"/>
             <a:r>
               <a:rPr lang="ko-KR" sz="1200"/>
-              <a:t>AI 지원의 병목은 사람의 리뷰다. 형태의 선택은 "세션 02. LLM이라는 재료"에서 다룬다.</a:t>
+              <a:t>AI 지원의 병목은 사람의 리뷰다. 형태의 선택은 "세션 02. LLM이라는 도구"에서 다룬다.</a:t>
             </a:r>
           </a:p>
         </p:txBody>
@@ -1099,7 +1099,7 @@
             <a:pPr lvl="0"/>
             <a:r>
               <a:rPr lang="ko-KR" sz="1200"/>
-              <a:t>"습관을 키운다"는 이 과정의 설명이다. 출처로 인용하지 않는다.</a:t>
+              <a:t>"이미 하는 방식을 빠르게 한다"는 이 과정의 설명이다. 출처로 인용하지 않는다.</a:t>
             </a:r>
           </a:p>
         </p:txBody>
@@ -1460,7 +1460,7 @@
             <a:pPr lvl="0"/>
             <a:r>
               <a:rPr lang="ko-KR" sz="1200"/>
-              <a:t>이 6단계를 결정하는 영역과 증거를 받는 영역으로 다시 그린 것이 「과정의 지도」다.</a:t>
+              <a:t>이 6단계를 결정하는 영역과 증거를 받는 영역으로 다시 그린 것이 세션 끝의 「과정의 지도」다.</a:t>
             </a:r>
           </a:p>
         </p:txBody>
@@ -1521,14 +1521,28 @@
             <a:pPr lvl="0"/>
             <a:r>
               <a:rPr lang="ko-KR" sz="1200"/>
-              <a:t>왼쪽 다섯은 "세션 03. 요구와 수용 기준"~"세션 07. 설계 — 책임과 협력", 오른쪽 넷은 "세션 08. 위임"~"세션 11. 종합 실행"이다. 이 세션과 "세션 02. LLM이라는 재료"는 두 쪽에 들어가기 전의 준비다.</a:t>
+              <a:t>인용 근거: OpenAI, "A practical guide to building agents"(2025) 원문 확인(받은 PDF).</a:t>
             </a:r>
           </a:p>
           <a:p>
             <a:pPr lvl="0"/>
             <a:r>
               <a:rPr lang="ko-KR" sz="1200"/>
-              <a:t>산출물을 모두 만들어야 하는 것은 아니다. 무엇을 넣을지는 도메인·기술 복잡성이 정하며, 그 판단은 "세션 03. 요구와 수용 기준"에서 경로와 함께 다룬다.</a:t>
+              <a:t>두 인용은 원문에서 이어지는 대목이다. 앞 문장이 에이전트가 맞는 자리를 말하고(결정적·규칙 기반 방식이 잘 듣지 않는 일), 그 뒤에 복잡한 판단·유지하기 어려운 규칙·비정형 데이터 셋을 기준으로 든 다음 뒤 문장이 온다. 그래서 Otherwise는 그 기준을 충족하지 못한 경우다 — 충족하면 에이전트가 맞고, 충족하지 못하면 결정적 해법으로 충분하다. 인용 하나만 보이면 "이 기준"이 무엇인지 알 수 없어 거꾸로 읽히므로 둘을 함께 둔다.</a:t>
+            </a:r>
+          </a:p>
+          <a:p>
+            <a:pPr lvl="0"/>
+            <a:r>
+              <a:rPr lang="ko-KR" sz="1200"/>
+              <a:t>포매터·정적 검사·빌드 도구는 뒤에서 에이전트의 결과를 확인하는 검사가 된다.</a:t>
+            </a:r>
+          </a:p>
+          <a:p>
+            <a:pPr lvl="0"/>
+            <a:r>
+              <a:rPr lang="ko-KR" sz="1200"/>
+              <a:t>작업 특성으로 활용 방식(수작업·대화형 보조·워크플로·에이전트)을 고르는 일은 "세션 02. LLM이라는 도구"가 맡는다. 비용 대비 효과의 판단은 "세션 10. 비용과 평가"다.</a:t>
             </a:r>
           </a:p>
         </p:txBody>
@@ -1589,28 +1603,28 @@
             <a:pPr lvl="0"/>
             <a:r>
               <a:rPr lang="ko-KR" sz="1200"/>
-              <a:t>인용 근거: OpenAI, "A practical guide to building agents"(2025) 원문 확인(받은 PDF).</a:t>
+              <a:t>인용 근거: [Hassan 외 2026] 원문 확인. 저자들은 한 코딩 도구를 다룬 선행 연구를 들어 단기 속도는 올랐지만 복잡도와 정적 분석 경고가 지속해 쌓여 장기 생산성을 해쳤다고 적는다. 인용은 그 대목에 대한 저자들의 평가다.</a:t>
             </a:r>
           </a:p>
           <a:p>
             <a:pPr lvl="0"/>
             <a:r>
               <a:rPr lang="ko-KR" sz="1200"/>
-              <a:t>두 인용은 원문에서 이어지는 대목이다. 앞 문장이 에이전트가 맞는 자리를 말하고(결정적·규칙 기반 방식이 잘 듣지 않는 일), 그 뒤에 복잡한 판단·유지하기 어려운 규칙·비정형 데이터 셋을 기준으로 든 다음 뒤 문장이 온다. 그래서 Otherwise는 그 기준을 충족하지 못한 경우다 — 충족하면 에이전트가 맞고, 충족하지 못하면 결정적 해법으로 충분하다. 인용 하나만 보이면 "이 기준"이 무엇인지 알 수 없어 거꾸로 읽히므로 둘을 함께 둔다.</a:t>
+              <a:t>수강생에게 자기 프로젝트가 5가지 중 어디인지 먼저 말하게 한다. 2가지 이상에 걸치면 가장 보수적인 쪽을 고른다.</a:t>
             </a:r>
           </a:p>
           <a:p>
             <a:pPr lvl="0"/>
             <a:r>
               <a:rPr lang="ko-KR" sz="1200"/>
-              <a:t>포매터·정적 검사·빌드 도구는 뒤에서 에이전트의 결과를 확인하는 검사가 된다.</a:t>
+              <a:t>5가지 상황의 묶음은 이 과정의 정리다. 표의 접근은 시작 지점이며 고정된 처방이 아니다.</a:t>
             </a:r>
           </a:p>
           <a:p>
             <a:pPr lvl="0"/>
             <a:r>
               <a:rPr lang="ko-KR" sz="1200"/>
-              <a:t>작업 특성으로 활용 방식(수작업·대화형 보조·워크플로·에이전트)을 고르는 일은 "세션 02. LLM이라는 재료"가 맡는다. 비용 대비 효과의 판단은 "세션 10. 비용과 평가"다.</a:t>
+              <a:t>단기·중기·장기의 비용과 평가 세트로 계속 맡길지 판단하는 일은 "세션 10. 비용과 평가"가 맡는다. 여기서는 시작 지점을 고르는 것까지다.</a:t>
             </a:r>
           </a:p>
         </p:txBody>
@@ -1671,28 +1685,28 @@
             <a:pPr lvl="0"/>
             <a:r>
               <a:rPr lang="ko-KR" sz="1200"/>
-              <a:t>인용 근거: [Hassan 외 2026] 원문 확인. 저자들은 한 코딩 도구를 다룬 선행 연구를 들어 단기 속도는 올랐지만 복잡도와 정적 분석 경고가 지속해 쌓여 장기 생산성을 해쳤다고 적는다. 인용은 그 대목에 대한 저자들의 평가다.</a:t>
+              <a:t>왼쪽 다섯은 "세션 03. 요구와 수용 기준"~"세션 07. 설계 — 책임과 협력", 오른쪽 넷은 "세션 08. 위임"~"세션 11. 종합 실행"이다. 이 세션과 "세션 02. LLM이라는 도구"는 두 쪽에 들어가기 전의 준비다.</a:t>
             </a:r>
           </a:p>
           <a:p>
             <a:pPr lvl="0"/>
             <a:r>
               <a:rPr lang="ko-KR" sz="1200"/>
-              <a:t>수강생에게 자기 프로젝트가 다섯 중 어디인지 먼저 말하게 한다. 둘 이상에 걸치면 가장 보수적인 쪽을 고른다.</a:t>
+              <a:t>산출물을 모두 만들어야 하는 것은 아니다. 무엇을 넣을지는 도메인·기술 복잡성이 정하며, 그 판단은 "세션 03. 요구와 수용 기준"에서 경로와 함께 다룬다.</a:t>
             </a:r>
           </a:p>
           <a:p>
             <a:pPr lvl="0"/>
             <a:r>
               <a:rPr lang="ko-KR" sz="1200"/>
-              <a:t>다섯 상황의 묶음은 이 과정의 정리다. 표의 접근은 시작 지점이며 고정된 처방이 아니다.</a:t>
+              <a:t>강의 내용의 마지막 장이다. 맡길 작업과 상황까지 본 뒤에 남은 세션의 순서를 보이고 실습 환경으로 넘어간다.</a:t>
             </a:r>
           </a:p>
           <a:p>
             <a:pPr lvl="0"/>
             <a:r>
               <a:rPr lang="ko-KR" sz="1200"/>
-              <a:t>단기·중기·장기의 비용과 평가 세트로 계속 맡길지 판단하는 일은 "세션 10. 비용과 평가"가 맡는다. 여기서는 시작 지점을 고르는 것까지다.</a:t>
+              <a:t>세션의 순서는 학습 순서다. 실제로는 작업 단위마다 결정과 검사를 함께 수행한다 — 「결정마다 검사가 있다」에서 이미 보였으므로 본문에서는 뺐다.</a:t>
             </a:r>
           </a:p>
         </p:txBody>
@@ -2319,7 +2333,7 @@
             <a:pPr lvl="0"/>
             <a:r>
               <a:rPr lang="ko-KR" sz="1200"/>
-              <a:t>LLM이라는 재료의 성질과 활용 방식의 선택은 "세션 02. LLM이라는 재료"가 맡는다. 이 세션은 사람과 AI가 나누는 일까지다.</a:t>
+              <a:t>LLM이라는 도구의 성질과 활용 방식의 선택은 "세션 02. LLM이라는 도구"가 맡는다. 이 세션은 사람과 AI가 나누는 일까지다.</a:t>
             </a:r>
           </a:p>
         </p:txBody>
@@ -6503,7 +6517,7 @@
                 <a:latin typeface="맑은 고딕"/>
                 <a:ea typeface="맑은 고딕"/>
               </a:rPr>
-              <a:t>에이전트가 만든 테스트</a:t>
+              <a:t>에이전트가 생성한 테스트</a:t>
             </a:r>
             <a:r>
               <a:rPr sz="1800" b="0">
@@ -6523,7 +6537,7 @@
                 <a:latin typeface="맑은 고딕"/>
                 <a:ea typeface="맑은 고딕"/>
               </a:rPr>
-              <a:t>자기가 쓴 코드의 동작</a:t>
+              <a:t>자기가 작성한 코드의 동작</a:t>
             </a:r>
             <a:r>
               <a:rPr sz="1800" b="0">
@@ -6533,7 +6547,7 @@
                 <a:latin typeface="맑은 고딕"/>
                 <a:ea typeface="맑은 고딕"/>
               </a:rPr>
-              <a:t>을 기대값으로 삼았다. 같은 코드를 업무 규칙으로 확인하면 세 곳에서 실패한다.</a:t>
+              <a:t>을 기대값으로 삼았다. 업무 규칙을 반영한 테스트로 같은 코드를 확인하자 3곳에서 실패했다.</a:t>
             </a:r>
           </a:p>
           <a:p>
@@ -6556,7 +6570,7 @@
                 <a:latin typeface="맑은 고딕"/>
                 <a:ea typeface="맑은 고딕"/>
               </a:rPr>
-              <a:t>코드에서 테스트를 만드는 것은 AI를 SW 공학에 쓸 때 </a:t>
+              <a:t>코드에서 테스트를 만드는 것은 AI를 SW 공학에 사용할 때 </a:t>
             </a:r>
             <a:r>
               <a:rPr sz="1800" b="1">
@@ -6576,7 +6590,7 @@
                 <a:latin typeface="맑은 고딕"/>
                 <a:ea typeface="맑은 고딕"/>
               </a:rPr>
-              <a:t>이며, 그 코드가 해야 할 일을 한다는 </a:t>
+              <a:t>이며, 그 코드가 할 일을 한다는 </a:t>
             </a:r>
             <a:r>
               <a:rPr sz="1800" b="1">
@@ -7522,7 +7536,7 @@
                           <a:ea typeface="맑은 고딕" panose="020B0503020000020004" pitchFamily="34" charset="-127"/>
                           <a:cs typeface="맑은 고딕"/>
                         </a:rPr>
-                        <a:t>AI가 10분 만에 만들었다</a:t>
+                        <a:t>AI가 10분 만에 생성했다</a:t>
                       </a:r>
                     </a:p>
                   </a:txBody>
@@ -7743,7 +7757,7 @@
                 <a:latin typeface="맑은 고딕"/>
                 <a:ea typeface="맑은 고딕"/>
               </a:rPr>
-              <a:t>표현하는 노동</a:t>
+              <a:t>표현하는 것</a:t>
             </a:r>
             <a:r>
               <a:rPr sz="1600" b="0">
@@ -7927,7 +7941,7 @@
         <p:spPr>
           <a:xfrm>
             <a:off x="365760" y="4752163"/>
-            <a:ext cx="8412480" cy="777240"/>
+            <a:ext cx="8412480" cy="1325880"/>
           </a:xfrm>
           <a:prstGeom prst="rect">
             <a:avLst/>
@@ -7959,7 +7973,7 @@
                 <a:latin typeface="맑은 고딕"/>
                 <a:ea typeface="맑은 고딕"/>
               </a:rPr>
-              <a:t>AI가 줄인 것</a:t>
+              <a:t>AI는 우연적 복잡성을 줄인다</a:t>
             </a:r>
             <a:r>
               <a:rPr sz="1800" b="0">
@@ -7979,7 +7993,7 @@
                 <a:latin typeface="맑은 고딕"/>
                 <a:ea typeface="맑은 고딕"/>
               </a:rPr>
-              <a:t> 업무 규칙을 코드로 옮기는 노동이다.</a:t>
+              <a:t> 업무 규칙을 코드로 옮기는 일은 10분에 끝난다.</a:t>
             </a:r>
           </a:p>
           <a:p>
@@ -8002,7 +8016,7 @@
                 <a:latin typeface="맑은 고딕"/>
                 <a:ea typeface="맑은 고딕"/>
               </a:rPr>
-              <a:t>병목의 이동</a:t>
+              <a:t>병목은 본질적 복잡성에 있다</a:t>
             </a:r>
             <a:r>
               <a:rPr sz="1800" b="0">
@@ -8022,7 +8036,7 @@
                 <a:latin typeface="맑은 고딕"/>
                 <a:ea typeface="맑은 고딕"/>
               </a:rPr>
-              <a:t> 이제 업무 규칙을 찾고, 정하고, 검증하는 것이다.</a:t>
+              <a:t> 주문 금액·배송 요청·결제 거절을 결정하고 검증하는 일이다.</a:t>
             </a:r>
           </a:p>
         </p:txBody>
@@ -9323,7 +9337,7 @@
                 <a:latin typeface="맑은 고딕"/>
                 <a:ea typeface="맑은 고딕"/>
               </a:rPr>
-              <a:t>5가지가 함께 움직인다</a:t>
+              <a:t>5가지가 함께 달라진다</a:t>
             </a:r>
             <a:r>
               <a:rPr sz="1800" b="0">
@@ -9333,7 +9347,7 @@
                 <a:latin typeface="맑은 고딕"/>
                 <a:ea typeface="맑은 고딕"/>
               </a:rPr>
-              <a:t>. 얻는 쪽만 보면 잃는 쪽이 비용으로 돌아온다.</a:t>
+              <a:t>. 얻는 것만 고려하면 누적된 복잡도와 틀린 가정을 나중에 비용으로 지불한다.</a:t>
             </a:r>
           </a:p>
         </p:txBody>
@@ -9582,7 +9596,7 @@
                 <a:latin typeface="맑은 고딕"/>
                 <a:ea typeface="맑은 고딕"/>
               </a:rPr>
-              <a:t>병목이 사라지지 않는 이유</a:t>
+              <a:t>사람은 의도를 한 번에 분명히 말하지 못한다</a:t>
             </a:r>
             <a:r>
               <a:rPr sz="1800" b="0">
@@ -9602,7 +9616,7 @@
                 <a:latin typeface="맑은 고딕"/>
                 <a:ea typeface="맑은 고딕"/>
               </a:rPr>
-              <a:t> 사람이 의도를 한 번에 분명히 말하지 못해서 생기는 한계이며, 모델이 강해져도 남는다.</a:t>
+              <a:t> 요청 한 줄에서 업무 규칙 3가지가 빠졌고, 모델이 강해져도 이 한계는 남는다.</a:t>
             </a:r>
           </a:p>
           <a:p>
@@ -9625,7 +9639,7 @@
                 <a:latin typeface="맑은 고딕"/>
                 <a:ea typeface="맑은 고딕"/>
               </a:rPr>
-              <a:t>얻는 쪽을 키우는 조건</a:t>
+              <a:t>검사를 자동화해야 속도가 이득으로 남는다</a:t>
             </a:r>
             <a:r>
               <a:rPr sz="1800" b="0">
@@ -9645,7 +9659,7 @@
                 <a:latin typeface="맑은 고딕"/>
                 <a:ea typeface="맑은 고딕"/>
               </a:rPr>
-              <a:t> 만든 결과를 </a:t>
+              <a:t> 생성한 결과가 업무 규칙대로인지 </a:t>
             </a:r>
             <a:r>
               <a:rPr sz="1600" b="1">
@@ -9655,7 +9669,7 @@
                 <a:latin typeface="맑은 고딕"/>
                 <a:ea typeface="맑은 고딕"/>
               </a:rPr>
-              <a:t>실행하고 검증하는 자동화</a:t>
+              <a:t>자동으로 확인하지 못하면</a:t>
             </a:r>
             <a:r>
               <a:rPr sz="1600" b="0">
@@ -9665,7 +9679,7 @@
                 <a:latin typeface="맑은 고딕"/>
                 <a:ea typeface="맑은 고딕"/>
               </a:rPr>
-              <a:t>가 있어야 5가지 모두에서 얻는 쪽이 커진다.</a:t>
+              <a:t> 사람이 전부 읽어야 한다.</a:t>
             </a:r>
           </a:p>
         </p:txBody>
@@ -9851,8 +9865,8 @@
           </p:nvPr>
         </p:nvGraphicFramePr>
         <p:xfrm>
-          <a:off x="1941386" y="2112010"/>
-          <a:ext cx="5247640" cy="3873500"/>
+          <a:off x="1801686" y="2112010"/>
+          <a:ext cx="5527040" cy="3873500"/>
         </p:xfrm>
         <a:graphic>
           <a:graphicData uri="http://schemas.openxmlformats.org/drawingml/2006/table">
@@ -9860,7 +9874,7 @@
               <a:tblPr/>
               <a:tblGrid>
                 <a:gridCol w="1869440"/>
-                <a:gridCol w="3378200"/>
+                <a:gridCol w="3657600"/>
               </a:tblGrid>
               <a:tr h="288000">
                 <a:tc>
@@ -10405,7 +10419,7 @@
                           <a:ea typeface="맑은 고딕" panose="020B0503020000020004" pitchFamily="34" charset="-127"/>
                           <a:cs typeface="맑은 고딕"/>
                         </a:rPr>
-                        <a:t>기대값을 독립으로 정하는 일이 중요해진다</a:t>
+                        <a:t>기대값을 코드와 별도로 결정하는 일이 중요해진다</a:t>
                       </a:r>
                     </a:p>
                   </a:txBody>
@@ -10517,7 +10531,7 @@
                           <a:ea typeface="맑은 고딕" panose="020B0503020000020004" pitchFamily="34" charset="-127"/>
                           <a:cs typeface="맑은 고딕"/>
                         </a:rPr>
-                        <a:t>성능·보안·유지보수성을 자동으로 재고 고친다</a:t>
+                        <a:t>성능·보안·유지보수성을 자동으로 측정하고 고친다</a:t>
                       </a:r>
                     </a:p>
                   </a:txBody>
@@ -10871,7 +10885,7 @@
         <p:spPr>
           <a:xfrm>
             <a:off x="365760" y="4356610"/>
-            <a:ext cx="8412480" cy="1325880"/>
+            <a:ext cx="8412480" cy="1600200"/>
           </a:xfrm>
           <a:prstGeom prst="rect">
             <a:avLst/>
@@ -10923,7 +10937,7 @@
                 <a:latin typeface="맑은 고딕"/>
                 <a:ea typeface="맑은 고딕"/>
               </a:rPr>
-              <a:t> 원칙을 </a:t>
+              <a:t> 같은 6원칙을 </a:t>
             </a:r>
             <a:r>
               <a:rPr sz="1600" b="1">
@@ -10943,7 +10957,7 @@
                 <a:latin typeface="맑은 고딕"/>
                 <a:ea typeface="맑은 고딕"/>
               </a:rPr>
-              <a:t> 적용한다.</a:t>
+              <a:t> 적용하는 것이 달라진 점이다.</a:t>
             </a:r>
           </a:p>
           <a:p>
@@ -10966,7 +10980,7 @@
                 <a:latin typeface="맑은 고딕"/>
                 <a:ea typeface="맑은 고딕"/>
               </a:rPr>
-              <a:t>검증 기준의 독립성</a:t>
+              <a:t>기대값은 코드와 별도로 결정한다</a:t>
             </a:r>
             <a:r>
               <a:rPr sz="1800" b="0">
@@ -10986,7 +11000,7 @@
                 <a:latin typeface="맑은 고딕"/>
                 <a:ea typeface="맑은 고딕"/>
               </a:rPr>
-              <a:t> 테스트와 명세를 만드는 일은 빨라졌지만, 그 기대값을 </a:t>
+              <a:t> 테스트를 작성하는 일은 빨라지고, 주문 금액 2,000원처럼 </a:t>
             </a:r>
             <a:r>
               <a:rPr sz="1600" b="1">
@@ -10996,7 +11010,7 @@
                 <a:latin typeface="맑은 고딕"/>
                 <a:ea typeface="맑은 고딕"/>
               </a:rPr>
-              <a:t>정의하는 것</a:t>
+              <a:t>무엇을 통과로 볼지 결정하는 일</a:t>
             </a:r>
             <a:r>
               <a:rPr sz="1600" b="0">
@@ -11006,7 +11020,7 @@
                 <a:latin typeface="맑은 고딕"/>
                 <a:ea typeface="맑은 고딕"/>
               </a:rPr>
-              <a:t>이 더 중요해졌다.</a:t>
+              <a:t>이 더 중요해진다.</a:t>
             </a:r>
           </a:p>
         </p:txBody>
@@ -11981,7 +11995,7 @@
                 <a:latin typeface="맑은 고딕"/>
                 <a:ea typeface="맑은 고딕"/>
               </a:rPr>
-              <a:t>LLM은 이 지식을 모른다</a:t>
+              <a:t>LLM은 업무 규칙을 모른다</a:t>
             </a:r>
             <a:r>
               <a:rPr sz="1800" b="0">
@@ -12001,7 +12015,7 @@
                 <a:latin typeface="맑은 고딕"/>
                 <a:ea typeface="맑은 고딕"/>
               </a:rPr>
-              <a:t> 주어지지 않으면 흔히 보이는 답을 고른다. 그 답은 다른 회사에서는 맞는 답이라 틀린 줄 알기 어렵다.</a:t>
+              <a:t> 주어지지 않으면 임의의 답을 선택한다. 2,400원은 다른 쇼핑몰에서 맞는 답일 수 있다.</a:t>
             </a:r>
           </a:p>
           <a:p>
@@ -13567,7 +13581,7 @@
                 <a:latin typeface="맑은 고딕"/>
                 <a:ea typeface="맑은 고딕"/>
               </a:rPr>
-              <a:t>바뀌는 것</a:t>
+              <a:t>사람의 일은 코드 작성에서 결정으로 바뀐다</a:t>
             </a:r>
             <a:r>
               <a:rPr sz="1800" b="0">
@@ -13587,7 +13601,7 @@
                 <a:latin typeface="맑은 고딕"/>
                 <a:ea typeface="맑은 고딕"/>
               </a:rPr>
-              <a:t> 코드를 작성하고 읽던 일이 업무 규칙을 정하고 검증하는 일로 옮겨 간다.</a:t>
+              <a:t> 사람은 업무 규칙을 정하고 검증한다.</a:t>
             </a:r>
           </a:p>
           <a:p>
@@ -13610,7 +13624,7 @@
                 <a:latin typeface="맑은 고딕"/>
                 <a:ea typeface="맑은 고딕"/>
               </a:rPr>
-              <a:t>바뀌지 않는 것</a:t>
+              <a:t>책임은 세 방식에서 같다</a:t>
             </a:r>
             <a:r>
               <a:rPr sz="1800" b="0">
@@ -13653,7 +13667,7 @@
                 <a:latin typeface="맑은 고딕"/>
                 <a:ea typeface="맑은 고딕"/>
               </a:rPr>
-              <a:t>"모두 에이전트"가 아니다</a:t>
+              <a:t>모든 작업을 에이전트에게 맡기지 않는다</a:t>
             </a:r>
             <a:r>
               <a:rPr sz="1800" b="0">
@@ -13673,7 +13687,7 @@
                 <a:latin typeface="맑은 고딕"/>
                 <a:ea typeface="맑은 고딕"/>
               </a:rPr>
-              <a:t> 작업마다 가장 단순한 충분한 형태를 고른다.</a:t>
+              <a:t> 작업마다 가장 단순한 형태를 고른다.</a:t>
             </a:r>
           </a:p>
           <a:p>
@@ -13689,6 +13703,16 @@
               <a:buChar char=""/>
             </a:pPr>
             <a:r>
+              <a:rPr sz="1800" b="0">
+                <a:solidFill>
+                  <a:srgbClr val="000000"/>
+                </a:solidFill>
+                <a:latin typeface="맑은 고딕"/>
+                <a:ea typeface="맑은 고딕"/>
+              </a:rPr>
+              <a:t>코드 중심을 </a:t>
+            </a:r>
+            <a:r>
               <a:rPr sz="1800" b="1">
                 <a:solidFill>
                   <a:srgbClr val="000000"/>
@@ -13696,7 +13720,7 @@
                 <a:latin typeface="맑은 고딕"/>
                 <a:ea typeface="맑은 고딕"/>
               </a:rPr>
-              <a:t>다른 이름</a:t>
+              <a:t>SE 1.0</a:t>
             </a:r>
             <a:r>
               <a:rPr sz="1800" b="0">
@@ -13706,40 +13730,10 @@
                 <a:latin typeface="맑은 고딕"/>
                 <a:ea typeface="맑은 고딕"/>
               </a:rPr>
-              <a:t> —</a:t>
-            </a:r>
-            <a:r>
-              <a:rPr sz="1600" b="0">
-                <a:solidFill>
-                  <a:srgbClr val="000000"/>
-                </a:solidFill>
-                <a:latin typeface="맑은 고딕"/>
-                <a:ea typeface="맑은 고딕"/>
-              </a:rPr>
-              <a:t> 코드 중심이 </a:t>
-            </a:r>
-            <a:r>
-              <a:rPr sz="1600" b="1">
-                <a:solidFill>
-                  <a:srgbClr val="000000"/>
-                </a:solidFill>
-                <a:latin typeface="맑은 고딕"/>
-                <a:ea typeface="맑은 고딕"/>
-              </a:rPr>
-              <a:t>SE 1.0</a:t>
-            </a:r>
-            <a:r>
-              <a:rPr sz="1600" b="0">
-                <a:solidFill>
-                  <a:srgbClr val="000000"/>
-                </a:solidFill>
-                <a:latin typeface="맑은 고딕"/>
-                <a:ea typeface="맑은 고딕"/>
-              </a:rPr>
-              <a:t>, AI 지원이 </a:t>
-            </a:r>
-            <a:r>
-              <a:rPr sz="1600" b="1">
+              <a:t>, AI 지원을 </a:t>
+            </a:r>
+            <a:r>
+              <a:rPr sz="1800" b="1">
                 <a:solidFill>
                   <a:srgbClr val="000000"/>
                 </a:solidFill>
@@ -13749,17 +13743,17 @@
               <a:t>SE 2.0</a:t>
             </a:r>
             <a:r>
-              <a:rPr sz="1600" b="0">
-                <a:solidFill>
-                  <a:srgbClr val="000000"/>
-                </a:solidFill>
-                <a:latin typeface="맑은 고딕"/>
-                <a:ea typeface="맑은 고딕"/>
-              </a:rPr>
-              <a:t>, AI-native가 </a:t>
-            </a:r>
-            <a:r>
-              <a:rPr sz="1600" b="1">
+              <a:rPr sz="1800" b="0">
+                <a:solidFill>
+                  <a:srgbClr val="000000"/>
+                </a:solidFill>
+                <a:latin typeface="맑은 고딕"/>
+                <a:ea typeface="맑은 고딕"/>
+              </a:rPr>
+              <a:t>, AI-native를 </a:t>
+            </a:r>
+            <a:r>
+              <a:rPr sz="1800" b="1">
                 <a:solidFill>
                   <a:srgbClr val="000000"/>
                 </a:solidFill>
@@ -13769,14 +13763,14 @@
               <a:t>SE 3.0</a:t>
             </a:r>
             <a:r>
-              <a:rPr sz="1600" b="0">
-                <a:solidFill>
-                  <a:srgbClr val="000000"/>
-                </a:solidFill>
-                <a:latin typeface="맑은 고딕"/>
-                <a:ea typeface="맑은 고딕"/>
-              </a:rPr>
-              <a:t>이다.</a:t>
+              <a:rPr sz="1800" b="0">
+                <a:solidFill>
+                  <a:srgbClr val="000000"/>
+                </a:solidFill>
+                <a:latin typeface="맑은 고딕"/>
+                <a:ea typeface="맑은 고딕"/>
+              </a:rPr>
+              <a:t>이라고도 부른다.</a:t>
             </a:r>
           </a:p>
         </p:txBody>
@@ -14021,7 +14015,7 @@
                 <a:latin typeface="맑은 고딕"/>
                 <a:ea typeface="맑은 고딕"/>
               </a:rPr>
-              <a:t>같은 "주문한다"를 세 방식으로 개발하면 </a:t>
+              <a:t>"주문한다"를 각기 다른 3가지 방식으로 개발하면 </a:t>
             </a:r>
             <a:r>
               <a:rPr sz="1800" b="1">
@@ -14031,7 +14025,7 @@
                 <a:latin typeface="맑은 고딕"/>
                 <a:ea typeface="맑은 고딕"/>
               </a:rPr>
-              <a:t>사람이 직접 손대는 자리</a:t>
+              <a:t>사람이 하는 일</a:t>
             </a:r>
             <a:r>
               <a:rPr sz="1800" b="0">
@@ -14041,7 +14035,7 @@
                 <a:latin typeface="맑은 고딕"/>
                 <a:ea typeface="맑은 고딕"/>
               </a:rPr>
-              <a:t>가 달라진다.</a:t>
+              <a:t>이 달라진다.</a:t>
             </a:r>
           </a:p>
           <a:p>
@@ -14127,7 +14121,7 @@
                 <a:latin typeface="맑은 고딕"/>
                 <a:ea typeface="맑은 고딕"/>
               </a:rPr>
-              <a:t> LLM이 다음 줄을 제안하고 사람이 받아들인다.</a:t>
+              <a:t> LLM이 제안하고 사람이 받아들인다.</a:t>
             </a:r>
           </a:p>
           <a:p>
@@ -14170,7 +14164,7 @@
                 <a:latin typeface="맑은 고딕"/>
                 <a:ea typeface="맑은 고딕"/>
               </a:rPr>
-              <a:t> 에이전트가 코드와 테스트를 만들고, 사람은 검사의 결과로 판단한다.</a:t>
+              <a:t> 에이전트가 코드와 테스트를 생성하고, 사람은 검사의 결과로 판단한다.</a:t>
             </a:r>
           </a:p>
         </p:txBody>
@@ -14476,7 +14470,7 @@
                 <a:latin typeface="맑은 고딕"/>
                 <a:ea typeface="맑은 고딕"/>
               </a:rPr>
-              <a:t>결과의 동작만 보고 받아들이는 방식이 </a:t>
+              <a:t>결과만 보고 받아들이는 방식을 </a:t>
             </a:r>
             <a:r>
               <a:rPr sz="1800" b="1">
@@ -14506,7 +14500,7 @@
                 <a:latin typeface="맑은 고딕"/>
                 <a:ea typeface="맑은 고딕"/>
               </a:rPr>
-              <a:t>이다.</a:t>
+              <a:t>이라고 부른다.</a:t>
             </a:r>
           </a:p>
           <a:p>
@@ -14688,6 +14682,16 @@
               <a:buChar char=""/>
             </a:pPr>
             <a:r>
+              <a:rPr sz="1800" b="0">
+                <a:solidFill>
+                  <a:srgbClr val="000000"/>
+                </a:solidFill>
+                <a:latin typeface="맑은 고딕"/>
+                <a:ea typeface="맑은 고딕"/>
+              </a:rPr>
+              <a:t>숙련자가 규율을 지키며 LLM을 사용하는 방식을 </a:t>
+            </a:r>
+            <a:r>
               <a:rPr sz="1800" b="1">
                 <a:solidFill>
                   <a:srgbClr val="000000"/>
@@ -14715,17 +14719,7 @@
                 <a:latin typeface="맑은 고딕"/>
                 <a:ea typeface="맑은 고딕"/>
               </a:rPr>
-              <a:t> —</a:t>
-            </a:r>
-            <a:r>
-              <a:rPr sz="1600" b="0">
-                <a:solidFill>
-                  <a:srgbClr val="000000"/>
-                </a:solidFill>
-                <a:latin typeface="맑은 고딕"/>
-                <a:ea typeface="맑은 고딕"/>
-              </a:rPr>
-              <a:t> 규율을 지키며 LLM을 사용하는 숙련자의 방식을 가리키는 이름이다.</a:t>
+              <a:t>이라고 부른다.</a:t>
             </a:r>
           </a:p>
           <a:p>
@@ -14821,7 +14815,7 @@
                 <a:latin typeface="맑은 고딕"/>
                 <a:ea typeface="맑은 고딕"/>
               </a:rPr>
-              <a:t>AI는 팀의 습관을 키운다</a:t>
+              <a:t>AI는 팀이 이미 하는 방식을 빠르게 한다</a:t>
             </a:r>
             <a:r>
               <a:rPr sz="1800" b="0">
@@ -14923,7 +14917,7 @@
                 <a:latin typeface="맑은 고딕"/>
                 <a:ea typeface="맑은 고딕"/>
               </a:rPr>
-              <a:t>05. 활동마다 사람과 AI</a:t>
+              <a:t>05. 사람과 AI가 하는 일</a:t>
             </a:r>
           </a:p>
         </p:txBody>
@@ -15297,7 +15291,7 @@
                 <a:latin typeface="맑은 고딕"/>
                 <a:ea typeface="맑은 고딕"/>
               </a:rPr>
-              <a:t>우선순위</a:t>
+              <a:t>우선순위를 사람이 정한다</a:t>
             </a:r>
             <a:r>
               <a:rPr sz="1800" b="0">
@@ -15317,7 +15311,7 @@
                 <a:latin typeface="맑은 고딕"/>
                 <a:ea typeface="맑은 고딕"/>
               </a:rPr>
-              <a:t> 첫 릴리스에 "주문한다"를 먼저 맡기기로 정한다.</a:t>
+              <a:t> 첫 릴리스에 "주문한다"를 포함한다.</a:t>
             </a:r>
           </a:p>
           <a:p>
@@ -15340,7 +15334,7 @@
                 <a:latin typeface="맑은 고딕"/>
                 <a:ea typeface="맑은 고딕"/>
               </a:rPr>
-              <a:t>수용 기준</a:t>
+              <a:t>수용 기준을 사람이 정한다</a:t>
             </a:r>
             <a:r>
               <a:rPr sz="1800" b="0">
@@ -15383,7 +15377,7 @@
                 <a:latin typeface="맑은 고딕"/>
                 <a:ea typeface="맑은 고딕"/>
               </a:rPr>
-              <a:t>결과 확인</a:t>
+              <a:t>결과를 사람이 확인한다</a:t>
             </a:r>
             <a:r>
               <a:rPr sz="1800" b="0">
@@ -15403,7 +15397,7 @@
                 <a:latin typeface="맑은 고딕"/>
                 <a:ea typeface="맑은 고딕"/>
               </a:rPr>
-              <a:t> 데모가 아니라 업무 규칙의 테스트로 받아들인다.</a:t>
+              <a:t> 데모가 아니라 업무 규칙의 테스트 결과를 보고 받아들일지 판단한다.</a:t>
             </a:r>
           </a:p>
         </p:txBody>
@@ -15473,7 +15467,7 @@
                 <a:latin typeface="맑은 고딕"/>
                 <a:ea typeface="맑은 고딕"/>
               </a:rPr>
-              <a:t>활동마다 사람과 AI</a:t>
+              <a:t>활동마다 누가 결정하는가?</a:t>
             </a:r>
           </a:p>
           <a:p>
@@ -15485,7 +15479,7 @@
                 <a:latin typeface="맑은 고딕"/>
                 <a:ea typeface="맑은 고딕"/>
               </a:rPr>
-              <a:t>05. 활동마다 사람과 AI</a:t>
+              <a:t>05. 사람과 AI가 하는 일</a:t>
             </a:r>
           </a:p>
         </p:txBody>
@@ -17574,7 +17568,7 @@
                 <a:latin typeface="맑은 고딕"/>
                 <a:ea typeface="맑은 고딕"/>
               </a:rPr>
-              <a:t>. 결정을 AI에게 넘기면 첫 시도처럼 추측이 결과에 들어온다.</a:t>
+              <a:t>. 결정을 AI에게 넘기면 첫 시도처럼 AI의 추측이 결과에 섞인다.</a:t>
             </a:r>
           </a:p>
         </p:txBody>
@@ -17740,7 +17734,7 @@
                 <a:latin typeface="맑은 고딕"/>
                 <a:ea typeface="맑은 고딕"/>
               </a:rPr>
-              <a:t>예</a:t>
+              <a:t>에이전트가 결정하지 않고 묻게 한다</a:t>
             </a:r>
             <a:r>
               <a:rPr sz="1800" b="0">
@@ -17760,7 +17754,7 @@
                 <a:latin typeface="맑은 고딕"/>
                 <a:ea typeface="맑은 고딕"/>
               </a:rPr>
-              <a:t> 에이전트는 "결제가 거절되면 주문은 어떻게 되나요?"를 정하지 않고 묻는다. 정하는 것은 업무 담당자와 개발자다.</a:t>
+              <a:t> "결제가 거절되면 주문은 어떻게 되나요?"를 정하는 것은 업무 담당자와 개발자다.</a:t>
             </a:r>
           </a:p>
         </p:txBody>
@@ -17936,7 +17930,7 @@
                 <a:latin typeface="맑은 고딕"/>
                 <a:ea typeface="맑은 고딕"/>
               </a:rPr>
-              <a:t>02. LLM이라는 재료</a:t>
+              <a:t>02. LLM이라는 도구</a:t>
             </a:r>
           </a:p>
           <a:p>
@@ -18495,7 +18489,7 @@
                 <a:latin typeface="맑은 고딕"/>
                 <a:ea typeface="맑은 고딕"/>
               </a:rPr>
-              <a:t>그 결정을 재는 검사</a:t>
+              <a:t>그 결정을 확인하는 검사</a:t>
             </a:r>
             <a:r>
               <a:rPr sz="1800" b="0">
@@ -18505,7 +18499,7 @@
                 <a:latin typeface="맑은 고딕"/>
                 <a:ea typeface="맑은 고딕"/>
               </a:rPr>
-              <a:t>와 짝을 이룬다. 짝이 없는 결정은 지켜졌는지 아무도 모른다.</a:t>
+              <a:t>와 짝을 이뤄야 한다. 짝이 없는 결정은 지켜졌는지 아무도 모른다.</a:t>
             </a:r>
           </a:p>
           <a:p>
@@ -18528,7 +18522,7 @@
                 <a:latin typeface="맑은 고딕"/>
                 <a:ea typeface="맑은 고딕"/>
               </a:rPr>
-              <a:t>왼쪽에서 정하지 않은 것은 오른쪽 검사에 없다</a:t>
+              <a:t>정하지 않은 것은 검사로 만들 수 없다</a:t>
             </a:r>
             <a:r>
               <a:rPr sz="1800" b="0">
@@ -18548,7 +18542,7 @@
                 <a:latin typeface="맑은 고딕"/>
                 <a:ea typeface="맑은 고딕"/>
               </a:rPr>
-              <a:t> 그리고 검사가 없는 것은 에이전트에게 맡길 수 없다.</a:t>
+              <a:t> 검사가 없는 일은 에이전트에게 맡길 수 없다.</a:t>
             </a:r>
           </a:p>
           <a:p>
@@ -18571,7 +18565,7 @@
                 <a:latin typeface="맑은 고딕"/>
                 <a:ea typeface="맑은 고딕"/>
               </a:rPr>
-              <a:t>검사는 사람이 보기 전에 돌아간다</a:t>
+              <a:t>에이전트가 사람에게 보이기 전에 검사를 실행한다</a:t>
             </a:r>
             <a:r>
               <a:rPr sz="1800" b="0">
@@ -18591,7 +18585,7 @@
                 <a:latin typeface="맑은 고딕"/>
                 <a:ea typeface="맑은 고딕"/>
               </a:rPr>
-              <a:t> 에이전트가 실패를 읽고 스스로 고친다.</a:t>
+              <a:t> 실패한 검사를 읽고 스스로 고친다.</a:t>
             </a:r>
           </a:p>
         </p:txBody>
@@ -18633,7 +18627,7 @@
                 <a:latin typeface="맑은 고딕"/>
                 <a:ea typeface="맑은 고딕"/>
               </a:rPr>
-              <a:t>결정과 그 결정을 재는 검사</a:t>
+              <a:t>결정과 그 결정을 확인하는 검사</a:t>
             </a:r>
           </a:p>
         </p:txBody>
@@ -19006,7 +19000,7 @@
                           <a:ea typeface="맑은 고딕" panose="020B0503020000020004" pitchFamily="34" charset="-127"/>
                           <a:cs typeface="맑은 고딕"/>
                         </a:rPr>
-                        <a:t>그 결정을 재는 검사</a:t>
+                        <a:t>그 결정을 확인하는 검사</a:t>
                       </a:r>
                     </a:p>
                   </a:txBody>
@@ -19622,7 +19616,7 @@
                 <a:latin typeface="맑은 고딕"/>
                 <a:ea typeface="맑은 고딕"/>
               </a:rPr>
-              <a:t>정하지 않은 결정</a:t>
+              <a:t>정하지 않은 업무 규칙</a:t>
             </a:r>
             <a:r>
               <a:rPr sz="1800" b="0">
@@ -19632,7 +19626,7 @@
                 <a:latin typeface="맑은 고딕"/>
                 <a:ea typeface="맑은 고딕"/>
               </a:rPr>
-              <a:t>이 추측으로 채워진 것이다.</a:t>
+              <a:t>을 에이전트가 추측으로 채운 것이다.</a:t>
             </a:r>
           </a:p>
         </p:txBody>
@@ -19798,7 +19792,7 @@
                 <a:latin typeface="맑은 고딕"/>
                 <a:ea typeface="맑은 고딕"/>
               </a:rPr>
-              <a:t>공백에는 기대값이 없다</a:t>
+              <a:t>정하지 않은 것에는 기대값이 없다</a:t>
             </a:r>
             <a:r>
               <a:rPr sz="1800" b="0">
@@ -19818,7 +19812,7 @@
                 <a:latin typeface="맑은 고딕"/>
                 <a:ea typeface="맑은 고딕"/>
               </a:rPr>
-              <a:t> 그래서 에이전트의 테스트가 모두 통과했다. 통과는 공백을 보여 주지 못한다.</a:t>
+              <a:t> 에이전트의 테스트 3개가 모두 통과한 이유이며, 통과는 정하지 않은 것을 드러내지 못한다.</a:t>
             </a:r>
           </a:p>
           <a:p>
@@ -19841,7 +19835,7 @@
                 <a:latin typeface="맑은 고딕"/>
                 <a:ea typeface="맑은 고딕"/>
               </a:rPr>
-              <a:t>녹색은 작성한 검사만큼만 보장한다</a:t>
+              <a:t>품질은 작성한 검사만큼만 보장한다</a:t>
             </a:r>
             <a:r>
               <a:rPr sz="1800" b="0">
@@ -19861,7 +19855,7 @@
                 <a:latin typeface="맑은 고딕"/>
                 <a:ea typeface="맑은 고딕"/>
               </a:rPr>
-              <a:t> 무엇을 확인했는지는 검사의 목록이 말한다.</a:t>
+              <a:t> 주문 금액을 측정하는 검사가 없으면 2,400원을 청구해도 통과한다.</a:t>
             </a:r>
           </a:p>
         </p:txBody>
@@ -21380,7 +21374,7 @@
                 <a:latin typeface="맑은 고딕"/>
                 <a:ea typeface="맑은 고딕"/>
               </a:rPr>
-              <a:t>누가 끌고 가는지와, 산출물을 만드는 비용과, 검증의 자리</a:t>
+              <a:t>누가 끌고 가는지, 산출물을 만드는 비용, 검증하는 시점</a:t>
             </a:r>
             <a:r>
               <a:rPr sz="1800" b="0">
@@ -21390,7 +21384,7 @@
                 <a:latin typeface="맑은 고딕"/>
                 <a:ea typeface="맑은 고딕"/>
               </a:rPr>
-              <a:t>다.</a:t>
+              <a:t>이다.</a:t>
             </a:r>
           </a:p>
           <a:p>
@@ -21932,7 +21926,7 @@
                 <a:latin typeface="맑은 고딕"/>
                 <a:ea typeface="맑은 고딕"/>
               </a:rPr>
-              <a:t>단계의 순서가 아니다</a:t>
+              <a:t>6개 활동은 절차가 아니다</a:t>
             </a:r>
             <a:r>
               <a:rPr sz="1800" b="0">
@@ -21952,7 +21946,7 @@
                 <a:latin typeface="맑은 고딕"/>
                 <a:ea typeface="맑은 고딕"/>
               </a:rPr>
-              <a:t> 작업 단위 하나마다 이 6단계를 한 바퀴 돈다.</a:t>
+              <a:t> 작업 단위 하나마다 전부 한 번씩 수행한다.</a:t>
             </a:r>
           </a:p>
           <a:p>
@@ -21975,7 +21969,7 @@
                 <a:latin typeface="맑은 고딕"/>
                 <a:ea typeface="맑은 고딕"/>
               </a:rPr>
-              <a:t>분석을 건너뛸 이유가 없다</a:t>
+              <a:t>구현이 빨라도 분석은 줄지 않는다</a:t>
             </a:r>
             <a:r>
               <a:rPr sz="1800" b="0">
@@ -21995,7 +21989,7 @@
                 <a:latin typeface="맑은 고딕"/>
                 <a:ea typeface="맑은 고딕"/>
               </a:rPr>
-              <a:t> 코드가 빨라진 것이 분석을 생략할 이유는 아니다.</a:t>
+              <a:t> 무엇을 만들지 결정하는 일은 사람의 몫으로 남는다.</a:t>
             </a:r>
           </a:p>
           <a:p>
@@ -22018,7 +22012,7 @@
                 <a:latin typeface="맑은 고딕"/>
                 <a:ea typeface="맑은 고딕"/>
               </a:rPr>
-              <a:t>검증은 구현 뒤가 아니다</a:t>
+              <a:t>검증은 구현 뒤에 시작하지 않는다</a:t>
             </a:r>
             <a:r>
               <a:rPr sz="1800" b="0">
@@ -22038,7 +22032,7 @@
                 <a:latin typeface="맑은 고딕"/>
                 <a:ea typeface="맑은 고딕"/>
               </a:rPr>
-              <a:t> 받아들일 조건을 요구에서 정하고 계속 확인한다.</a:t>
+              <a:t> 받아들일 조건을 요구에서 결정해 계속 확인한다.</a:t>
             </a:r>
           </a:p>
         </p:txBody>
@@ -22108,7 +22102,7 @@
                 <a:latin typeface="맑은 고딕"/>
                 <a:ea typeface="맑은 고딕"/>
               </a:rPr>
-              <a:t>과정의 지도</a:t>
+              <a:t>맡기지 않는 작업 3가지</a:t>
             </a:r>
           </a:p>
           <a:p>
@@ -22120,7 +22114,7 @@
                 <a:latin typeface="맑은 고딕"/>
                 <a:ea typeface="맑은 고딕"/>
               </a:rPr>
-              <a:t>06. 결정과 검사의 짝</a:t>
+              <a:t>07. 맡길 작업과 맡기지 않을 작업</a:t>
             </a:r>
           </a:p>
         </p:txBody>
@@ -22156,509 +22150,6 @@
                 </a:solidFill>
               </a:rPr>
               <a:t>- 24 -</a:t>
-            </a:r>
-          </a:p>
-        </p:txBody>
-      </p:sp>
-      <p:sp>
-        <p:nvSpPr>
-          <p:cNvPr id="5" name="텍스트 개체 틀 4">
-            <a:extLst>
-              <a:ext uri="{FF2B5EF4-FFF2-40B4-BE49-F238E27FC236}">
-                <a16:creationId xmlns:a16="http://schemas.microsoft.com/office/drawing/2014/main" id="{D66274C8-E16F-5AEB-614B-D8D32DA3E8C6}"/>
-              </a:ext>
-            </a:extLst>
-          </p:cNvPr>
-          <p:cNvSpPr>
-            <a:spLocks noGrp="1"/>
-          </p:cNvSpPr>
-          <p:nvPr>
-            <p:ph type="body" sz="quarter" idx="11"/>
-          </p:nvPr>
-        </p:nvSpPr>
-        <p:spPr/>
-        <p:txBody>
-          <a:bodyPr/>
-          <a:lstStyle/>
-          <a:p>
-            <a:r>
-              <a:rPr kumimoji="1" lang="en-US" altLang="ko-KR" sz="1400" dirty="0" err="1"/>
-              <a:t>01. 사람의 일과 AI의 일</a:t>
-            </a:r>
-          </a:p>
-        </p:txBody>
-      </p:sp>
-      <p:sp>
-        <p:nvSpPr>
-          <p:cNvPr id="6" name="텍스트 개체 틀 5">
-            <a:extLst>
-              <a:ext uri="{FF2B5EF4-FFF2-40B4-BE49-F238E27FC236}">
-                <a16:creationId xmlns:a16="http://schemas.microsoft.com/office/drawing/2014/main" id="{A24E58E1-194B-A320-AEEE-24D08685BB67}"/>
-              </a:ext>
-            </a:extLst>
-          </p:cNvPr>
-          <p:cNvSpPr>
-            <a:spLocks noGrp="1"/>
-          </p:cNvSpPr>
-          <p:nvPr>
-            <p:ph type="body" sz="quarter" idx="12"/>
-          </p:nvPr>
-        </p:nvSpPr>
-        <p:spPr/>
-        <p:txBody>
-          <a:bodyPr/>
-          <a:lstStyle/>
-          <a:p>
-            <a:endParaRPr kumimoji="1" lang="ko-KR" altLang="en-US" dirty="0"/>
-          </a:p>
-        </p:txBody>
-      </p:sp>
-      <p:sp>
-        <p:nvSpPr>
-          <p:cNvPr id="7" name="텍스트 개체 틀 6">
-            <a:extLst>
-              <a:ext uri="{FF2B5EF4-FFF2-40B4-BE49-F238E27FC236}">
-                <a16:creationId xmlns:a16="http://schemas.microsoft.com/office/drawing/2014/main" id="{A219F420-613B-6234-45F6-0955A9A4505F}"/>
-              </a:ext>
-            </a:extLst>
-          </p:cNvPr>
-          <p:cNvSpPr>
-            <a:spLocks noGrp="1"/>
-          </p:cNvSpPr>
-          <p:nvPr>
-            <p:ph type="body" sz="quarter" idx="13"/>
-          </p:nvPr>
-        </p:nvSpPr>
-        <p:spPr/>
-        <p:txBody>
-          <a:bodyPr/>
-          <a:lstStyle/>
-          <a:p>
-            <a:endParaRPr kumimoji="1" lang="en-US" altLang="ko-KR" dirty="0"/>
-          </a:p>
-        </p:txBody>
-      </p:sp>
-      <p:sp>
-        <p:nvSpPr>
-          <p:cNvPr id="8" name="내용 개체 틀 7">
-            <a:extLst>
-              <a:ext uri="{FF2B5EF4-FFF2-40B4-BE49-F238E27FC236}">
-                <a16:creationId xmlns:a16="http://schemas.microsoft.com/office/drawing/2014/main" id="{BEBA2C4A-B0BF-F2E4-EA6E-614C99CBA184}"/>
-              </a:ext>
-            </a:extLst>
-          </p:cNvPr>
-          <p:cNvSpPr>
-            <a:spLocks noGrp="1"/>
-          </p:cNvSpPr>
-          <p:nvPr>
-            <p:ph idx="1"/>
-          </p:nvPr>
-        </p:nvSpPr>
-        <p:spPr>
-          <a:xfrm>
-            <a:off x="365760" y="960120"/>
-            <a:ext cx="8412480" cy="2788920"/>
-          </a:xfrm>
-        </p:spPr>
-        <p:txBody>
-          <a:bodyPr>
-            <a:normAutofit/>
-          </a:bodyPr>
-          <a:lstStyle/>
-          <a:p>
-            <a:pPr marL="0" indent="0">
-              <a:spcBef>
-                <a:spcPts val="600"/>
-              </a:spcBef>
-              <a:spcAft>
-                <a:spcPts val="600"/>
-              </a:spcAft>
-              <a:buNone/>
-            </a:pPr>
-            <a:r>
-              <a:rPr sz="1800" b="0">
-                <a:solidFill>
-                  <a:srgbClr val="000000"/>
-                </a:solidFill>
-                <a:latin typeface="맑은 고딕"/>
-                <a:ea typeface="맑은 고딕"/>
-              </a:rPr>
-              <a:t>이 11세션은 </a:t>
-            </a:r>
-            <a:r>
-              <a:rPr sz="1800" b="1">
-                <a:solidFill>
-                  <a:srgbClr val="000000"/>
-                </a:solidFill>
-                <a:latin typeface="맑은 고딕"/>
-                <a:ea typeface="맑은 고딕"/>
-              </a:rPr>
-              <a:t>결정하는 영역과 실행하고 증거를 받는 영역</a:t>
-            </a:r>
-            <a:r>
-              <a:rPr sz="1800" b="0">
-                <a:solidFill>
-                  <a:srgbClr val="000000"/>
-                </a:solidFill>
-                <a:latin typeface="맑은 고딕"/>
-                <a:ea typeface="맑은 고딕"/>
-              </a:rPr>
-              <a:t>으로 나뉜다. 한 과제를 작업 단위로 나눠 이 두 영역을 수행한다.</a:t>
-            </a:r>
-          </a:p>
-          <a:p>
-            <a:pPr lvl="2" marL="723900" indent="-368300">
-              <a:spcBef>
-                <a:spcPts val="600"/>
-              </a:spcBef>
-              <a:spcAft>
-                <a:spcPts val="600"/>
-              </a:spcAft>
-              <a:buSzPct val="90000"/>
-              <a:buFont typeface="Wingdings" pitchFamily="2" charset="2"/>
-              <a:buChar char=""/>
-            </a:pPr>
-            <a:r>
-              <a:rPr sz="1800" b="1">
-                <a:solidFill>
-                  <a:srgbClr val="000000"/>
-                </a:solidFill>
-                <a:latin typeface="맑은 고딕"/>
-                <a:ea typeface="맑은 고딕"/>
-              </a:rPr>
-              <a:t>사람의 결정</a:t>
-            </a:r>
-            <a:r>
-              <a:rPr sz="1800" b="0">
-                <a:solidFill>
-                  <a:srgbClr val="000000"/>
-                </a:solidFill>
-                <a:latin typeface="맑은 고딕"/>
-                <a:ea typeface="맑은 고딕"/>
-              </a:rPr>
-              <a:t> —</a:t>
-            </a:r>
-            <a:r>
-              <a:rPr sz="1600" b="0">
-                <a:solidFill>
-                  <a:srgbClr val="000000"/>
-                </a:solidFill>
-                <a:latin typeface="맑은 고딕"/>
-                <a:ea typeface="맑은 고딕"/>
-              </a:rPr>
-              <a:t> 요구와 수용 기준, 정적 모델, 동적 모델, 아키텍처, 설계와 작업 단위다.</a:t>
-            </a:r>
-          </a:p>
-          <a:p>
-            <a:pPr lvl="2" marL="723900" indent="-368300">
-              <a:spcBef>
-                <a:spcPts val="600"/>
-              </a:spcBef>
-              <a:spcAft>
-                <a:spcPts val="600"/>
-              </a:spcAft>
-              <a:buSzPct val="90000"/>
-              <a:buFont typeface="Wingdings" pitchFamily="2" charset="2"/>
-              <a:buChar char=""/>
-            </a:pPr>
-            <a:r>
-              <a:rPr sz="1800" b="1">
-                <a:solidFill>
-                  <a:srgbClr val="000000"/>
-                </a:solidFill>
-                <a:latin typeface="맑은 고딕"/>
-                <a:ea typeface="맑은 고딕"/>
-              </a:rPr>
-              <a:t>학습 순서이지 개발 절차가 아니다</a:t>
-            </a:r>
-            <a:r>
-              <a:rPr sz="1800" b="0">
-                <a:solidFill>
-                  <a:srgbClr val="000000"/>
-                </a:solidFill>
-                <a:latin typeface="맑은 고딕"/>
-                <a:ea typeface="맑은 고딕"/>
-              </a:rPr>
-              <a:t> —</a:t>
-            </a:r>
-            <a:r>
-              <a:rPr sz="1600" b="0">
-                <a:solidFill>
-                  <a:srgbClr val="000000"/>
-                </a:solidFill>
-                <a:latin typeface="맑은 고딕"/>
-                <a:ea typeface="맑은 고딕"/>
-              </a:rPr>
-              <a:t> 작업 단위마다 결정과 검사를 한 바퀴 돈다.</a:t>
-            </a:r>
-          </a:p>
-          <a:p>
-            <a:pPr lvl="2" marL="723900" indent="-368300">
-              <a:spcBef>
-                <a:spcPts val="600"/>
-              </a:spcBef>
-              <a:spcAft>
-                <a:spcPts val="600"/>
-              </a:spcAft>
-              <a:buSzPct val="90000"/>
-              <a:buFont typeface="Wingdings" pitchFamily="2" charset="2"/>
-              <a:buChar char=""/>
-            </a:pPr>
-            <a:r>
-              <a:rPr sz="1800" b="1">
-                <a:solidFill>
-                  <a:srgbClr val="000000"/>
-                </a:solidFill>
-                <a:latin typeface="맑은 고딕"/>
-                <a:ea typeface="맑은 고딕"/>
-              </a:rPr>
-              <a:t>오래 남는 것</a:t>
-            </a:r>
-            <a:r>
-              <a:rPr sz="1800" b="0">
-                <a:solidFill>
-                  <a:srgbClr val="000000"/>
-                </a:solidFill>
-                <a:latin typeface="맑은 고딕"/>
-                <a:ea typeface="맑은 고딕"/>
-              </a:rPr>
-              <a:t> —</a:t>
-            </a:r>
-            <a:r>
-              <a:rPr sz="1600" b="0">
-                <a:solidFill>
-                  <a:srgbClr val="000000"/>
-                </a:solidFill>
-                <a:latin typeface="맑은 고딕"/>
-                <a:ea typeface="맑은 고딕"/>
-              </a:rPr>
-              <a:t> 요구사항 정의서·용어집·정적 모델·상태 기계·의존 규칙과 그 검사다.</a:t>
-            </a:r>
-          </a:p>
-          <a:p>
-            <a:pPr lvl="2" marL="723900" indent="-368300">
-              <a:spcBef>
-                <a:spcPts val="600"/>
-              </a:spcBef>
-              <a:spcAft>
-                <a:spcPts val="600"/>
-              </a:spcAft>
-              <a:buSzPct val="90000"/>
-              <a:buFont typeface="Wingdings" pitchFamily="2" charset="2"/>
-              <a:buChar char=""/>
-            </a:pPr>
-            <a:r>
-              <a:rPr sz="1800" b="1">
-                <a:solidFill>
-                  <a:srgbClr val="000000"/>
-                </a:solidFill>
-                <a:latin typeface="맑은 고딕"/>
-                <a:ea typeface="맑은 고딕"/>
-              </a:rPr>
-              <a:t>환경은 필요에서 자란다</a:t>
-            </a:r>
-            <a:r>
-              <a:rPr sz="1800" b="0">
-                <a:solidFill>
-                  <a:srgbClr val="000000"/>
-                </a:solidFill>
-                <a:latin typeface="맑은 고딕"/>
-                <a:ea typeface="맑은 고딕"/>
-              </a:rPr>
-              <a:t> —</a:t>
-            </a:r>
-            <a:r>
-              <a:rPr sz="1600" b="0">
-                <a:solidFill>
-                  <a:srgbClr val="000000"/>
-                </a:solidFill>
-                <a:latin typeface="맑은 고딕"/>
-                <a:ea typeface="맑은 고딕"/>
-              </a:rPr>
-              <a:t> 검사가 쌓이고 권한이 좁아지는 것은 실행에서 필요가 드러난 결과다.</a:t>
-            </a:r>
-          </a:p>
-        </p:txBody>
-      </p:sp>
-      <p:sp>
-        <p:nvSpPr>
-          <p:cNvPr id="9" name="TextBox 12">
-            <a:extLst>
-              <a:ext uri="{FF2B5EF4-FFF2-40B4-BE49-F238E27FC236}">
-                <a16:creationId xmlns:a16="http://schemas.microsoft.com/office/drawing/2014/main" id="{654EDDB4-901F-3D48-A715-17D163E8A7AC}"/>
-              </a:ext>
-            </a:extLst>
-          </p:cNvPr>
-          <p:cNvSpPr txBox="1"/>
-          <p:nvPr/>
-        </p:nvSpPr>
-        <p:spPr>
-          <a:xfrm>
-            <a:off x="365760" y="4386072"/>
-            <a:ext cx="8412480" cy="201168"/>
-          </a:xfrm>
-          <a:prstGeom prst="rect">
-            <a:avLst/>
-          </a:prstGeom>
-          <a:noFill/>
-        </p:spPr>
-        <p:txBody>
-          <a:bodyPr wrap="square">
-            <a:spAutoFit/>
-          </a:bodyPr>
-          <a:lstStyle/>
-          <a:p>
-            <a:pPr algn="ctr"/>
-            <a:r>
-              <a:rPr sz="1400" b="1">
-                <a:solidFill>
-                  <a:srgbClr val="000000"/>
-                </a:solidFill>
-                <a:latin typeface="맑은 고딕"/>
-                <a:ea typeface="맑은 고딕"/>
-              </a:rPr>
-              <a:t>과정의 지도</a:t>
-            </a:r>
-          </a:p>
-        </p:txBody>
-      </p:sp>
-      <p:pic>
-        <p:nvPicPr>
-          <p:cNvPr id="10" name="mermaid Diagram 5"/>
-          <p:cNvPicPr>
-            <a:picLocks noChangeAspect="1"/>
-          </p:cNvPicPr>
-          <p:nvPr/>
-        </p:nvPicPr>
-        <p:blipFill>
-          <a:blip r:embed="mermaidImage5"/>
-          <a:stretch>
-            <a:fillRect/>
-          </a:stretch>
-        </p:blipFill>
-        <p:spPr>
-          <a:xfrm>
-            <a:off x="1531938" y="4623816"/>
-            <a:ext cx="6080125" cy="769938"/>
-          </a:xfrm>
-          <a:prstGeom prst="rect">
-            <a:avLst/>
-          </a:prstGeom>
-        </p:spPr>
-      </p:pic>
-    </p:spTree>
-    <p:extLst>
-      <p:ext uri="{BB962C8B-B14F-4D97-AF65-F5344CB8AC3E}">
-        <p14:creationId xmlns:p14="http://schemas.microsoft.com/office/powerpoint/2010/main" val="3555436673"/>
-      </p:ext>
-    </p:extLst>
-  </p:cSld>
-  <p:clrMapOvr>
-    <a:masterClrMapping/>
-  </p:clrMapOvr>
-</p:sld>
-</file>
-
-<file path=ppt/slides/slide25.xml><?xml version="1.0" encoding="utf-8"?>
-<p:sld xmlns:a="http://schemas.openxmlformats.org/drawingml/2006/main" xmlns:r="http://schemas.openxmlformats.org/officeDocument/2006/relationships" xmlns:p="http://schemas.openxmlformats.org/presentationml/2006/main">
-  <p:cSld>
-    <p:spTree>
-      <p:nvGrpSpPr>
-        <p:cNvPr id="1" name="">
-          <a:extLst>
-            <a:ext uri="{FF2B5EF4-FFF2-40B4-BE49-F238E27FC236}">
-              <a16:creationId xmlns:a16="http://schemas.microsoft.com/office/drawing/2014/main" id="{8E4F1F13-426B-086B-7D8C-9A58A0F879DB}"/>
-            </a:ext>
-          </a:extLst>
-        </p:cNvPr>
-        <p:cNvGrpSpPr/>
-        <p:nvPr/>
-      </p:nvGrpSpPr>
-      <p:grpSpPr>
-        <a:xfrm>
-          <a:off x="0" y="0"/>
-          <a:ext cx="0" cy="0"/>
-          <a:chOff x="0" y="0"/>
-          <a:chExt cx="0" cy="0"/>
-        </a:xfrm>
-      </p:grpSpPr>
-      <p:sp>
-        <p:nvSpPr>
-          <p:cNvPr id="2" name="제목 1">
-            <a:extLst>
-              <a:ext uri="{FF2B5EF4-FFF2-40B4-BE49-F238E27FC236}">
-                <a16:creationId xmlns:a16="http://schemas.microsoft.com/office/drawing/2014/main" id="{AA26A92D-924E-0575-9551-F8FD7BFD3FAD}"/>
-              </a:ext>
-            </a:extLst>
-          </p:cNvPr>
-          <p:cNvSpPr>
-            <a:spLocks noGrp="1"/>
-          </p:cNvSpPr>
-          <p:nvPr>
-            <p:ph type="title"/>
-          </p:nvPr>
-        </p:nvSpPr>
-        <p:spPr/>
-        <p:txBody>
-          <a:bodyPr/>
-          <a:lstStyle/>
-          <a:p>
-            <a:r>
-              <a:rPr sz="2400" b="1">
-                <a:solidFill>
-                  <a:srgbClr val="000000"/>
-                </a:solidFill>
-                <a:latin typeface="맑은 고딕"/>
-                <a:ea typeface="맑은 고딕"/>
-              </a:rPr>
-              <a:t>맡기지 않는 작업 3가지</a:t>
-            </a:r>
-          </a:p>
-          <a:p>
-            <a:r>
-              <a:rPr sz="1100" b="1">
-                <a:solidFill>
-                  <a:srgbClr val="000000"/>
-                </a:solidFill>
-                <a:latin typeface="맑은 고딕"/>
-                <a:ea typeface="맑은 고딕"/>
-              </a:rPr>
-              <a:t>07. 맡길 작업과 맡기지 않을 작업</a:t>
-            </a:r>
-          </a:p>
-        </p:txBody>
-      </p:sp>
-      <p:sp>
-        <p:nvSpPr>
-          <p:cNvPr id="3" name="슬라이드 번호 개체 틀 2">
-            <a:extLst>
-              <a:ext uri="{FF2B5EF4-FFF2-40B4-BE49-F238E27FC236}">
-                <a16:creationId xmlns:a16="http://schemas.microsoft.com/office/drawing/2014/main" id="{12CF30EE-4DFD-8063-56B8-B8689E76DFCA}"/>
-              </a:ext>
-            </a:extLst>
-          </p:cNvPr>
-          <p:cNvSpPr>
-            <a:spLocks noGrp="1"/>
-          </p:cNvSpPr>
-          <p:nvPr>
-            <p:ph type="sldNum" sz="quarter" idx="10"/>
-          </p:nvPr>
-        </p:nvSpPr>
-        <p:spPr/>
-        <p:txBody>
-          <a:bodyPr/>
-          <a:lstStyle/>
-          <a:p>
-            <a:pPr>
-              <a:defRPr/>
-            </a:pPr>
-            <a:r>
-              <a:rPr lang="en-US" altLang="ko-KR">
-                <a:solidFill>
-                  <a:prstClr val="black"/>
-                </a:solidFill>
-              </a:rPr>
-              <a:t>- 25 -</a:t>
             </a:r>
           </a:p>
         </p:txBody>
@@ -22894,7 +22385,7 @@
                 <a:latin typeface="맑은 고딕"/>
                 <a:ea typeface="맑은 고딕"/>
               </a:rPr>
-              <a:t> 답과 책임이 AI 밖에 있다.</a:t>
+              <a:t> 답과 책임이 사람에게 있다.</a:t>
             </a:r>
           </a:p>
           <a:p>
@@ -23023,7 +22514,7 @@
                 <a:latin typeface="맑은 고딕"/>
                 <a:ea typeface="맑은 고딕"/>
               </a:rPr>
-              <a:t> 늘 같은 결과가 필요하다.</a:t>
+              <a:t> 늘 같은 결과가 나와야 한다.</a:t>
             </a:r>
           </a:p>
           <a:p>
@@ -23066,7 +22557,7 @@
                 <a:latin typeface="맑은 고딕"/>
                 <a:ea typeface="맑은 고딕"/>
               </a:rPr>
-              <a:t> 포매터·정적 검사로 한다.</a:t>
+              <a:t> 포매터와 정적 검사가 한다.</a:t>
             </a:r>
           </a:p>
           <a:p>
@@ -23275,7 +22766,7 @@
                 <a:latin typeface="맑은 고딕"/>
                 <a:ea typeface="맑은 고딕"/>
               </a:rPr>
-              <a:t> 받아들일 기준을 작성할 수 없으면 검사도 없다. 검사가 없는 작업은 맡기지 않는다.</a:t>
+              <a:t> 받아들일 기준이 없으면 검사도 없고, 검사가 없으면 맡기지 않는다.</a:t>
             </a:r>
           </a:p>
         </p:txBody>
@@ -23293,7 +22784,7 @@
 </p:sld>
 </file>
 
-<file path=ppt/slides/slide26.xml><?xml version="1.0" encoding="utf-8"?>
+<file path=ppt/slides/slide25.xml><?xml version="1.0" encoding="utf-8"?>
 <p:sld xmlns:a="http://schemas.openxmlformats.org/drawingml/2006/main" xmlns:r="http://schemas.openxmlformats.org/officeDocument/2006/relationships" xmlns:p="http://schemas.openxmlformats.org/presentationml/2006/main">
   <p:cSld>
     <p:spTree>
@@ -24300,7 +23791,7 @@
                 <a:ea typeface="맑은 고딕" panose="020B0503020000020004" pitchFamily="34" charset="-127"/>
                 <a:cs typeface="+mn-cs"/>
               </a:rPr>
-              <a:t>- 26 -</a:t>
+              <a:t>- 25 -</a:t>
             </a:r>
           </a:p>
         </p:txBody>
@@ -24514,7 +24005,7 @@
                 <a:latin typeface="맑은 고딕"/>
                 <a:ea typeface="맑은 고딕"/>
               </a:rPr>
-              <a:t> 만든 양이 아니라 </a:t>
+              <a:t> 생성한 양이 아니라 </a:t>
             </a:r>
             <a:r>
               <a:rPr sz="1600" b="1">
@@ -24534,7 +24025,7 @@
                 <a:latin typeface="맑은 고딕"/>
                 <a:ea typeface="맑은 고딕"/>
               </a:rPr>
-              <a:t>로 측정해야 득실이 보인다.</a:t>
+              <a:t>로 득실을 측정한다.</a:t>
             </a:r>
           </a:p>
           <a:p>
@@ -24557,7 +24048,7 @@
                 <a:latin typeface="맑은 고딕"/>
                 <a:ea typeface="맑은 고딕"/>
               </a:rPr>
-              <a:t>검사가 없으면 수준을 올리지 않는다</a:t>
+              <a:t>검사가 없으면 자율성을 올리지 않는다</a:t>
             </a:r>
             <a:r>
               <a:rPr sz="1800" b="0">
@@ -24577,7 +24068,7 @@
                 <a:latin typeface="맑은 고딕"/>
                 <a:ea typeface="맑은 고딕"/>
               </a:rPr>
-              <a:t> 다섯 상황의 차이는 결국 </a:t>
+              <a:t> 5가지 상황을 가르는 것은 </a:t>
             </a:r>
             <a:r>
               <a:rPr sz="1600" b="1">
@@ -24606,6 +24097,529 @@
     <p:extLst>
       <p:ext uri="{BB962C8B-B14F-4D97-AF65-F5344CB8AC3E}">
         <p14:creationId xmlns:p14="http://schemas.microsoft.com/office/powerpoint/2010/main" val="2789569477"/>
+      </p:ext>
+    </p:extLst>
+  </p:cSld>
+  <p:clrMapOvr>
+    <a:masterClrMapping/>
+  </p:clrMapOvr>
+</p:sld>
+</file>
+
+<file path=ppt/slides/slide26.xml><?xml version="1.0" encoding="utf-8"?>
+<p:sld xmlns:a="http://schemas.openxmlformats.org/drawingml/2006/main" xmlns:r="http://schemas.openxmlformats.org/officeDocument/2006/relationships" xmlns:p="http://schemas.openxmlformats.org/presentationml/2006/main">
+  <p:cSld>
+    <p:spTree>
+      <p:nvGrpSpPr>
+        <p:cNvPr id="1" name="">
+          <a:extLst>
+            <a:ext uri="{FF2B5EF4-FFF2-40B4-BE49-F238E27FC236}">
+              <a16:creationId xmlns:a16="http://schemas.microsoft.com/office/drawing/2014/main" id="{8E4F1F13-426B-086B-7D8C-9A58A0F879DB}"/>
+            </a:ext>
+          </a:extLst>
+        </p:cNvPr>
+        <p:cNvGrpSpPr/>
+        <p:nvPr/>
+      </p:nvGrpSpPr>
+      <p:grpSpPr>
+        <a:xfrm>
+          <a:off x="0" y="0"/>
+          <a:ext cx="0" cy="0"/>
+          <a:chOff x="0" y="0"/>
+          <a:chExt cx="0" cy="0"/>
+        </a:xfrm>
+      </p:grpSpPr>
+      <p:sp>
+        <p:nvSpPr>
+          <p:cNvPr id="2" name="제목 1">
+            <a:extLst>
+              <a:ext uri="{FF2B5EF4-FFF2-40B4-BE49-F238E27FC236}">
+                <a16:creationId xmlns:a16="http://schemas.microsoft.com/office/drawing/2014/main" id="{AA26A92D-924E-0575-9551-F8FD7BFD3FAD}"/>
+              </a:ext>
+            </a:extLst>
+          </p:cNvPr>
+          <p:cNvSpPr>
+            <a:spLocks noGrp="1"/>
+          </p:cNvSpPr>
+          <p:nvPr>
+            <p:ph type="title"/>
+          </p:nvPr>
+        </p:nvSpPr>
+        <p:spPr/>
+        <p:txBody>
+          <a:bodyPr/>
+          <a:lstStyle/>
+          <a:p>
+            <a:r>
+              <a:rPr sz="2400" b="1">
+                <a:solidFill>
+                  <a:srgbClr val="000000"/>
+                </a:solidFill>
+                <a:latin typeface="맑은 고딕"/>
+                <a:ea typeface="맑은 고딕"/>
+              </a:rPr>
+              <a:t>과정의 지도</a:t>
+            </a:r>
+          </a:p>
+          <a:p>
+            <a:r>
+              <a:rPr sz="1100" b="1">
+                <a:solidFill>
+                  <a:srgbClr val="000000"/>
+                </a:solidFill>
+                <a:latin typeface="맑은 고딕"/>
+                <a:ea typeface="맑은 고딕"/>
+              </a:rPr>
+              <a:t>07. 맡길 작업과 맡기지 않을 작업</a:t>
+            </a:r>
+          </a:p>
+        </p:txBody>
+      </p:sp>
+      <p:sp>
+        <p:nvSpPr>
+          <p:cNvPr id="3" name="슬라이드 번호 개체 틀 2">
+            <a:extLst>
+              <a:ext uri="{FF2B5EF4-FFF2-40B4-BE49-F238E27FC236}">
+                <a16:creationId xmlns:a16="http://schemas.microsoft.com/office/drawing/2014/main" id="{12CF30EE-4DFD-8063-56B8-B8689E76DFCA}"/>
+              </a:ext>
+            </a:extLst>
+          </p:cNvPr>
+          <p:cNvSpPr>
+            <a:spLocks noGrp="1"/>
+          </p:cNvSpPr>
+          <p:nvPr>
+            <p:ph type="sldNum" sz="quarter" idx="10"/>
+          </p:nvPr>
+        </p:nvSpPr>
+        <p:spPr/>
+        <p:txBody>
+          <a:bodyPr/>
+          <a:lstStyle/>
+          <a:p>
+            <a:pPr>
+              <a:defRPr/>
+            </a:pPr>
+            <a:r>
+              <a:rPr lang="en-US" altLang="ko-KR">
+                <a:solidFill>
+                  <a:prstClr val="black"/>
+                </a:solidFill>
+              </a:rPr>
+              <a:t>- 26 -</a:t>
+            </a:r>
+          </a:p>
+        </p:txBody>
+      </p:sp>
+      <p:sp>
+        <p:nvSpPr>
+          <p:cNvPr id="5" name="텍스트 개체 틀 4">
+            <a:extLst>
+              <a:ext uri="{FF2B5EF4-FFF2-40B4-BE49-F238E27FC236}">
+                <a16:creationId xmlns:a16="http://schemas.microsoft.com/office/drawing/2014/main" id="{D66274C8-E16F-5AEB-614B-D8D32DA3E8C6}"/>
+              </a:ext>
+            </a:extLst>
+          </p:cNvPr>
+          <p:cNvSpPr>
+            <a:spLocks noGrp="1"/>
+          </p:cNvSpPr>
+          <p:nvPr>
+            <p:ph type="body" sz="quarter" idx="11"/>
+          </p:nvPr>
+        </p:nvSpPr>
+        <p:spPr/>
+        <p:txBody>
+          <a:bodyPr/>
+          <a:lstStyle/>
+          <a:p>
+            <a:r>
+              <a:rPr kumimoji="1" lang="en-US" altLang="ko-KR" sz="1400" dirty="0" err="1"/>
+              <a:t>01. 사람의 일과 AI의 일</a:t>
+            </a:r>
+          </a:p>
+        </p:txBody>
+      </p:sp>
+      <p:sp>
+        <p:nvSpPr>
+          <p:cNvPr id="6" name="텍스트 개체 틀 5">
+            <a:extLst>
+              <a:ext uri="{FF2B5EF4-FFF2-40B4-BE49-F238E27FC236}">
+                <a16:creationId xmlns:a16="http://schemas.microsoft.com/office/drawing/2014/main" id="{A24E58E1-194B-A320-AEEE-24D08685BB67}"/>
+              </a:ext>
+            </a:extLst>
+          </p:cNvPr>
+          <p:cNvSpPr>
+            <a:spLocks noGrp="1"/>
+          </p:cNvSpPr>
+          <p:nvPr>
+            <p:ph type="body" sz="quarter" idx="12"/>
+          </p:nvPr>
+        </p:nvSpPr>
+        <p:spPr/>
+        <p:txBody>
+          <a:bodyPr/>
+          <a:lstStyle/>
+          <a:p>
+            <a:endParaRPr kumimoji="1" lang="ko-KR" altLang="en-US" dirty="0"/>
+          </a:p>
+        </p:txBody>
+      </p:sp>
+      <p:sp>
+        <p:nvSpPr>
+          <p:cNvPr id="7" name="텍스트 개체 틀 6">
+            <a:extLst>
+              <a:ext uri="{FF2B5EF4-FFF2-40B4-BE49-F238E27FC236}">
+                <a16:creationId xmlns:a16="http://schemas.microsoft.com/office/drawing/2014/main" id="{A219F420-613B-6234-45F6-0955A9A4505F}"/>
+              </a:ext>
+            </a:extLst>
+          </p:cNvPr>
+          <p:cNvSpPr>
+            <a:spLocks noGrp="1"/>
+          </p:cNvSpPr>
+          <p:nvPr>
+            <p:ph type="body" sz="quarter" idx="13"/>
+          </p:nvPr>
+        </p:nvSpPr>
+        <p:spPr/>
+        <p:txBody>
+          <a:bodyPr/>
+          <a:lstStyle/>
+          <a:p>
+            <a:endParaRPr kumimoji="1" lang="en-US" altLang="ko-KR" dirty="0"/>
+          </a:p>
+        </p:txBody>
+      </p:sp>
+      <p:sp>
+        <p:nvSpPr>
+          <p:cNvPr id="8" name="내용 개체 틀 7">
+            <a:extLst>
+              <a:ext uri="{FF2B5EF4-FFF2-40B4-BE49-F238E27FC236}">
+                <a16:creationId xmlns:a16="http://schemas.microsoft.com/office/drawing/2014/main" id="{BEBA2C4A-B0BF-F2E4-EA6E-614C99CBA184}"/>
+              </a:ext>
+            </a:extLst>
+          </p:cNvPr>
+          <p:cNvSpPr>
+            <a:spLocks noGrp="1"/>
+          </p:cNvSpPr>
+          <p:nvPr>
+            <p:ph idx="1"/>
+          </p:nvPr>
+        </p:nvSpPr>
+        <p:spPr>
+          <a:xfrm>
+            <a:off x="365760" y="960120"/>
+            <a:ext cx="8412480" cy="2788920"/>
+          </a:xfrm>
+        </p:spPr>
+        <p:txBody>
+          <a:bodyPr>
+            <a:normAutofit/>
+          </a:bodyPr>
+          <a:lstStyle/>
+          <a:p>
+            <a:pPr marL="0" indent="0">
+              <a:spcBef>
+                <a:spcPts val="600"/>
+              </a:spcBef>
+              <a:spcAft>
+                <a:spcPts val="600"/>
+              </a:spcAft>
+              <a:buNone/>
+            </a:pPr>
+            <a:r>
+              <a:rPr sz="1800" b="0">
+                <a:solidFill>
+                  <a:srgbClr val="000000"/>
+                </a:solidFill>
+                <a:latin typeface="맑은 고딕"/>
+                <a:ea typeface="맑은 고딕"/>
+              </a:rPr>
+              <a:t>남은 10세션은 사람이 </a:t>
+            </a:r>
+            <a:r>
+              <a:rPr sz="1800" b="1">
+                <a:solidFill>
+                  <a:srgbClr val="000000"/>
+                </a:solidFill>
+                <a:latin typeface="맑은 고딕"/>
+                <a:ea typeface="맑은 고딕"/>
+              </a:rPr>
+              <a:t>결정하는 영역</a:t>
+            </a:r>
+            <a:r>
+              <a:rPr sz="1800" b="0">
+                <a:solidFill>
+                  <a:srgbClr val="000000"/>
+                </a:solidFill>
+                <a:latin typeface="맑은 고딕"/>
+                <a:ea typeface="맑은 고딕"/>
+              </a:rPr>
+              <a:t>과 에이전트에게 </a:t>
+            </a:r>
+            <a:r>
+              <a:rPr sz="1800" b="1">
+                <a:solidFill>
+                  <a:srgbClr val="000000"/>
+                </a:solidFill>
+                <a:latin typeface="맑은 고딕"/>
+                <a:ea typeface="맑은 고딕"/>
+              </a:rPr>
+              <a:t>맡기고 증거를 받는 영역</a:t>
+            </a:r>
+            <a:r>
+              <a:rPr sz="1800" b="0">
+                <a:solidFill>
+                  <a:srgbClr val="000000"/>
+                </a:solidFill>
+                <a:latin typeface="맑은 고딕"/>
+                <a:ea typeface="맑은 고딕"/>
+              </a:rPr>
+              <a:t>으로 나뉜다. 실습은 "주문한다" 하나로 두 영역을 모두 거친다.</a:t>
+            </a:r>
+          </a:p>
+          <a:p>
+            <a:pPr lvl="2" marL="723900" indent="-368300">
+              <a:spcBef>
+                <a:spcPts val="600"/>
+              </a:spcBef>
+              <a:spcAft>
+                <a:spcPts val="600"/>
+              </a:spcAft>
+              <a:buSzPct val="90000"/>
+              <a:buFont typeface="Wingdings" pitchFamily="2" charset="2"/>
+              <a:buChar char=""/>
+            </a:pPr>
+            <a:r>
+              <a:rPr sz="1800" b="1">
+                <a:solidFill>
+                  <a:srgbClr val="000000"/>
+                </a:solidFill>
+                <a:latin typeface="맑은 고딕"/>
+                <a:ea typeface="맑은 고딕"/>
+              </a:rPr>
+              <a:t>사람이 결정하는 것은 5가지다</a:t>
+            </a:r>
+            <a:r>
+              <a:rPr sz="1800" b="0">
+                <a:solidFill>
+                  <a:srgbClr val="000000"/>
+                </a:solidFill>
+                <a:latin typeface="맑은 고딕"/>
+                <a:ea typeface="맑은 고딕"/>
+              </a:rPr>
+              <a:t> —</a:t>
+            </a:r>
+            <a:r>
+              <a:rPr sz="1600" b="0">
+                <a:solidFill>
+                  <a:srgbClr val="000000"/>
+                </a:solidFill>
+                <a:latin typeface="맑은 고딕"/>
+                <a:ea typeface="맑은 고딕"/>
+              </a:rPr>
+              <a:t> 요구와 수용 기준, 정적 모델, 동적 모델, 아키텍처, 설계와 작업 단위다.</a:t>
+            </a:r>
+          </a:p>
+          <a:p>
+            <a:pPr lvl="2" marL="723900" indent="-368300">
+              <a:spcBef>
+                <a:spcPts val="600"/>
+              </a:spcBef>
+              <a:spcAft>
+                <a:spcPts val="600"/>
+              </a:spcAft>
+              <a:buSzPct val="90000"/>
+              <a:buFont typeface="Wingdings" pitchFamily="2" charset="2"/>
+              <a:buChar char=""/>
+            </a:pPr>
+            <a:r>
+              <a:rPr sz="1800" b="1">
+                <a:solidFill>
+                  <a:srgbClr val="000000"/>
+                </a:solidFill>
+                <a:latin typeface="맑은 고딕"/>
+                <a:ea typeface="맑은 고딕"/>
+              </a:rPr>
+              <a:t>에이전트가 하는 일은 4가지다</a:t>
+            </a:r>
+            <a:r>
+              <a:rPr sz="1800" b="0">
+                <a:solidFill>
+                  <a:srgbClr val="000000"/>
+                </a:solidFill>
+                <a:latin typeface="맑은 고딕"/>
+                <a:ea typeface="맑은 고딕"/>
+              </a:rPr>
+              <a:t> —</a:t>
+            </a:r>
+            <a:r>
+              <a:rPr sz="1600" b="0">
+                <a:solidFill>
+                  <a:srgbClr val="000000"/>
+                </a:solidFill>
+                <a:latin typeface="맑은 고딕"/>
+                <a:ea typeface="맑은 고딕"/>
+              </a:rPr>
+              <a:t> 맡은 작업의 구현, 검사 실행과 수정, 완료의 증거 제시, 비용과 결과의 기록이다.</a:t>
+            </a:r>
+          </a:p>
+          <a:p>
+            <a:pPr lvl="2" marL="723900" indent="-368300">
+              <a:spcBef>
+                <a:spcPts val="600"/>
+              </a:spcBef>
+              <a:spcAft>
+                <a:spcPts val="600"/>
+              </a:spcAft>
+              <a:buSzPct val="90000"/>
+              <a:buFont typeface="Wingdings" pitchFamily="2" charset="2"/>
+              <a:buChar char=""/>
+            </a:pPr>
+            <a:r>
+              <a:rPr sz="1800" b="1">
+                <a:solidFill>
+                  <a:srgbClr val="000000"/>
+                </a:solidFill>
+                <a:latin typeface="맑은 고딕"/>
+                <a:ea typeface="맑은 고딕"/>
+              </a:rPr>
+              <a:t>오래 남는 산출물은 5가지다</a:t>
+            </a:r>
+            <a:r>
+              <a:rPr sz="1800" b="0">
+                <a:solidFill>
+                  <a:srgbClr val="000000"/>
+                </a:solidFill>
+                <a:latin typeface="맑은 고딕"/>
+                <a:ea typeface="맑은 고딕"/>
+              </a:rPr>
+              <a:t> —</a:t>
+            </a:r>
+            <a:r>
+              <a:rPr sz="1600" b="0">
+                <a:solidFill>
+                  <a:srgbClr val="000000"/>
+                </a:solidFill>
+                <a:latin typeface="맑은 고딕"/>
+                <a:ea typeface="맑은 고딕"/>
+              </a:rPr>
+              <a:t> 요구사항 정의서·용어집·정적 모델·상태 기계·의존 규칙과 검사 결과이다.</a:t>
+            </a:r>
+          </a:p>
+          <a:p>
+            <a:pPr lvl="2" marL="723900" indent="-368300">
+              <a:spcBef>
+                <a:spcPts val="600"/>
+              </a:spcBef>
+              <a:spcAft>
+                <a:spcPts val="600"/>
+              </a:spcAft>
+              <a:buSzPct val="90000"/>
+              <a:buFont typeface="Wingdings" pitchFamily="2" charset="2"/>
+              <a:buChar char=""/>
+            </a:pPr>
+            <a:r>
+              <a:rPr sz="1800" b="1">
+                <a:solidFill>
+                  <a:srgbClr val="000000"/>
+                </a:solidFill>
+                <a:latin typeface="맑은 고딕"/>
+                <a:ea typeface="맑은 고딕"/>
+              </a:rPr>
+              <a:t>검사와 권한은 한 번 맡겨 본 뒤에 결정한다</a:t>
+            </a:r>
+            <a:r>
+              <a:rPr sz="1800" b="0">
+                <a:solidFill>
+                  <a:srgbClr val="000000"/>
+                </a:solidFill>
+                <a:latin typeface="맑은 고딕"/>
+                <a:ea typeface="맑은 고딕"/>
+              </a:rPr>
+              <a:t> —</a:t>
+            </a:r>
+            <a:r>
+              <a:rPr sz="1600" b="0">
+                <a:solidFill>
+                  <a:srgbClr val="000000"/>
+                </a:solidFill>
+                <a:latin typeface="맑은 고딕"/>
+                <a:ea typeface="맑은 고딕"/>
+              </a:rPr>
+              <a:t> 무엇을 검사하고 무엇을 금지할지는 미리 알 수 없다.</a:t>
+            </a:r>
+          </a:p>
+        </p:txBody>
+      </p:sp>
+      <p:sp>
+        <p:nvSpPr>
+          <p:cNvPr id="9" name="TextBox 12">
+            <a:extLst>
+              <a:ext uri="{FF2B5EF4-FFF2-40B4-BE49-F238E27FC236}">
+                <a16:creationId xmlns:a16="http://schemas.microsoft.com/office/drawing/2014/main" id="{654EDDB4-901F-3D48-A715-17D163E8A7AC}"/>
+              </a:ext>
+            </a:extLst>
+          </p:cNvPr>
+          <p:cNvSpPr txBox="1"/>
+          <p:nvPr/>
+        </p:nvSpPr>
+        <p:spPr>
+          <a:xfrm>
+            <a:off x="365760" y="4660392"/>
+            <a:ext cx="8412480" cy="201168"/>
+          </a:xfrm>
+          <a:prstGeom prst="rect">
+            <a:avLst/>
+          </a:prstGeom>
+          <a:noFill/>
+        </p:spPr>
+        <p:txBody>
+          <a:bodyPr wrap="square">
+            <a:spAutoFit/>
+          </a:bodyPr>
+          <a:lstStyle/>
+          <a:p>
+            <a:pPr algn="ctr"/>
+            <a:r>
+              <a:rPr sz="1400" b="1">
+                <a:solidFill>
+                  <a:srgbClr val="000000"/>
+                </a:solidFill>
+                <a:latin typeface="맑은 고딕"/>
+                <a:ea typeface="맑은 고딕"/>
+              </a:rPr>
+              <a:t>과정의 지도</a:t>
+            </a:r>
+          </a:p>
+        </p:txBody>
+      </p:sp>
+      <p:pic>
+        <p:nvPicPr>
+          <p:cNvPr id="10" name="mermaid Diagram 5"/>
+          <p:cNvPicPr>
+            <a:picLocks noChangeAspect="1"/>
+          </p:cNvPicPr>
+          <p:nvPr/>
+        </p:nvPicPr>
+        <p:blipFill>
+          <a:blip r:embed="mermaidImage5"/>
+          <a:stretch>
+            <a:fillRect/>
+          </a:stretch>
+        </p:blipFill>
+        <p:spPr>
+          <a:xfrm>
+            <a:off x="1531938" y="4898136"/>
+            <a:ext cx="6080125" cy="769938"/>
+          </a:xfrm>
+          <a:prstGeom prst="rect">
+            <a:avLst/>
+          </a:prstGeom>
+        </p:spPr>
+      </p:pic>
+    </p:spTree>
+    <p:extLst>
+      <p:ext uri="{BB962C8B-B14F-4D97-AF65-F5344CB8AC3E}">
+        <p14:creationId xmlns:p14="http://schemas.microsoft.com/office/powerpoint/2010/main" val="3555436673"/>
       </p:ext>
     </p:extLst>
   </p:cSld>
@@ -25433,7 +25447,7 @@
                 <a:latin typeface="맑은 고딕"/>
                 <a:ea typeface="맑은 고딕"/>
               </a:rPr>
-              <a:t>산출물은 저장소가 들고 간다</a:t>
+              <a:t>산출물은 한 저장소에 모은다</a:t>
             </a:r>
             <a:r>
               <a:rPr sz="1800" b="0">
@@ -26607,7 +26621,7 @@
                 <a:latin typeface="맑은 고딕"/>
                 <a:ea typeface="맑은 고딕"/>
               </a:rPr>
-              <a:t>AI는 업무 규칙을 코드로 옮기는 일을 담당하고, 그것을 </a:t>
+              <a:t>AI는 업무 규칙을 코드로 옮기고, 업무 규칙을 </a:t>
             </a:r>
             <a:r>
               <a:rPr sz="1800" b="1">
@@ -26691,7 +26705,7 @@
                 <a:latin typeface="맑은 고딕"/>
                 <a:ea typeface="맑은 고딕"/>
               </a:rPr>
-              <a:t> 코드로 옮기는 일은 AI가, 업무 규칙은 사람이 정한다</a:t>
+              <a:t> 코드로 옮기는 일은 AI가 하고, 업무 규칙은 사람이 정한다</a:t>
             </a:r>
           </a:p>
           <a:p>
@@ -26960,7 +26974,7 @@
                 <a:latin typeface="맑은 고딕"/>
                 <a:ea typeface="맑은 고딕"/>
               </a:rPr>
-              <a:t>세션 02. LLM이라는 재료</a:t>
+              <a:t>세션 02. LLM이라는 도구</a:t>
             </a:r>
             <a:r>
               <a:rPr sz="1800" b="0">
@@ -26980,7 +26994,7 @@
                 <a:latin typeface="맑은 고딕"/>
                 <a:ea typeface="맑은 고딕"/>
               </a:rPr>
-              <a:t> 재료의 성질과 비용의 구조를 알고 활용 방식을 고른다.</a:t>
+              <a:t> 도구의 성질과 비용의 구조를 알고 활용 방식을 고른다.</a:t>
             </a:r>
           </a:p>
         </p:txBody>
@@ -27219,7 +27233,7 @@
                 <a:latin typeface="맑은 고딕"/>
                 <a:ea typeface="맑은 고딕"/>
               </a:rPr>
-              <a:t>05. 활동마다 사람과 AI</a:t>
+              <a:t>05. 사람과 AI가 하는 일</a:t>
             </a:r>
           </a:p>
           <a:p>
@@ -28763,7 +28777,7 @@
                 <a:latin typeface="맑은 고딕"/>
                 <a:ea typeface="맑은 고딕"/>
               </a:rPr>
-              <a:t>를 설명하고, 그래도 </a:t>
+              <a:t>와 </a:t>
             </a:r>
             <a:r>
               <a:rPr sz="1800" b="1">
@@ -28816,7 +28830,7 @@
                 <a:latin typeface="맑은 고딕"/>
                 <a:ea typeface="맑은 고딕"/>
               </a:rPr>
-              <a:t>은 도메인 지식이며, 주어지지 않으면 LLM이 추측으로 채우는 것을 코드와 테스트로 확인한다.</a:t>
+              <a:t>은 도메인 지식이며 주어지지 않으면 LLM이 추측으로 채운다는 것을 코드와 테스트로 확인한다.</a:t>
             </a:r>
           </a:p>
           <a:p>
@@ -28915,7 +28929,7 @@
                 <a:latin typeface="맑은 고딕"/>
                 <a:ea typeface="맑은 고딕"/>
               </a:rPr>
-              <a:t>사람이 내린 결정마다 그것을 재는 </a:t>
+              <a:t>사람이 내린 결정마다 그 결정을 확인하는 </a:t>
             </a:r>
             <a:r>
               <a:rPr sz="1800" b="1">
@@ -28958,7 +28972,7 @@
                 <a:latin typeface="맑은 고딕"/>
                 <a:ea typeface="맑은 고딕"/>
               </a:rPr>
-              <a:t>프로젝트의 </a:t>
+              <a:t>프로젝트가 </a:t>
             </a:r>
             <a:r>
               <a:rPr sz="1800" b="1">
@@ -28968,7 +28982,7 @@
                 <a:latin typeface="맑은 고딕"/>
                 <a:ea typeface="맑은 고딕"/>
               </a:rPr>
-              <a:t>상황에 따라</a:t>
+              <a:t>어떤 상황인지</a:t>
             </a:r>
             <a:r>
               <a:rPr sz="1800" b="0">
@@ -28978,7 +28992,7 @@
                 <a:latin typeface="맑은 고딕"/>
                 <a:ea typeface="맑은 고딕"/>
               </a:rPr>
-              <a:t> 어디서 시작할지와 AI에게 </a:t>
+              <a:t> 판단해 접근법을 선택하고, AI에게 </a:t>
             </a:r>
             <a:r>
               <a:rPr sz="1800" b="1">
@@ -28998,7 +29012,7 @@
                 <a:latin typeface="맑은 고딕"/>
                 <a:ea typeface="맑은 고딕"/>
               </a:rPr>
-              <a:t>을 구분한다.</a:t>
+              <a:t>을 선택한다.</a:t>
             </a:r>
           </a:p>
         </p:txBody>
@@ -29243,7 +29257,7 @@
                 <a:latin typeface="맑은 고딕"/>
                 <a:ea typeface="맑은 고딕"/>
               </a:rPr>
-              <a:t>생활용품 쇼핑몰이 주문 시스템을 </a:t>
+              <a:t>생활용품 쇼핑몰에 주문 시스템을 </a:t>
             </a:r>
             <a:r>
               <a:rPr sz="1800" b="1">
@@ -29263,7 +29277,7 @@
                 <a:latin typeface="맑은 고딕"/>
                 <a:ea typeface="맑은 고딕"/>
               </a:rPr>
-              <a:t> 만든다. 첫 기능은 고객이 결제까지 마치는 </a:t>
+              <a:t> 만든다. 첫 기능은 고객의 결제까지 포함하는 </a:t>
             </a:r>
             <a:r>
               <a:rPr sz="1800" b="1">
@@ -29692,7 +29706,7 @@
                 <a:latin typeface="맑은 고딕"/>
                 <a:ea typeface="맑은 고딕"/>
               </a:rPr>
-              <a:t>업무 담당자가 준 요청은 아래 한 줄뿐이었다. 테크 리드가 이것을 그대로 코딩 에이전트에게 주자 </a:t>
+              <a:t>업무 담당자가 준 요청은 한 줄뿐이었다. 테크 리드가 그 한 줄을 그대로 코딩 에이전트에게 주자 </a:t>
             </a:r>
             <a:r>
               <a:rPr sz="1800" b="1">
@@ -29758,7 +29772,7 @@
                 <a:latin typeface="맑은 고딕"/>
                 <a:ea typeface="맑은 고딕"/>
               </a:rPr>
-              <a:t>결과</a:t>
+              <a:t>에이전트가 자바 파일 15개와 테스트 3개를 생성했다</a:t>
             </a:r>
             <a:r>
               <a:rPr sz="1800" b="0">
@@ -29778,7 +29792,7 @@
                 <a:latin typeface="맑은 고딕"/>
                 <a:ea typeface="맑은 고딕"/>
               </a:rPr>
-              <a:t> 자바 파일 15개와 테스트 3개를 만들었다. 테스트는 모두 통과했다.</a:t>
+              <a:t> 테스트는 모두 통과했다.</a:t>
             </a:r>
           </a:p>
           <a:p>
@@ -29801,7 +29815,7 @@
                 <a:latin typeface="맑은 고딕"/>
                 <a:ea typeface="맑은 고딕"/>
               </a:rPr>
-              <a:t>데모</a:t>
+              <a:t>데모도 성공했다</a:t>
             </a:r>
             <a:r>
               <a:rPr sz="1800" b="0">
@@ -29821,7 +29835,7 @@
                 <a:latin typeface="맑은 고딕"/>
                 <a:ea typeface="맑은 고딕"/>
               </a:rPr>
-              <a:t> 펜 2개를 카드로 결제하자 결제완료가 되고 배송이 요청되었다.</a:t>
+              <a:t> 펜 2개를 카드로 결제하자 주문이 결제완료가 되고 시스템이 배송을 요청했다.</a:t>
             </a:r>
           </a:p>
           <a:p>
@@ -29844,7 +29858,7 @@
                 <a:latin typeface="맑은 고딕"/>
                 <a:ea typeface="맑은 고딕"/>
               </a:rPr>
-              <a:t>팀의 판단</a:t>
+              <a:t>팀은 "다 됐다"고 판단했다</a:t>
             </a:r>
             <a:r>
               <a:rPr sz="1800" b="0">
@@ -29864,7 +29878,7 @@
                 <a:latin typeface="맑은 고딕"/>
                 <a:ea typeface="맑은 고딕"/>
               </a:rPr>
-              <a:t> "다 됐다"고 보고 업무 담당자에게 리뷰를 요청했다.</a:t>
+              <a:t> 업무 담당자에게 리뷰를 요청했다.</a:t>
             </a:r>
           </a:p>
         </p:txBody>
@@ -30819,7 +30833,7 @@
                 <a:latin typeface="맑은 고딕"/>
                 <a:ea typeface="맑은 고딕"/>
               </a:rPr>
-              <a:t>테스트는 모두 통과했지만, 업무 담당자가 결과를 보자 </a:t>
+              <a:t>테스트는 모두 통과했지만, 업무 담당자가 결과에서 </a:t>
             </a:r>
             <a:r>
               <a:rPr sz="1800" b="1">
@@ -30829,7 +30843,7 @@
                 <a:latin typeface="맑은 고딕"/>
                 <a:ea typeface="맑은 고딕"/>
               </a:rPr>
-              <a:t>3가지를 발견했다</a:t>
+              <a:t>3가지 문제를 발견했다</a:t>
             </a:r>
             <a:r>
               <a:rPr sz="1800" b="0">
@@ -31005,7 +31019,7 @@
                 <a:latin typeface="맑은 고딕"/>
                 <a:ea typeface="맑은 고딕"/>
               </a:rPr>
-              <a:t>공통점</a:t>
+              <a:t>3가지 모두 요청에 없던 업무 규칙이다</a:t>
             </a:r>
             <a:r>
               <a:rPr sz="1800" b="0">
@@ -31025,27 +31039,7 @@
                 <a:latin typeface="맑은 고딕"/>
                 <a:ea typeface="맑은 고딕"/>
               </a:rPr>
-              <a:t> 3가지 모두 요청 한 줄에 없던 </a:t>
-            </a:r>
-            <a:r>
-              <a:rPr sz="1600" b="1">
-                <a:solidFill>
-                  <a:srgbClr val="000000"/>
-                </a:solidFill>
-                <a:latin typeface="맑은 고딕"/>
-                <a:ea typeface="맑은 고딕"/>
-              </a:rPr>
-              <a:t>업무 규칙</a:t>
-            </a:r>
-            <a:r>
-              <a:rPr sz="1600" b="0">
-                <a:solidFill>
-                  <a:srgbClr val="000000"/>
-                </a:solidFill>
-                <a:latin typeface="맑은 고딕"/>
-                <a:ea typeface="맑은 고딕"/>
-              </a:rPr>
-              <a:t>이다. 에이전트는 묻지 않고 임의로 선택했다.</a:t>
+              <a:t> 주문 금액·배송 요청·결제 거절을 에이전트가 묻지 않고 임의로 선택했다.</a:t>
             </a:r>
           </a:p>
         </p:txBody>
@@ -31300,7 +31294,7 @@
                 <a:latin typeface="맑은 고딕"/>
                 <a:ea typeface="맑은 고딕"/>
               </a:rPr>
-              <a:t>에이전트가 만든 결제 코드는 요청에 없던 업무 규칙 3가지를 모두 </a:t>
+              <a:t>에이전트가 생성한 결제 코드는 요청에 없던 업무 규칙 3가지를 모두 </a:t>
             </a:r>
             <a:r>
               <a:rPr sz="1800" b="1">

--- a/courses/ai-native/sessions/s01.pptx
+++ b/courses/ai-native/sessions/s01.pptx
@@ -5749,7 +5749,7 @@
         </p:nvGraphicFramePr>
         <p:xfrm>
           <a:off x="1635316" y="5242522"/>
-          <a:ext cx="5859780" cy="3873500"/>
+          <a:ext cx="5859780" cy="1152000"/>
         </p:xfrm>
         <a:graphic>
           <a:graphicData uri="http://schemas.openxmlformats.org/drawingml/2006/table">
@@ -7024,7 +7024,7 @@
         </p:nvGraphicFramePr>
         <p:xfrm>
           <a:off x="412306" y="3659563"/>
-          <a:ext cx="8305800" cy="3873500"/>
+          <a:ext cx="8305800" cy="864000"/>
         </p:xfrm>
         <a:graphic>
           <a:graphicData uri="http://schemas.openxmlformats.org/drawingml/2006/table">
@@ -8223,7 +8223,7 @@
         </p:nvGraphicFramePr>
         <p:xfrm>
           <a:off x="1174306" y="2112010"/>
-          <a:ext cx="6781800" cy="3873500"/>
+          <a:ext cx="6781800" cy="1728000"/>
         </p:xfrm>
         <a:graphic>
           <a:graphicData uri="http://schemas.openxmlformats.org/drawingml/2006/table">
@@ -9866,7 +9866,7 @@
         </p:nvGraphicFramePr>
         <p:xfrm>
           <a:off x="1801686" y="2112010"/>
-          <a:ext cx="5527040" cy="3873500"/>
+          <a:ext cx="5527040" cy="2016000"/>
         </p:xfrm>
         <a:graphic>
           <a:graphicData uri="http://schemas.openxmlformats.org/drawingml/2006/table">
@@ -11207,7 +11207,7 @@
         </p:nvGraphicFramePr>
         <p:xfrm>
           <a:off x="921575" y="2898948"/>
-          <a:ext cx="7287260" cy="3873500"/>
+          <a:ext cx="7287260" cy="1152000"/>
         </p:xfrm>
         <a:graphic>
           <a:graphicData uri="http://schemas.openxmlformats.org/drawingml/2006/table">
@@ -12285,7 +12285,7 @@
         </p:nvGraphicFramePr>
         <p:xfrm>
           <a:off x="412306" y="2624628"/>
-          <a:ext cx="8305800" cy="3873500"/>
+          <a:ext cx="8305800" cy="1152000"/>
         </p:xfrm>
         <a:graphic>
           <a:graphicData uri="http://schemas.openxmlformats.org/drawingml/2006/table">
@@ -15584,7 +15584,7 @@
         </p:nvGraphicFramePr>
         <p:xfrm>
           <a:off x="1202246" y="2112010"/>
-          <a:ext cx="6725920" cy="3873500"/>
+          <a:ext cx="6725920" cy="3168000"/>
         </p:xfrm>
         <a:graphic>
           <a:graphicData uri="http://schemas.openxmlformats.org/drawingml/2006/table">
@@ -18838,7 +18838,7 @@
         </p:nvGraphicFramePr>
         <p:xfrm>
           <a:off x="978726" y="2112010"/>
-          <a:ext cx="7172960" cy="3873500"/>
+          <a:ext cx="7172960" cy="1152000"/>
         </p:xfrm>
         <a:graphic>
           <a:graphicData uri="http://schemas.openxmlformats.org/drawingml/2006/table">
@@ -20052,7 +20052,7 @@
         </p:nvGraphicFramePr>
         <p:xfrm>
           <a:off x="1775016" y="3173268"/>
-          <a:ext cx="5580380" cy="3873500"/>
+          <a:ext cx="5580380" cy="2016000"/>
         </p:xfrm>
         <a:graphic>
           <a:graphicData uri="http://schemas.openxmlformats.org/drawingml/2006/table">
@@ -21602,6 +21602,108 @@
                 <a:ea typeface="맑은 고딕"/>
               </a:rPr>
               <a:t>활동마다 달라지는 것</a:t>
+            </a:r>
+          </a:p>
+        </p:txBody>
+      </p:sp>
+      <p:sp>
+        <p:nvSpPr>
+          <p:cNvPr id="15" name="TextBox 12">
+            <a:extLst>
+              <a:ext uri="{FF2B5EF4-FFF2-40B4-BE49-F238E27FC236}">
+                <a16:creationId xmlns:a16="http://schemas.microsoft.com/office/drawing/2014/main" id="{654EDDB4-901F-3D48-A715-17D163E8A7AC}"/>
+              </a:ext>
+            </a:extLst>
+          </p:cNvPr>
+          <p:cNvSpPr txBox="1"/>
+          <p:nvPr/>
+        </p:nvSpPr>
+        <p:spPr>
+          <a:xfrm>
+            <a:off x="365760" y="5417868"/>
+            <a:ext cx="8412480" cy="701040"/>
+          </a:xfrm>
+          <a:prstGeom prst="rect">
+            <a:avLst/>
+          </a:prstGeom>
+          <a:noFill/>
+        </p:spPr>
+        <p:txBody>
+          <a:bodyPr wrap="square">
+            <a:spAutoFit/>
+          </a:bodyPr>
+          <a:lstStyle/>
+          <a:p>
+            <a:pPr lvl="2" marL="723900" indent="-368300">
+              <a:spcBef>
+                <a:spcPts val="600"/>
+              </a:spcBef>
+              <a:spcAft>
+                <a:spcPts val="600"/>
+              </a:spcAft>
+              <a:buSzPct val="90000"/>
+              <a:buFont typeface="Wingdings" pitchFamily="2" charset="2"/>
+              <a:buChar char=""/>
+            </a:pPr>
+            <a:r>
+              <a:rPr sz="1800" b="1">
+                <a:solidFill>
+                  <a:srgbClr val="000000"/>
+                </a:solidFill>
+                <a:latin typeface="맑은 고딕"/>
+                <a:ea typeface="맑은 고딕"/>
+              </a:rPr>
+              <a:t>코드는 수단이다</a:t>
+            </a:r>
+            <a:r>
+              <a:rPr sz="1800" b="0">
+                <a:solidFill>
+                  <a:srgbClr val="000000"/>
+                </a:solidFill>
+                <a:latin typeface="맑은 고딕"/>
+                <a:ea typeface="맑은 고딕"/>
+              </a:rPr>
+              <a:t> — 공학이 늘 해 온 일은 의도를 품질 있는 소프트웨어로 바꾸는 것이다</a:t>
+            </a:r>
+            <a:r>
+              <a:rPr sz="1000" b="0">
+                <a:solidFill>
+                  <a:srgbClr val="000000"/>
+                </a:solidFill>
+                <a:latin typeface="맑은 고딕"/>
+                <a:ea typeface="맑은 고딕"/>
+              </a:rPr>
+              <a:t>, </a:t>
+            </a:r>
+            <a:r>
+              <a:rPr sz="1000" b="0">
+                <a:solidFill>
+                  <a:srgbClr val="000000"/>
+                </a:solidFill>
+                <a:latin typeface="맑은 고딕"/>
+                <a:ea typeface="맑은 고딕"/>
+              </a:rPr>
+              <a:t>"Code is just a means to an end."</a:t>
+            </a:r>
+            <a:r>
+              <a:rPr sz="1000" b="0">
+                <a:solidFill>
+                  <a:srgbClr val="000000"/>
+                </a:solidFill>
+                <a:latin typeface="맑은 고딕"/>
+                <a:ea typeface="맑은 고딕"/>
+              </a:rPr>
+              <a:t>, </a:t>
+            </a:r>
+            <a:r>
+              <a:rPr sz="1000" b="0">
+                <a:solidFill>
+                  <a:srgbClr val="000000"/>
+                </a:solidFill>
+                <a:latin typeface="맑은 고딕"/>
+                <a:ea typeface="맑은 고딕"/>
+              </a:rPr>
+              <a:t>[Hassan 외 2026]</a:t>
             </a:r>
           </a:p>
         </p:txBody>
@@ -21853,79 +21955,6 @@
                 <a:latin typeface="맑은 고딕"/>
                 <a:ea typeface="맑은 고딕"/>
               </a:rPr>
-              <a:t>코드는 수단이다</a:t>
-            </a:r>
-            <a:r>
-              <a:rPr sz="1800" b="0">
-                <a:solidFill>
-                  <a:srgbClr val="000000"/>
-                </a:solidFill>
-                <a:latin typeface="맑은 고딕"/>
-                <a:ea typeface="맑은 고딕"/>
-              </a:rPr>
-              <a:t> — 공학이 늘 해 온 일은 의도를 품질 있는 소프트웨어로 바꾸는 것이다</a:t>
-            </a:r>
-            <a:r>
-              <a:rPr sz="1000" b="0">
-                <a:solidFill>
-                  <a:srgbClr val="000000"/>
-                </a:solidFill>
-                <a:latin typeface="맑은 고딕"/>
-                <a:ea typeface="맑은 고딕"/>
-              </a:rPr>
-              <a:t>, </a:t>
-            </a:r>
-            <a:r>
-              <a:rPr sz="1000" b="0">
-                <a:solidFill>
-                  <a:srgbClr val="000000"/>
-                </a:solidFill>
-                <a:latin typeface="맑은 고딕"/>
-                <a:ea typeface="맑은 고딕"/>
-              </a:rPr>
-              <a:t>"Code is just a means to an end."</a:t>
-            </a:r>
-            <a:r>
-              <a:rPr sz="1000" b="0">
-                <a:solidFill>
-                  <a:srgbClr val="000000"/>
-                </a:solidFill>
-                <a:latin typeface="맑은 고딕"/>
-                <a:ea typeface="맑은 고딕"/>
-              </a:rPr>
-              <a:t>, </a:t>
-            </a:r>
-            <a:r>
-              <a:rPr sz="1000" b="0">
-                <a:solidFill>
-                  <a:srgbClr val="000000"/>
-                </a:solidFill>
-                <a:latin typeface="맑은 고딕"/>
-                <a:ea typeface="맑은 고딕"/>
-              </a:rPr>
-              <a:t>[Hassan 외 2026]</a:t>
-            </a:r>
-          </a:p>
-          <a:p>
-            <a:pPr lvl="2" marL="723900" indent="-368300">
-              <a:spcBef>
-                <a:spcPts val="600"/>
-              </a:spcBef>
-              <a:spcAft>
-                <a:spcPts val="600"/>
-              </a:spcAft>
-              <a:buSzPct val="90000"/>
-              <a:buFont typeface="Wingdings" pitchFamily="2" charset="2"/>
-              <a:buChar char=""/>
-            </a:pPr>
-            <a:r>
-              <a:rPr sz="1800" b="1">
-                <a:solidFill>
-                  <a:srgbClr val="000000"/>
-                </a:solidFill>
-                <a:latin typeface="맑은 고딕"/>
-                <a:ea typeface="맑은 고딕"/>
-              </a:rPr>
               <a:t>6개 활동은 절차가 아니다</a:t>
             </a:r>
             <a:r>
@@ -22953,7 +22982,7 @@
         </p:nvGraphicFramePr>
         <p:xfrm>
           <a:off x="1969326" y="2386330"/>
-          <a:ext cx="5191760" cy="3873500"/>
+          <a:ext cx="5191760" cy="1728000"/>
         </p:xfrm>
         <a:graphic>
           <a:graphicData uri="http://schemas.openxmlformats.org/drawingml/2006/table">
@@ -26964,27 +26993,7 @@
                 <a:latin typeface="맑은 고딕"/>
                 <a:ea typeface="맑은 고딕"/>
               </a:rPr>
-              <a:t>"</a:t>
-            </a:r>
-            <a:r>
-              <a:rPr sz="1800" b="1">
-                <a:solidFill>
-                  <a:srgbClr val="000000"/>
-                </a:solidFill>
-                <a:latin typeface="맑은 고딕"/>
-                <a:ea typeface="맑은 고딕"/>
-              </a:rPr>
-              <a:t>세션 02. LLM이라는 도구</a:t>
-            </a:r>
-            <a:r>
-              <a:rPr sz="1800" b="0">
-                <a:solidFill>
-                  <a:srgbClr val="000000"/>
-                </a:solidFill>
-                <a:latin typeface="맑은 고딕"/>
-                <a:ea typeface="맑은 고딕"/>
-              </a:rPr>
-              <a:t>" —</a:t>
+              <a:t>"세션 02. LLM이라는 도구" —</a:t>
             </a:r>
             <a:r>
               <a:rPr sz="1600" b="0">
@@ -30065,7 +30074,7 @@
         </p:nvGraphicFramePr>
         <p:xfrm>
           <a:off x="412306" y="2112010"/>
-          <a:ext cx="8305800" cy="3873500"/>
+          <a:ext cx="8305800" cy="1152000"/>
         </p:xfrm>
         <a:graphic>
           <a:graphicData uri="http://schemas.openxmlformats.org/drawingml/2006/table">
